--- a/rapor/final_2026/deliverables/CS395_Presentation_EfeHan_Keles_25September2026.pptx
+++ b/rapor/final_2026/deliverables/CS395_Presentation_EfeHan_Keles_25September2026.pptx
@@ -2,27 +2,27 @@
 <file path=ppt/presentation.xml><?xml version="1.0" encoding="utf-8"?>
 <p:presentation xmlns:p="http://schemas.openxmlformats.org/presentationml/2006/main">
   <p:sldMasterIdLst>
-    <p:sldMasterId xmlns:r="http://schemas.openxmlformats.org/officeDocument/2006/relationships" id="2147483648" r:id="R2896cf8ab0c74f89"/>
+    <p:sldMasterId xmlns:r="http://schemas.openxmlformats.org/officeDocument/2006/relationships" id="2147483648" r:id="R989ef20f28e5460b"/>
   </p:sldMasterIdLst>
   <p:notesMasterIdLst>
-    <p:notesMasterId xmlns:r="http://schemas.openxmlformats.org/officeDocument/2006/relationships" r:id="R4959a867a1b24de9"/>
+    <p:notesMasterId xmlns:r="http://schemas.openxmlformats.org/officeDocument/2006/relationships" r:id="Ra97259ec55cc40bf"/>
   </p:notesMasterIdLst>
   <p:sldIdLst>
-    <p:sldId xmlns:r="http://schemas.openxmlformats.org/officeDocument/2006/relationships" id="256" r:id="R671c85ca656f46f9"/>
-    <p:sldId xmlns:r="http://schemas.openxmlformats.org/officeDocument/2006/relationships" id="257" r:id="R783e99d2e86b4a1c"/>
-    <p:sldId xmlns:r="http://schemas.openxmlformats.org/officeDocument/2006/relationships" id="258" r:id="Rc5dddc6c3b1b4a1f"/>
-    <p:sldId xmlns:r="http://schemas.openxmlformats.org/officeDocument/2006/relationships" id="259" r:id="R42a64a6b5e1642ed"/>
-    <p:sldId xmlns:r="http://schemas.openxmlformats.org/officeDocument/2006/relationships" id="260" r:id="R14e4624db88b49e9"/>
-    <p:sldId xmlns:r="http://schemas.openxmlformats.org/officeDocument/2006/relationships" id="261" r:id="R1ad61806b5b5461e"/>
-    <p:sldId xmlns:r="http://schemas.openxmlformats.org/officeDocument/2006/relationships" id="262" r:id="R3ab970e005614bf8"/>
-    <p:sldId xmlns:r="http://schemas.openxmlformats.org/officeDocument/2006/relationships" id="263" r:id="R6dd3c58357894477"/>
-    <p:sldId xmlns:r="http://schemas.openxmlformats.org/officeDocument/2006/relationships" id="264" r:id="Rc9b84fa4e90c4374"/>
-    <p:sldId xmlns:r="http://schemas.openxmlformats.org/officeDocument/2006/relationships" id="265" r:id="Rf6da60324394469e"/>
-    <p:sldId xmlns:r="http://schemas.openxmlformats.org/officeDocument/2006/relationships" id="266" r:id="R78970e8db652422c"/>
-    <p:sldId xmlns:r="http://schemas.openxmlformats.org/officeDocument/2006/relationships" id="267" r:id="R31ad93fdc08f4357"/>
-    <p:sldId xmlns:r="http://schemas.openxmlformats.org/officeDocument/2006/relationships" id="268" r:id="Rd86f62d70e374fe3"/>
-    <p:sldId xmlns:r="http://schemas.openxmlformats.org/officeDocument/2006/relationships" id="269" r:id="R8cf56fe29ffd4f6c"/>
-    <p:sldId xmlns:r="http://schemas.openxmlformats.org/officeDocument/2006/relationships" id="270" r:id="Rda9f71f7579243de"/>
+    <p:sldId xmlns:r="http://schemas.openxmlformats.org/officeDocument/2006/relationships" id="256" r:id="R17b9cf3db9714b5b"/>
+    <p:sldId xmlns:r="http://schemas.openxmlformats.org/officeDocument/2006/relationships" id="257" r:id="R481259a3b3f34456"/>
+    <p:sldId xmlns:r="http://schemas.openxmlformats.org/officeDocument/2006/relationships" id="258" r:id="Ra00cffb463b94f16"/>
+    <p:sldId xmlns:r="http://schemas.openxmlformats.org/officeDocument/2006/relationships" id="259" r:id="R15e34ae37bd14319"/>
+    <p:sldId xmlns:r="http://schemas.openxmlformats.org/officeDocument/2006/relationships" id="260" r:id="Rd69a3737b66c4c9b"/>
+    <p:sldId xmlns:r="http://schemas.openxmlformats.org/officeDocument/2006/relationships" id="261" r:id="R52bd4762ce244827"/>
+    <p:sldId xmlns:r="http://schemas.openxmlformats.org/officeDocument/2006/relationships" id="262" r:id="R9161bac362f5432e"/>
+    <p:sldId xmlns:r="http://schemas.openxmlformats.org/officeDocument/2006/relationships" id="263" r:id="R569bbca97f414743"/>
+    <p:sldId xmlns:r="http://schemas.openxmlformats.org/officeDocument/2006/relationships" id="264" r:id="R2d7a3ee75b2a4234"/>
+    <p:sldId xmlns:r="http://schemas.openxmlformats.org/officeDocument/2006/relationships" id="265" r:id="Ra4cebad90a5c4145"/>
+    <p:sldId xmlns:r="http://schemas.openxmlformats.org/officeDocument/2006/relationships" id="266" r:id="R81f89c5d0a2e48c7"/>
+    <p:sldId xmlns:r="http://schemas.openxmlformats.org/officeDocument/2006/relationships" id="267" r:id="Rd4216748d5084844"/>
+    <p:sldId xmlns:r="http://schemas.openxmlformats.org/officeDocument/2006/relationships" id="268" r:id="Rfbfc98f35d5741ed"/>
+    <p:sldId xmlns:r="http://schemas.openxmlformats.org/officeDocument/2006/relationships" id="269" r:id="R16c02fd4943e4f28"/>
+    <p:sldId xmlns:r="http://schemas.openxmlformats.org/officeDocument/2006/relationships" id="270" r:id="R57a5d8d55e534712"/>
   </p:sldIdLst>
   <p:sldSz cx="12192000" cy="6858000"/>
   <p:notesSz cx="6858000" cy="9144000"/>
@@ -466,7 +466,7 @@
           </a:p>
           <a:p xmlns:a="http://schemas.openxmlformats.org/drawingml/2006/main">
             <a:r>
-              <a:t>My internship project was PixelProof, a research prototype for detecting evidence of AI generation in images. I will explain the problem, how the project changed after failures, what the strongest model achieved, and what remains unresolved. The main result is a working local demonstration with substantial improvement on a defined development collection. It is not a universally reliable authenticity detector. The approved internship lasted forty working days. This presentation covers the technical record available before the end of the internship.</a:t>
+              <a:t>My internship project was PixelProof, a research prototype for detecting evidence of AI generation in images. I will explain the problem, how the project changed after failures, what the current demo model achieved, and what remains unresolved. The main result is a working local demonstration with substantial improvement on a defined development collection. It is not a universally reliable authenticity detector. The approved internship lasted forty working days. This presentation covers the technical record available before the end of the internship.</a:t>
             </a:r>
           </a:p>
         </p:txBody>
@@ -1506,7 +1506,7 @@
           </a:p>
           <a:p xmlns:a="http://schemas.openxmlformats.org/drawingml/2006/main">
             <a:r>
-              <a:t>The displayed number caused understandable confusion. It is a raw model score multiplied by one hundred, not a probability that a photograph is AI. There is no reason to impose a fifty-percent boundary. The inherited upper cut is approximately seven point nine four; the lower cut is approximately one point one five. An original score above the upper cut keeps an AI alert visible. Two low E92 views produce no clear AI evidence. Other cases remain uncertain, and disagreement can require review. The older reference is advisory and no longer vetoes two low E92 scores. These operating points are experimental, not universally optimal. Guo et al. explain why calibration is a separate question.</a:t>
+              <a:t>The displayed number caused understandable confusion. It is a raw model score multiplied by one hundred, not a probability that a photograph is AI. There is no reason to impose a fifty-percent boundary. The inherited upper cut is approximately seven point nine four; the lower cut is approximately one point one five. An original score above the upper cut keeps an AI alert visible. Two low E92 views produce no clear AI evidence. Other cases remain uncertain, and disagreement can require review. The older reference is advisory and no longer vetoes two low E92 scores. The upper cut came from earlier calibration; the lower cut used consumed calibration and development observations. They are not fresh E92 calibration or universally optimal values. Guo et al. explain why calibration is a separate question.</a:t>
             </a:r>
           </a:p>
         </p:txBody>
@@ -1576,7 +1576,7 @@
           <a:lstStyle xmlns:a="http://schemas.openxmlformats.org/drawingml/2006/main"/>
           <a:p xmlns:a="http://schemas.openxmlformats.org/drawingml/2006/main">
             <a:r>
-              <a:t>Suggested time: 60 seconds.</a:t>
+              <a:t>Suggested time: 90 seconds.</a:t>
             </a:r>
           </a:p>
           <a:p xmlns:a="http://schemas.openxmlformats.org/drawingml/2006/main">
@@ -1586,7 +1586,7 @@
           </a:p>
           <a:p xmlns:a="http://schemas.openxmlformats.org/drawingml/2006/main">
             <a:r>
-              <a:t>The practical gallery check found nine false alerts in two hundred six unique original real files, and eighteen after processing. That collection had already been inspected and mostly represents one phone, so it is a diagnostic, not independent accuracy. Later source-separated experiments used different research heads. No tested calibration assignment met the full evaluation conditions. Adding source-pixel features slightly improved clean aggregates but harmed AI recall after several transformations. Those candidates were rejected instead of replacing E92. These results identify remaining weaknesses; they do not provide a new E92 accuracy estimate. Sources: E95, E146, E151 and E152.</a:t>
+              <a:t>The earlier comprehensive E49 test had one thousand real and one thousand AI parents. E43 falsely flagged three hundred ninety-one real originals and four hundred ninety processed views, passing only eleven of twenty checks. Those are E43 results on a different population, not E92 accuracy. E92 did not pass the gate needed to open its E49 regression. Its twenty-out-of-twenty development milestone therefore does not repair or replace that final test. On the owner gallery, E92 produced nine false alerts in two hundred six unique real originals and eighteen after processing. This consumed collection mostly represents one phone. Later E102 reduced development processed false alerts from fourteen to twelve, preserving E92 detections, but retained the same E43-relative miss. It was not promoted. Separate source-fold calibration and source-pixel candidates also failed their requirements. The protected reserves remain unscored, without a verified balanced-final admission. Sources: evidence/e49_final_result.json, E92, E95, E102, E139, E146 and E151.</a:t>
             </a:r>
           </a:p>
         </p:txBody>
@@ -1654,7 +1654,7 @@
   </p:cSld>
   <p:clrMap bg1="lt1" tx1="dk1" bg2="lt2" tx2="dk2" accent1="accent1" accent2="accent2" accent3="accent3" accent4="accent4" accent5="accent5" accent6="accent6" hlink="hlink" folHlink="folHlink"/>
   <p:sldLayoutIdLst>
-    <p:sldLayoutId xmlns:r="http://schemas.openxmlformats.org/officeDocument/2006/relationships" id="2147483649" r:id="R4a2cfb6ac8b24f20"/>
+    <p:sldLayoutId xmlns:r="http://schemas.openxmlformats.org/officeDocument/2006/relationships" id="2147483649" r:id="R342bfe1e13bb4605"/>
   </p:sldLayoutIdLst>
   <p:txStyles>
     <p:titleStyle>
@@ -2471,7 +2471,7 @@
           <p:cNvPr id="8" name="">
             <a:extLst xmlns:a="http://schemas.openxmlformats.org/drawingml/2006/main">
               <a:ext uri="{FF2B5EF4-FFF2-40B4-BE49-F238E27FC236}">
-                <a16:creationId xmlns:a16="http://schemas.microsoft.com/office/drawing/2014/main" id="{04AA1815-542B-42FA-9381-62355690E1EA}"/>
+                <a16:creationId xmlns:a16="http://schemas.microsoft.com/office/drawing/2014/main" id="{F66392BE-6A44-42CF-8FCE-540B573C8C2E}"/>
               </a:ext>
             </a:extLst>
           </p:cNvPr>
@@ -2528,7 +2528,7 @@
           <p:cNvPr id="2" name="">
             <a:extLst xmlns:a="http://schemas.openxmlformats.org/drawingml/2006/main">
               <a:ext uri="{FF2B5EF4-FFF2-40B4-BE49-F238E27FC236}">
-                <a16:creationId xmlns:a16="http://schemas.microsoft.com/office/drawing/2014/main" id="{87979F0B-5460-4ACB-8EE0-321B965433C3}"/>
+                <a16:creationId xmlns:a16="http://schemas.microsoft.com/office/drawing/2014/main" id="{674A99A9-33F9-4AE2-A236-198221B8F401}"/>
               </a:ext>
             </a:extLst>
           </p:cNvPr>
@@ -2585,7 +2585,7 @@
           <p:cNvPr id="3" name="">
             <a:extLst xmlns:a="http://schemas.openxmlformats.org/drawingml/2006/main">
               <a:ext uri="{FF2B5EF4-FFF2-40B4-BE49-F238E27FC236}">
-                <a16:creationId xmlns:a16="http://schemas.microsoft.com/office/drawing/2014/main" id="{ADC399DA-4149-400F-BEA7-228F742435A3}"/>
+                <a16:creationId xmlns:a16="http://schemas.microsoft.com/office/drawing/2014/main" id="{3F71F66E-123D-47E0-B758-7B2CFD68A8F9}"/>
               </a:ext>
             </a:extLst>
           </p:cNvPr>
@@ -2642,7 +2642,7 @@
           <p:cNvPr id="4" name="">
             <a:extLst xmlns:a="http://schemas.openxmlformats.org/drawingml/2006/main">
               <a:ext uri="{FF2B5EF4-FFF2-40B4-BE49-F238E27FC236}">
-                <a16:creationId xmlns:a16="http://schemas.microsoft.com/office/drawing/2014/main" id="{B1F33532-7B07-408A-855A-E2EA9BBC4554}"/>
+                <a16:creationId xmlns:a16="http://schemas.microsoft.com/office/drawing/2014/main" id="{2086C2CB-2BB2-4989-A6E6-B0BF15EEFA7F}"/>
               </a:ext>
             </a:extLst>
           </p:cNvPr>
@@ -2722,7 +2722,7 @@
           <p:cNvPr id="5" name="">
             <a:extLst xmlns:a="http://schemas.openxmlformats.org/drawingml/2006/main">
               <a:ext uri="{FF2B5EF4-FFF2-40B4-BE49-F238E27FC236}">
-                <a16:creationId xmlns:a16="http://schemas.microsoft.com/office/drawing/2014/main" id="{228B9852-1005-436C-BFC3-9F591A88B5DC}"/>
+                <a16:creationId xmlns:a16="http://schemas.microsoft.com/office/drawing/2014/main" id="{FA82ACFE-1557-4C2B-BAA4-25ADBF7AE406}"/>
               </a:ext>
             </a:extLst>
           </p:cNvPr>
@@ -2779,7 +2779,7 @@
           <p:cNvPr id="6" name="">
             <a:extLst xmlns:a="http://schemas.openxmlformats.org/drawingml/2006/main">
               <a:ext uri="{FF2B5EF4-FFF2-40B4-BE49-F238E27FC236}">
-                <a16:creationId xmlns:a16="http://schemas.microsoft.com/office/drawing/2014/main" id="{A9105978-3C4F-4E54-AE1B-FE07D1AA5EC0}"/>
+                <a16:creationId xmlns:a16="http://schemas.microsoft.com/office/drawing/2014/main" id="{CA92967A-0F86-4579-A08A-0DF20A5CC13B}"/>
               </a:ext>
             </a:extLst>
           </p:cNvPr>
@@ -2836,7 +2836,7 @@
           <p:cNvPr id="7" name="">
             <a:extLst xmlns:a="http://schemas.openxmlformats.org/drawingml/2006/main">
               <a:ext uri="{FF2B5EF4-FFF2-40B4-BE49-F238E27FC236}">
-                <a16:creationId xmlns:a16="http://schemas.microsoft.com/office/drawing/2014/main" id="{9A462E1D-BB9B-4F11-9AE7-B109C22975C9}"/>
+                <a16:creationId xmlns:a16="http://schemas.microsoft.com/office/drawing/2014/main" id="{D26A57EB-2114-4242-A7BE-D2247EDC4887}"/>
               </a:ext>
             </a:extLst>
           </p:cNvPr>
@@ -2914,7 +2914,7 @@
     </p:spTree>
     <p:extLst>
       <p:ext uri="{BB962C8B-B14F-4D97-AF65-F5344CB8AC3E}">
-        <p14:creationId xmlns:p14="http://schemas.microsoft.com/office/powerpoint/2010/main" val="1784236607"/>
+        <p14:creationId xmlns:p14="http://schemas.microsoft.com/office/powerpoint/2010/main" val="976782232"/>
       </p:ext>
     </p:extLst>
   </p:cSld>
@@ -2945,7 +2945,7 @@
           <p:cNvPr id="8" name="">
             <a:extLst xmlns:a="http://schemas.openxmlformats.org/drawingml/2006/main">
               <a:ext uri="{FF2B5EF4-FFF2-40B4-BE49-F238E27FC236}">
-                <a16:creationId xmlns:a16="http://schemas.microsoft.com/office/drawing/2014/main" id="{65518561-4E4A-4A43-AC6A-917E7A7FDA43}"/>
+                <a16:creationId xmlns:a16="http://schemas.microsoft.com/office/drawing/2014/main" id="{BD29502A-FA9C-4A4A-9DE9-837FFCED1D65}"/>
               </a:ext>
             </a:extLst>
           </p:cNvPr>
@@ -3002,7 +3002,7 @@
           <p:cNvPr id="2" name="">
             <a:extLst xmlns:a="http://schemas.openxmlformats.org/drawingml/2006/main">
               <a:ext uri="{FF2B5EF4-FFF2-40B4-BE49-F238E27FC236}">
-                <a16:creationId xmlns:a16="http://schemas.microsoft.com/office/drawing/2014/main" id="{0FBEC708-933B-4438-BC84-2E23A9D22A70}"/>
+                <a16:creationId xmlns:a16="http://schemas.microsoft.com/office/drawing/2014/main" id="{6B222839-CE0E-48C3-A14F-D528842E898E}"/>
               </a:ext>
             </a:extLst>
           </p:cNvPr>
@@ -3059,7 +3059,7 @@
           <p:cNvPr id="3" name="">
             <a:extLst xmlns:a="http://schemas.openxmlformats.org/drawingml/2006/main">
               <a:ext uri="{FF2B5EF4-FFF2-40B4-BE49-F238E27FC236}">
-                <a16:creationId xmlns:a16="http://schemas.microsoft.com/office/drawing/2014/main" id="{0439F565-344C-45DB-9944-47BA23C4F567}"/>
+                <a16:creationId xmlns:a16="http://schemas.microsoft.com/office/drawing/2014/main" id="{C60A7024-8A3D-431D-B49B-F8955A98D5C6}"/>
               </a:ext>
             </a:extLst>
           </p:cNvPr>
@@ -3116,7 +3116,7 @@
           <p:cNvPr id="4" name="">
             <a:extLst xmlns:a="http://schemas.openxmlformats.org/drawingml/2006/main">
               <a:ext uri="{FF2B5EF4-FFF2-40B4-BE49-F238E27FC236}">
-                <a16:creationId xmlns:a16="http://schemas.microsoft.com/office/drawing/2014/main" id="{28C6865D-1F53-4AE5-87F8-164D1298068C}"/>
+                <a16:creationId xmlns:a16="http://schemas.microsoft.com/office/drawing/2014/main" id="{6D64D07C-3A9B-4CA1-9C70-11C89AC0B409}"/>
               </a:ext>
             </a:extLst>
           </p:cNvPr>
@@ -3173,7 +3173,7 @@
           <p:cNvPr id="5" name="">
             <a:extLst xmlns:a="http://schemas.openxmlformats.org/drawingml/2006/main">
               <a:ext uri="{FF2B5EF4-FFF2-40B4-BE49-F238E27FC236}">
-                <a16:creationId xmlns:a16="http://schemas.microsoft.com/office/drawing/2014/main" id="{803DE041-FCC4-4D77-8BE7-F62BD5BA8C36}"/>
+                <a16:creationId xmlns:a16="http://schemas.microsoft.com/office/drawing/2014/main" id="{22BAD948-6D5A-400C-9A60-6EFA3387DB23}"/>
               </a:ext>
             </a:extLst>
           </p:cNvPr>
@@ -3585,7 +3585,7 @@
           <p:cNvPr id="7" name="">
             <a:extLst xmlns:a="http://schemas.openxmlformats.org/drawingml/2006/main">
               <a:ext uri="{FF2B5EF4-FFF2-40B4-BE49-F238E27FC236}">
-                <a16:creationId xmlns:a16="http://schemas.microsoft.com/office/drawing/2014/main" id="{C595E7B0-7613-47D1-96B8-97D47C62612D}"/>
+                <a16:creationId xmlns:a16="http://schemas.microsoft.com/office/drawing/2014/main" id="{D795D9FC-FCF7-485A-88DA-099904D72C33}"/>
               </a:ext>
             </a:extLst>
           </p:cNvPr>
@@ -3640,7 +3640,7 @@
     </p:spTree>
     <p:extLst>
       <p:ext uri="{BB962C8B-B14F-4D97-AF65-F5344CB8AC3E}">
-        <p14:creationId xmlns:p14="http://schemas.microsoft.com/office/powerpoint/2010/main" val="351955952"/>
+        <p14:creationId xmlns:p14="http://schemas.microsoft.com/office/powerpoint/2010/main" val="1611092326"/>
       </p:ext>
     </p:extLst>
   </p:cSld>
@@ -3671,7 +3671,7 @@
           <p:cNvPr id="9" name="">
             <a:extLst xmlns:a="http://schemas.openxmlformats.org/drawingml/2006/main">
               <a:ext uri="{FF2B5EF4-FFF2-40B4-BE49-F238E27FC236}">
-                <a16:creationId xmlns:a16="http://schemas.microsoft.com/office/drawing/2014/main" id="{484F1EA8-6B5C-4FBB-BDFB-3BED88C5C705}"/>
+                <a16:creationId xmlns:a16="http://schemas.microsoft.com/office/drawing/2014/main" id="{A6B6D9D8-211F-472B-82C0-B9C80F3CDE5A}"/>
               </a:ext>
             </a:extLst>
           </p:cNvPr>
@@ -3728,7 +3728,7 @@
           <p:cNvPr id="2" name="">
             <a:extLst xmlns:a="http://schemas.openxmlformats.org/drawingml/2006/main">
               <a:ext uri="{FF2B5EF4-FFF2-40B4-BE49-F238E27FC236}">
-                <a16:creationId xmlns:a16="http://schemas.microsoft.com/office/drawing/2014/main" id="{4AB039BB-4B1D-4007-B53C-1310F248B200}"/>
+                <a16:creationId xmlns:a16="http://schemas.microsoft.com/office/drawing/2014/main" id="{FED937CC-57A2-41E7-BFA4-143570F45528}"/>
               </a:ext>
             </a:extLst>
           </p:cNvPr>
@@ -3785,7 +3785,7 @@
           <p:cNvPr id="3" name="">
             <a:extLst xmlns:a="http://schemas.openxmlformats.org/drawingml/2006/main">
               <a:ext uri="{FF2B5EF4-FFF2-40B4-BE49-F238E27FC236}">
-                <a16:creationId xmlns:a16="http://schemas.microsoft.com/office/drawing/2014/main" id="{3A9287A9-7CFC-4046-95F3-E6A869658EB0}"/>
+                <a16:creationId xmlns:a16="http://schemas.microsoft.com/office/drawing/2014/main" id="{5980EC78-D6DD-40AA-80C1-12CB1E770118}"/>
               </a:ext>
             </a:extLst>
           </p:cNvPr>
@@ -3842,7 +3842,7 @@
           <p:cNvPr id="4" name="">
             <a:extLst xmlns:a="http://schemas.openxmlformats.org/drawingml/2006/main">
               <a:ext uri="{FF2B5EF4-FFF2-40B4-BE49-F238E27FC236}">
-                <a16:creationId xmlns:a16="http://schemas.microsoft.com/office/drawing/2014/main" id="{9245BADC-DF04-411B-BA88-7C1B34FA71EA}"/>
+                <a16:creationId xmlns:a16="http://schemas.microsoft.com/office/drawing/2014/main" id="{98CD89F5-C8D5-433B-991A-898D20E02C84}"/>
               </a:ext>
             </a:extLst>
           </p:cNvPr>
@@ -3899,7 +3899,7 @@
           <p:cNvPr id="5" name="">
             <a:extLst xmlns:a="http://schemas.openxmlformats.org/drawingml/2006/main">
               <a:ext uri="{FF2B5EF4-FFF2-40B4-BE49-F238E27FC236}">
-                <a16:creationId xmlns:a16="http://schemas.microsoft.com/office/drawing/2014/main" id="{F5F5F69D-0F69-45BB-BACC-9F50D2F3D3D2}"/>
+                <a16:creationId xmlns:a16="http://schemas.microsoft.com/office/drawing/2014/main" id="{97172F91-2C91-48C5-B9E2-BCD8A9C8D0B8}"/>
               </a:ext>
             </a:extLst>
           </p:cNvPr>
@@ -3956,7 +3956,7 @@
           <p:cNvPr id="6" name="">
             <a:extLst xmlns:a="http://schemas.openxmlformats.org/drawingml/2006/main">
               <a:ext uri="{FF2B5EF4-FFF2-40B4-BE49-F238E27FC236}">
-                <a16:creationId xmlns:a16="http://schemas.microsoft.com/office/drawing/2014/main" id="{1536FB50-1327-497E-AE82-672DCF12CA91}"/>
+                <a16:creationId xmlns:a16="http://schemas.microsoft.com/office/drawing/2014/main" id="{EB46E5A3-FDD0-4A47-841A-5C0B890D60D7}"/>
               </a:ext>
             </a:extLst>
           </p:cNvPr>
@@ -4013,7 +4013,7 @@
           <p:cNvPr id="7" name="">
             <a:extLst xmlns:a="http://schemas.openxmlformats.org/drawingml/2006/main">
               <a:ext uri="{FF2B5EF4-FFF2-40B4-BE49-F238E27FC236}">
-                <a16:creationId xmlns:a16="http://schemas.microsoft.com/office/drawing/2014/main" id="{A7DED9F2-DB52-43ED-BF34-F0F28161152F}"/>
+                <a16:creationId xmlns:a16="http://schemas.microsoft.com/office/drawing/2014/main" id="{CD7CCD7D-BDA0-4914-BE16-CD0C4CE0DF79}"/>
               </a:ext>
             </a:extLst>
           </p:cNvPr>
@@ -4093,7 +4093,7 @@
           <p:cNvPr id="8" name="">
             <a:extLst xmlns:a="http://schemas.openxmlformats.org/drawingml/2006/main">
               <a:ext uri="{FF2B5EF4-FFF2-40B4-BE49-F238E27FC236}">
-                <a16:creationId xmlns:a16="http://schemas.microsoft.com/office/drawing/2014/main" id="{7538B775-78EE-4572-86A4-77977C5B4EA2}"/>
+                <a16:creationId xmlns:a16="http://schemas.microsoft.com/office/drawing/2014/main" id="{286ACE20-336C-48B8-9499-B4B2169AA194}"/>
               </a:ext>
             </a:extLst>
           </p:cNvPr>
@@ -4148,7 +4148,7 @@
     </p:spTree>
     <p:extLst>
       <p:ext uri="{BB962C8B-B14F-4D97-AF65-F5344CB8AC3E}">
-        <p14:creationId xmlns:p14="http://schemas.microsoft.com/office/powerpoint/2010/main" val="1464822538"/>
+        <p14:creationId xmlns:p14="http://schemas.microsoft.com/office/powerpoint/2010/main" val="1877491317"/>
       </p:ext>
     </p:extLst>
   </p:cSld>
@@ -4179,7 +4179,7 @@
           <p:cNvPr id="8" name="">
             <a:extLst xmlns:a="http://schemas.openxmlformats.org/drawingml/2006/main">
               <a:ext uri="{FF2B5EF4-FFF2-40B4-BE49-F238E27FC236}">
-                <a16:creationId xmlns:a16="http://schemas.microsoft.com/office/drawing/2014/main" id="{E4F7593E-21E7-4C8D-8512-4CD557924C5C}"/>
+                <a16:creationId xmlns:a16="http://schemas.microsoft.com/office/drawing/2014/main" id="{EBE2BEE4-1BE5-4CE8-9393-ED721BF53164}"/>
               </a:ext>
             </a:extLst>
           </p:cNvPr>
@@ -4236,7 +4236,7 @@
           <p:cNvPr id="2" name="">
             <a:extLst xmlns:a="http://schemas.openxmlformats.org/drawingml/2006/main">
               <a:ext uri="{FF2B5EF4-FFF2-40B4-BE49-F238E27FC236}">
-                <a16:creationId xmlns:a16="http://schemas.microsoft.com/office/drawing/2014/main" id="{60F15548-646C-48F0-88F5-F77C35D04517}"/>
+                <a16:creationId xmlns:a16="http://schemas.microsoft.com/office/drawing/2014/main" id="{C0420959-E797-4C53-A9DF-355F94BEE8A4}"/>
               </a:ext>
             </a:extLst>
           </p:cNvPr>
@@ -4293,7 +4293,7 @@
           <p:cNvPr id="3" name="">
             <a:extLst xmlns:a="http://schemas.openxmlformats.org/drawingml/2006/main">
               <a:ext uri="{FF2B5EF4-FFF2-40B4-BE49-F238E27FC236}">
-                <a16:creationId xmlns:a16="http://schemas.microsoft.com/office/drawing/2014/main" id="{D92B5CFB-60BE-4816-9779-7E359FF040CA}"/>
+                <a16:creationId xmlns:a16="http://schemas.microsoft.com/office/drawing/2014/main" id="{A7FE8062-C1D1-4C67-B942-3EC2A0FE005D}"/>
               </a:ext>
             </a:extLst>
           </p:cNvPr>
@@ -4350,7 +4350,7 @@
           <p:cNvPr id="4" name="">
             <a:extLst xmlns:a="http://schemas.openxmlformats.org/drawingml/2006/main">
               <a:ext uri="{FF2B5EF4-FFF2-40B4-BE49-F238E27FC236}">
-                <a16:creationId xmlns:a16="http://schemas.microsoft.com/office/drawing/2014/main" id="{D7BE49FC-9513-427B-9A07-15368C9983E6}"/>
+                <a16:creationId xmlns:a16="http://schemas.microsoft.com/office/drawing/2014/main" id="{661E432C-592D-4532-94BE-D3C3B05C9AD6}"/>
               </a:ext>
             </a:extLst>
           </p:cNvPr>
@@ -4407,7 +4407,7 @@
           <p:cNvPr id="5" name="">
             <a:extLst xmlns:a="http://schemas.openxmlformats.org/drawingml/2006/main">
               <a:ext uri="{FF2B5EF4-FFF2-40B4-BE49-F238E27FC236}">
-                <a16:creationId xmlns:a16="http://schemas.microsoft.com/office/drawing/2014/main" id="{F423B9B4-C4ED-40E1-9640-1E7AF9BC9CA9}"/>
+                <a16:creationId xmlns:a16="http://schemas.microsoft.com/office/drawing/2014/main" id="{1CE7BB05-11B2-4967-974D-D95096F626DC}"/>
               </a:ext>
             </a:extLst>
           </p:cNvPr>
@@ -4766,7 +4766,7 @@
           <p:cNvPr id="7" name="">
             <a:extLst xmlns:a="http://schemas.openxmlformats.org/drawingml/2006/main">
               <a:ext uri="{FF2B5EF4-FFF2-40B4-BE49-F238E27FC236}">
-                <a16:creationId xmlns:a16="http://schemas.microsoft.com/office/drawing/2014/main" id="{34E7EC87-9AD2-4646-A415-8BA6FE74CBDA}"/>
+                <a16:creationId xmlns:a16="http://schemas.microsoft.com/office/drawing/2014/main" id="{7313BB7D-1EB4-45EA-B223-EFF856076ABB}"/>
               </a:ext>
             </a:extLst>
           </p:cNvPr>
@@ -4821,7 +4821,7 @@
     </p:spTree>
     <p:extLst>
       <p:ext uri="{BB962C8B-B14F-4D97-AF65-F5344CB8AC3E}">
-        <p14:creationId xmlns:p14="http://schemas.microsoft.com/office/powerpoint/2010/main" val="161049236"/>
+        <p14:creationId xmlns:p14="http://schemas.microsoft.com/office/powerpoint/2010/main" val="1971513331"/>
       </p:ext>
     </p:extLst>
   </p:cSld>
@@ -4852,7 +4852,7 @@
           <p:cNvPr id="8" name="">
             <a:extLst xmlns:a="http://schemas.openxmlformats.org/drawingml/2006/main">
               <a:ext uri="{FF2B5EF4-FFF2-40B4-BE49-F238E27FC236}">
-                <a16:creationId xmlns:a16="http://schemas.microsoft.com/office/drawing/2014/main" id="{A2C2CE30-9CA1-48B0-A680-4BA7DBE1918C}"/>
+                <a16:creationId xmlns:a16="http://schemas.microsoft.com/office/drawing/2014/main" id="{C6A32F50-8CB5-40CF-972B-DC9A863718FC}"/>
               </a:ext>
             </a:extLst>
           </p:cNvPr>
@@ -4909,7 +4909,7 @@
           <p:cNvPr id="2" name="">
             <a:extLst xmlns:a="http://schemas.openxmlformats.org/drawingml/2006/main">
               <a:ext uri="{FF2B5EF4-FFF2-40B4-BE49-F238E27FC236}">
-                <a16:creationId xmlns:a16="http://schemas.microsoft.com/office/drawing/2014/main" id="{A7381CEA-6B41-4BCD-A6E5-A1429FB25C47}"/>
+                <a16:creationId xmlns:a16="http://schemas.microsoft.com/office/drawing/2014/main" id="{F41A015C-9E2B-4038-BEBA-EE403BAB3F86}"/>
               </a:ext>
             </a:extLst>
           </p:cNvPr>
@@ -4966,7 +4966,7 @@
           <p:cNvPr id="3" name="">
             <a:extLst xmlns:a="http://schemas.openxmlformats.org/drawingml/2006/main">
               <a:ext uri="{FF2B5EF4-FFF2-40B4-BE49-F238E27FC236}">
-                <a16:creationId xmlns:a16="http://schemas.microsoft.com/office/drawing/2014/main" id="{26CD19FF-BC94-472A-BA71-BB54EBC37E5F}"/>
+                <a16:creationId xmlns:a16="http://schemas.microsoft.com/office/drawing/2014/main" id="{EF3D5396-86A4-4330-8F7E-AE15BA0711A7}"/>
               </a:ext>
             </a:extLst>
           </p:cNvPr>
@@ -5023,7 +5023,7 @@
           <p:cNvPr id="4" name="">
             <a:extLst xmlns:a="http://schemas.openxmlformats.org/drawingml/2006/main">
               <a:ext uri="{FF2B5EF4-FFF2-40B4-BE49-F238E27FC236}">
-                <a16:creationId xmlns:a16="http://schemas.microsoft.com/office/drawing/2014/main" id="{83B6F238-0D41-4F5C-810A-B0EC9B6453EF}"/>
+                <a16:creationId xmlns:a16="http://schemas.microsoft.com/office/drawing/2014/main" id="{68DD6925-4204-41F7-AD67-38A46D599474}"/>
               </a:ext>
             </a:extLst>
           </p:cNvPr>
@@ -5080,7 +5080,7 @@
           <p:cNvPr id="5" name="">
             <a:extLst xmlns:a="http://schemas.openxmlformats.org/drawingml/2006/main">
               <a:ext uri="{FF2B5EF4-FFF2-40B4-BE49-F238E27FC236}">
-                <a16:creationId xmlns:a16="http://schemas.microsoft.com/office/drawing/2014/main" id="{120F8BD5-1211-44C1-B0A2-92101DD09685}"/>
+                <a16:creationId xmlns:a16="http://schemas.microsoft.com/office/drawing/2014/main" id="{25AB691D-8F1F-4FAD-A266-DFE12B987D94}"/>
               </a:ext>
             </a:extLst>
           </p:cNvPr>
@@ -5137,7 +5137,7 @@
           <p:cNvPr id="6" name="">
             <a:extLst xmlns:a="http://schemas.openxmlformats.org/drawingml/2006/main">
               <a:ext uri="{FF2B5EF4-FFF2-40B4-BE49-F238E27FC236}">
-                <a16:creationId xmlns:a16="http://schemas.microsoft.com/office/drawing/2014/main" id="{9F9572EE-A11B-45D1-BC5B-6EE3D6D1DDFE}"/>
+                <a16:creationId xmlns:a16="http://schemas.microsoft.com/office/drawing/2014/main" id="{62C8EDED-9281-4624-82C7-CEC53A1E8A07}"/>
               </a:ext>
             </a:extLst>
           </p:cNvPr>
@@ -5194,7 +5194,7 @@
           <p:cNvPr id="7" name="">
             <a:extLst xmlns:a="http://schemas.openxmlformats.org/drawingml/2006/main">
               <a:ext uri="{FF2B5EF4-FFF2-40B4-BE49-F238E27FC236}">
-                <a16:creationId xmlns:a16="http://schemas.microsoft.com/office/drawing/2014/main" id="{475AD438-C5A0-4932-8A59-6F44E2BE93F5}"/>
+                <a16:creationId xmlns:a16="http://schemas.microsoft.com/office/drawing/2014/main" id="{7F29AC82-F229-4CEE-8B15-64416DEDFE6F}"/>
               </a:ext>
             </a:extLst>
           </p:cNvPr>
@@ -5249,7 +5249,7 @@
     </p:spTree>
     <p:extLst>
       <p:ext uri="{BB962C8B-B14F-4D97-AF65-F5344CB8AC3E}">
-        <p14:creationId xmlns:p14="http://schemas.microsoft.com/office/powerpoint/2010/main" val="217173156"/>
+        <p14:creationId xmlns:p14="http://schemas.microsoft.com/office/powerpoint/2010/main" val="1808727010"/>
       </p:ext>
     </p:extLst>
   </p:cSld>
@@ -5280,7 +5280,7 @@
           <p:cNvPr id="16" name="">
             <a:extLst xmlns:a="http://schemas.openxmlformats.org/drawingml/2006/main">
               <a:ext uri="{FF2B5EF4-FFF2-40B4-BE49-F238E27FC236}">
-                <a16:creationId xmlns:a16="http://schemas.microsoft.com/office/drawing/2014/main" id="{774F17EC-1A57-412C-BA73-A31DD1807401}"/>
+                <a16:creationId xmlns:a16="http://schemas.microsoft.com/office/drawing/2014/main" id="{15ACB0A5-2344-433F-9B21-2B860ABE2F6C}"/>
               </a:ext>
             </a:extLst>
           </p:cNvPr>
@@ -5337,7 +5337,7 @@
           <p:cNvPr id="2" name="">
             <a:extLst xmlns:a="http://schemas.openxmlformats.org/drawingml/2006/main">
               <a:ext uri="{FF2B5EF4-FFF2-40B4-BE49-F238E27FC236}">
-                <a16:creationId xmlns:a16="http://schemas.microsoft.com/office/drawing/2014/main" id="{E4C0477B-4ABD-410E-8D46-3EF339D86CDF}"/>
+                <a16:creationId xmlns:a16="http://schemas.microsoft.com/office/drawing/2014/main" id="{22F3E6E2-8E4C-44CC-95FD-3F831BFC67F9}"/>
               </a:ext>
             </a:extLst>
           </p:cNvPr>
@@ -5394,7 +5394,7 @@
           <p:cNvPr id="3" name="">
             <a:extLst xmlns:a="http://schemas.openxmlformats.org/drawingml/2006/main">
               <a:ext uri="{FF2B5EF4-FFF2-40B4-BE49-F238E27FC236}">
-                <a16:creationId xmlns:a16="http://schemas.microsoft.com/office/drawing/2014/main" id="{04960E9F-D08B-4F8E-9423-35B6C8856CFB}"/>
+                <a16:creationId xmlns:a16="http://schemas.microsoft.com/office/drawing/2014/main" id="{97AE8A00-93AA-4806-AE80-4EF71704AB30}"/>
               </a:ext>
             </a:extLst>
           </p:cNvPr>
@@ -5451,7 +5451,7 @@
           <p:cNvPr id="4" name="">
             <a:extLst xmlns:a="http://schemas.openxmlformats.org/drawingml/2006/main">
               <a:ext uri="{FF2B5EF4-FFF2-40B4-BE49-F238E27FC236}">
-                <a16:creationId xmlns:a16="http://schemas.microsoft.com/office/drawing/2014/main" id="{4153BFDA-2496-496D-9D6A-C81F7CC39CB7}"/>
+                <a16:creationId xmlns:a16="http://schemas.microsoft.com/office/drawing/2014/main" id="{8634EF52-2A78-4D65-A448-5BFB206C8B38}"/>
               </a:ext>
             </a:extLst>
           </p:cNvPr>
@@ -5508,7 +5508,7 @@
           <p:cNvPr id="5" name="">
             <a:extLst xmlns:a="http://schemas.openxmlformats.org/drawingml/2006/main">
               <a:ext uri="{FF2B5EF4-FFF2-40B4-BE49-F238E27FC236}">
-                <a16:creationId xmlns:a16="http://schemas.microsoft.com/office/drawing/2014/main" id="{363578EA-496D-45AF-9181-2C91EFB22F50}"/>
+                <a16:creationId xmlns:a16="http://schemas.microsoft.com/office/drawing/2014/main" id="{EE6B469B-BCC9-4FBD-AE11-57EB61433430}"/>
               </a:ext>
             </a:extLst>
           </p:cNvPr>
@@ -5565,7 +5565,7 @@
           <p:cNvPr id="6" name="">
             <a:extLst xmlns:a="http://schemas.openxmlformats.org/drawingml/2006/main">
               <a:ext uri="{FF2B5EF4-FFF2-40B4-BE49-F238E27FC236}">
-                <a16:creationId xmlns:a16="http://schemas.microsoft.com/office/drawing/2014/main" id="{CA7777D2-E9AE-49DE-B955-428BB699F3F5}"/>
+                <a16:creationId xmlns:a16="http://schemas.microsoft.com/office/drawing/2014/main" id="{E4F3BE1F-BF85-4A18-AF61-0E1EBFAC1959}"/>
               </a:ext>
             </a:extLst>
           </p:cNvPr>
@@ -5622,7 +5622,7 @@
           <p:cNvPr id="7" name="">
             <a:extLst xmlns:a="http://schemas.openxmlformats.org/drawingml/2006/main">
               <a:ext uri="{FF2B5EF4-FFF2-40B4-BE49-F238E27FC236}">
-                <a16:creationId xmlns:a16="http://schemas.microsoft.com/office/drawing/2014/main" id="{05721B50-A75F-4489-B9D2-FCE1CFD5C8A6}"/>
+                <a16:creationId xmlns:a16="http://schemas.microsoft.com/office/drawing/2014/main" id="{CB49FA46-6160-4B6C-921D-829CB3D9F576}"/>
               </a:ext>
             </a:extLst>
           </p:cNvPr>
@@ -5679,7 +5679,7 @@
           <p:cNvPr id="8" name="">
             <a:extLst xmlns:a="http://schemas.openxmlformats.org/drawingml/2006/main">
               <a:ext uri="{FF2B5EF4-FFF2-40B4-BE49-F238E27FC236}">
-                <a16:creationId xmlns:a16="http://schemas.microsoft.com/office/drawing/2014/main" id="{B0BB03E1-6DED-408B-AE42-B57CF31E6EC7}"/>
+                <a16:creationId xmlns:a16="http://schemas.microsoft.com/office/drawing/2014/main" id="{688966BC-88D9-4627-883F-CF881CCC03D4}"/>
               </a:ext>
             </a:extLst>
           </p:cNvPr>
@@ -5736,7 +5736,7 @@
           <p:cNvPr id="9" name="">
             <a:extLst xmlns:a="http://schemas.openxmlformats.org/drawingml/2006/main">
               <a:ext uri="{FF2B5EF4-FFF2-40B4-BE49-F238E27FC236}">
-                <a16:creationId xmlns:a16="http://schemas.microsoft.com/office/drawing/2014/main" id="{2AF0889A-29E4-46BC-AE33-A561E3C86A4A}"/>
+                <a16:creationId xmlns:a16="http://schemas.microsoft.com/office/drawing/2014/main" id="{2A4B887C-2EE0-4EC4-B207-A80783075EC8}"/>
               </a:ext>
             </a:extLst>
           </p:cNvPr>
@@ -5793,7 +5793,7 @@
           <p:cNvPr id="10" name="">
             <a:extLst xmlns:a="http://schemas.openxmlformats.org/drawingml/2006/main">
               <a:ext uri="{FF2B5EF4-FFF2-40B4-BE49-F238E27FC236}">
-                <a16:creationId xmlns:a16="http://schemas.microsoft.com/office/drawing/2014/main" id="{2D372846-4FB2-49C0-A0D0-B3C14C7E0F83}"/>
+                <a16:creationId xmlns:a16="http://schemas.microsoft.com/office/drawing/2014/main" id="{81EEF742-953C-4E33-BE5B-890C6F93EC9C}"/>
               </a:ext>
             </a:extLst>
           </p:cNvPr>
@@ -5850,7 +5850,7 @@
           <p:cNvPr id="11" name="">
             <a:extLst xmlns:a="http://schemas.openxmlformats.org/drawingml/2006/main">
               <a:ext uri="{FF2B5EF4-FFF2-40B4-BE49-F238E27FC236}">
-                <a16:creationId xmlns:a16="http://schemas.microsoft.com/office/drawing/2014/main" id="{DE848AF9-047F-4D3A-A3CF-D93823F83E8A}"/>
+                <a16:creationId xmlns:a16="http://schemas.microsoft.com/office/drawing/2014/main" id="{A5FD5E9B-F57D-4841-908A-4492C68DF10C}"/>
               </a:ext>
             </a:extLst>
           </p:cNvPr>
@@ -5907,7 +5907,7 @@
           <p:cNvPr id="12" name="">
             <a:extLst xmlns:a="http://schemas.openxmlformats.org/drawingml/2006/main">
               <a:ext uri="{FF2B5EF4-FFF2-40B4-BE49-F238E27FC236}">
-                <a16:creationId xmlns:a16="http://schemas.microsoft.com/office/drawing/2014/main" id="{FBCAD16E-D83A-4C48-BBF1-A158BA53912B}"/>
+                <a16:creationId xmlns:a16="http://schemas.microsoft.com/office/drawing/2014/main" id="{A35EFE08-69C4-476C-B22B-6EEF9F954AD1}"/>
               </a:ext>
             </a:extLst>
           </p:cNvPr>
@@ -5964,7 +5964,7 @@
           <p:cNvPr id="13" name="">
             <a:extLst xmlns:a="http://schemas.openxmlformats.org/drawingml/2006/main">
               <a:ext uri="{FF2B5EF4-FFF2-40B4-BE49-F238E27FC236}">
-                <a16:creationId xmlns:a16="http://schemas.microsoft.com/office/drawing/2014/main" id="{4BB33A28-06A8-4F34-9B86-ACD5DDB8C80A}"/>
+                <a16:creationId xmlns:a16="http://schemas.microsoft.com/office/drawing/2014/main" id="{88F24953-C2BF-4D5F-9A62-4D67D575FDBA}"/>
               </a:ext>
             </a:extLst>
           </p:cNvPr>
@@ -6021,7 +6021,7 @@
           <p:cNvPr id="14" name="">
             <a:extLst xmlns:a="http://schemas.openxmlformats.org/drawingml/2006/main">
               <a:ext uri="{FF2B5EF4-FFF2-40B4-BE49-F238E27FC236}">
-                <a16:creationId xmlns:a16="http://schemas.microsoft.com/office/drawing/2014/main" id="{EC87A5B4-2C73-41D2-8275-BC0DFB83E340}"/>
+                <a16:creationId xmlns:a16="http://schemas.microsoft.com/office/drawing/2014/main" id="{DFAC8726-65A7-4B2D-B225-4EC95C512A97}"/>
               </a:ext>
             </a:extLst>
           </p:cNvPr>
@@ -6078,7 +6078,7 @@
           <p:cNvPr id="15" name="">
             <a:extLst xmlns:a="http://schemas.openxmlformats.org/drawingml/2006/main">
               <a:ext uri="{FF2B5EF4-FFF2-40B4-BE49-F238E27FC236}">
-                <a16:creationId xmlns:a16="http://schemas.microsoft.com/office/drawing/2014/main" id="{FF6C464A-6D17-4F21-91A4-552BC65513AF}"/>
+                <a16:creationId xmlns:a16="http://schemas.microsoft.com/office/drawing/2014/main" id="{C6B4B7E0-6C78-44A1-844F-9A2E72C02464}"/>
               </a:ext>
             </a:extLst>
           </p:cNvPr>
@@ -6133,7 +6133,7 @@
     </p:spTree>
     <p:extLst>
       <p:ext uri="{BB962C8B-B14F-4D97-AF65-F5344CB8AC3E}">
-        <p14:creationId xmlns:p14="http://schemas.microsoft.com/office/powerpoint/2010/main" val="450983230"/>
+        <p14:creationId xmlns:p14="http://schemas.microsoft.com/office/powerpoint/2010/main" val="2027210444"/>
       </p:ext>
     </p:extLst>
   </p:cSld>
@@ -6164,7 +6164,7 @@
           <p:cNvPr id="16" name="">
             <a:extLst xmlns:a="http://schemas.openxmlformats.org/drawingml/2006/main">
               <a:ext uri="{FF2B5EF4-FFF2-40B4-BE49-F238E27FC236}">
-                <a16:creationId xmlns:a16="http://schemas.microsoft.com/office/drawing/2014/main" id="{73D7D9FD-8F9A-4635-A600-C3672CE00A3D}"/>
+                <a16:creationId xmlns:a16="http://schemas.microsoft.com/office/drawing/2014/main" id="{99FFE787-9212-46B4-8FF5-93E7FCE6B84C}"/>
               </a:ext>
             </a:extLst>
           </p:cNvPr>
@@ -6221,7 +6221,7 @@
           <p:cNvPr id="2" name="">
             <a:extLst xmlns:a="http://schemas.openxmlformats.org/drawingml/2006/main">
               <a:ext uri="{FF2B5EF4-FFF2-40B4-BE49-F238E27FC236}">
-                <a16:creationId xmlns:a16="http://schemas.microsoft.com/office/drawing/2014/main" id="{05A9D58F-9B64-4FEB-B379-4EDF1214FD66}"/>
+                <a16:creationId xmlns:a16="http://schemas.microsoft.com/office/drawing/2014/main" id="{BBC87A7E-E4D1-4E03-8FD4-B698EA32119F}"/>
               </a:ext>
             </a:extLst>
           </p:cNvPr>
@@ -6278,7 +6278,7 @@
           <p:cNvPr id="3" name="">
             <a:extLst xmlns:a="http://schemas.openxmlformats.org/drawingml/2006/main">
               <a:ext uri="{FF2B5EF4-FFF2-40B4-BE49-F238E27FC236}">
-                <a16:creationId xmlns:a16="http://schemas.microsoft.com/office/drawing/2014/main" id="{23376D67-1884-49DE-A081-F913CD28789B}"/>
+                <a16:creationId xmlns:a16="http://schemas.microsoft.com/office/drawing/2014/main" id="{39AD1CD0-8553-4B69-941A-6AB1433A4DD8}"/>
               </a:ext>
             </a:extLst>
           </p:cNvPr>
@@ -6335,7 +6335,7 @@
           <p:cNvPr id="4" name="">
             <a:extLst xmlns:a="http://schemas.openxmlformats.org/drawingml/2006/main">
               <a:ext uri="{FF2B5EF4-FFF2-40B4-BE49-F238E27FC236}">
-                <a16:creationId xmlns:a16="http://schemas.microsoft.com/office/drawing/2014/main" id="{B9620528-715C-400B-A912-A36C93DE7FB6}"/>
+                <a16:creationId xmlns:a16="http://schemas.microsoft.com/office/drawing/2014/main" id="{D4D5046F-8B51-40E8-84AC-738A6BB651CB}"/>
               </a:ext>
             </a:extLst>
           </p:cNvPr>
@@ -6392,7 +6392,7 @@
           <p:cNvPr id="5" name="">
             <a:extLst xmlns:a="http://schemas.openxmlformats.org/drawingml/2006/main">
               <a:ext uri="{FF2B5EF4-FFF2-40B4-BE49-F238E27FC236}">
-                <a16:creationId xmlns:a16="http://schemas.microsoft.com/office/drawing/2014/main" id="{13462330-6CF8-4D76-861F-9B6F245AB8CA}"/>
+                <a16:creationId xmlns:a16="http://schemas.microsoft.com/office/drawing/2014/main" id="{FEB6604B-7FBA-454F-8B5B-FC4D413FEDE9}"/>
               </a:ext>
             </a:extLst>
           </p:cNvPr>
@@ -6449,7 +6449,7 @@
           <p:cNvPr id="6" name="">
             <a:extLst xmlns:a="http://schemas.openxmlformats.org/drawingml/2006/main">
               <a:ext uri="{FF2B5EF4-FFF2-40B4-BE49-F238E27FC236}">
-                <a16:creationId xmlns:a16="http://schemas.microsoft.com/office/drawing/2014/main" id="{0A296BA6-290B-40E0-BC1E-B9FD189B2CE5}"/>
+                <a16:creationId xmlns:a16="http://schemas.microsoft.com/office/drawing/2014/main" id="{0168E37B-3842-4A6B-AB45-0FDFD7014CAC}"/>
               </a:ext>
             </a:extLst>
           </p:cNvPr>
@@ -6506,7 +6506,7 @@
           <p:cNvPr id="7" name="">
             <a:extLst xmlns:a="http://schemas.openxmlformats.org/drawingml/2006/main">
               <a:ext uri="{FF2B5EF4-FFF2-40B4-BE49-F238E27FC236}">
-                <a16:creationId xmlns:a16="http://schemas.microsoft.com/office/drawing/2014/main" id="{5CEEDB66-EE01-4B7A-9B6E-961096146D13}"/>
+                <a16:creationId xmlns:a16="http://schemas.microsoft.com/office/drawing/2014/main" id="{4F590475-9D9F-48E1-90CB-3F23CE675546}"/>
               </a:ext>
             </a:extLst>
           </p:cNvPr>
@@ -6563,7 +6563,7 @@
           <p:cNvPr id="8" name="">
             <a:extLst xmlns:a="http://schemas.openxmlformats.org/drawingml/2006/main">
               <a:ext uri="{FF2B5EF4-FFF2-40B4-BE49-F238E27FC236}">
-                <a16:creationId xmlns:a16="http://schemas.microsoft.com/office/drawing/2014/main" id="{7C7D0032-ED39-44B1-9CDB-6462FDE39458}"/>
+                <a16:creationId xmlns:a16="http://schemas.microsoft.com/office/drawing/2014/main" id="{D356CE78-BFBC-4D8D-B410-2DCA60BF9762}"/>
               </a:ext>
             </a:extLst>
           </p:cNvPr>
@@ -6620,7 +6620,7 @@
           <p:cNvPr id="9" name="">
             <a:extLst xmlns:a="http://schemas.openxmlformats.org/drawingml/2006/main">
               <a:ext uri="{FF2B5EF4-FFF2-40B4-BE49-F238E27FC236}">
-                <a16:creationId xmlns:a16="http://schemas.microsoft.com/office/drawing/2014/main" id="{FC538E28-D3CA-4783-B6C8-2659B4F0D4A6}"/>
+                <a16:creationId xmlns:a16="http://schemas.microsoft.com/office/drawing/2014/main" id="{C68E89CD-E24E-4683-BD7B-9AB3AE9C4979}"/>
               </a:ext>
             </a:extLst>
           </p:cNvPr>
@@ -6677,7 +6677,7 @@
           <p:cNvPr id="10" name="">
             <a:extLst xmlns:a="http://schemas.openxmlformats.org/drawingml/2006/main">
               <a:ext uri="{FF2B5EF4-FFF2-40B4-BE49-F238E27FC236}">
-                <a16:creationId xmlns:a16="http://schemas.microsoft.com/office/drawing/2014/main" id="{D9854DC1-D53C-431E-9E5E-A138F77AECF2}"/>
+                <a16:creationId xmlns:a16="http://schemas.microsoft.com/office/drawing/2014/main" id="{DFC7E32C-8087-43F2-9C33-079AA8CE8BA7}"/>
               </a:ext>
             </a:extLst>
           </p:cNvPr>
@@ -6734,7 +6734,7 @@
           <p:cNvPr id="11" name="">
             <a:extLst xmlns:a="http://schemas.openxmlformats.org/drawingml/2006/main">
               <a:ext uri="{FF2B5EF4-FFF2-40B4-BE49-F238E27FC236}">
-                <a16:creationId xmlns:a16="http://schemas.microsoft.com/office/drawing/2014/main" id="{37753342-C9CE-479E-8037-02333005A771}"/>
+                <a16:creationId xmlns:a16="http://schemas.microsoft.com/office/drawing/2014/main" id="{6E1C2E0F-C29C-4153-9540-DF118D122AF8}"/>
               </a:ext>
             </a:extLst>
           </p:cNvPr>
@@ -6791,7 +6791,7 @@
           <p:cNvPr id="12" name="">
             <a:extLst xmlns:a="http://schemas.openxmlformats.org/drawingml/2006/main">
               <a:ext uri="{FF2B5EF4-FFF2-40B4-BE49-F238E27FC236}">
-                <a16:creationId xmlns:a16="http://schemas.microsoft.com/office/drawing/2014/main" id="{4DCDB921-F851-4079-AEAE-8A8B6D41114F}"/>
+                <a16:creationId xmlns:a16="http://schemas.microsoft.com/office/drawing/2014/main" id="{9F4B53B6-25C5-4EF1-B3FB-7653AFB75135}"/>
               </a:ext>
             </a:extLst>
           </p:cNvPr>
@@ -6848,7 +6848,7 @@
           <p:cNvPr id="13" name="">
             <a:extLst xmlns:a="http://schemas.openxmlformats.org/drawingml/2006/main">
               <a:ext uri="{FF2B5EF4-FFF2-40B4-BE49-F238E27FC236}">
-                <a16:creationId xmlns:a16="http://schemas.microsoft.com/office/drawing/2014/main" id="{815E7C60-8F14-4510-A7C4-4AAAE15CF130}"/>
+                <a16:creationId xmlns:a16="http://schemas.microsoft.com/office/drawing/2014/main" id="{F5EA00A4-9A2B-4B18-9944-84DA8C327067}"/>
               </a:ext>
             </a:extLst>
           </p:cNvPr>
@@ -6905,7 +6905,7 @@
           <p:cNvPr id="14" name="">
             <a:extLst xmlns:a="http://schemas.openxmlformats.org/drawingml/2006/main">
               <a:ext uri="{FF2B5EF4-FFF2-40B4-BE49-F238E27FC236}">
-                <a16:creationId xmlns:a16="http://schemas.microsoft.com/office/drawing/2014/main" id="{E88C9D0B-3AA6-4CD2-8135-903DAFD8B10D}"/>
+                <a16:creationId xmlns:a16="http://schemas.microsoft.com/office/drawing/2014/main" id="{7CB6501A-8203-4370-A5D3-53D8C87003D6}"/>
               </a:ext>
             </a:extLst>
           </p:cNvPr>
@@ -6962,7 +6962,7 @@
           <p:cNvPr id="15" name="">
             <a:extLst xmlns:a="http://schemas.openxmlformats.org/drawingml/2006/main">
               <a:ext uri="{FF2B5EF4-FFF2-40B4-BE49-F238E27FC236}">
-                <a16:creationId xmlns:a16="http://schemas.microsoft.com/office/drawing/2014/main" id="{C1A4D76D-CF99-4341-A412-A1A6FC2957F3}"/>
+                <a16:creationId xmlns:a16="http://schemas.microsoft.com/office/drawing/2014/main" id="{EA6D3C01-D100-4E33-BBD1-D9092EF61387}"/>
               </a:ext>
             </a:extLst>
           </p:cNvPr>
@@ -7017,7 +7017,7 @@
     </p:spTree>
     <p:extLst>
       <p:ext uri="{BB962C8B-B14F-4D97-AF65-F5344CB8AC3E}">
-        <p14:creationId xmlns:p14="http://schemas.microsoft.com/office/powerpoint/2010/main" val="1299778230"/>
+        <p14:creationId xmlns:p14="http://schemas.microsoft.com/office/powerpoint/2010/main" val="1551341982"/>
       </p:ext>
     </p:extLst>
   </p:cSld>
@@ -7048,7 +7048,7 @@
           <p:cNvPr id="8" name="">
             <a:extLst xmlns:a="http://schemas.openxmlformats.org/drawingml/2006/main">
               <a:ext uri="{FF2B5EF4-FFF2-40B4-BE49-F238E27FC236}">
-                <a16:creationId xmlns:a16="http://schemas.microsoft.com/office/drawing/2014/main" id="{F8B20A62-7DF3-4203-B045-EA4275727231}"/>
+                <a16:creationId xmlns:a16="http://schemas.microsoft.com/office/drawing/2014/main" id="{7B6E5181-8450-4A4A-ADC2-C3251271A809}"/>
               </a:ext>
             </a:extLst>
           </p:cNvPr>
@@ -7105,7 +7105,7 @@
           <p:cNvPr id="2" name="">
             <a:extLst xmlns:a="http://schemas.openxmlformats.org/drawingml/2006/main">
               <a:ext uri="{FF2B5EF4-FFF2-40B4-BE49-F238E27FC236}">
-                <a16:creationId xmlns:a16="http://schemas.microsoft.com/office/drawing/2014/main" id="{55750BB0-7B7C-4780-B693-D0D47160EFA7}"/>
+                <a16:creationId xmlns:a16="http://schemas.microsoft.com/office/drawing/2014/main" id="{5444035D-00E1-4A33-B4BA-4656894EF0DD}"/>
               </a:ext>
             </a:extLst>
           </p:cNvPr>
@@ -7162,7 +7162,7 @@
           <p:cNvPr id="3" name="">
             <a:extLst xmlns:a="http://schemas.openxmlformats.org/drawingml/2006/main">
               <a:ext uri="{FF2B5EF4-FFF2-40B4-BE49-F238E27FC236}">
-                <a16:creationId xmlns:a16="http://schemas.microsoft.com/office/drawing/2014/main" id="{B58F508F-13BC-4715-BD50-D87ADBEEA015}"/>
+                <a16:creationId xmlns:a16="http://schemas.microsoft.com/office/drawing/2014/main" id="{8885B466-DA04-4463-BFCA-A8CCA4A1B292}"/>
               </a:ext>
             </a:extLst>
           </p:cNvPr>
@@ -7219,7 +7219,7 @@
           <p:cNvPr id="4" name="">
             <a:extLst xmlns:a="http://schemas.openxmlformats.org/drawingml/2006/main">
               <a:ext uri="{FF2B5EF4-FFF2-40B4-BE49-F238E27FC236}">
-                <a16:creationId xmlns:a16="http://schemas.microsoft.com/office/drawing/2014/main" id="{0A86B993-056B-4851-AA14-6D8E8A92C185}"/>
+                <a16:creationId xmlns:a16="http://schemas.microsoft.com/office/drawing/2014/main" id="{765A7660-7087-402D-838B-D3F12F278579}"/>
               </a:ext>
             </a:extLst>
           </p:cNvPr>
@@ -7276,7 +7276,7 @@
           <p:cNvPr id="5" name="">
             <a:extLst xmlns:a="http://schemas.openxmlformats.org/drawingml/2006/main">
               <a:ext uri="{FF2B5EF4-FFF2-40B4-BE49-F238E27FC236}">
-                <a16:creationId xmlns:a16="http://schemas.microsoft.com/office/drawing/2014/main" id="{C7ED29A7-878C-459A-A505-C66946111C5C}"/>
+                <a16:creationId xmlns:a16="http://schemas.microsoft.com/office/drawing/2014/main" id="{C63A5E09-DBBE-4F07-A35A-B44F1F520555}"/>
               </a:ext>
             </a:extLst>
           </p:cNvPr>
@@ -7356,7 +7356,7 @@
           <p:cNvPr id="6" name="">
             <a:extLst xmlns:a="http://schemas.openxmlformats.org/drawingml/2006/main">
               <a:ext uri="{FF2B5EF4-FFF2-40B4-BE49-F238E27FC236}">
-                <a16:creationId xmlns:a16="http://schemas.microsoft.com/office/drawing/2014/main" id="{9683A051-6CFF-44D7-8B24-8AD24A59CC28}"/>
+                <a16:creationId xmlns:a16="http://schemas.microsoft.com/office/drawing/2014/main" id="{8D1F8D87-9CA5-4058-A5C9-09EB311EA10A}"/>
               </a:ext>
             </a:extLst>
           </p:cNvPr>
@@ -7413,7 +7413,7 @@
           <p:cNvPr id="7" name="">
             <a:extLst xmlns:a="http://schemas.openxmlformats.org/drawingml/2006/main">
               <a:ext uri="{FF2B5EF4-FFF2-40B4-BE49-F238E27FC236}">
-                <a16:creationId xmlns:a16="http://schemas.microsoft.com/office/drawing/2014/main" id="{CD086F7B-C53A-4CFF-95E5-E6092258AD1A}"/>
+                <a16:creationId xmlns:a16="http://schemas.microsoft.com/office/drawing/2014/main" id="{FB5B443F-097D-44E9-8130-8239B25A1F2B}"/>
               </a:ext>
             </a:extLst>
           </p:cNvPr>
@@ -7468,7 +7468,7 @@
     </p:spTree>
     <p:extLst>
       <p:ext uri="{BB962C8B-B14F-4D97-AF65-F5344CB8AC3E}">
-        <p14:creationId xmlns:p14="http://schemas.microsoft.com/office/powerpoint/2010/main" val="2119945107"/>
+        <p14:creationId xmlns:p14="http://schemas.microsoft.com/office/powerpoint/2010/main" val="1447500490"/>
       </p:ext>
     </p:extLst>
   </p:cSld>
@@ -7499,7 +7499,7 @@
           <p:cNvPr id="8" name="">
             <a:extLst xmlns:a="http://schemas.openxmlformats.org/drawingml/2006/main">
               <a:ext uri="{FF2B5EF4-FFF2-40B4-BE49-F238E27FC236}">
-                <a16:creationId xmlns:a16="http://schemas.microsoft.com/office/drawing/2014/main" id="{14737205-E856-492A-AC7D-3D9D3DF5BBF2}"/>
+                <a16:creationId xmlns:a16="http://schemas.microsoft.com/office/drawing/2014/main" id="{5A2C7E56-12EF-4DB7-8195-AEA223DBE9E4}"/>
               </a:ext>
             </a:extLst>
           </p:cNvPr>
@@ -7556,7 +7556,7 @@
           <p:cNvPr id="2" name="">
             <a:extLst xmlns:a="http://schemas.openxmlformats.org/drawingml/2006/main">
               <a:ext uri="{FF2B5EF4-FFF2-40B4-BE49-F238E27FC236}">
-                <a16:creationId xmlns:a16="http://schemas.microsoft.com/office/drawing/2014/main" id="{B508AC81-4E46-4EE7-9BEE-EC5278D467C8}"/>
+                <a16:creationId xmlns:a16="http://schemas.microsoft.com/office/drawing/2014/main" id="{D85A7E7F-2E5F-4448-B2ED-4A4696BE2163}"/>
               </a:ext>
             </a:extLst>
           </p:cNvPr>
@@ -7613,7 +7613,7 @@
           <p:cNvPr id="3" name="">
             <a:extLst xmlns:a="http://schemas.openxmlformats.org/drawingml/2006/main">
               <a:ext uri="{FF2B5EF4-FFF2-40B4-BE49-F238E27FC236}">
-                <a16:creationId xmlns:a16="http://schemas.microsoft.com/office/drawing/2014/main" id="{5520BFEE-A6B1-43EA-8C72-2F0486E875BC}"/>
+                <a16:creationId xmlns:a16="http://schemas.microsoft.com/office/drawing/2014/main" id="{6EC1556D-C228-42FF-91AB-620C7122FC11}"/>
               </a:ext>
             </a:extLst>
           </p:cNvPr>
@@ -7670,7 +7670,7 @@
           <p:cNvPr id="4" name="">
             <a:extLst xmlns:a="http://schemas.openxmlformats.org/drawingml/2006/main">
               <a:ext uri="{FF2B5EF4-FFF2-40B4-BE49-F238E27FC236}">
-                <a16:creationId xmlns:a16="http://schemas.microsoft.com/office/drawing/2014/main" id="{5CB5A228-D170-41C9-A24A-51BD13393461}"/>
+                <a16:creationId xmlns:a16="http://schemas.microsoft.com/office/drawing/2014/main" id="{A0B53E3A-8E56-434B-97BE-6ABE6C0643BF}"/>
               </a:ext>
             </a:extLst>
           </p:cNvPr>
@@ -7727,7 +7727,7 @@
           <p:cNvPr id="5" name="">
             <a:extLst xmlns:a="http://schemas.openxmlformats.org/drawingml/2006/main">
               <a:ext uri="{FF2B5EF4-FFF2-40B4-BE49-F238E27FC236}">
-                <a16:creationId xmlns:a16="http://schemas.microsoft.com/office/drawing/2014/main" id="{0A77E9A8-64BD-4D32-B9F7-9B6268134AD3}"/>
+                <a16:creationId xmlns:a16="http://schemas.microsoft.com/office/drawing/2014/main" id="{6C889AF9-4E48-45B2-A476-FBECB821C907}"/>
               </a:ext>
             </a:extLst>
           </p:cNvPr>
@@ -8056,7 +8056,7 @@
           <p:cNvPr id="7" name="">
             <a:extLst xmlns:a="http://schemas.openxmlformats.org/drawingml/2006/main">
               <a:ext uri="{FF2B5EF4-FFF2-40B4-BE49-F238E27FC236}">
-                <a16:creationId xmlns:a16="http://schemas.microsoft.com/office/drawing/2014/main" id="{4493E411-9ECE-4912-97E3-53530F7C7456}"/>
+                <a16:creationId xmlns:a16="http://schemas.microsoft.com/office/drawing/2014/main" id="{7F035CFC-EEE0-490A-ABFE-05467A0E2211}"/>
               </a:ext>
             </a:extLst>
           </p:cNvPr>
@@ -8134,7 +8134,7 @@
     </p:spTree>
     <p:extLst>
       <p:ext uri="{BB962C8B-B14F-4D97-AF65-F5344CB8AC3E}">
-        <p14:creationId xmlns:p14="http://schemas.microsoft.com/office/powerpoint/2010/main" val="924960069"/>
+        <p14:creationId xmlns:p14="http://schemas.microsoft.com/office/powerpoint/2010/main" val="1757711368"/>
       </p:ext>
     </p:extLst>
   </p:cSld>
@@ -8165,7 +8165,7 @@
           <p:cNvPr id="8" name="">
             <a:extLst xmlns:a="http://schemas.openxmlformats.org/drawingml/2006/main">
               <a:ext uri="{FF2B5EF4-FFF2-40B4-BE49-F238E27FC236}">
-                <a16:creationId xmlns:a16="http://schemas.microsoft.com/office/drawing/2014/main" id="{5E644C37-A7D8-42FC-A95F-E089CEF3A35C}"/>
+                <a16:creationId xmlns:a16="http://schemas.microsoft.com/office/drawing/2014/main" id="{15FE5362-52BA-4C14-9717-7497AA4D1336}"/>
               </a:ext>
             </a:extLst>
           </p:cNvPr>
@@ -8222,7 +8222,7 @@
           <p:cNvPr id="2" name="">
             <a:extLst xmlns:a="http://schemas.openxmlformats.org/drawingml/2006/main">
               <a:ext uri="{FF2B5EF4-FFF2-40B4-BE49-F238E27FC236}">
-                <a16:creationId xmlns:a16="http://schemas.microsoft.com/office/drawing/2014/main" id="{91AB4095-5EE2-449D-BC4A-5BF4A65742A8}"/>
+                <a16:creationId xmlns:a16="http://schemas.microsoft.com/office/drawing/2014/main" id="{8BFA9122-FC07-43B4-AACB-5B8C89B100C2}"/>
               </a:ext>
             </a:extLst>
           </p:cNvPr>
@@ -8279,7 +8279,7 @@
           <p:cNvPr id="3" name="">
             <a:extLst xmlns:a="http://schemas.openxmlformats.org/drawingml/2006/main">
               <a:ext uri="{FF2B5EF4-FFF2-40B4-BE49-F238E27FC236}">
-                <a16:creationId xmlns:a16="http://schemas.microsoft.com/office/drawing/2014/main" id="{C55A066C-74F2-41F0-AF5A-306CE3C32F42}"/>
+                <a16:creationId xmlns:a16="http://schemas.microsoft.com/office/drawing/2014/main" id="{3B204EF4-99D9-40C3-97B7-CC822161783A}"/>
               </a:ext>
             </a:extLst>
           </p:cNvPr>
@@ -8336,7 +8336,7 @@
           <p:cNvPr id="4" name="">
             <a:extLst xmlns:a="http://schemas.openxmlformats.org/drawingml/2006/main">
               <a:ext uri="{FF2B5EF4-FFF2-40B4-BE49-F238E27FC236}">
-                <a16:creationId xmlns:a16="http://schemas.microsoft.com/office/drawing/2014/main" id="{204BDA60-C3AF-4A6A-BB82-CC7324CA833B}"/>
+                <a16:creationId xmlns:a16="http://schemas.microsoft.com/office/drawing/2014/main" id="{9A46140B-7532-4CA6-9966-27B9A99CB9B5}"/>
               </a:ext>
             </a:extLst>
           </p:cNvPr>
@@ -8416,7 +8416,7 @@
           <p:cNvPr id="5" name="">
             <a:extLst xmlns:a="http://schemas.openxmlformats.org/drawingml/2006/main">
               <a:ext uri="{FF2B5EF4-FFF2-40B4-BE49-F238E27FC236}">
-                <a16:creationId xmlns:a16="http://schemas.microsoft.com/office/drawing/2014/main" id="{F5D1A11B-0B5F-440D-A109-3E6DCA4E2FE4}"/>
+                <a16:creationId xmlns:a16="http://schemas.microsoft.com/office/drawing/2014/main" id="{51E2140B-7CF7-44DF-B696-48C3E54E42F0}"/>
               </a:ext>
             </a:extLst>
           </p:cNvPr>
@@ -8496,7 +8496,7 @@
           <p:cNvPr id="6" name="">
             <a:extLst xmlns:a="http://schemas.openxmlformats.org/drawingml/2006/main">
               <a:ext uri="{FF2B5EF4-FFF2-40B4-BE49-F238E27FC236}">
-                <a16:creationId xmlns:a16="http://schemas.microsoft.com/office/drawing/2014/main" id="{A0DB3759-F8F7-4EF9-9B82-88A8904D3EFD}"/>
+                <a16:creationId xmlns:a16="http://schemas.microsoft.com/office/drawing/2014/main" id="{D9ADCAA8-BF45-4F25-AF13-95BBE9404634}"/>
               </a:ext>
             </a:extLst>
           </p:cNvPr>
@@ -8576,7 +8576,7 @@
           <p:cNvPr id="7" name="">
             <a:extLst xmlns:a="http://schemas.openxmlformats.org/drawingml/2006/main">
               <a:ext uri="{FF2B5EF4-FFF2-40B4-BE49-F238E27FC236}">
-                <a16:creationId xmlns:a16="http://schemas.microsoft.com/office/drawing/2014/main" id="{28F58307-597C-4667-AFD1-802ED5CA28DB}"/>
+                <a16:creationId xmlns:a16="http://schemas.microsoft.com/office/drawing/2014/main" id="{FED90383-65AA-486A-823C-A4AEEB944753}"/>
               </a:ext>
             </a:extLst>
           </p:cNvPr>
@@ -8631,7 +8631,7 @@
     </p:spTree>
     <p:extLst>
       <p:ext uri="{BB962C8B-B14F-4D97-AF65-F5344CB8AC3E}">
-        <p14:creationId xmlns:p14="http://schemas.microsoft.com/office/powerpoint/2010/main" val="1577318958"/>
+        <p14:creationId xmlns:p14="http://schemas.microsoft.com/office/powerpoint/2010/main" val="1422453459"/>
       </p:ext>
     </p:extLst>
   </p:cSld>
@@ -8662,7 +8662,7 @@
           <p:cNvPr id="9" name="">
             <a:extLst xmlns:a="http://schemas.openxmlformats.org/drawingml/2006/main">
               <a:ext uri="{FF2B5EF4-FFF2-40B4-BE49-F238E27FC236}">
-                <a16:creationId xmlns:a16="http://schemas.microsoft.com/office/drawing/2014/main" id="{C44283BC-FF78-480E-9527-D9A2FAC67418}"/>
+                <a16:creationId xmlns:a16="http://schemas.microsoft.com/office/drawing/2014/main" id="{FE32B96A-BEC1-4FC4-AB74-064B073C37F9}"/>
               </a:ext>
             </a:extLst>
           </p:cNvPr>
@@ -8719,7 +8719,7 @@
           <p:cNvPr id="2" name="">
             <a:extLst xmlns:a="http://schemas.openxmlformats.org/drawingml/2006/main">
               <a:ext uri="{FF2B5EF4-FFF2-40B4-BE49-F238E27FC236}">
-                <a16:creationId xmlns:a16="http://schemas.microsoft.com/office/drawing/2014/main" id="{AB4D54EC-DBDF-41A7-BA8E-3F521EA68806}"/>
+                <a16:creationId xmlns:a16="http://schemas.microsoft.com/office/drawing/2014/main" id="{D00F0C16-91E3-4AFB-AE67-0296C868A0AA}"/>
               </a:ext>
             </a:extLst>
           </p:cNvPr>
@@ -8776,7 +8776,7 @@
           <p:cNvPr id="3" name="">
             <a:extLst xmlns:a="http://schemas.openxmlformats.org/drawingml/2006/main">
               <a:ext uri="{FF2B5EF4-FFF2-40B4-BE49-F238E27FC236}">
-                <a16:creationId xmlns:a16="http://schemas.microsoft.com/office/drawing/2014/main" id="{63DB8E91-BB9F-4EEF-AB73-1904718AF02F}"/>
+                <a16:creationId xmlns:a16="http://schemas.microsoft.com/office/drawing/2014/main" id="{D1E58D90-D200-4C29-8E03-2FD6B022D98D}"/>
               </a:ext>
             </a:extLst>
           </p:cNvPr>
@@ -8833,7 +8833,7 @@
           <p:cNvPr id="4" name="">
             <a:extLst xmlns:a="http://schemas.openxmlformats.org/drawingml/2006/main">
               <a:ext uri="{FF2B5EF4-FFF2-40B4-BE49-F238E27FC236}">
-                <a16:creationId xmlns:a16="http://schemas.microsoft.com/office/drawing/2014/main" id="{F7200080-69C9-4875-83E2-540B1BF9A5CE}"/>
+                <a16:creationId xmlns:a16="http://schemas.microsoft.com/office/drawing/2014/main" id="{00801219-42EA-4784-9EE5-6F340B603F39}"/>
               </a:ext>
             </a:extLst>
           </p:cNvPr>
@@ -8890,7 +8890,7 @@
           <p:cNvPr id="5" name="">
             <a:extLst xmlns:a="http://schemas.openxmlformats.org/drawingml/2006/main">
               <a:ext uri="{FF2B5EF4-FFF2-40B4-BE49-F238E27FC236}">
-                <a16:creationId xmlns:a16="http://schemas.microsoft.com/office/drawing/2014/main" id="{C2C38BCF-1D11-4A37-9054-605E253EE7E6}"/>
+                <a16:creationId xmlns:a16="http://schemas.microsoft.com/office/drawing/2014/main" id="{D9E1B329-FD5B-4F7A-ABA6-EFDC59DF0EBD}"/>
               </a:ext>
             </a:extLst>
           </p:cNvPr>
@@ -8947,7 +8947,7 @@
           <p:cNvPr id="6" name="">
             <a:extLst xmlns:a="http://schemas.openxmlformats.org/drawingml/2006/main">
               <a:ext uri="{FF2B5EF4-FFF2-40B4-BE49-F238E27FC236}">
-                <a16:creationId xmlns:a16="http://schemas.microsoft.com/office/drawing/2014/main" id="{E3891AC2-47BA-48B3-A709-60F272632677}"/>
+                <a16:creationId xmlns:a16="http://schemas.microsoft.com/office/drawing/2014/main" id="{3E9727B5-0BAA-426B-8CB0-949594075D87}"/>
               </a:ext>
             </a:extLst>
           </p:cNvPr>
@@ -9004,7 +9004,7 @@
           <p:cNvPr id="7" name="">
             <a:extLst xmlns:a="http://schemas.openxmlformats.org/drawingml/2006/main">
               <a:ext uri="{FF2B5EF4-FFF2-40B4-BE49-F238E27FC236}">
-                <a16:creationId xmlns:a16="http://schemas.microsoft.com/office/drawing/2014/main" id="{07F4DD46-2D78-41C4-9ECF-B55D9D4634F0}"/>
+                <a16:creationId xmlns:a16="http://schemas.microsoft.com/office/drawing/2014/main" id="{476D4704-FAD4-430E-BC8D-CA013EBA5732}"/>
               </a:ext>
             </a:extLst>
           </p:cNvPr>
@@ -9061,7 +9061,7 @@
           <p:cNvPr id="8" name="">
             <a:extLst xmlns:a="http://schemas.openxmlformats.org/drawingml/2006/main">
               <a:ext uri="{FF2B5EF4-FFF2-40B4-BE49-F238E27FC236}">
-                <a16:creationId xmlns:a16="http://schemas.microsoft.com/office/drawing/2014/main" id="{4C7F73F5-659D-4F04-98EF-9AF6E2F32B71}"/>
+                <a16:creationId xmlns:a16="http://schemas.microsoft.com/office/drawing/2014/main" id="{D06D656C-9DE8-4D32-A17D-29E3AF6D41D4}"/>
               </a:ext>
             </a:extLst>
           </p:cNvPr>
@@ -9116,7 +9116,7 @@
     </p:spTree>
     <p:extLst>
       <p:ext uri="{BB962C8B-B14F-4D97-AF65-F5344CB8AC3E}">
-        <p14:creationId xmlns:p14="http://schemas.microsoft.com/office/powerpoint/2010/main" val="446255591"/>
+        <p14:creationId xmlns:p14="http://schemas.microsoft.com/office/powerpoint/2010/main" val="891311633"/>
       </p:ext>
     </p:extLst>
   </p:cSld>
@@ -9147,7 +9147,7 @@
           <p:cNvPr id="8" name="">
             <a:extLst xmlns:a="http://schemas.openxmlformats.org/drawingml/2006/main">
               <a:ext uri="{FF2B5EF4-FFF2-40B4-BE49-F238E27FC236}">
-                <a16:creationId xmlns:a16="http://schemas.microsoft.com/office/drawing/2014/main" id="{8FC5529A-8EC8-4869-8E99-E51DB77D0A3D}"/>
+                <a16:creationId xmlns:a16="http://schemas.microsoft.com/office/drawing/2014/main" id="{ECA1493B-33DF-4BF6-A00F-6E93F5DCE11B}"/>
               </a:ext>
             </a:extLst>
           </p:cNvPr>
@@ -9204,7 +9204,7 @@
           <p:cNvPr id="2" name="">
             <a:extLst xmlns:a="http://schemas.openxmlformats.org/drawingml/2006/main">
               <a:ext uri="{FF2B5EF4-FFF2-40B4-BE49-F238E27FC236}">
-                <a16:creationId xmlns:a16="http://schemas.microsoft.com/office/drawing/2014/main" id="{853E6C22-3CCD-487C-92EA-6F24FD4F1B13}"/>
+                <a16:creationId xmlns:a16="http://schemas.microsoft.com/office/drawing/2014/main" id="{752104B1-3CDF-43F3-8CBF-8C9FAC12FD8D}"/>
               </a:ext>
             </a:extLst>
           </p:cNvPr>
@@ -9261,7 +9261,7 @@
           <p:cNvPr id="3" name="">
             <a:extLst xmlns:a="http://schemas.openxmlformats.org/drawingml/2006/main">
               <a:ext uri="{FF2B5EF4-FFF2-40B4-BE49-F238E27FC236}">
-                <a16:creationId xmlns:a16="http://schemas.microsoft.com/office/drawing/2014/main" id="{F72AB5C0-F480-41F6-B4A4-35109F83BEB4}"/>
+                <a16:creationId xmlns:a16="http://schemas.microsoft.com/office/drawing/2014/main" id="{065CD58C-E5FD-4A01-A9F0-C4E934D9B07A}"/>
               </a:ext>
             </a:extLst>
           </p:cNvPr>
@@ -9318,7 +9318,7 @@
           <p:cNvPr id="4" name="">
             <a:extLst xmlns:a="http://schemas.openxmlformats.org/drawingml/2006/main">
               <a:ext uri="{FF2B5EF4-FFF2-40B4-BE49-F238E27FC236}">
-                <a16:creationId xmlns:a16="http://schemas.microsoft.com/office/drawing/2014/main" id="{7A9C25C8-0970-44C4-8D5D-62552767869E}"/>
+                <a16:creationId xmlns:a16="http://schemas.microsoft.com/office/drawing/2014/main" id="{DC8112C8-7C2B-4673-A5BB-0646D7D439F7}"/>
               </a:ext>
             </a:extLst>
           </p:cNvPr>
@@ -9382,7 +9382,7 @@
         </p:xfrm>
         <a:graphic xmlns:a="http://schemas.openxmlformats.org/drawingml/2006/main">
           <a:graphicData uri="http://schemas.openxmlformats.org/drawingml/2006/chart">
-            <c:chart xmlns:r="http://schemas.openxmlformats.org/officeDocument/2006/relationships" xmlns:c="http://schemas.openxmlformats.org/drawingml/2006/chart" r:id="R343c2c70253e4d92"/>
+            <c:chart xmlns:r="http://schemas.openxmlformats.org/officeDocument/2006/relationships" xmlns:c="http://schemas.openxmlformats.org/drawingml/2006/chart" r:id="R6031095b61d04a77"/>
           </a:graphicData>
         </a:graphic>
       </p:graphicFrame>
@@ -9391,7 +9391,7 @@
           <p:cNvPr id="6" name="">
             <a:extLst xmlns:a="http://schemas.openxmlformats.org/drawingml/2006/main">
               <a:ext uri="{FF2B5EF4-FFF2-40B4-BE49-F238E27FC236}">
-                <a16:creationId xmlns:a16="http://schemas.microsoft.com/office/drawing/2014/main" id="{6CF92A6B-E925-40D7-8DFD-0EC96CC195FB}"/>
+                <a16:creationId xmlns:a16="http://schemas.microsoft.com/office/drawing/2014/main" id="{4B15B570-0B60-4776-B45D-D7C76966E7A2}"/>
               </a:ext>
             </a:extLst>
           </p:cNvPr>
@@ -9448,7 +9448,7 @@
           <p:cNvPr id="7" name="">
             <a:extLst xmlns:a="http://schemas.openxmlformats.org/drawingml/2006/main">
               <a:ext uri="{FF2B5EF4-FFF2-40B4-BE49-F238E27FC236}">
-                <a16:creationId xmlns:a16="http://schemas.microsoft.com/office/drawing/2014/main" id="{9CFFF7EB-9CF7-4364-8A99-6580A513A224}"/>
+                <a16:creationId xmlns:a16="http://schemas.microsoft.com/office/drawing/2014/main" id="{50554569-ED58-4904-A172-CC9B84369BF1}"/>
               </a:ext>
             </a:extLst>
           </p:cNvPr>
@@ -9503,7 +9503,7 @@
     </p:spTree>
     <p:extLst>
       <p:ext uri="{BB962C8B-B14F-4D97-AF65-F5344CB8AC3E}">
-        <p14:creationId xmlns:p14="http://schemas.microsoft.com/office/powerpoint/2010/main" val="1972504929"/>
+        <p14:creationId xmlns:p14="http://schemas.microsoft.com/office/powerpoint/2010/main" val="788800669"/>
       </p:ext>
     </p:extLst>
   </p:cSld>
@@ -9534,7 +9534,7 @@
           <p:cNvPr id="8" name="">
             <a:extLst xmlns:a="http://schemas.openxmlformats.org/drawingml/2006/main">
               <a:ext uri="{FF2B5EF4-FFF2-40B4-BE49-F238E27FC236}">
-                <a16:creationId xmlns:a16="http://schemas.microsoft.com/office/drawing/2014/main" id="{FD4AB9A2-1E8D-4719-A778-5E0C44F6519C}"/>
+                <a16:creationId xmlns:a16="http://schemas.microsoft.com/office/drawing/2014/main" id="{361D97B0-540F-4B7D-B9D0-50A16FBD1189}"/>
               </a:ext>
             </a:extLst>
           </p:cNvPr>
@@ -9591,7 +9591,7 @@
           <p:cNvPr id="2" name="">
             <a:extLst xmlns:a="http://schemas.openxmlformats.org/drawingml/2006/main">
               <a:ext uri="{FF2B5EF4-FFF2-40B4-BE49-F238E27FC236}">
-                <a16:creationId xmlns:a16="http://schemas.microsoft.com/office/drawing/2014/main" id="{F7283E97-E77A-4C84-BCDC-0B960039071C}"/>
+                <a16:creationId xmlns:a16="http://schemas.microsoft.com/office/drawing/2014/main" id="{7D4CEB33-0FC0-4D7A-A08E-6063E4C4A416}"/>
               </a:ext>
             </a:extLst>
           </p:cNvPr>
@@ -9648,7 +9648,7 @@
           <p:cNvPr id="3" name="">
             <a:extLst xmlns:a="http://schemas.openxmlformats.org/drawingml/2006/main">
               <a:ext uri="{FF2B5EF4-FFF2-40B4-BE49-F238E27FC236}">
-                <a16:creationId xmlns:a16="http://schemas.microsoft.com/office/drawing/2014/main" id="{3F02402F-C9F4-4782-8E91-A3B092B8D30F}"/>
+                <a16:creationId xmlns:a16="http://schemas.microsoft.com/office/drawing/2014/main" id="{FD275584-84AE-41AF-8C7E-A1CD3DB2F50F}"/>
               </a:ext>
             </a:extLst>
           </p:cNvPr>
@@ -9705,7 +9705,7 @@
           <p:cNvPr id="4" name="">
             <a:extLst xmlns:a="http://schemas.openxmlformats.org/drawingml/2006/main">
               <a:ext uri="{FF2B5EF4-FFF2-40B4-BE49-F238E27FC236}">
-                <a16:creationId xmlns:a16="http://schemas.microsoft.com/office/drawing/2014/main" id="{694FD3AE-0CE5-4085-B07F-60285044D939}"/>
+                <a16:creationId xmlns:a16="http://schemas.microsoft.com/office/drawing/2014/main" id="{CD9E7DBF-5496-450A-9AF6-94DDC3CD6BA2}"/>
               </a:ext>
             </a:extLst>
           </p:cNvPr>
@@ -9762,7 +9762,7 @@
           <p:cNvPr id="5" name="">
             <a:extLst xmlns:a="http://schemas.openxmlformats.org/drawingml/2006/main">
               <a:ext uri="{FF2B5EF4-FFF2-40B4-BE49-F238E27FC236}">
-                <a16:creationId xmlns:a16="http://schemas.microsoft.com/office/drawing/2014/main" id="{8F60D332-6DD2-487C-B6CC-A3312C18596C}"/>
+                <a16:creationId xmlns:a16="http://schemas.microsoft.com/office/drawing/2014/main" id="{4113DDCF-28A0-4EBB-9D64-23967DD07978}"/>
               </a:ext>
             </a:extLst>
           </p:cNvPr>
@@ -10009,7 +10009,7 @@
           <p:cNvPr id="7" name="">
             <a:extLst xmlns:a="http://schemas.openxmlformats.org/drawingml/2006/main">
               <a:ext uri="{FF2B5EF4-FFF2-40B4-BE49-F238E27FC236}">
-                <a16:creationId xmlns:a16="http://schemas.microsoft.com/office/drawing/2014/main" id="{036EB91D-C66E-4226-B8F6-4573FD7837E8}"/>
+                <a16:creationId xmlns:a16="http://schemas.microsoft.com/office/drawing/2014/main" id="{A8D2D851-6E42-49C3-8599-043C2EC98991}"/>
               </a:ext>
             </a:extLst>
           </p:cNvPr>
@@ -10087,7 +10087,7 @@
     </p:spTree>
     <p:extLst>
       <p:ext uri="{BB962C8B-B14F-4D97-AF65-F5344CB8AC3E}">
-        <p14:creationId xmlns:p14="http://schemas.microsoft.com/office/powerpoint/2010/main" val="905909173"/>
+        <p14:creationId xmlns:p14="http://schemas.microsoft.com/office/powerpoint/2010/main" val="1751677155"/>
       </p:ext>
     </p:extLst>
   </p:cSld>
@@ -10118,7 +10118,7 @@
           <p:cNvPr id="8" name="">
             <a:extLst xmlns:a="http://schemas.openxmlformats.org/drawingml/2006/main">
               <a:ext uri="{FF2B5EF4-FFF2-40B4-BE49-F238E27FC236}">
-                <a16:creationId xmlns:a16="http://schemas.microsoft.com/office/drawing/2014/main" id="{C3F9F3E2-18ED-4181-8681-6AA067540C3A}"/>
+                <a16:creationId xmlns:a16="http://schemas.microsoft.com/office/drawing/2014/main" id="{D05DDF3E-CFF9-4448-9C72-E97EDCE1324D}"/>
               </a:ext>
             </a:extLst>
           </p:cNvPr>
@@ -10175,7 +10175,7 @@
           <p:cNvPr id="2" name="">
             <a:extLst xmlns:a="http://schemas.openxmlformats.org/drawingml/2006/main">
               <a:ext uri="{FF2B5EF4-FFF2-40B4-BE49-F238E27FC236}">
-                <a16:creationId xmlns:a16="http://schemas.microsoft.com/office/drawing/2014/main" id="{CBA7CE62-DF41-4A5B-BD23-98AFB0940FD9}"/>
+                <a16:creationId xmlns:a16="http://schemas.microsoft.com/office/drawing/2014/main" id="{403CB2B9-87DC-4E3B-AD15-4C0E67C8E0D4}"/>
               </a:ext>
             </a:extLst>
           </p:cNvPr>
@@ -10232,7 +10232,7 @@
           <p:cNvPr id="3" name="">
             <a:extLst xmlns:a="http://schemas.openxmlformats.org/drawingml/2006/main">
               <a:ext uri="{FF2B5EF4-FFF2-40B4-BE49-F238E27FC236}">
-                <a16:creationId xmlns:a16="http://schemas.microsoft.com/office/drawing/2014/main" id="{B5728A43-4F81-4892-8E6A-A9EA10F3E545}"/>
+                <a16:creationId xmlns:a16="http://schemas.microsoft.com/office/drawing/2014/main" id="{B7AA5621-968F-4FE4-A7E8-EE80254E1AEE}"/>
               </a:ext>
             </a:extLst>
           </p:cNvPr>
@@ -10289,7 +10289,7 @@
           <p:cNvPr id="4" name="">
             <a:extLst xmlns:a="http://schemas.openxmlformats.org/drawingml/2006/main">
               <a:ext uri="{FF2B5EF4-FFF2-40B4-BE49-F238E27FC236}">
-                <a16:creationId xmlns:a16="http://schemas.microsoft.com/office/drawing/2014/main" id="{3E1F65EE-332C-4957-86F7-7D50F4DE8590}"/>
+                <a16:creationId xmlns:a16="http://schemas.microsoft.com/office/drawing/2014/main" id="{E8D095CB-D779-428E-9681-879B3435AEFF}"/>
               </a:ext>
             </a:extLst>
           </p:cNvPr>
@@ -10346,7 +10346,7 @@
           <p:cNvPr id="5" name="">
             <a:extLst xmlns:a="http://schemas.openxmlformats.org/drawingml/2006/main">
               <a:ext uri="{FF2B5EF4-FFF2-40B4-BE49-F238E27FC236}">
-                <a16:creationId xmlns:a16="http://schemas.microsoft.com/office/drawing/2014/main" id="{87998AE8-4ABD-4372-8332-0A60CB6EBE12}"/>
+                <a16:creationId xmlns:a16="http://schemas.microsoft.com/office/drawing/2014/main" id="{05D13986-D1DC-49DE-B9B4-17A83CCC1CD7}"/>
               </a:ext>
             </a:extLst>
           </p:cNvPr>
@@ -10649,7 +10649,7 @@
           <p:cNvPr id="7" name="">
             <a:extLst xmlns:a="http://schemas.openxmlformats.org/drawingml/2006/main">
               <a:ext uri="{FF2B5EF4-FFF2-40B4-BE49-F238E27FC236}">
-                <a16:creationId xmlns:a16="http://schemas.microsoft.com/office/drawing/2014/main" id="{67323989-919C-4B0C-B567-E162F08FD57C}"/>
+                <a16:creationId xmlns:a16="http://schemas.microsoft.com/office/drawing/2014/main" id="{23C006FB-7D28-41F0-A784-BF8ED642B27D}"/>
               </a:ext>
             </a:extLst>
           </p:cNvPr>
@@ -10727,7 +10727,7 @@
     </p:spTree>
     <p:extLst>
       <p:ext uri="{BB962C8B-B14F-4D97-AF65-F5344CB8AC3E}">
-        <p14:creationId xmlns:p14="http://schemas.microsoft.com/office/powerpoint/2010/main" val="708984788"/>
+        <p14:creationId xmlns:p14="http://schemas.microsoft.com/office/powerpoint/2010/main" val="1736297023"/>
       </p:ext>
     </p:extLst>
   </p:cSld>
@@ -10755,10 +10755,10 @@
       </p:grpSpPr>
       <p:sp>
         <p:nvSpPr>
-          <p:cNvPr id="8" name="">
-            <a:extLst xmlns:a="http://schemas.openxmlformats.org/drawingml/2006/main">
-              <a:ext uri="{FF2B5EF4-FFF2-40B4-BE49-F238E27FC236}">
-                <a16:creationId xmlns:a16="http://schemas.microsoft.com/office/drawing/2014/main" id="{CF37768B-FD20-4C68-BF85-09F77FA66430}"/>
+          <p:cNvPr id="9" name="">
+            <a:extLst xmlns:a="http://schemas.openxmlformats.org/drawingml/2006/main">
+              <a:ext uri="{FF2B5EF4-FFF2-40B4-BE49-F238E27FC236}">
+                <a16:creationId xmlns:a16="http://schemas.microsoft.com/office/drawing/2014/main" id="{FB595447-26CE-4CB6-BCC0-06DB0F97B11D}"/>
               </a:ext>
             </a:extLst>
           </p:cNvPr>
@@ -10815,7 +10815,7 @@
           <p:cNvPr id="2" name="">
             <a:extLst xmlns:a="http://schemas.openxmlformats.org/drawingml/2006/main">
               <a:ext uri="{FF2B5EF4-FFF2-40B4-BE49-F238E27FC236}">
-                <a16:creationId xmlns:a16="http://schemas.microsoft.com/office/drawing/2014/main" id="{F3E021D7-5ECA-4927-A06A-1D4D1EB40B7C}"/>
+                <a16:creationId xmlns:a16="http://schemas.microsoft.com/office/drawing/2014/main" id="{87B92ACE-826A-47DA-B080-0D43957D67E9}"/>
               </a:ext>
             </a:extLst>
           </p:cNvPr>
@@ -10872,7 +10872,7 @@
           <p:cNvPr id="3" name="">
             <a:extLst xmlns:a="http://schemas.openxmlformats.org/drawingml/2006/main">
               <a:ext uri="{FF2B5EF4-FFF2-40B4-BE49-F238E27FC236}">
-                <a16:creationId xmlns:a16="http://schemas.microsoft.com/office/drawing/2014/main" id="{179382B1-6A20-41DD-B3E1-DC55FCA412BE}"/>
+                <a16:creationId xmlns:a16="http://schemas.microsoft.com/office/drawing/2014/main" id="{37F9525F-221E-45C8-A329-4D753F01AE9E}"/>
               </a:ext>
             </a:extLst>
           </p:cNvPr>
@@ -10929,18 +10929,18 @@
           <p:cNvPr id="4" name="">
             <a:extLst xmlns:a="http://schemas.openxmlformats.org/drawingml/2006/main">
               <a:ext uri="{FF2B5EF4-FFF2-40B4-BE49-F238E27FC236}">
-                <a16:creationId xmlns:a16="http://schemas.microsoft.com/office/drawing/2014/main" id="{CAB7A648-BFB5-44F2-A9E7-5BB01D3E9E61}"/>
-              </a:ext>
-            </a:extLst>
-          </p:cNvPr>
-          <p:cNvSpPr>
-            <a:spLocks xmlns:a="http://schemas.openxmlformats.org/drawingml/2006/main" noGrp="1"/>
-          </p:cNvSpPr>
-          <p:nvPr/>
-        </p:nvSpPr>
-        <p:spPr>
-          <a:xfrm xmlns:a="http://schemas.openxmlformats.org/drawingml/2006/main">
-            <a:off x="685800" y="1619250"/>
+                <a16:creationId xmlns:a16="http://schemas.microsoft.com/office/drawing/2014/main" id="{EB73714C-5393-4499-80B9-A37258428D0B}"/>
+              </a:ext>
+            </a:extLst>
+          </p:cNvPr>
+          <p:cNvSpPr>
+            <a:spLocks xmlns:a="http://schemas.openxmlformats.org/drawingml/2006/main" noGrp="1"/>
+          </p:cNvSpPr>
+          <p:nvPr/>
+        </p:nvSpPr>
+        <p:spPr>
+          <a:xfrm xmlns:a="http://schemas.openxmlformats.org/drawingml/2006/main">
+            <a:off x="685800" y="1533525"/>
             <a:ext cx="10820400" cy="523875"/>
           </a:xfrm>
           <a:prstGeom xmlns:a="http://schemas.openxmlformats.org/drawingml/2006/main" prst="rect">
@@ -10958,25 +10958,25 @@
           <a:lstStyle xmlns:a="http://schemas.openxmlformats.org/drawingml/2006/main"/>
           <a:p xmlns:a="http://schemas.openxmlformats.org/drawingml/2006/main">
             <a:pPr algn="l">
-              <a:defRPr sz="2550" b="1">
-                <a:solidFill>
-                  <a:srgbClr val="000000"/>
-                </a:solidFill>
-                <a:latin typeface="Times New Roman"/>
-                <a:ea typeface="Times New Roman"/>
-                <a:cs typeface="Times New Roman"/>
-              </a:defRPr>
-            </a:pPr>
-            <a:r>
-              <a:rPr sz="2550" b="1">
-                <a:solidFill>
-                  <a:srgbClr val="000000"/>
-                </a:solidFill>
-                <a:latin typeface="Times New Roman"/>
-                <a:ea typeface="Times New Roman"/>
-                <a:cs typeface="Times New Roman"/>
-              </a:rPr>
-              <a:t>Owner gallery: 206 unique real-image files</a:t>
+              <a:defRPr sz="2475" b="1">
+                <a:solidFill>
+                  <a:srgbClr val="000000"/>
+                </a:solidFill>
+                <a:latin typeface="Times New Roman"/>
+                <a:ea typeface="Times New Roman"/>
+                <a:cs typeface="Times New Roman"/>
+              </a:defRPr>
+            </a:pPr>
+            <a:r>
+              <a:rPr sz="2475" b="1">
+                <a:solidFill>
+                  <a:srgbClr val="000000"/>
+                </a:solidFill>
+                <a:latin typeface="Times New Roman"/>
+                <a:ea typeface="Times New Roman"/>
+                <a:cs typeface="Times New Roman"/>
+              </a:rPr>
+              <a:t>Earlier comprehensive test: E43 failed</a:t>
             </a:r>
           </a:p>
         </p:txBody>
@@ -10986,19 +10986,19 @@
           <p:cNvPr id="5" name="">
             <a:extLst xmlns:a="http://schemas.openxmlformats.org/drawingml/2006/main">
               <a:ext uri="{FF2B5EF4-FFF2-40B4-BE49-F238E27FC236}">
-                <a16:creationId xmlns:a16="http://schemas.microsoft.com/office/drawing/2014/main" id="{48C65385-10BC-4FEF-8471-B3F8B99805AF}"/>
-              </a:ext>
-            </a:extLst>
-          </p:cNvPr>
-          <p:cNvSpPr>
-            <a:spLocks xmlns:a="http://schemas.openxmlformats.org/drawingml/2006/main" noGrp="1"/>
-          </p:cNvSpPr>
-          <p:nvPr/>
-        </p:nvSpPr>
-        <p:spPr>
-          <a:xfrm xmlns:a="http://schemas.openxmlformats.org/drawingml/2006/main">
-            <a:off x="685800" y="2314575"/>
-            <a:ext cx="10820400" cy="1000125"/>
+                <a16:creationId xmlns:a16="http://schemas.microsoft.com/office/drawing/2014/main" id="{60FB3A2A-DD3E-43AF-81E8-72AAD00F474E}"/>
+              </a:ext>
+            </a:extLst>
+          </p:cNvPr>
+          <p:cNvSpPr>
+            <a:spLocks xmlns:a="http://schemas.openxmlformats.org/drawingml/2006/main" noGrp="1"/>
+          </p:cNvSpPr>
+          <p:nvPr/>
+        </p:nvSpPr>
+        <p:spPr>
+          <a:xfrm xmlns:a="http://schemas.openxmlformats.org/drawingml/2006/main">
+            <a:off x="685800" y="2162175"/>
+            <a:ext cx="10820400" cy="952500"/>
           </a:xfrm>
           <a:prstGeom xmlns:a="http://schemas.openxmlformats.org/drawingml/2006/main" prst="rect">
             <a:avLst/>
@@ -11015,48 +11015,48 @@
           <a:lstStyle xmlns:a="http://schemas.openxmlformats.org/drawingml/2006/main"/>
           <a:p xmlns:a="http://schemas.openxmlformats.org/drawingml/2006/main">
             <a:pPr algn="l">
-              <a:defRPr sz="2175" b="0">
-                <a:solidFill>
-                  <a:srgbClr val="000000"/>
-                </a:solidFill>
-                <a:latin typeface="Times New Roman"/>
-                <a:ea typeface="Times New Roman"/>
-                <a:cs typeface="Times New Roman"/>
-              </a:defRPr>
-            </a:pPr>
-            <a:r>
-              <a:rPr sz="2175" b="0">
-                <a:solidFill>
-                  <a:srgbClr val="000000"/>
-                </a:solidFill>
-                <a:latin typeface="Times New Roman"/>
-                <a:ea typeface="Times New Roman"/>
-                <a:cs typeface="Times New Roman"/>
-              </a:rPr>
-              <a:t>False AI alerts: 9 originals; 18 social-style views</a:t>
+              <a:defRPr sz="2100" b="0">
+                <a:solidFill>
+                  <a:srgbClr val="000000"/>
+                </a:solidFill>
+                <a:latin typeface="Times New Roman"/>
+                <a:ea typeface="Times New Roman"/>
+                <a:cs typeface="Times New Roman"/>
+              </a:defRPr>
+            </a:pPr>
+            <a:r>
+              <a:rPr sz="2100" b="0">
+                <a:solidFill>
+                  <a:srgbClr val="000000"/>
+                </a:solidFill>
+                <a:latin typeface="Times New Roman"/>
+                <a:ea typeface="Times New Roman"/>
+                <a:cs typeface="Times New Roman"/>
+              </a:rPr>
+              <a:t>Real false alerts: 391/1,000 originals; 490/1,000 processed</a:t>
             </a:r>
           </a:p>
           <a:p xmlns:a="http://schemas.openxmlformats.org/drawingml/2006/main">
             <a:pPr algn="l">
-              <a:defRPr sz="2175" b="0">
-                <a:solidFill>
-                  <a:srgbClr val="000000"/>
-                </a:solidFill>
-                <a:latin typeface="Times New Roman"/>
-                <a:ea typeface="Times New Roman"/>
-                <a:cs typeface="Times New Roman"/>
-              </a:defRPr>
-            </a:pPr>
-            <a:r>
-              <a:rPr sz="2175" b="0">
-                <a:solidFill>
-                  <a:srgbClr val="000000"/>
-                </a:solidFill>
-                <a:latin typeface="Times New Roman"/>
-                <a:ea typeface="Times New Roman"/>
-                <a:cs typeface="Times New Roman"/>
-              </a:rPr>
-              <a:t>Previously inspected, mostly one phone and correlated scenes</a:t>
+              <a:defRPr sz="2100" b="0">
+                <a:solidFill>
+                  <a:srgbClr val="000000"/>
+                </a:solidFill>
+                <a:latin typeface="Times New Roman"/>
+                <a:ea typeface="Times New Roman"/>
+                <a:cs typeface="Times New Roman"/>
+              </a:defRPr>
+            </a:pPr>
+            <a:r>
+              <a:rPr sz="2100" b="0">
+                <a:solidFill>
+                  <a:srgbClr val="000000"/>
+                </a:solidFill>
+                <a:latin typeface="Times New Roman"/>
+                <a:ea typeface="Times New Roman"/>
+                <a:cs typeface="Times New Roman"/>
+              </a:rPr>
+              <a:t>Different model and population from the E92 comparison</a:t>
             </a:r>
           </a:p>
         </p:txBody>
@@ -11066,18 +11066,18 @@
           <p:cNvPr id="6" name="">
             <a:extLst xmlns:a="http://schemas.openxmlformats.org/drawingml/2006/main">
               <a:ext uri="{FF2B5EF4-FFF2-40B4-BE49-F238E27FC236}">
-                <a16:creationId xmlns:a16="http://schemas.microsoft.com/office/drawing/2014/main" id="{7E4A4BB7-97A8-4285-BD36-903B9354AB8A}"/>
-              </a:ext>
-            </a:extLst>
-          </p:cNvPr>
-          <p:cNvSpPr>
-            <a:spLocks xmlns:a="http://schemas.openxmlformats.org/drawingml/2006/main" noGrp="1"/>
-          </p:cNvSpPr>
-          <p:nvPr/>
-        </p:nvSpPr>
-        <p:spPr>
-          <a:xfrm xmlns:a="http://schemas.openxmlformats.org/drawingml/2006/main">
-            <a:off x="685800" y="3800475"/>
+                <a16:creationId xmlns:a16="http://schemas.microsoft.com/office/drawing/2014/main" id="{C173F40F-4C22-400F-B6C9-42774D088C26}"/>
+              </a:ext>
+            </a:extLst>
+          </p:cNvPr>
+          <p:cNvSpPr>
+            <a:spLocks xmlns:a="http://schemas.openxmlformats.org/drawingml/2006/main" noGrp="1"/>
+          </p:cNvSpPr>
+          <p:nvPr/>
+        </p:nvSpPr>
+        <p:spPr>
+          <a:xfrm xmlns:a="http://schemas.openxmlformats.org/drawingml/2006/main">
+            <a:off x="685800" y="3400425"/>
             <a:ext cx="10820400" cy="523875"/>
           </a:xfrm>
           <a:prstGeom xmlns:a="http://schemas.openxmlformats.org/drawingml/2006/main" prst="rect">
@@ -11095,25 +11095,25 @@
           <a:lstStyle xmlns:a="http://schemas.openxmlformats.org/drawingml/2006/main"/>
           <a:p xmlns:a="http://schemas.openxmlformats.org/drawingml/2006/main">
             <a:pPr algn="l">
-              <a:defRPr sz="2550" b="1">
-                <a:solidFill>
-                  <a:srgbClr val="000000"/>
-                </a:solidFill>
-                <a:latin typeface="Times New Roman"/>
-                <a:ea typeface="Times New Roman"/>
-                <a:cs typeface="Times New Roman"/>
-              </a:defRPr>
-            </a:pPr>
-            <a:r>
-              <a:rPr sz="2550" b="1">
-                <a:solidFill>
-                  <a:srgbClr val="000000"/>
-                </a:solidFill>
-                <a:latin typeface="Times New Roman"/>
-                <a:ea typeface="Times New Roman"/>
-                <a:cs typeface="Times New Roman"/>
-              </a:rPr>
-              <a:t>Later research candidates were rejected</a:t>
+              <a:defRPr sz="2475" b="1">
+                <a:solidFill>
+                  <a:srgbClr val="000000"/>
+                </a:solidFill>
+                <a:latin typeface="Times New Roman"/>
+                <a:ea typeface="Times New Roman"/>
+                <a:cs typeface="Times New Roman"/>
+              </a:defRPr>
+            </a:pPr>
+            <a:r>
+              <a:rPr sz="2475" b="1">
+                <a:solidFill>
+                  <a:srgbClr val="000000"/>
+                </a:solidFill>
+                <a:latin typeface="Times New Roman"/>
+                <a:ea typeface="Times New Roman"/>
+                <a:cs typeface="Times New Roman"/>
+              </a:rPr>
+              <a:t>E92 owner gallery: false alerts still occurred</a:t>
             </a:r>
           </a:p>
         </p:txBody>
@@ -11123,19 +11123,19 @@
           <p:cNvPr id="7" name="">
             <a:extLst xmlns:a="http://schemas.openxmlformats.org/drawingml/2006/main">
               <a:ext uri="{FF2B5EF4-FFF2-40B4-BE49-F238E27FC236}">
-                <a16:creationId xmlns:a16="http://schemas.microsoft.com/office/drawing/2014/main" id="{E08CC3DE-F9E7-44C2-9209-4244355BBA2D}"/>
-              </a:ext>
-            </a:extLst>
-          </p:cNvPr>
-          <p:cNvSpPr>
-            <a:spLocks xmlns:a="http://schemas.openxmlformats.org/drawingml/2006/main" noGrp="1"/>
-          </p:cNvSpPr>
-          <p:nvPr/>
-        </p:nvSpPr>
-        <p:spPr>
-          <a:xfrm xmlns:a="http://schemas.openxmlformats.org/drawingml/2006/main">
-            <a:off x="685800" y="4495800"/>
-            <a:ext cx="10820400" cy="1000125"/>
+                <a16:creationId xmlns:a16="http://schemas.microsoft.com/office/drawing/2014/main" id="{38F77C3A-33BB-46E3-B7AD-B2D08CC64B8B}"/>
+              </a:ext>
+            </a:extLst>
+          </p:cNvPr>
+          <p:cNvSpPr>
+            <a:spLocks xmlns:a="http://schemas.openxmlformats.org/drawingml/2006/main" noGrp="1"/>
+          </p:cNvSpPr>
+          <p:nvPr/>
+        </p:nvSpPr>
+        <p:spPr>
+          <a:xfrm xmlns:a="http://schemas.openxmlformats.org/drawingml/2006/main">
+            <a:off x="685800" y="4019550"/>
+            <a:ext cx="10820400" cy="952500"/>
           </a:xfrm>
           <a:prstGeom xmlns:a="http://schemas.openxmlformats.org/drawingml/2006/main" prst="rect">
             <a:avLst/>
@@ -11152,48 +11152,105 @@
           <a:lstStyle xmlns:a="http://schemas.openxmlformats.org/drawingml/2006/main"/>
           <a:p xmlns:a="http://schemas.openxmlformats.org/drawingml/2006/main">
             <a:pPr algn="l">
-              <a:defRPr sz="2175" b="0">
-                <a:solidFill>
-                  <a:srgbClr val="000000"/>
-                </a:solidFill>
-                <a:latin typeface="Times New Roman"/>
-                <a:ea typeface="Times New Roman"/>
-                <a:cs typeface="Times New Roman"/>
-              </a:defRPr>
-            </a:pPr>
-            <a:r>
-              <a:rPr sz="2175" b="0">
-                <a:solidFill>
-                  <a:srgbClr val="000000"/>
-                </a:solidFill>
-                <a:latin typeface="Times New Roman"/>
-                <a:ea typeface="Times New Roman"/>
-                <a:cs typeface="Times New Roman"/>
-              </a:rPr>
-              <a:t>Source-fold evaluation failed the complete requirements.</a:t>
+              <a:defRPr sz="2100" b="0">
+                <a:solidFill>
+                  <a:srgbClr val="000000"/>
+                </a:solidFill>
+                <a:latin typeface="Times New Roman"/>
+                <a:ea typeface="Times New Roman"/>
+                <a:cs typeface="Times New Roman"/>
+              </a:defRPr>
+            </a:pPr>
+            <a:r>
+              <a:rPr sz="2100" b="0">
+                <a:solidFill>
+                  <a:srgbClr val="000000"/>
+                </a:solidFill>
+                <a:latin typeface="Times New Roman"/>
+                <a:ea typeface="Times New Roman"/>
+                <a:cs typeface="Times New Roman"/>
+              </a:rPr>
+              <a:t>9/206 originals; 18/206 processed copies</a:t>
             </a:r>
           </a:p>
           <a:p xmlns:a="http://schemas.openxmlformats.org/drawingml/2006/main">
             <a:pPr algn="l">
-              <a:defRPr sz="2175" b="0">
-                <a:solidFill>
-                  <a:srgbClr val="000000"/>
-                </a:solidFill>
-                <a:latin typeface="Times New Roman"/>
-                <a:ea typeface="Times New Roman"/>
-                <a:cs typeface="Times New Roman"/>
-              </a:defRPr>
-            </a:pPr>
-            <a:r>
-              <a:rPr sz="2175" b="0">
-                <a:solidFill>
-                  <a:srgbClr val="000000"/>
-                </a:solidFill>
-                <a:latin typeface="Times New Roman"/>
-                <a:ea typeface="Times New Roman"/>
-                <a:cs typeface="Times New Roman"/>
-              </a:rPr>
-              <a:t>New source-pixel features harmed transported AI recall.</a:t>
+              <a:defRPr sz="2100" b="0">
+                <a:solidFill>
+                  <a:srgbClr val="000000"/>
+                </a:solidFill>
+                <a:latin typeface="Times New Roman"/>
+                <a:ea typeface="Times New Roman"/>
+                <a:cs typeface="Times New Roman"/>
+              </a:defRPr>
+            </a:pPr>
+            <a:r>
+              <a:rPr sz="2100" b="0">
+                <a:solidFill>
+                  <a:srgbClr val="000000"/>
+                </a:solidFill>
+                <a:latin typeface="Times New Roman"/>
+                <a:ea typeface="Times New Roman"/>
+                <a:cs typeface="Times New Roman"/>
+              </a:rPr>
+              <a:t>Consumed data, mostly one phone and correlated scenes</a:t>
+            </a:r>
+          </a:p>
+        </p:txBody>
+      </p:sp>
+      <p:sp>
+        <p:nvSpPr>
+          <p:cNvPr id="8" name="">
+            <a:extLst xmlns:a="http://schemas.openxmlformats.org/drawingml/2006/main">
+              <a:ext uri="{FF2B5EF4-FFF2-40B4-BE49-F238E27FC236}">
+                <a16:creationId xmlns:a16="http://schemas.microsoft.com/office/drawing/2014/main" id="{7B88C94A-ACA7-4F07-82FB-2E34AB1DE13C}"/>
+              </a:ext>
+            </a:extLst>
+          </p:cNvPr>
+          <p:cNvSpPr>
+            <a:spLocks xmlns:a="http://schemas.openxmlformats.org/drawingml/2006/main" noGrp="1"/>
+          </p:cNvSpPr>
+          <p:nvPr/>
+        </p:nvSpPr>
+        <p:spPr>
+          <a:xfrm xmlns:a="http://schemas.openxmlformats.org/drawingml/2006/main">
+            <a:off x="685800" y="5362575"/>
+            <a:ext cx="10820400" cy="523875"/>
+          </a:xfrm>
+          <a:prstGeom xmlns:a="http://schemas.openxmlformats.org/drawingml/2006/main" prst="rect">
+            <a:avLst/>
+          </a:prstGeom>
+          <a:noFill xmlns:a="http://schemas.openxmlformats.org/drawingml/2006/main"/>
+          <a:ln xmlns:a="http://schemas.openxmlformats.org/drawingml/2006/main" w="0">
+            <a:noFill/>
+          </a:ln>
+        </p:spPr>
+        <p:txBody>
+          <a:bodyPr xmlns:a="http://schemas.openxmlformats.org/drawingml/2006/main">
+            <a:noAutofit/>
+          </a:bodyPr>
+          <a:lstStyle xmlns:a="http://schemas.openxmlformats.org/drawingml/2006/main"/>
+          <a:p xmlns:a="http://schemas.openxmlformats.org/drawingml/2006/main">
+            <a:pPr algn="l">
+              <a:defRPr sz="2250" b="1">
+                <a:solidFill>
+                  <a:srgbClr val="000000"/>
+                </a:solidFill>
+                <a:latin typeface="Times New Roman"/>
+                <a:ea typeface="Times New Roman"/>
+                <a:cs typeface="Times New Roman"/>
+              </a:defRPr>
+            </a:pPr>
+            <a:r>
+              <a:rPr sz="2250" b="1">
+                <a:solidFill>
+                  <a:srgbClr val="000000"/>
+                </a:solidFill>
+                <a:latin typeface="Times New Roman"/>
+                <a:ea typeface="Times New Roman"/>
+                <a:cs typeface="Times New Roman"/>
+              </a:rPr>
+              <a:t>Later candidates also failed full acceptance.</a:t>
             </a:r>
           </a:p>
         </p:txBody>
@@ -11201,7 +11258,7 @@
     </p:spTree>
     <p:extLst>
       <p:ext uri="{BB962C8B-B14F-4D97-AF65-F5344CB8AC3E}">
-        <p14:creationId xmlns:p14="http://schemas.microsoft.com/office/powerpoint/2010/main" val="1188778162"/>
+        <p14:creationId xmlns:p14="http://schemas.microsoft.com/office/powerpoint/2010/main" val="885609335"/>
       </p:ext>
     </p:extLst>
   </p:cSld>

--- a/rapor/final_2026/deliverables/CS395_Presentation_EfeHan_Keles_25September2026.pptx
+++ b/rapor/final_2026/deliverables/CS395_Presentation_EfeHan_Keles_25September2026.pptx
@@ -2,27 +2,27 @@
 <file path=ppt/presentation.xml><?xml version="1.0" encoding="utf-8"?>
 <p:presentation xmlns:p="http://schemas.openxmlformats.org/presentationml/2006/main">
   <p:sldMasterIdLst>
-    <p:sldMasterId xmlns:r="http://schemas.openxmlformats.org/officeDocument/2006/relationships" id="2147483648" r:id="R989ef20f28e5460b"/>
+    <p:sldMasterId xmlns:r="http://schemas.openxmlformats.org/officeDocument/2006/relationships" id="2147483648" r:id="R4b50027b5dc348fc"/>
   </p:sldMasterIdLst>
   <p:notesMasterIdLst>
-    <p:notesMasterId xmlns:r="http://schemas.openxmlformats.org/officeDocument/2006/relationships" r:id="Ra97259ec55cc40bf"/>
+    <p:notesMasterId xmlns:r="http://schemas.openxmlformats.org/officeDocument/2006/relationships" r:id="R2410f0b7ca774366"/>
   </p:notesMasterIdLst>
   <p:sldIdLst>
-    <p:sldId xmlns:r="http://schemas.openxmlformats.org/officeDocument/2006/relationships" id="256" r:id="R17b9cf3db9714b5b"/>
-    <p:sldId xmlns:r="http://schemas.openxmlformats.org/officeDocument/2006/relationships" id="257" r:id="R481259a3b3f34456"/>
-    <p:sldId xmlns:r="http://schemas.openxmlformats.org/officeDocument/2006/relationships" id="258" r:id="Ra00cffb463b94f16"/>
-    <p:sldId xmlns:r="http://schemas.openxmlformats.org/officeDocument/2006/relationships" id="259" r:id="R15e34ae37bd14319"/>
-    <p:sldId xmlns:r="http://schemas.openxmlformats.org/officeDocument/2006/relationships" id="260" r:id="Rd69a3737b66c4c9b"/>
-    <p:sldId xmlns:r="http://schemas.openxmlformats.org/officeDocument/2006/relationships" id="261" r:id="R52bd4762ce244827"/>
-    <p:sldId xmlns:r="http://schemas.openxmlformats.org/officeDocument/2006/relationships" id="262" r:id="R9161bac362f5432e"/>
-    <p:sldId xmlns:r="http://schemas.openxmlformats.org/officeDocument/2006/relationships" id="263" r:id="R569bbca97f414743"/>
-    <p:sldId xmlns:r="http://schemas.openxmlformats.org/officeDocument/2006/relationships" id="264" r:id="R2d7a3ee75b2a4234"/>
-    <p:sldId xmlns:r="http://schemas.openxmlformats.org/officeDocument/2006/relationships" id="265" r:id="Ra4cebad90a5c4145"/>
-    <p:sldId xmlns:r="http://schemas.openxmlformats.org/officeDocument/2006/relationships" id="266" r:id="R81f89c5d0a2e48c7"/>
-    <p:sldId xmlns:r="http://schemas.openxmlformats.org/officeDocument/2006/relationships" id="267" r:id="Rd4216748d5084844"/>
-    <p:sldId xmlns:r="http://schemas.openxmlformats.org/officeDocument/2006/relationships" id="268" r:id="Rfbfc98f35d5741ed"/>
-    <p:sldId xmlns:r="http://schemas.openxmlformats.org/officeDocument/2006/relationships" id="269" r:id="R16c02fd4943e4f28"/>
-    <p:sldId xmlns:r="http://schemas.openxmlformats.org/officeDocument/2006/relationships" id="270" r:id="R57a5d8d55e534712"/>
+    <p:sldId xmlns:r="http://schemas.openxmlformats.org/officeDocument/2006/relationships" id="256" r:id="Rf81ce69d99be41be"/>
+    <p:sldId xmlns:r="http://schemas.openxmlformats.org/officeDocument/2006/relationships" id="257" r:id="R3453ef72a7c94f1d"/>
+    <p:sldId xmlns:r="http://schemas.openxmlformats.org/officeDocument/2006/relationships" id="258" r:id="Rfd30003958694b1f"/>
+    <p:sldId xmlns:r="http://schemas.openxmlformats.org/officeDocument/2006/relationships" id="259" r:id="Ra5943ae70502450d"/>
+    <p:sldId xmlns:r="http://schemas.openxmlformats.org/officeDocument/2006/relationships" id="260" r:id="R239fef931c454172"/>
+    <p:sldId xmlns:r="http://schemas.openxmlformats.org/officeDocument/2006/relationships" id="261" r:id="R5327489161ca4798"/>
+    <p:sldId xmlns:r="http://schemas.openxmlformats.org/officeDocument/2006/relationships" id="262" r:id="R53533de9b5a7495e"/>
+    <p:sldId xmlns:r="http://schemas.openxmlformats.org/officeDocument/2006/relationships" id="263" r:id="R816ca1bd16774908"/>
+    <p:sldId xmlns:r="http://schemas.openxmlformats.org/officeDocument/2006/relationships" id="264" r:id="Rfd0f89a8caaa490f"/>
+    <p:sldId xmlns:r="http://schemas.openxmlformats.org/officeDocument/2006/relationships" id="265" r:id="R256df6816a274d4c"/>
+    <p:sldId xmlns:r="http://schemas.openxmlformats.org/officeDocument/2006/relationships" id="266" r:id="R9b7aa8dc2ea44f45"/>
+    <p:sldId xmlns:r="http://schemas.openxmlformats.org/officeDocument/2006/relationships" id="267" r:id="Rac954695553c4c45"/>
+    <p:sldId xmlns:r="http://schemas.openxmlformats.org/officeDocument/2006/relationships" id="268" r:id="R083e2515ed2b4d93"/>
+    <p:sldId xmlns:r="http://schemas.openxmlformats.org/officeDocument/2006/relationships" id="269" r:id="Rbd36a15f496f4556"/>
+    <p:sldId xmlns:r="http://schemas.openxmlformats.org/officeDocument/2006/relationships" id="270" r:id="R025e0527d66c40c6"/>
   </p:sldIdLst>
   <p:sldSz cx="12192000" cy="6858000"/>
   <p:notesSz cx="6858000" cy="9144000"/>
@@ -466,7 +466,7 @@
           </a:p>
           <a:p xmlns:a="http://schemas.openxmlformats.org/drawingml/2006/main">
             <a:r>
-              <a:t>My internship project was PixelProof, a research prototype for detecting evidence of AI generation in images. I will explain the problem, how the project changed after failures, what the current demo model achieved, and what remains unresolved. The main result is a working local demonstration with substantial improvement on a defined development collection. It is not a universally reliable authenticity detector. The approved internship lasted forty working days. This presentation covers the technical record available before the end of the internship.</a:t>
+              <a:t>My supervisor was Önder Çelebi, Director of the Planning and Development Directorate. The submission date remains to be completed. My internship project was PixelProof, a research prototype for detecting evidence of AI generation in images. I will explain the problem, how the project changed after failures, what the current demo model achieved, and what remains unresolved. The main result is a working local demonstration with substantial improvement on a defined development collection. It is not a universally reliable authenticity detector. The approved internship lasted forty working days. This presentation covers the technical record available before the end of the internship.</a:t>
             </a:r>
           </a:p>
         </p:txBody>
@@ -1654,7 +1654,7 @@
   </p:cSld>
   <p:clrMap bg1="lt1" tx1="dk1" bg2="lt2" tx2="dk2" accent1="accent1" accent2="accent2" accent3="accent3" accent4="accent4" accent5="accent5" accent6="accent6" hlink="hlink" folHlink="folHlink"/>
   <p:sldLayoutIdLst>
-    <p:sldLayoutId xmlns:r="http://schemas.openxmlformats.org/officeDocument/2006/relationships" id="2147483649" r:id="R342bfe1e13bb4605"/>
+    <p:sldLayoutId xmlns:r="http://schemas.openxmlformats.org/officeDocument/2006/relationships" id="2147483649" r:id="R6dc5444661294537"/>
   </p:sldLayoutIdLst>
   <p:txStyles>
     <p:titleStyle>
@@ -2468,10 +2468,10 @@
       </p:grpSpPr>
       <p:sp>
         <p:nvSpPr>
-          <p:cNvPr id="8" name="">
-            <a:extLst xmlns:a="http://schemas.openxmlformats.org/drawingml/2006/main">
-              <a:ext uri="{FF2B5EF4-FFF2-40B4-BE49-F238E27FC236}">
-                <a16:creationId xmlns:a16="http://schemas.microsoft.com/office/drawing/2014/main" id="{F66392BE-6A44-42CF-8FCE-540B573C8C2E}"/>
+          <p:cNvPr id="9" name="">
+            <a:extLst xmlns:a="http://schemas.openxmlformats.org/drawingml/2006/main">
+              <a:ext uri="{FF2B5EF4-FFF2-40B4-BE49-F238E27FC236}">
+                <a16:creationId xmlns:a16="http://schemas.microsoft.com/office/drawing/2014/main" id="{26BC09F2-CB33-4BBD-BDBE-CCB22BCCD2B2}"/>
               </a:ext>
             </a:extLst>
           </p:cNvPr>
@@ -2528,7 +2528,7 @@
           <p:cNvPr id="2" name="">
             <a:extLst xmlns:a="http://schemas.openxmlformats.org/drawingml/2006/main">
               <a:ext uri="{FF2B5EF4-FFF2-40B4-BE49-F238E27FC236}">
-                <a16:creationId xmlns:a16="http://schemas.microsoft.com/office/drawing/2014/main" id="{674A99A9-33F9-4AE2-A236-198221B8F401}"/>
+                <a16:creationId xmlns:a16="http://schemas.microsoft.com/office/drawing/2014/main" id="{56B9CC4B-FF13-4D33-84DB-D8FA2F621F02}"/>
               </a:ext>
             </a:extLst>
           </p:cNvPr>
@@ -2585,7 +2585,7 @@
           <p:cNvPr id="3" name="">
             <a:extLst xmlns:a="http://schemas.openxmlformats.org/drawingml/2006/main">
               <a:ext uri="{FF2B5EF4-FFF2-40B4-BE49-F238E27FC236}">
-                <a16:creationId xmlns:a16="http://schemas.microsoft.com/office/drawing/2014/main" id="{3F71F66E-123D-47E0-B758-7B2CFD68A8F9}"/>
+                <a16:creationId xmlns:a16="http://schemas.microsoft.com/office/drawing/2014/main" id="{1B375DD1-CBDC-4302-9319-BA2DAF1C260D}"/>
               </a:ext>
             </a:extLst>
           </p:cNvPr>
@@ -2642,7 +2642,7 @@
           <p:cNvPr id="4" name="">
             <a:extLst xmlns:a="http://schemas.openxmlformats.org/drawingml/2006/main">
               <a:ext uri="{FF2B5EF4-FFF2-40B4-BE49-F238E27FC236}">
-                <a16:creationId xmlns:a16="http://schemas.microsoft.com/office/drawing/2014/main" id="{2086C2CB-2BB2-4989-A6E6-B0BF15EEFA7F}"/>
+                <a16:creationId xmlns:a16="http://schemas.microsoft.com/office/drawing/2014/main" id="{ADDDA529-B9CE-4168-9756-DEBCD1E539C4}"/>
               </a:ext>
             </a:extLst>
           </p:cNvPr>
@@ -2722,7 +2722,7 @@
           <p:cNvPr id="5" name="">
             <a:extLst xmlns:a="http://schemas.openxmlformats.org/drawingml/2006/main">
               <a:ext uri="{FF2B5EF4-FFF2-40B4-BE49-F238E27FC236}">
-                <a16:creationId xmlns:a16="http://schemas.microsoft.com/office/drawing/2014/main" id="{FA82ACFE-1557-4C2B-BAA4-25ADBF7AE406}"/>
+                <a16:creationId xmlns:a16="http://schemas.microsoft.com/office/drawing/2014/main" id="{86BABC0E-C671-4BAF-AE91-8C4D811601B4}"/>
               </a:ext>
             </a:extLst>
           </p:cNvPr>
@@ -2779,7 +2779,7 @@
           <p:cNvPr id="6" name="">
             <a:extLst xmlns:a="http://schemas.openxmlformats.org/drawingml/2006/main">
               <a:ext uri="{FF2B5EF4-FFF2-40B4-BE49-F238E27FC236}">
-                <a16:creationId xmlns:a16="http://schemas.microsoft.com/office/drawing/2014/main" id="{CA92967A-0F86-4579-A08A-0DF20A5CC13B}"/>
+                <a16:creationId xmlns:a16="http://schemas.microsoft.com/office/drawing/2014/main" id="{FC6C349E-8B69-44C5-B3D6-CB83962D854D}"/>
               </a:ext>
             </a:extLst>
           </p:cNvPr>
@@ -2836,19 +2836,19 @@
           <p:cNvPr id="7" name="">
             <a:extLst xmlns:a="http://schemas.openxmlformats.org/drawingml/2006/main">
               <a:ext uri="{FF2B5EF4-FFF2-40B4-BE49-F238E27FC236}">
-                <a16:creationId xmlns:a16="http://schemas.microsoft.com/office/drawing/2014/main" id="{D26A57EB-2114-4242-A7BE-D2247EDC4887}"/>
-              </a:ext>
-            </a:extLst>
-          </p:cNvPr>
-          <p:cNvSpPr>
-            <a:spLocks xmlns:a="http://schemas.openxmlformats.org/drawingml/2006/main" noGrp="1"/>
-          </p:cNvSpPr>
-          <p:nvPr/>
-        </p:nvSpPr>
-        <p:spPr>
-          <a:xfrm xmlns:a="http://schemas.openxmlformats.org/drawingml/2006/main">
-            <a:off x="685800" y="4905375"/>
-            <a:ext cx="10820400" cy="904875"/>
+                <a16:creationId xmlns:a16="http://schemas.microsoft.com/office/drawing/2014/main" id="{C5D6847C-F8FF-4E5F-838F-BF5128EC71B8}"/>
+              </a:ext>
+            </a:extLst>
+          </p:cNvPr>
+          <p:cNvSpPr>
+            <a:spLocks xmlns:a="http://schemas.openxmlformats.org/drawingml/2006/main" noGrp="1"/>
+          </p:cNvSpPr>
+          <p:nvPr/>
+        </p:nvSpPr>
+        <p:spPr>
+          <a:xfrm xmlns:a="http://schemas.openxmlformats.org/drawingml/2006/main">
+            <a:off x="685800" y="4714875"/>
+            <a:ext cx="10820400" cy="1095375"/>
           </a:xfrm>
           <a:prstGeom xmlns:a="http://schemas.openxmlformats.org/drawingml/2006/main" prst="rect">
             <a:avLst/>
@@ -2883,7 +2883,7 @@
                 <a:ea typeface="Times New Roman"/>
                 <a:cs typeface="Times New Roman"/>
               </a:rPr>
-              <a:t>Supervisor: Önder Çelebi</a:t>
+              <a:t>Supervisor: Önder Çelebi, Director</a:t>
             </a:r>
           </a:p>
           <a:p xmlns:a="http://schemas.openxmlformats.org/drawingml/2006/main">
@@ -2906,7 +2906,87 @@
                 <a:ea typeface="Times New Roman"/>
                 <a:cs typeface="Times New Roman"/>
               </a:rPr>
+              <a:t>Planning and Development Directorate</a:t>
+            </a:r>
+          </a:p>
+          <a:p xmlns:a="http://schemas.openxmlformats.org/drawingml/2006/main">
+            <a:pPr algn="l">
+              <a:defRPr sz="1950" b="0">
+                <a:solidFill>
+                  <a:srgbClr val="000000"/>
+                </a:solidFill>
+                <a:latin typeface="Times New Roman"/>
+                <a:ea typeface="Times New Roman"/>
+                <a:cs typeface="Times New Roman"/>
+              </a:defRPr>
+            </a:pPr>
+            <a:r>
+              <a:rPr sz="1950" b="0">
+                <a:solidFill>
+                  <a:srgbClr val="000000"/>
+                </a:solidFill>
+                <a:latin typeface="Times New Roman"/>
+                <a:ea typeface="Times New Roman"/>
+                <a:cs typeface="Times New Roman"/>
+              </a:rPr>
               <a:t>Computer Science and Engineering · Sabancı University</a:t>
+            </a:r>
+          </a:p>
+        </p:txBody>
+      </p:sp>
+      <p:sp>
+        <p:nvSpPr>
+          <p:cNvPr id="8" name="">
+            <a:extLst xmlns:a="http://schemas.openxmlformats.org/drawingml/2006/main">
+              <a:ext uri="{FF2B5EF4-FFF2-40B4-BE49-F238E27FC236}">
+                <a16:creationId xmlns:a16="http://schemas.microsoft.com/office/drawing/2014/main" id="{1DBEBECA-DC76-4993-92B2-B97A346160E1}"/>
+              </a:ext>
+            </a:extLst>
+          </p:cNvPr>
+          <p:cNvSpPr>
+            <a:spLocks xmlns:a="http://schemas.openxmlformats.org/drawingml/2006/main" noGrp="1"/>
+          </p:cNvSpPr>
+          <p:nvPr/>
+        </p:nvSpPr>
+        <p:spPr>
+          <a:xfrm xmlns:a="http://schemas.openxmlformats.org/drawingml/2006/main">
+            <a:off x="685800" y="5886450"/>
+            <a:ext cx="10820400" cy="304800"/>
+          </a:xfrm>
+          <a:prstGeom xmlns:a="http://schemas.openxmlformats.org/drawingml/2006/main" prst="rect">
+            <a:avLst/>
+          </a:prstGeom>
+          <a:noFill xmlns:a="http://schemas.openxmlformats.org/drawingml/2006/main"/>
+          <a:ln xmlns:a="http://schemas.openxmlformats.org/drawingml/2006/main" w="0">
+            <a:noFill/>
+          </a:ln>
+        </p:spPr>
+        <p:txBody>
+          <a:bodyPr xmlns:a="http://schemas.openxmlformats.org/drawingml/2006/main">
+            <a:noAutofit/>
+          </a:bodyPr>
+          <a:lstStyle xmlns:a="http://schemas.openxmlformats.org/drawingml/2006/main"/>
+          <a:p xmlns:a="http://schemas.openxmlformats.org/drawingml/2006/main">
+            <a:pPr algn="l">
+              <a:defRPr sz="1650" b="0">
+                <a:solidFill>
+                  <a:srgbClr val="000000"/>
+                </a:solidFill>
+                <a:latin typeface="Times New Roman"/>
+                <a:ea typeface="Times New Roman"/>
+                <a:cs typeface="Times New Roman"/>
+              </a:defRPr>
+            </a:pPr>
+            <a:r>
+              <a:rPr sz="1650" b="0">
+                <a:solidFill>
+                  <a:srgbClr val="000000"/>
+                </a:solidFill>
+                <a:latin typeface="Times New Roman"/>
+                <a:ea typeface="Times New Roman"/>
+                <a:cs typeface="Times New Roman"/>
+              </a:rPr>
+              <a:t>Submission date: [TO COMPLETE]</a:t>
             </a:r>
           </a:p>
         </p:txBody>
@@ -2914,7 +2994,7 @@
     </p:spTree>
     <p:extLst>
       <p:ext uri="{BB962C8B-B14F-4D97-AF65-F5344CB8AC3E}">
-        <p14:creationId xmlns:p14="http://schemas.microsoft.com/office/powerpoint/2010/main" val="976782232"/>
+        <p14:creationId xmlns:p14="http://schemas.microsoft.com/office/powerpoint/2010/main" val="556894269"/>
       </p:ext>
     </p:extLst>
   </p:cSld>
@@ -2945,7 +3025,7 @@
           <p:cNvPr id="8" name="">
             <a:extLst xmlns:a="http://schemas.openxmlformats.org/drawingml/2006/main">
               <a:ext uri="{FF2B5EF4-FFF2-40B4-BE49-F238E27FC236}">
-                <a16:creationId xmlns:a16="http://schemas.microsoft.com/office/drawing/2014/main" id="{BD29502A-FA9C-4A4A-9DE9-837FFCED1D65}"/>
+                <a16:creationId xmlns:a16="http://schemas.microsoft.com/office/drawing/2014/main" id="{E2A98C2A-840B-473F-AD17-DFD5EA11247F}"/>
               </a:ext>
             </a:extLst>
           </p:cNvPr>
@@ -3002,7 +3082,7 @@
           <p:cNvPr id="2" name="">
             <a:extLst xmlns:a="http://schemas.openxmlformats.org/drawingml/2006/main">
               <a:ext uri="{FF2B5EF4-FFF2-40B4-BE49-F238E27FC236}">
-                <a16:creationId xmlns:a16="http://schemas.microsoft.com/office/drawing/2014/main" id="{6B222839-CE0E-48C3-A14F-D528842E898E}"/>
+                <a16:creationId xmlns:a16="http://schemas.microsoft.com/office/drawing/2014/main" id="{1AA8361A-D8A5-4B35-9EE7-666845BFDF6F}"/>
               </a:ext>
             </a:extLst>
           </p:cNvPr>
@@ -3059,7 +3139,7 @@
           <p:cNvPr id="3" name="">
             <a:extLst xmlns:a="http://schemas.openxmlformats.org/drawingml/2006/main">
               <a:ext uri="{FF2B5EF4-FFF2-40B4-BE49-F238E27FC236}">
-                <a16:creationId xmlns:a16="http://schemas.microsoft.com/office/drawing/2014/main" id="{C60A7024-8A3D-431D-B49B-F8955A98D5C6}"/>
+                <a16:creationId xmlns:a16="http://schemas.microsoft.com/office/drawing/2014/main" id="{9DC56862-A017-4D51-BDEB-C767F30E4DFA}"/>
               </a:ext>
             </a:extLst>
           </p:cNvPr>
@@ -3116,7 +3196,7 @@
           <p:cNvPr id="4" name="">
             <a:extLst xmlns:a="http://schemas.openxmlformats.org/drawingml/2006/main">
               <a:ext uri="{FF2B5EF4-FFF2-40B4-BE49-F238E27FC236}">
-                <a16:creationId xmlns:a16="http://schemas.microsoft.com/office/drawing/2014/main" id="{6D64D07C-3A9B-4CA1-9C70-11C89AC0B409}"/>
+                <a16:creationId xmlns:a16="http://schemas.microsoft.com/office/drawing/2014/main" id="{2451B2BC-7162-4ADA-A8DB-CC1E9B075143}"/>
               </a:ext>
             </a:extLst>
           </p:cNvPr>
@@ -3173,7 +3253,7 @@
           <p:cNvPr id="5" name="">
             <a:extLst xmlns:a="http://schemas.openxmlformats.org/drawingml/2006/main">
               <a:ext uri="{FF2B5EF4-FFF2-40B4-BE49-F238E27FC236}">
-                <a16:creationId xmlns:a16="http://schemas.microsoft.com/office/drawing/2014/main" id="{22BAD948-6D5A-400C-9A60-6EFA3387DB23}"/>
+                <a16:creationId xmlns:a16="http://schemas.microsoft.com/office/drawing/2014/main" id="{334F5685-1266-461F-9134-E974D71CE3FD}"/>
               </a:ext>
             </a:extLst>
           </p:cNvPr>
@@ -3585,7 +3665,7 @@
           <p:cNvPr id="7" name="">
             <a:extLst xmlns:a="http://schemas.openxmlformats.org/drawingml/2006/main">
               <a:ext uri="{FF2B5EF4-FFF2-40B4-BE49-F238E27FC236}">
-                <a16:creationId xmlns:a16="http://schemas.microsoft.com/office/drawing/2014/main" id="{D795D9FC-FCF7-485A-88DA-099904D72C33}"/>
+                <a16:creationId xmlns:a16="http://schemas.microsoft.com/office/drawing/2014/main" id="{CB8F3345-F183-4BAF-A6D4-861BA608580E}"/>
               </a:ext>
             </a:extLst>
           </p:cNvPr>
@@ -3640,7 +3720,7 @@
     </p:spTree>
     <p:extLst>
       <p:ext uri="{BB962C8B-B14F-4D97-AF65-F5344CB8AC3E}">
-        <p14:creationId xmlns:p14="http://schemas.microsoft.com/office/powerpoint/2010/main" val="1611092326"/>
+        <p14:creationId xmlns:p14="http://schemas.microsoft.com/office/powerpoint/2010/main" val="996669859"/>
       </p:ext>
     </p:extLst>
   </p:cSld>
@@ -3671,7 +3751,7 @@
           <p:cNvPr id="9" name="">
             <a:extLst xmlns:a="http://schemas.openxmlformats.org/drawingml/2006/main">
               <a:ext uri="{FF2B5EF4-FFF2-40B4-BE49-F238E27FC236}">
-                <a16:creationId xmlns:a16="http://schemas.microsoft.com/office/drawing/2014/main" id="{A6B6D9D8-211F-472B-82C0-B9C80F3CDE5A}"/>
+                <a16:creationId xmlns:a16="http://schemas.microsoft.com/office/drawing/2014/main" id="{5033755C-E581-46DC-8182-46A61C090109}"/>
               </a:ext>
             </a:extLst>
           </p:cNvPr>
@@ -3728,7 +3808,7 @@
           <p:cNvPr id="2" name="">
             <a:extLst xmlns:a="http://schemas.openxmlformats.org/drawingml/2006/main">
               <a:ext uri="{FF2B5EF4-FFF2-40B4-BE49-F238E27FC236}">
-                <a16:creationId xmlns:a16="http://schemas.microsoft.com/office/drawing/2014/main" id="{FED937CC-57A2-41E7-BFA4-143570F45528}"/>
+                <a16:creationId xmlns:a16="http://schemas.microsoft.com/office/drawing/2014/main" id="{B4FA5238-9700-447B-B9BE-603710D246A0}"/>
               </a:ext>
             </a:extLst>
           </p:cNvPr>
@@ -3785,7 +3865,7 @@
           <p:cNvPr id="3" name="">
             <a:extLst xmlns:a="http://schemas.openxmlformats.org/drawingml/2006/main">
               <a:ext uri="{FF2B5EF4-FFF2-40B4-BE49-F238E27FC236}">
-                <a16:creationId xmlns:a16="http://schemas.microsoft.com/office/drawing/2014/main" id="{5980EC78-D6DD-40AA-80C1-12CB1E770118}"/>
+                <a16:creationId xmlns:a16="http://schemas.microsoft.com/office/drawing/2014/main" id="{75350301-8BFF-4F1D-AC6C-F4ABC0A80726}"/>
               </a:ext>
             </a:extLst>
           </p:cNvPr>
@@ -3842,7 +3922,7 @@
           <p:cNvPr id="4" name="">
             <a:extLst xmlns:a="http://schemas.openxmlformats.org/drawingml/2006/main">
               <a:ext uri="{FF2B5EF4-FFF2-40B4-BE49-F238E27FC236}">
-                <a16:creationId xmlns:a16="http://schemas.microsoft.com/office/drawing/2014/main" id="{98CD89F5-C8D5-433B-991A-898D20E02C84}"/>
+                <a16:creationId xmlns:a16="http://schemas.microsoft.com/office/drawing/2014/main" id="{94867E04-2497-46D9-96BE-9EB057DFCBF4}"/>
               </a:ext>
             </a:extLst>
           </p:cNvPr>
@@ -3899,7 +3979,7 @@
           <p:cNvPr id="5" name="">
             <a:extLst xmlns:a="http://schemas.openxmlformats.org/drawingml/2006/main">
               <a:ext uri="{FF2B5EF4-FFF2-40B4-BE49-F238E27FC236}">
-                <a16:creationId xmlns:a16="http://schemas.microsoft.com/office/drawing/2014/main" id="{97172F91-2C91-48C5-B9E2-BCD8A9C8D0B8}"/>
+                <a16:creationId xmlns:a16="http://schemas.microsoft.com/office/drawing/2014/main" id="{0D764829-D315-438F-A33B-AF1CBCA92063}"/>
               </a:ext>
             </a:extLst>
           </p:cNvPr>
@@ -3956,7 +4036,7 @@
           <p:cNvPr id="6" name="">
             <a:extLst xmlns:a="http://schemas.openxmlformats.org/drawingml/2006/main">
               <a:ext uri="{FF2B5EF4-FFF2-40B4-BE49-F238E27FC236}">
-                <a16:creationId xmlns:a16="http://schemas.microsoft.com/office/drawing/2014/main" id="{EB46E5A3-FDD0-4A47-841A-5C0B890D60D7}"/>
+                <a16:creationId xmlns:a16="http://schemas.microsoft.com/office/drawing/2014/main" id="{F7600A14-1B70-498B-BA12-8D17FCC0865B}"/>
               </a:ext>
             </a:extLst>
           </p:cNvPr>
@@ -4013,7 +4093,7 @@
           <p:cNvPr id="7" name="">
             <a:extLst xmlns:a="http://schemas.openxmlformats.org/drawingml/2006/main">
               <a:ext uri="{FF2B5EF4-FFF2-40B4-BE49-F238E27FC236}">
-                <a16:creationId xmlns:a16="http://schemas.microsoft.com/office/drawing/2014/main" id="{CD7CCD7D-BDA0-4914-BE16-CD0C4CE0DF79}"/>
+                <a16:creationId xmlns:a16="http://schemas.microsoft.com/office/drawing/2014/main" id="{E1109A79-8A68-41CA-952E-59A13A705CA3}"/>
               </a:ext>
             </a:extLst>
           </p:cNvPr>
@@ -4093,7 +4173,7 @@
           <p:cNvPr id="8" name="">
             <a:extLst xmlns:a="http://schemas.openxmlformats.org/drawingml/2006/main">
               <a:ext uri="{FF2B5EF4-FFF2-40B4-BE49-F238E27FC236}">
-                <a16:creationId xmlns:a16="http://schemas.microsoft.com/office/drawing/2014/main" id="{286ACE20-336C-48B8-9499-B4B2169AA194}"/>
+                <a16:creationId xmlns:a16="http://schemas.microsoft.com/office/drawing/2014/main" id="{5FDE47A7-6877-44DA-BB4A-806F7224AEF1}"/>
               </a:ext>
             </a:extLst>
           </p:cNvPr>
@@ -4148,7 +4228,7 @@
     </p:spTree>
     <p:extLst>
       <p:ext uri="{BB962C8B-B14F-4D97-AF65-F5344CB8AC3E}">
-        <p14:creationId xmlns:p14="http://schemas.microsoft.com/office/powerpoint/2010/main" val="1877491317"/>
+        <p14:creationId xmlns:p14="http://schemas.microsoft.com/office/powerpoint/2010/main" val="184521776"/>
       </p:ext>
     </p:extLst>
   </p:cSld>
@@ -4179,7 +4259,7 @@
           <p:cNvPr id="8" name="">
             <a:extLst xmlns:a="http://schemas.openxmlformats.org/drawingml/2006/main">
               <a:ext uri="{FF2B5EF4-FFF2-40B4-BE49-F238E27FC236}">
-                <a16:creationId xmlns:a16="http://schemas.microsoft.com/office/drawing/2014/main" id="{EBE2BEE4-1BE5-4CE8-9393-ED721BF53164}"/>
+                <a16:creationId xmlns:a16="http://schemas.microsoft.com/office/drawing/2014/main" id="{8EDE7FD6-DB55-46FA-9E0C-AAD01CD07FBD}"/>
               </a:ext>
             </a:extLst>
           </p:cNvPr>
@@ -4236,7 +4316,7 @@
           <p:cNvPr id="2" name="">
             <a:extLst xmlns:a="http://schemas.openxmlformats.org/drawingml/2006/main">
               <a:ext uri="{FF2B5EF4-FFF2-40B4-BE49-F238E27FC236}">
-                <a16:creationId xmlns:a16="http://schemas.microsoft.com/office/drawing/2014/main" id="{C0420959-E797-4C53-A9DF-355F94BEE8A4}"/>
+                <a16:creationId xmlns:a16="http://schemas.microsoft.com/office/drawing/2014/main" id="{C1FD05E1-5C4B-4687-993D-1038E83EAA95}"/>
               </a:ext>
             </a:extLst>
           </p:cNvPr>
@@ -4293,7 +4373,7 @@
           <p:cNvPr id="3" name="">
             <a:extLst xmlns:a="http://schemas.openxmlformats.org/drawingml/2006/main">
               <a:ext uri="{FF2B5EF4-FFF2-40B4-BE49-F238E27FC236}">
-                <a16:creationId xmlns:a16="http://schemas.microsoft.com/office/drawing/2014/main" id="{A7FE8062-C1D1-4C67-B942-3EC2A0FE005D}"/>
+                <a16:creationId xmlns:a16="http://schemas.microsoft.com/office/drawing/2014/main" id="{634BD51F-28D2-4C30-942E-38574404649D}"/>
               </a:ext>
             </a:extLst>
           </p:cNvPr>
@@ -4350,7 +4430,7 @@
           <p:cNvPr id="4" name="">
             <a:extLst xmlns:a="http://schemas.openxmlformats.org/drawingml/2006/main">
               <a:ext uri="{FF2B5EF4-FFF2-40B4-BE49-F238E27FC236}">
-                <a16:creationId xmlns:a16="http://schemas.microsoft.com/office/drawing/2014/main" id="{661E432C-592D-4532-94BE-D3C3B05C9AD6}"/>
+                <a16:creationId xmlns:a16="http://schemas.microsoft.com/office/drawing/2014/main" id="{0BE29BEB-B651-466D-A8F2-4687AF3AC349}"/>
               </a:ext>
             </a:extLst>
           </p:cNvPr>
@@ -4407,7 +4487,7 @@
           <p:cNvPr id="5" name="">
             <a:extLst xmlns:a="http://schemas.openxmlformats.org/drawingml/2006/main">
               <a:ext uri="{FF2B5EF4-FFF2-40B4-BE49-F238E27FC236}">
-                <a16:creationId xmlns:a16="http://schemas.microsoft.com/office/drawing/2014/main" id="{1CE7BB05-11B2-4967-974D-D95096F626DC}"/>
+                <a16:creationId xmlns:a16="http://schemas.microsoft.com/office/drawing/2014/main" id="{1A106478-3164-47C3-B63C-A4AEF58A5822}"/>
               </a:ext>
             </a:extLst>
           </p:cNvPr>
@@ -4766,7 +4846,7 @@
           <p:cNvPr id="7" name="">
             <a:extLst xmlns:a="http://schemas.openxmlformats.org/drawingml/2006/main">
               <a:ext uri="{FF2B5EF4-FFF2-40B4-BE49-F238E27FC236}">
-                <a16:creationId xmlns:a16="http://schemas.microsoft.com/office/drawing/2014/main" id="{7313BB7D-1EB4-45EA-B223-EFF856076ABB}"/>
+                <a16:creationId xmlns:a16="http://schemas.microsoft.com/office/drawing/2014/main" id="{B0E71C98-8F71-4567-A930-66EE339D37E7}"/>
               </a:ext>
             </a:extLst>
           </p:cNvPr>
@@ -4821,7 +4901,7 @@
     </p:spTree>
     <p:extLst>
       <p:ext uri="{BB962C8B-B14F-4D97-AF65-F5344CB8AC3E}">
-        <p14:creationId xmlns:p14="http://schemas.microsoft.com/office/powerpoint/2010/main" val="1971513331"/>
+        <p14:creationId xmlns:p14="http://schemas.microsoft.com/office/powerpoint/2010/main" val="596323619"/>
       </p:ext>
     </p:extLst>
   </p:cSld>
@@ -4852,7 +4932,7 @@
           <p:cNvPr id="8" name="">
             <a:extLst xmlns:a="http://schemas.openxmlformats.org/drawingml/2006/main">
               <a:ext uri="{FF2B5EF4-FFF2-40B4-BE49-F238E27FC236}">
-                <a16:creationId xmlns:a16="http://schemas.microsoft.com/office/drawing/2014/main" id="{C6A32F50-8CB5-40CF-972B-DC9A863718FC}"/>
+                <a16:creationId xmlns:a16="http://schemas.microsoft.com/office/drawing/2014/main" id="{60F1C58E-08EA-4FC3-A889-F1C24C56BBD4}"/>
               </a:ext>
             </a:extLst>
           </p:cNvPr>
@@ -4909,7 +4989,7 @@
           <p:cNvPr id="2" name="">
             <a:extLst xmlns:a="http://schemas.openxmlformats.org/drawingml/2006/main">
               <a:ext uri="{FF2B5EF4-FFF2-40B4-BE49-F238E27FC236}">
-                <a16:creationId xmlns:a16="http://schemas.microsoft.com/office/drawing/2014/main" id="{F41A015C-9E2B-4038-BEBA-EE403BAB3F86}"/>
+                <a16:creationId xmlns:a16="http://schemas.microsoft.com/office/drawing/2014/main" id="{A2F16137-8AA3-497F-A88E-8E1543383B31}"/>
               </a:ext>
             </a:extLst>
           </p:cNvPr>
@@ -4966,7 +5046,7 @@
           <p:cNvPr id="3" name="">
             <a:extLst xmlns:a="http://schemas.openxmlformats.org/drawingml/2006/main">
               <a:ext uri="{FF2B5EF4-FFF2-40B4-BE49-F238E27FC236}">
-                <a16:creationId xmlns:a16="http://schemas.microsoft.com/office/drawing/2014/main" id="{EF3D5396-86A4-4330-8F7E-AE15BA0711A7}"/>
+                <a16:creationId xmlns:a16="http://schemas.microsoft.com/office/drawing/2014/main" id="{D8D64108-D85C-4C93-A573-90B5DBB03616}"/>
               </a:ext>
             </a:extLst>
           </p:cNvPr>
@@ -5023,7 +5103,7 @@
           <p:cNvPr id="4" name="">
             <a:extLst xmlns:a="http://schemas.openxmlformats.org/drawingml/2006/main">
               <a:ext uri="{FF2B5EF4-FFF2-40B4-BE49-F238E27FC236}">
-                <a16:creationId xmlns:a16="http://schemas.microsoft.com/office/drawing/2014/main" id="{68DD6925-4204-41F7-AD67-38A46D599474}"/>
+                <a16:creationId xmlns:a16="http://schemas.microsoft.com/office/drawing/2014/main" id="{C354D4CC-BF9C-4A27-8F4B-F0CCCED60B95}"/>
               </a:ext>
             </a:extLst>
           </p:cNvPr>
@@ -5080,7 +5160,7 @@
           <p:cNvPr id="5" name="">
             <a:extLst xmlns:a="http://schemas.openxmlformats.org/drawingml/2006/main">
               <a:ext uri="{FF2B5EF4-FFF2-40B4-BE49-F238E27FC236}">
-                <a16:creationId xmlns:a16="http://schemas.microsoft.com/office/drawing/2014/main" id="{25AB691D-8F1F-4FAD-A266-DFE12B987D94}"/>
+                <a16:creationId xmlns:a16="http://schemas.microsoft.com/office/drawing/2014/main" id="{229B7F14-A45A-416A-9E96-48B9A13FD664}"/>
               </a:ext>
             </a:extLst>
           </p:cNvPr>
@@ -5137,7 +5217,7 @@
           <p:cNvPr id="6" name="">
             <a:extLst xmlns:a="http://schemas.openxmlformats.org/drawingml/2006/main">
               <a:ext uri="{FF2B5EF4-FFF2-40B4-BE49-F238E27FC236}">
-                <a16:creationId xmlns:a16="http://schemas.microsoft.com/office/drawing/2014/main" id="{62C8EDED-9281-4624-82C7-CEC53A1E8A07}"/>
+                <a16:creationId xmlns:a16="http://schemas.microsoft.com/office/drawing/2014/main" id="{EEC10EFB-9548-41D6-B400-1C8B95EBF5B0}"/>
               </a:ext>
             </a:extLst>
           </p:cNvPr>
@@ -5194,7 +5274,7 @@
           <p:cNvPr id="7" name="">
             <a:extLst xmlns:a="http://schemas.openxmlformats.org/drawingml/2006/main">
               <a:ext uri="{FF2B5EF4-FFF2-40B4-BE49-F238E27FC236}">
-                <a16:creationId xmlns:a16="http://schemas.microsoft.com/office/drawing/2014/main" id="{7F29AC82-F229-4CEE-8B15-64416DEDFE6F}"/>
+                <a16:creationId xmlns:a16="http://schemas.microsoft.com/office/drawing/2014/main" id="{6BF8BBF2-B232-4CD5-A81F-5E7096525566}"/>
               </a:ext>
             </a:extLst>
           </p:cNvPr>
@@ -5249,7 +5329,7 @@
     </p:spTree>
     <p:extLst>
       <p:ext uri="{BB962C8B-B14F-4D97-AF65-F5344CB8AC3E}">
-        <p14:creationId xmlns:p14="http://schemas.microsoft.com/office/powerpoint/2010/main" val="1808727010"/>
+        <p14:creationId xmlns:p14="http://schemas.microsoft.com/office/powerpoint/2010/main" val="478076009"/>
       </p:ext>
     </p:extLst>
   </p:cSld>
@@ -5280,7 +5360,7 @@
           <p:cNvPr id="16" name="">
             <a:extLst xmlns:a="http://schemas.openxmlformats.org/drawingml/2006/main">
               <a:ext uri="{FF2B5EF4-FFF2-40B4-BE49-F238E27FC236}">
-                <a16:creationId xmlns:a16="http://schemas.microsoft.com/office/drawing/2014/main" id="{15ACB0A5-2344-433F-9B21-2B860ABE2F6C}"/>
+                <a16:creationId xmlns:a16="http://schemas.microsoft.com/office/drawing/2014/main" id="{44BD6011-CD63-406D-8622-2B80C3C2B059}"/>
               </a:ext>
             </a:extLst>
           </p:cNvPr>
@@ -5337,7 +5417,7 @@
           <p:cNvPr id="2" name="">
             <a:extLst xmlns:a="http://schemas.openxmlformats.org/drawingml/2006/main">
               <a:ext uri="{FF2B5EF4-FFF2-40B4-BE49-F238E27FC236}">
-                <a16:creationId xmlns:a16="http://schemas.microsoft.com/office/drawing/2014/main" id="{22F3E6E2-8E4C-44CC-95FD-3F831BFC67F9}"/>
+                <a16:creationId xmlns:a16="http://schemas.microsoft.com/office/drawing/2014/main" id="{B9FDF67D-10A4-4191-936C-F6B7646D865F}"/>
               </a:ext>
             </a:extLst>
           </p:cNvPr>
@@ -5394,7 +5474,7 @@
           <p:cNvPr id="3" name="">
             <a:extLst xmlns:a="http://schemas.openxmlformats.org/drawingml/2006/main">
               <a:ext uri="{FF2B5EF4-FFF2-40B4-BE49-F238E27FC236}">
-                <a16:creationId xmlns:a16="http://schemas.microsoft.com/office/drawing/2014/main" id="{97AE8A00-93AA-4806-AE80-4EF71704AB30}"/>
+                <a16:creationId xmlns:a16="http://schemas.microsoft.com/office/drawing/2014/main" id="{CCC3AB83-881F-481E-8774-735FBE24AEA8}"/>
               </a:ext>
             </a:extLst>
           </p:cNvPr>
@@ -5451,7 +5531,7 @@
           <p:cNvPr id="4" name="">
             <a:extLst xmlns:a="http://schemas.openxmlformats.org/drawingml/2006/main">
               <a:ext uri="{FF2B5EF4-FFF2-40B4-BE49-F238E27FC236}">
-                <a16:creationId xmlns:a16="http://schemas.microsoft.com/office/drawing/2014/main" id="{8634EF52-2A78-4D65-A448-5BFB206C8B38}"/>
+                <a16:creationId xmlns:a16="http://schemas.microsoft.com/office/drawing/2014/main" id="{9C2593A9-16EF-47CE-A409-7430A00D4D72}"/>
               </a:ext>
             </a:extLst>
           </p:cNvPr>
@@ -5508,7 +5588,7 @@
           <p:cNvPr id="5" name="">
             <a:extLst xmlns:a="http://schemas.openxmlformats.org/drawingml/2006/main">
               <a:ext uri="{FF2B5EF4-FFF2-40B4-BE49-F238E27FC236}">
-                <a16:creationId xmlns:a16="http://schemas.microsoft.com/office/drawing/2014/main" id="{EE6B469B-BCC9-4FBD-AE11-57EB61433430}"/>
+                <a16:creationId xmlns:a16="http://schemas.microsoft.com/office/drawing/2014/main" id="{7AE98E3E-8E86-43A0-8A4D-4D17C324FAB2}"/>
               </a:ext>
             </a:extLst>
           </p:cNvPr>
@@ -5565,7 +5645,7 @@
           <p:cNvPr id="6" name="">
             <a:extLst xmlns:a="http://schemas.openxmlformats.org/drawingml/2006/main">
               <a:ext uri="{FF2B5EF4-FFF2-40B4-BE49-F238E27FC236}">
-                <a16:creationId xmlns:a16="http://schemas.microsoft.com/office/drawing/2014/main" id="{E4F3BE1F-BF85-4A18-AF61-0E1EBFAC1959}"/>
+                <a16:creationId xmlns:a16="http://schemas.microsoft.com/office/drawing/2014/main" id="{CC317283-A875-482B-B138-2C1072858DD3}"/>
               </a:ext>
             </a:extLst>
           </p:cNvPr>
@@ -5622,7 +5702,7 @@
           <p:cNvPr id="7" name="">
             <a:extLst xmlns:a="http://schemas.openxmlformats.org/drawingml/2006/main">
               <a:ext uri="{FF2B5EF4-FFF2-40B4-BE49-F238E27FC236}">
-                <a16:creationId xmlns:a16="http://schemas.microsoft.com/office/drawing/2014/main" id="{CB49FA46-6160-4B6C-921D-829CB3D9F576}"/>
+                <a16:creationId xmlns:a16="http://schemas.microsoft.com/office/drawing/2014/main" id="{A10CB75D-A988-4AD2-AA52-04B23C239E9E}"/>
               </a:ext>
             </a:extLst>
           </p:cNvPr>
@@ -5679,7 +5759,7 @@
           <p:cNvPr id="8" name="">
             <a:extLst xmlns:a="http://schemas.openxmlformats.org/drawingml/2006/main">
               <a:ext uri="{FF2B5EF4-FFF2-40B4-BE49-F238E27FC236}">
-                <a16:creationId xmlns:a16="http://schemas.microsoft.com/office/drawing/2014/main" id="{688966BC-88D9-4627-883F-CF881CCC03D4}"/>
+                <a16:creationId xmlns:a16="http://schemas.microsoft.com/office/drawing/2014/main" id="{A6D844C3-FA8D-4F2F-ADAD-36A833ED063B}"/>
               </a:ext>
             </a:extLst>
           </p:cNvPr>
@@ -5736,7 +5816,7 @@
           <p:cNvPr id="9" name="">
             <a:extLst xmlns:a="http://schemas.openxmlformats.org/drawingml/2006/main">
               <a:ext uri="{FF2B5EF4-FFF2-40B4-BE49-F238E27FC236}">
-                <a16:creationId xmlns:a16="http://schemas.microsoft.com/office/drawing/2014/main" id="{2A4B887C-2EE0-4EC4-B207-A80783075EC8}"/>
+                <a16:creationId xmlns:a16="http://schemas.microsoft.com/office/drawing/2014/main" id="{AD582EB2-960B-4BD1-B60E-6ABB9C3DDDA0}"/>
               </a:ext>
             </a:extLst>
           </p:cNvPr>
@@ -5793,7 +5873,7 @@
           <p:cNvPr id="10" name="">
             <a:extLst xmlns:a="http://schemas.openxmlformats.org/drawingml/2006/main">
               <a:ext uri="{FF2B5EF4-FFF2-40B4-BE49-F238E27FC236}">
-                <a16:creationId xmlns:a16="http://schemas.microsoft.com/office/drawing/2014/main" id="{81EEF742-953C-4E33-BE5B-890C6F93EC9C}"/>
+                <a16:creationId xmlns:a16="http://schemas.microsoft.com/office/drawing/2014/main" id="{ED40EA19-B66E-4D3B-AA18-4E07B98CD9DE}"/>
               </a:ext>
             </a:extLst>
           </p:cNvPr>
@@ -5850,7 +5930,7 @@
           <p:cNvPr id="11" name="">
             <a:extLst xmlns:a="http://schemas.openxmlformats.org/drawingml/2006/main">
               <a:ext uri="{FF2B5EF4-FFF2-40B4-BE49-F238E27FC236}">
-                <a16:creationId xmlns:a16="http://schemas.microsoft.com/office/drawing/2014/main" id="{A5FD5E9B-F57D-4841-908A-4492C68DF10C}"/>
+                <a16:creationId xmlns:a16="http://schemas.microsoft.com/office/drawing/2014/main" id="{B3255190-A96E-454C-BB31-3768D1B42451}"/>
               </a:ext>
             </a:extLst>
           </p:cNvPr>
@@ -5907,7 +5987,7 @@
           <p:cNvPr id="12" name="">
             <a:extLst xmlns:a="http://schemas.openxmlformats.org/drawingml/2006/main">
               <a:ext uri="{FF2B5EF4-FFF2-40B4-BE49-F238E27FC236}">
-                <a16:creationId xmlns:a16="http://schemas.microsoft.com/office/drawing/2014/main" id="{A35EFE08-69C4-476C-B22B-6EEF9F954AD1}"/>
+                <a16:creationId xmlns:a16="http://schemas.microsoft.com/office/drawing/2014/main" id="{95B01668-8C1D-4F54-849F-F5871CC76FE9}"/>
               </a:ext>
             </a:extLst>
           </p:cNvPr>
@@ -5964,7 +6044,7 @@
           <p:cNvPr id="13" name="">
             <a:extLst xmlns:a="http://schemas.openxmlformats.org/drawingml/2006/main">
               <a:ext uri="{FF2B5EF4-FFF2-40B4-BE49-F238E27FC236}">
-                <a16:creationId xmlns:a16="http://schemas.microsoft.com/office/drawing/2014/main" id="{88F24953-C2BF-4D5F-9A62-4D67D575FDBA}"/>
+                <a16:creationId xmlns:a16="http://schemas.microsoft.com/office/drawing/2014/main" id="{9EFD0661-C577-4173-A765-AD3F45FE23DD}"/>
               </a:ext>
             </a:extLst>
           </p:cNvPr>
@@ -6021,7 +6101,7 @@
           <p:cNvPr id="14" name="">
             <a:extLst xmlns:a="http://schemas.openxmlformats.org/drawingml/2006/main">
               <a:ext uri="{FF2B5EF4-FFF2-40B4-BE49-F238E27FC236}">
-                <a16:creationId xmlns:a16="http://schemas.microsoft.com/office/drawing/2014/main" id="{DFAC8726-65A7-4B2D-B225-4EC95C512A97}"/>
+                <a16:creationId xmlns:a16="http://schemas.microsoft.com/office/drawing/2014/main" id="{655176E4-7BCF-4E2A-A4C5-C5FF7E1F7172}"/>
               </a:ext>
             </a:extLst>
           </p:cNvPr>
@@ -6078,7 +6158,7 @@
           <p:cNvPr id="15" name="">
             <a:extLst xmlns:a="http://schemas.openxmlformats.org/drawingml/2006/main">
               <a:ext uri="{FF2B5EF4-FFF2-40B4-BE49-F238E27FC236}">
-                <a16:creationId xmlns:a16="http://schemas.microsoft.com/office/drawing/2014/main" id="{C6B4B7E0-6C78-44A1-844F-9A2E72C02464}"/>
+                <a16:creationId xmlns:a16="http://schemas.microsoft.com/office/drawing/2014/main" id="{E5FE20D1-263A-48AE-AFF8-B4B9D0B92F32}"/>
               </a:ext>
             </a:extLst>
           </p:cNvPr>
@@ -6133,7 +6213,7 @@
     </p:spTree>
     <p:extLst>
       <p:ext uri="{BB962C8B-B14F-4D97-AF65-F5344CB8AC3E}">
-        <p14:creationId xmlns:p14="http://schemas.microsoft.com/office/powerpoint/2010/main" val="2027210444"/>
+        <p14:creationId xmlns:p14="http://schemas.microsoft.com/office/powerpoint/2010/main" val="17887357"/>
       </p:ext>
     </p:extLst>
   </p:cSld>
@@ -6164,7 +6244,7 @@
           <p:cNvPr id="16" name="">
             <a:extLst xmlns:a="http://schemas.openxmlformats.org/drawingml/2006/main">
               <a:ext uri="{FF2B5EF4-FFF2-40B4-BE49-F238E27FC236}">
-                <a16:creationId xmlns:a16="http://schemas.microsoft.com/office/drawing/2014/main" id="{99FFE787-9212-46B4-8FF5-93E7FCE6B84C}"/>
+                <a16:creationId xmlns:a16="http://schemas.microsoft.com/office/drawing/2014/main" id="{B576CC0E-3337-411C-8DC7-897792474B1C}"/>
               </a:ext>
             </a:extLst>
           </p:cNvPr>
@@ -6221,7 +6301,7 @@
           <p:cNvPr id="2" name="">
             <a:extLst xmlns:a="http://schemas.openxmlformats.org/drawingml/2006/main">
               <a:ext uri="{FF2B5EF4-FFF2-40B4-BE49-F238E27FC236}">
-                <a16:creationId xmlns:a16="http://schemas.microsoft.com/office/drawing/2014/main" id="{BBC87A7E-E4D1-4E03-8FD4-B698EA32119F}"/>
+                <a16:creationId xmlns:a16="http://schemas.microsoft.com/office/drawing/2014/main" id="{7A07067C-5DB0-4E89-80E7-4FBBD91631C2}"/>
               </a:ext>
             </a:extLst>
           </p:cNvPr>
@@ -6278,7 +6358,7 @@
           <p:cNvPr id="3" name="">
             <a:extLst xmlns:a="http://schemas.openxmlformats.org/drawingml/2006/main">
               <a:ext uri="{FF2B5EF4-FFF2-40B4-BE49-F238E27FC236}">
-                <a16:creationId xmlns:a16="http://schemas.microsoft.com/office/drawing/2014/main" id="{39AD1CD0-8553-4B69-941A-6AB1433A4DD8}"/>
+                <a16:creationId xmlns:a16="http://schemas.microsoft.com/office/drawing/2014/main" id="{0BB5ED55-6BD1-4759-92D9-EB162EC96E2C}"/>
               </a:ext>
             </a:extLst>
           </p:cNvPr>
@@ -6335,7 +6415,7 @@
           <p:cNvPr id="4" name="">
             <a:extLst xmlns:a="http://schemas.openxmlformats.org/drawingml/2006/main">
               <a:ext uri="{FF2B5EF4-FFF2-40B4-BE49-F238E27FC236}">
-                <a16:creationId xmlns:a16="http://schemas.microsoft.com/office/drawing/2014/main" id="{D4D5046F-8B51-40E8-84AC-738A6BB651CB}"/>
+                <a16:creationId xmlns:a16="http://schemas.microsoft.com/office/drawing/2014/main" id="{BAEBF8E9-688A-433A-9A19-FE6109A87D6F}"/>
               </a:ext>
             </a:extLst>
           </p:cNvPr>
@@ -6392,7 +6472,7 @@
           <p:cNvPr id="5" name="">
             <a:extLst xmlns:a="http://schemas.openxmlformats.org/drawingml/2006/main">
               <a:ext uri="{FF2B5EF4-FFF2-40B4-BE49-F238E27FC236}">
-                <a16:creationId xmlns:a16="http://schemas.microsoft.com/office/drawing/2014/main" id="{FEB6604B-7FBA-454F-8B5B-FC4D413FEDE9}"/>
+                <a16:creationId xmlns:a16="http://schemas.microsoft.com/office/drawing/2014/main" id="{78B97A90-E5AA-4031-99C6-FA91EA4921FB}"/>
               </a:ext>
             </a:extLst>
           </p:cNvPr>
@@ -6449,7 +6529,7 @@
           <p:cNvPr id="6" name="">
             <a:extLst xmlns:a="http://schemas.openxmlformats.org/drawingml/2006/main">
               <a:ext uri="{FF2B5EF4-FFF2-40B4-BE49-F238E27FC236}">
-                <a16:creationId xmlns:a16="http://schemas.microsoft.com/office/drawing/2014/main" id="{0168E37B-3842-4A6B-AB45-0FDFD7014CAC}"/>
+                <a16:creationId xmlns:a16="http://schemas.microsoft.com/office/drawing/2014/main" id="{5537FB2B-3827-46B9-98CD-FACC8AF8A106}"/>
               </a:ext>
             </a:extLst>
           </p:cNvPr>
@@ -6506,7 +6586,7 @@
           <p:cNvPr id="7" name="">
             <a:extLst xmlns:a="http://schemas.openxmlformats.org/drawingml/2006/main">
               <a:ext uri="{FF2B5EF4-FFF2-40B4-BE49-F238E27FC236}">
-                <a16:creationId xmlns:a16="http://schemas.microsoft.com/office/drawing/2014/main" id="{4F590475-9D9F-48E1-90CB-3F23CE675546}"/>
+                <a16:creationId xmlns:a16="http://schemas.microsoft.com/office/drawing/2014/main" id="{5EEA2952-30AF-494B-9F28-557B59854874}"/>
               </a:ext>
             </a:extLst>
           </p:cNvPr>
@@ -6563,7 +6643,7 @@
           <p:cNvPr id="8" name="">
             <a:extLst xmlns:a="http://schemas.openxmlformats.org/drawingml/2006/main">
               <a:ext uri="{FF2B5EF4-FFF2-40B4-BE49-F238E27FC236}">
-                <a16:creationId xmlns:a16="http://schemas.microsoft.com/office/drawing/2014/main" id="{D356CE78-BFBC-4D8D-B410-2DCA60BF9762}"/>
+                <a16:creationId xmlns:a16="http://schemas.microsoft.com/office/drawing/2014/main" id="{37D0BF1E-C647-4F8C-81FF-3F4BAED8756E}"/>
               </a:ext>
             </a:extLst>
           </p:cNvPr>
@@ -6620,7 +6700,7 @@
           <p:cNvPr id="9" name="">
             <a:extLst xmlns:a="http://schemas.openxmlformats.org/drawingml/2006/main">
               <a:ext uri="{FF2B5EF4-FFF2-40B4-BE49-F238E27FC236}">
-                <a16:creationId xmlns:a16="http://schemas.microsoft.com/office/drawing/2014/main" id="{C68E89CD-E24E-4683-BD7B-9AB3AE9C4979}"/>
+                <a16:creationId xmlns:a16="http://schemas.microsoft.com/office/drawing/2014/main" id="{4C17586D-AD50-4D19-A2FD-A77B56752E2F}"/>
               </a:ext>
             </a:extLst>
           </p:cNvPr>
@@ -6677,7 +6757,7 @@
           <p:cNvPr id="10" name="">
             <a:extLst xmlns:a="http://schemas.openxmlformats.org/drawingml/2006/main">
               <a:ext uri="{FF2B5EF4-FFF2-40B4-BE49-F238E27FC236}">
-                <a16:creationId xmlns:a16="http://schemas.microsoft.com/office/drawing/2014/main" id="{DFC7E32C-8087-43F2-9C33-079AA8CE8BA7}"/>
+                <a16:creationId xmlns:a16="http://schemas.microsoft.com/office/drawing/2014/main" id="{200021EE-0FA0-4751-9A83-2EF29C38FE3E}"/>
               </a:ext>
             </a:extLst>
           </p:cNvPr>
@@ -6734,7 +6814,7 @@
           <p:cNvPr id="11" name="">
             <a:extLst xmlns:a="http://schemas.openxmlformats.org/drawingml/2006/main">
               <a:ext uri="{FF2B5EF4-FFF2-40B4-BE49-F238E27FC236}">
-                <a16:creationId xmlns:a16="http://schemas.microsoft.com/office/drawing/2014/main" id="{6E1C2E0F-C29C-4153-9540-DF118D122AF8}"/>
+                <a16:creationId xmlns:a16="http://schemas.microsoft.com/office/drawing/2014/main" id="{1F01B2FD-638D-4772-8DBF-0B08B47E3133}"/>
               </a:ext>
             </a:extLst>
           </p:cNvPr>
@@ -6791,7 +6871,7 @@
           <p:cNvPr id="12" name="">
             <a:extLst xmlns:a="http://schemas.openxmlformats.org/drawingml/2006/main">
               <a:ext uri="{FF2B5EF4-FFF2-40B4-BE49-F238E27FC236}">
-                <a16:creationId xmlns:a16="http://schemas.microsoft.com/office/drawing/2014/main" id="{9F4B53B6-25C5-4EF1-B3FB-7653AFB75135}"/>
+                <a16:creationId xmlns:a16="http://schemas.microsoft.com/office/drawing/2014/main" id="{0E0F42EF-C327-4CC0-9538-BC220950C74E}"/>
               </a:ext>
             </a:extLst>
           </p:cNvPr>
@@ -6848,7 +6928,7 @@
           <p:cNvPr id="13" name="">
             <a:extLst xmlns:a="http://schemas.openxmlformats.org/drawingml/2006/main">
               <a:ext uri="{FF2B5EF4-FFF2-40B4-BE49-F238E27FC236}">
-                <a16:creationId xmlns:a16="http://schemas.microsoft.com/office/drawing/2014/main" id="{F5EA00A4-9A2B-4B18-9944-84DA8C327067}"/>
+                <a16:creationId xmlns:a16="http://schemas.microsoft.com/office/drawing/2014/main" id="{742E5989-B373-42E4-ACF3-7E0A056F96D3}"/>
               </a:ext>
             </a:extLst>
           </p:cNvPr>
@@ -6905,7 +6985,7 @@
           <p:cNvPr id="14" name="">
             <a:extLst xmlns:a="http://schemas.openxmlformats.org/drawingml/2006/main">
               <a:ext uri="{FF2B5EF4-FFF2-40B4-BE49-F238E27FC236}">
-                <a16:creationId xmlns:a16="http://schemas.microsoft.com/office/drawing/2014/main" id="{7CB6501A-8203-4370-A5D3-53D8C87003D6}"/>
+                <a16:creationId xmlns:a16="http://schemas.microsoft.com/office/drawing/2014/main" id="{9FE25105-E280-448F-9025-1B19E77EB1D5}"/>
               </a:ext>
             </a:extLst>
           </p:cNvPr>
@@ -6962,7 +7042,7 @@
           <p:cNvPr id="15" name="">
             <a:extLst xmlns:a="http://schemas.openxmlformats.org/drawingml/2006/main">
               <a:ext uri="{FF2B5EF4-FFF2-40B4-BE49-F238E27FC236}">
-                <a16:creationId xmlns:a16="http://schemas.microsoft.com/office/drawing/2014/main" id="{EA6D3C01-D100-4E33-BBD1-D9092EF61387}"/>
+                <a16:creationId xmlns:a16="http://schemas.microsoft.com/office/drawing/2014/main" id="{02B3C55C-EB47-4F19-B433-8AD381975BA2}"/>
               </a:ext>
             </a:extLst>
           </p:cNvPr>
@@ -7017,7 +7097,7 @@
     </p:spTree>
     <p:extLst>
       <p:ext uri="{BB962C8B-B14F-4D97-AF65-F5344CB8AC3E}">
-        <p14:creationId xmlns:p14="http://schemas.microsoft.com/office/powerpoint/2010/main" val="1551341982"/>
+        <p14:creationId xmlns:p14="http://schemas.microsoft.com/office/powerpoint/2010/main" val="1519549327"/>
       </p:ext>
     </p:extLst>
   </p:cSld>
@@ -7048,7 +7128,7 @@
           <p:cNvPr id="8" name="">
             <a:extLst xmlns:a="http://schemas.openxmlformats.org/drawingml/2006/main">
               <a:ext uri="{FF2B5EF4-FFF2-40B4-BE49-F238E27FC236}">
-                <a16:creationId xmlns:a16="http://schemas.microsoft.com/office/drawing/2014/main" id="{7B6E5181-8450-4A4A-ADC2-C3251271A809}"/>
+                <a16:creationId xmlns:a16="http://schemas.microsoft.com/office/drawing/2014/main" id="{16285753-C105-4166-8E1C-458C086855D3}"/>
               </a:ext>
             </a:extLst>
           </p:cNvPr>
@@ -7105,7 +7185,7 @@
           <p:cNvPr id="2" name="">
             <a:extLst xmlns:a="http://schemas.openxmlformats.org/drawingml/2006/main">
               <a:ext uri="{FF2B5EF4-FFF2-40B4-BE49-F238E27FC236}">
-                <a16:creationId xmlns:a16="http://schemas.microsoft.com/office/drawing/2014/main" id="{5444035D-00E1-4A33-B4BA-4656894EF0DD}"/>
+                <a16:creationId xmlns:a16="http://schemas.microsoft.com/office/drawing/2014/main" id="{370C4DE6-F7E5-4AA3-A816-1E85C79686E8}"/>
               </a:ext>
             </a:extLst>
           </p:cNvPr>
@@ -7162,7 +7242,7 @@
           <p:cNvPr id="3" name="">
             <a:extLst xmlns:a="http://schemas.openxmlformats.org/drawingml/2006/main">
               <a:ext uri="{FF2B5EF4-FFF2-40B4-BE49-F238E27FC236}">
-                <a16:creationId xmlns:a16="http://schemas.microsoft.com/office/drawing/2014/main" id="{8885B466-DA04-4463-BFCA-A8CCA4A1B292}"/>
+                <a16:creationId xmlns:a16="http://schemas.microsoft.com/office/drawing/2014/main" id="{5C1D25EF-7D9A-4239-895A-178AC12D8B16}"/>
               </a:ext>
             </a:extLst>
           </p:cNvPr>
@@ -7219,7 +7299,7 @@
           <p:cNvPr id="4" name="">
             <a:extLst xmlns:a="http://schemas.openxmlformats.org/drawingml/2006/main">
               <a:ext uri="{FF2B5EF4-FFF2-40B4-BE49-F238E27FC236}">
-                <a16:creationId xmlns:a16="http://schemas.microsoft.com/office/drawing/2014/main" id="{765A7660-7087-402D-838B-D3F12F278579}"/>
+                <a16:creationId xmlns:a16="http://schemas.microsoft.com/office/drawing/2014/main" id="{EB738AB4-6BA0-4F9C-9532-2799A85E0E02}"/>
               </a:ext>
             </a:extLst>
           </p:cNvPr>
@@ -7276,7 +7356,7 @@
           <p:cNvPr id="5" name="">
             <a:extLst xmlns:a="http://schemas.openxmlformats.org/drawingml/2006/main">
               <a:ext uri="{FF2B5EF4-FFF2-40B4-BE49-F238E27FC236}">
-                <a16:creationId xmlns:a16="http://schemas.microsoft.com/office/drawing/2014/main" id="{C63A5E09-DBBE-4F07-A35A-B44F1F520555}"/>
+                <a16:creationId xmlns:a16="http://schemas.microsoft.com/office/drawing/2014/main" id="{0B17EEA3-056B-4F32-851F-3B252BB3860D}"/>
               </a:ext>
             </a:extLst>
           </p:cNvPr>
@@ -7356,7 +7436,7 @@
           <p:cNvPr id="6" name="">
             <a:extLst xmlns:a="http://schemas.openxmlformats.org/drawingml/2006/main">
               <a:ext uri="{FF2B5EF4-FFF2-40B4-BE49-F238E27FC236}">
-                <a16:creationId xmlns:a16="http://schemas.microsoft.com/office/drawing/2014/main" id="{8D1F8D87-9CA5-4058-A5C9-09EB311EA10A}"/>
+                <a16:creationId xmlns:a16="http://schemas.microsoft.com/office/drawing/2014/main" id="{914C4CA9-6D84-4924-A944-D0A94B302CD7}"/>
               </a:ext>
             </a:extLst>
           </p:cNvPr>
@@ -7413,7 +7493,7 @@
           <p:cNvPr id="7" name="">
             <a:extLst xmlns:a="http://schemas.openxmlformats.org/drawingml/2006/main">
               <a:ext uri="{FF2B5EF4-FFF2-40B4-BE49-F238E27FC236}">
-                <a16:creationId xmlns:a16="http://schemas.microsoft.com/office/drawing/2014/main" id="{FB5B443F-097D-44E9-8130-8239B25A1F2B}"/>
+                <a16:creationId xmlns:a16="http://schemas.microsoft.com/office/drawing/2014/main" id="{A12DF876-4BFB-41A9-A501-ECE935AFCE30}"/>
               </a:ext>
             </a:extLst>
           </p:cNvPr>
@@ -7468,7 +7548,7 @@
     </p:spTree>
     <p:extLst>
       <p:ext uri="{BB962C8B-B14F-4D97-AF65-F5344CB8AC3E}">
-        <p14:creationId xmlns:p14="http://schemas.microsoft.com/office/powerpoint/2010/main" val="1447500490"/>
+        <p14:creationId xmlns:p14="http://schemas.microsoft.com/office/powerpoint/2010/main" val="1684253119"/>
       </p:ext>
     </p:extLst>
   </p:cSld>
@@ -7499,7 +7579,7 @@
           <p:cNvPr id="8" name="">
             <a:extLst xmlns:a="http://schemas.openxmlformats.org/drawingml/2006/main">
               <a:ext uri="{FF2B5EF4-FFF2-40B4-BE49-F238E27FC236}">
-                <a16:creationId xmlns:a16="http://schemas.microsoft.com/office/drawing/2014/main" id="{5A2C7E56-12EF-4DB7-8195-AEA223DBE9E4}"/>
+                <a16:creationId xmlns:a16="http://schemas.microsoft.com/office/drawing/2014/main" id="{CEDCBCB8-DF0C-4535-AA1B-431525AC99F1}"/>
               </a:ext>
             </a:extLst>
           </p:cNvPr>
@@ -7556,7 +7636,7 @@
           <p:cNvPr id="2" name="">
             <a:extLst xmlns:a="http://schemas.openxmlformats.org/drawingml/2006/main">
               <a:ext uri="{FF2B5EF4-FFF2-40B4-BE49-F238E27FC236}">
-                <a16:creationId xmlns:a16="http://schemas.microsoft.com/office/drawing/2014/main" id="{D85A7E7F-2E5F-4448-B2ED-4A4696BE2163}"/>
+                <a16:creationId xmlns:a16="http://schemas.microsoft.com/office/drawing/2014/main" id="{32474150-D274-4206-936A-54B0308AF764}"/>
               </a:ext>
             </a:extLst>
           </p:cNvPr>
@@ -7613,7 +7693,7 @@
           <p:cNvPr id="3" name="">
             <a:extLst xmlns:a="http://schemas.openxmlformats.org/drawingml/2006/main">
               <a:ext uri="{FF2B5EF4-FFF2-40B4-BE49-F238E27FC236}">
-                <a16:creationId xmlns:a16="http://schemas.microsoft.com/office/drawing/2014/main" id="{6EC1556D-C228-42FF-91AB-620C7122FC11}"/>
+                <a16:creationId xmlns:a16="http://schemas.microsoft.com/office/drawing/2014/main" id="{4701C6E2-D230-4F15-B9DB-EDD309235BC7}"/>
               </a:ext>
             </a:extLst>
           </p:cNvPr>
@@ -7670,7 +7750,7 @@
           <p:cNvPr id="4" name="">
             <a:extLst xmlns:a="http://schemas.openxmlformats.org/drawingml/2006/main">
               <a:ext uri="{FF2B5EF4-FFF2-40B4-BE49-F238E27FC236}">
-                <a16:creationId xmlns:a16="http://schemas.microsoft.com/office/drawing/2014/main" id="{A0B53E3A-8E56-434B-97BE-6ABE6C0643BF}"/>
+                <a16:creationId xmlns:a16="http://schemas.microsoft.com/office/drawing/2014/main" id="{9D0B164D-228E-4BB7-B8AF-33CCA4BF953E}"/>
               </a:ext>
             </a:extLst>
           </p:cNvPr>
@@ -7727,7 +7807,7 @@
           <p:cNvPr id="5" name="">
             <a:extLst xmlns:a="http://schemas.openxmlformats.org/drawingml/2006/main">
               <a:ext uri="{FF2B5EF4-FFF2-40B4-BE49-F238E27FC236}">
-                <a16:creationId xmlns:a16="http://schemas.microsoft.com/office/drawing/2014/main" id="{6C889AF9-4E48-45B2-A476-FBECB821C907}"/>
+                <a16:creationId xmlns:a16="http://schemas.microsoft.com/office/drawing/2014/main" id="{F9495593-189D-41B9-B21C-4C746CB7E6CF}"/>
               </a:ext>
             </a:extLst>
           </p:cNvPr>
@@ -8056,7 +8136,7 @@
           <p:cNvPr id="7" name="">
             <a:extLst xmlns:a="http://schemas.openxmlformats.org/drawingml/2006/main">
               <a:ext uri="{FF2B5EF4-FFF2-40B4-BE49-F238E27FC236}">
-                <a16:creationId xmlns:a16="http://schemas.microsoft.com/office/drawing/2014/main" id="{7F035CFC-EEE0-490A-ABFE-05467A0E2211}"/>
+                <a16:creationId xmlns:a16="http://schemas.microsoft.com/office/drawing/2014/main" id="{5290C5DC-6D1A-421E-AB4B-F61122F47977}"/>
               </a:ext>
             </a:extLst>
           </p:cNvPr>
@@ -8134,7 +8214,7 @@
     </p:spTree>
     <p:extLst>
       <p:ext uri="{BB962C8B-B14F-4D97-AF65-F5344CB8AC3E}">
-        <p14:creationId xmlns:p14="http://schemas.microsoft.com/office/powerpoint/2010/main" val="1757711368"/>
+        <p14:creationId xmlns:p14="http://schemas.microsoft.com/office/powerpoint/2010/main" val="391638179"/>
       </p:ext>
     </p:extLst>
   </p:cSld>
@@ -8165,7 +8245,7 @@
           <p:cNvPr id="8" name="">
             <a:extLst xmlns:a="http://schemas.openxmlformats.org/drawingml/2006/main">
               <a:ext uri="{FF2B5EF4-FFF2-40B4-BE49-F238E27FC236}">
-                <a16:creationId xmlns:a16="http://schemas.microsoft.com/office/drawing/2014/main" id="{15FE5362-52BA-4C14-9717-7497AA4D1336}"/>
+                <a16:creationId xmlns:a16="http://schemas.microsoft.com/office/drawing/2014/main" id="{5A652CA3-5057-4C68-B181-17BC68907AFA}"/>
               </a:ext>
             </a:extLst>
           </p:cNvPr>
@@ -8222,7 +8302,7 @@
           <p:cNvPr id="2" name="">
             <a:extLst xmlns:a="http://schemas.openxmlformats.org/drawingml/2006/main">
               <a:ext uri="{FF2B5EF4-FFF2-40B4-BE49-F238E27FC236}">
-                <a16:creationId xmlns:a16="http://schemas.microsoft.com/office/drawing/2014/main" id="{8BFA9122-FC07-43B4-AACB-5B8C89B100C2}"/>
+                <a16:creationId xmlns:a16="http://schemas.microsoft.com/office/drawing/2014/main" id="{51A40D40-609E-46F0-8758-523EBAF1B8C5}"/>
               </a:ext>
             </a:extLst>
           </p:cNvPr>
@@ -8279,7 +8359,7 @@
           <p:cNvPr id="3" name="">
             <a:extLst xmlns:a="http://schemas.openxmlformats.org/drawingml/2006/main">
               <a:ext uri="{FF2B5EF4-FFF2-40B4-BE49-F238E27FC236}">
-                <a16:creationId xmlns:a16="http://schemas.microsoft.com/office/drawing/2014/main" id="{3B204EF4-99D9-40C3-97B7-CC822161783A}"/>
+                <a16:creationId xmlns:a16="http://schemas.microsoft.com/office/drawing/2014/main" id="{2DD8ED0F-030E-41A3-BF66-C75E33A708AA}"/>
               </a:ext>
             </a:extLst>
           </p:cNvPr>
@@ -8336,7 +8416,7 @@
           <p:cNvPr id="4" name="">
             <a:extLst xmlns:a="http://schemas.openxmlformats.org/drawingml/2006/main">
               <a:ext uri="{FF2B5EF4-FFF2-40B4-BE49-F238E27FC236}">
-                <a16:creationId xmlns:a16="http://schemas.microsoft.com/office/drawing/2014/main" id="{9A46140B-7532-4CA6-9966-27B9A99CB9B5}"/>
+                <a16:creationId xmlns:a16="http://schemas.microsoft.com/office/drawing/2014/main" id="{CE54562A-1E67-4811-BC20-416445806451}"/>
               </a:ext>
             </a:extLst>
           </p:cNvPr>
@@ -8416,7 +8496,7 @@
           <p:cNvPr id="5" name="">
             <a:extLst xmlns:a="http://schemas.openxmlformats.org/drawingml/2006/main">
               <a:ext uri="{FF2B5EF4-FFF2-40B4-BE49-F238E27FC236}">
-                <a16:creationId xmlns:a16="http://schemas.microsoft.com/office/drawing/2014/main" id="{51E2140B-7CF7-44DF-B696-48C3E54E42F0}"/>
+                <a16:creationId xmlns:a16="http://schemas.microsoft.com/office/drawing/2014/main" id="{70C53561-2300-4EFC-81EF-D55646327C0E}"/>
               </a:ext>
             </a:extLst>
           </p:cNvPr>
@@ -8496,7 +8576,7 @@
           <p:cNvPr id="6" name="">
             <a:extLst xmlns:a="http://schemas.openxmlformats.org/drawingml/2006/main">
               <a:ext uri="{FF2B5EF4-FFF2-40B4-BE49-F238E27FC236}">
-                <a16:creationId xmlns:a16="http://schemas.microsoft.com/office/drawing/2014/main" id="{D9ADCAA8-BF45-4F25-AF13-95BBE9404634}"/>
+                <a16:creationId xmlns:a16="http://schemas.microsoft.com/office/drawing/2014/main" id="{17FB0DE5-D3A3-4040-A3CE-C80D52A4687E}"/>
               </a:ext>
             </a:extLst>
           </p:cNvPr>
@@ -8576,7 +8656,7 @@
           <p:cNvPr id="7" name="">
             <a:extLst xmlns:a="http://schemas.openxmlformats.org/drawingml/2006/main">
               <a:ext uri="{FF2B5EF4-FFF2-40B4-BE49-F238E27FC236}">
-                <a16:creationId xmlns:a16="http://schemas.microsoft.com/office/drawing/2014/main" id="{FED90383-65AA-486A-823C-A4AEEB944753}"/>
+                <a16:creationId xmlns:a16="http://schemas.microsoft.com/office/drawing/2014/main" id="{7DBAE706-3A14-4C53-B17A-E1A561FE850D}"/>
               </a:ext>
             </a:extLst>
           </p:cNvPr>
@@ -8631,7 +8711,7 @@
     </p:spTree>
     <p:extLst>
       <p:ext uri="{BB962C8B-B14F-4D97-AF65-F5344CB8AC3E}">
-        <p14:creationId xmlns:p14="http://schemas.microsoft.com/office/powerpoint/2010/main" val="1422453459"/>
+        <p14:creationId xmlns:p14="http://schemas.microsoft.com/office/powerpoint/2010/main" val="610090670"/>
       </p:ext>
     </p:extLst>
   </p:cSld>
@@ -8662,7 +8742,7 @@
           <p:cNvPr id="9" name="">
             <a:extLst xmlns:a="http://schemas.openxmlformats.org/drawingml/2006/main">
               <a:ext uri="{FF2B5EF4-FFF2-40B4-BE49-F238E27FC236}">
-                <a16:creationId xmlns:a16="http://schemas.microsoft.com/office/drawing/2014/main" id="{FE32B96A-BEC1-4FC4-AB74-064B073C37F9}"/>
+                <a16:creationId xmlns:a16="http://schemas.microsoft.com/office/drawing/2014/main" id="{B7F1B9F8-9BA6-4B51-AB9C-F6C65F0862AC}"/>
               </a:ext>
             </a:extLst>
           </p:cNvPr>
@@ -8719,7 +8799,7 @@
           <p:cNvPr id="2" name="">
             <a:extLst xmlns:a="http://schemas.openxmlformats.org/drawingml/2006/main">
               <a:ext uri="{FF2B5EF4-FFF2-40B4-BE49-F238E27FC236}">
-                <a16:creationId xmlns:a16="http://schemas.microsoft.com/office/drawing/2014/main" id="{D00F0C16-91E3-4AFB-AE67-0296C868A0AA}"/>
+                <a16:creationId xmlns:a16="http://schemas.microsoft.com/office/drawing/2014/main" id="{9CA268EB-3A1C-4700-99B9-E9A7263AB5E3}"/>
               </a:ext>
             </a:extLst>
           </p:cNvPr>
@@ -8776,7 +8856,7 @@
           <p:cNvPr id="3" name="">
             <a:extLst xmlns:a="http://schemas.openxmlformats.org/drawingml/2006/main">
               <a:ext uri="{FF2B5EF4-FFF2-40B4-BE49-F238E27FC236}">
-                <a16:creationId xmlns:a16="http://schemas.microsoft.com/office/drawing/2014/main" id="{D1E58D90-D200-4C29-8E03-2FD6B022D98D}"/>
+                <a16:creationId xmlns:a16="http://schemas.microsoft.com/office/drawing/2014/main" id="{CBC44FB3-FAFE-43C7-BAA1-6F6D8B70E078}"/>
               </a:ext>
             </a:extLst>
           </p:cNvPr>
@@ -8833,7 +8913,7 @@
           <p:cNvPr id="4" name="">
             <a:extLst xmlns:a="http://schemas.openxmlformats.org/drawingml/2006/main">
               <a:ext uri="{FF2B5EF4-FFF2-40B4-BE49-F238E27FC236}">
-                <a16:creationId xmlns:a16="http://schemas.microsoft.com/office/drawing/2014/main" id="{00801219-42EA-4784-9EE5-6F340B603F39}"/>
+                <a16:creationId xmlns:a16="http://schemas.microsoft.com/office/drawing/2014/main" id="{C4B41740-AD7F-43E1-A942-EA784AE4D9F7}"/>
               </a:ext>
             </a:extLst>
           </p:cNvPr>
@@ -8890,7 +8970,7 @@
           <p:cNvPr id="5" name="">
             <a:extLst xmlns:a="http://schemas.openxmlformats.org/drawingml/2006/main">
               <a:ext uri="{FF2B5EF4-FFF2-40B4-BE49-F238E27FC236}">
-                <a16:creationId xmlns:a16="http://schemas.microsoft.com/office/drawing/2014/main" id="{D9E1B329-FD5B-4F7A-ABA6-EFDC59DF0EBD}"/>
+                <a16:creationId xmlns:a16="http://schemas.microsoft.com/office/drawing/2014/main" id="{584FCB02-CC3A-4EAC-9B27-71D748A54ABA}"/>
               </a:ext>
             </a:extLst>
           </p:cNvPr>
@@ -8947,7 +9027,7 @@
           <p:cNvPr id="6" name="">
             <a:extLst xmlns:a="http://schemas.openxmlformats.org/drawingml/2006/main">
               <a:ext uri="{FF2B5EF4-FFF2-40B4-BE49-F238E27FC236}">
-                <a16:creationId xmlns:a16="http://schemas.microsoft.com/office/drawing/2014/main" id="{3E9727B5-0BAA-426B-8CB0-949594075D87}"/>
+                <a16:creationId xmlns:a16="http://schemas.microsoft.com/office/drawing/2014/main" id="{20BA766E-2BB0-4ADC-A9A1-7F07C64334B4}"/>
               </a:ext>
             </a:extLst>
           </p:cNvPr>
@@ -9004,7 +9084,7 @@
           <p:cNvPr id="7" name="">
             <a:extLst xmlns:a="http://schemas.openxmlformats.org/drawingml/2006/main">
               <a:ext uri="{FF2B5EF4-FFF2-40B4-BE49-F238E27FC236}">
-                <a16:creationId xmlns:a16="http://schemas.microsoft.com/office/drawing/2014/main" id="{476D4704-FAD4-430E-BC8D-CA013EBA5732}"/>
+                <a16:creationId xmlns:a16="http://schemas.microsoft.com/office/drawing/2014/main" id="{F3B48406-B911-4494-801E-BBEA6E5847A9}"/>
               </a:ext>
             </a:extLst>
           </p:cNvPr>
@@ -9061,7 +9141,7 @@
           <p:cNvPr id="8" name="">
             <a:extLst xmlns:a="http://schemas.openxmlformats.org/drawingml/2006/main">
               <a:ext uri="{FF2B5EF4-FFF2-40B4-BE49-F238E27FC236}">
-                <a16:creationId xmlns:a16="http://schemas.microsoft.com/office/drawing/2014/main" id="{D06D656C-9DE8-4D32-A17D-29E3AF6D41D4}"/>
+                <a16:creationId xmlns:a16="http://schemas.microsoft.com/office/drawing/2014/main" id="{EA7241F4-A0D2-4A72-9648-24CE7AC6E85D}"/>
               </a:ext>
             </a:extLst>
           </p:cNvPr>
@@ -9116,7 +9196,7 @@
     </p:spTree>
     <p:extLst>
       <p:ext uri="{BB962C8B-B14F-4D97-AF65-F5344CB8AC3E}">
-        <p14:creationId xmlns:p14="http://schemas.microsoft.com/office/powerpoint/2010/main" val="891311633"/>
+        <p14:creationId xmlns:p14="http://schemas.microsoft.com/office/powerpoint/2010/main" val="296796229"/>
       </p:ext>
     </p:extLst>
   </p:cSld>
@@ -9147,7 +9227,7 @@
           <p:cNvPr id="8" name="">
             <a:extLst xmlns:a="http://schemas.openxmlformats.org/drawingml/2006/main">
               <a:ext uri="{FF2B5EF4-FFF2-40B4-BE49-F238E27FC236}">
-                <a16:creationId xmlns:a16="http://schemas.microsoft.com/office/drawing/2014/main" id="{ECA1493B-33DF-4BF6-A00F-6E93F5DCE11B}"/>
+                <a16:creationId xmlns:a16="http://schemas.microsoft.com/office/drawing/2014/main" id="{36CBCBCA-4EE9-4DE0-9F03-007813C93A71}"/>
               </a:ext>
             </a:extLst>
           </p:cNvPr>
@@ -9204,7 +9284,7 @@
           <p:cNvPr id="2" name="">
             <a:extLst xmlns:a="http://schemas.openxmlformats.org/drawingml/2006/main">
               <a:ext uri="{FF2B5EF4-FFF2-40B4-BE49-F238E27FC236}">
-                <a16:creationId xmlns:a16="http://schemas.microsoft.com/office/drawing/2014/main" id="{752104B1-3CDF-43F3-8CBF-8C9FAC12FD8D}"/>
+                <a16:creationId xmlns:a16="http://schemas.microsoft.com/office/drawing/2014/main" id="{877A3B0C-1515-42CB-9657-4560CA16B7BA}"/>
               </a:ext>
             </a:extLst>
           </p:cNvPr>
@@ -9261,7 +9341,7 @@
           <p:cNvPr id="3" name="">
             <a:extLst xmlns:a="http://schemas.openxmlformats.org/drawingml/2006/main">
               <a:ext uri="{FF2B5EF4-FFF2-40B4-BE49-F238E27FC236}">
-                <a16:creationId xmlns:a16="http://schemas.microsoft.com/office/drawing/2014/main" id="{065CD58C-E5FD-4A01-A9F0-C4E934D9B07A}"/>
+                <a16:creationId xmlns:a16="http://schemas.microsoft.com/office/drawing/2014/main" id="{8A0486C1-4A6D-4026-88A9-57271AADD6A4}"/>
               </a:ext>
             </a:extLst>
           </p:cNvPr>
@@ -9318,7 +9398,7 @@
           <p:cNvPr id="4" name="">
             <a:extLst xmlns:a="http://schemas.openxmlformats.org/drawingml/2006/main">
               <a:ext uri="{FF2B5EF4-FFF2-40B4-BE49-F238E27FC236}">
-                <a16:creationId xmlns:a16="http://schemas.microsoft.com/office/drawing/2014/main" id="{DC8112C8-7C2B-4673-A5BB-0646D7D439F7}"/>
+                <a16:creationId xmlns:a16="http://schemas.microsoft.com/office/drawing/2014/main" id="{B8ECB837-0A69-4880-B3A1-514A9DCABE1A}"/>
               </a:ext>
             </a:extLst>
           </p:cNvPr>
@@ -9382,7 +9462,7 @@
         </p:xfrm>
         <a:graphic xmlns:a="http://schemas.openxmlformats.org/drawingml/2006/main">
           <a:graphicData uri="http://schemas.openxmlformats.org/drawingml/2006/chart">
-            <c:chart xmlns:r="http://schemas.openxmlformats.org/officeDocument/2006/relationships" xmlns:c="http://schemas.openxmlformats.org/drawingml/2006/chart" r:id="R6031095b61d04a77"/>
+            <c:chart xmlns:r="http://schemas.openxmlformats.org/officeDocument/2006/relationships" xmlns:c="http://schemas.openxmlformats.org/drawingml/2006/chart" r:id="R28cdce4bb4f04df3"/>
           </a:graphicData>
         </a:graphic>
       </p:graphicFrame>
@@ -9391,7 +9471,7 @@
           <p:cNvPr id="6" name="">
             <a:extLst xmlns:a="http://schemas.openxmlformats.org/drawingml/2006/main">
               <a:ext uri="{FF2B5EF4-FFF2-40B4-BE49-F238E27FC236}">
-                <a16:creationId xmlns:a16="http://schemas.microsoft.com/office/drawing/2014/main" id="{4B15B570-0B60-4776-B45D-D7C76966E7A2}"/>
+                <a16:creationId xmlns:a16="http://schemas.microsoft.com/office/drawing/2014/main" id="{E43F499C-5CE5-4CA3-932D-CECD338BA0D3}"/>
               </a:ext>
             </a:extLst>
           </p:cNvPr>
@@ -9448,7 +9528,7 @@
           <p:cNvPr id="7" name="">
             <a:extLst xmlns:a="http://schemas.openxmlformats.org/drawingml/2006/main">
               <a:ext uri="{FF2B5EF4-FFF2-40B4-BE49-F238E27FC236}">
-                <a16:creationId xmlns:a16="http://schemas.microsoft.com/office/drawing/2014/main" id="{50554569-ED58-4904-A172-CC9B84369BF1}"/>
+                <a16:creationId xmlns:a16="http://schemas.microsoft.com/office/drawing/2014/main" id="{89EF0869-8CDC-4DEA-A629-51E9F66C0986}"/>
               </a:ext>
             </a:extLst>
           </p:cNvPr>
@@ -9503,7 +9583,7 @@
     </p:spTree>
     <p:extLst>
       <p:ext uri="{BB962C8B-B14F-4D97-AF65-F5344CB8AC3E}">
-        <p14:creationId xmlns:p14="http://schemas.microsoft.com/office/powerpoint/2010/main" val="788800669"/>
+        <p14:creationId xmlns:p14="http://schemas.microsoft.com/office/powerpoint/2010/main" val="1363432392"/>
       </p:ext>
     </p:extLst>
   </p:cSld>
@@ -9534,7 +9614,7 @@
           <p:cNvPr id="8" name="">
             <a:extLst xmlns:a="http://schemas.openxmlformats.org/drawingml/2006/main">
               <a:ext uri="{FF2B5EF4-FFF2-40B4-BE49-F238E27FC236}">
-                <a16:creationId xmlns:a16="http://schemas.microsoft.com/office/drawing/2014/main" id="{361D97B0-540F-4B7D-B9D0-50A16FBD1189}"/>
+                <a16:creationId xmlns:a16="http://schemas.microsoft.com/office/drawing/2014/main" id="{12200763-3EFD-4507-9D1B-515FAB6D7EDB}"/>
               </a:ext>
             </a:extLst>
           </p:cNvPr>
@@ -9591,7 +9671,7 @@
           <p:cNvPr id="2" name="">
             <a:extLst xmlns:a="http://schemas.openxmlformats.org/drawingml/2006/main">
               <a:ext uri="{FF2B5EF4-FFF2-40B4-BE49-F238E27FC236}">
-                <a16:creationId xmlns:a16="http://schemas.microsoft.com/office/drawing/2014/main" id="{7D4CEB33-0FC0-4D7A-A08E-6063E4C4A416}"/>
+                <a16:creationId xmlns:a16="http://schemas.microsoft.com/office/drawing/2014/main" id="{B1715D59-8D71-460F-BD65-15DBAA30EE5A}"/>
               </a:ext>
             </a:extLst>
           </p:cNvPr>
@@ -9648,7 +9728,7 @@
           <p:cNvPr id="3" name="">
             <a:extLst xmlns:a="http://schemas.openxmlformats.org/drawingml/2006/main">
               <a:ext uri="{FF2B5EF4-FFF2-40B4-BE49-F238E27FC236}">
-                <a16:creationId xmlns:a16="http://schemas.microsoft.com/office/drawing/2014/main" id="{FD275584-84AE-41AF-8C7E-A1CD3DB2F50F}"/>
+                <a16:creationId xmlns:a16="http://schemas.microsoft.com/office/drawing/2014/main" id="{1820C382-05A0-4EAD-AD69-44A61C057C1A}"/>
               </a:ext>
             </a:extLst>
           </p:cNvPr>
@@ -9705,7 +9785,7 @@
           <p:cNvPr id="4" name="">
             <a:extLst xmlns:a="http://schemas.openxmlformats.org/drawingml/2006/main">
               <a:ext uri="{FF2B5EF4-FFF2-40B4-BE49-F238E27FC236}">
-                <a16:creationId xmlns:a16="http://schemas.microsoft.com/office/drawing/2014/main" id="{CD9E7DBF-5496-450A-9AF6-94DDC3CD6BA2}"/>
+                <a16:creationId xmlns:a16="http://schemas.microsoft.com/office/drawing/2014/main" id="{50F0C19A-9AD9-4A29-B23B-2035375893EE}"/>
               </a:ext>
             </a:extLst>
           </p:cNvPr>
@@ -9762,7 +9842,7 @@
           <p:cNvPr id="5" name="">
             <a:extLst xmlns:a="http://schemas.openxmlformats.org/drawingml/2006/main">
               <a:ext uri="{FF2B5EF4-FFF2-40B4-BE49-F238E27FC236}">
-                <a16:creationId xmlns:a16="http://schemas.microsoft.com/office/drawing/2014/main" id="{4113DDCF-28A0-4EBB-9D64-23967DD07978}"/>
+                <a16:creationId xmlns:a16="http://schemas.microsoft.com/office/drawing/2014/main" id="{A5EA1360-57E1-4C13-9014-B73CDB0DD977}"/>
               </a:ext>
             </a:extLst>
           </p:cNvPr>
@@ -10009,7 +10089,7 @@
           <p:cNvPr id="7" name="">
             <a:extLst xmlns:a="http://schemas.openxmlformats.org/drawingml/2006/main">
               <a:ext uri="{FF2B5EF4-FFF2-40B4-BE49-F238E27FC236}">
-                <a16:creationId xmlns:a16="http://schemas.microsoft.com/office/drawing/2014/main" id="{A8D2D851-6E42-49C3-8599-043C2EC98991}"/>
+                <a16:creationId xmlns:a16="http://schemas.microsoft.com/office/drawing/2014/main" id="{50EAD5F3-8C59-452F-85F8-9FFF28EF6940}"/>
               </a:ext>
             </a:extLst>
           </p:cNvPr>
@@ -10087,7 +10167,7 @@
     </p:spTree>
     <p:extLst>
       <p:ext uri="{BB962C8B-B14F-4D97-AF65-F5344CB8AC3E}">
-        <p14:creationId xmlns:p14="http://schemas.microsoft.com/office/powerpoint/2010/main" val="1751677155"/>
+        <p14:creationId xmlns:p14="http://schemas.microsoft.com/office/powerpoint/2010/main" val="1096809730"/>
       </p:ext>
     </p:extLst>
   </p:cSld>
@@ -10118,7 +10198,7 @@
           <p:cNvPr id="8" name="">
             <a:extLst xmlns:a="http://schemas.openxmlformats.org/drawingml/2006/main">
               <a:ext uri="{FF2B5EF4-FFF2-40B4-BE49-F238E27FC236}">
-                <a16:creationId xmlns:a16="http://schemas.microsoft.com/office/drawing/2014/main" id="{D05DDF3E-CFF9-4448-9C72-E97EDCE1324D}"/>
+                <a16:creationId xmlns:a16="http://schemas.microsoft.com/office/drawing/2014/main" id="{F563E9DA-014E-4683-AB61-FC816B97733E}"/>
               </a:ext>
             </a:extLst>
           </p:cNvPr>
@@ -10175,7 +10255,7 @@
           <p:cNvPr id="2" name="">
             <a:extLst xmlns:a="http://schemas.openxmlformats.org/drawingml/2006/main">
               <a:ext uri="{FF2B5EF4-FFF2-40B4-BE49-F238E27FC236}">
-                <a16:creationId xmlns:a16="http://schemas.microsoft.com/office/drawing/2014/main" id="{403CB2B9-87DC-4E3B-AD15-4C0E67C8E0D4}"/>
+                <a16:creationId xmlns:a16="http://schemas.microsoft.com/office/drawing/2014/main" id="{BC1E87E8-9CA9-4734-AC39-634C55726B6A}"/>
               </a:ext>
             </a:extLst>
           </p:cNvPr>
@@ -10232,7 +10312,7 @@
           <p:cNvPr id="3" name="">
             <a:extLst xmlns:a="http://schemas.openxmlformats.org/drawingml/2006/main">
               <a:ext uri="{FF2B5EF4-FFF2-40B4-BE49-F238E27FC236}">
-                <a16:creationId xmlns:a16="http://schemas.microsoft.com/office/drawing/2014/main" id="{B7AA5621-968F-4FE4-A7E8-EE80254E1AEE}"/>
+                <a16:creationId xmlns:a16="http://schemas.microsoft.com/office/drawing/2014/main" id="{EBB4F683-38C6-4D33-9520-FEC096560540}"/>
               </a:ext>
             </a:extLst>
           </p:cNvPr>
@@ -10289,7 +10369,7 @@
           <p:cNvPr id="4" name="">
             <a:extLst xmlns:a="http://schemas.openxmlformats.org/drawingml/2006/main">
               <a:ext uri="{FF2B5EF4-FFF2-40B4-BE49-F238E27FC236}">
-                <a16:creationId xmlns:a16="http://schemas.microsoft.com/office/drawing/2014/main" id="{E8D095CB-D779-428E-9681-879B3435AEFF}"/>
+                <a16:creationId xmlns:a16="http://schemas.microsoft.com/office/drawing/2014/main" id="{4D5984B0-5059-4702-ADE8-7704FD3A580F}"/>
               </a:ext>
             </a:extLst>
           </p:cNvPr>
@@ -10346,7 +10426,7 @@
           <p:cNvPr id="5" name="">
             <a:extLst xmlns:a="http://schemas.openxmlformats.org/drawingml/2006/main">
               <a:ext uri="{FF2B5EF4-FFF2-40B4-BE49-F238E27FC236}">
-                <a16:creationId xmlns:a16="http://schemas.microsoft.com/office/drawing/2014/main" id="{05D13986-D1DC-49DE-B9B4-17A83CCC1CD7}"/>
+                <a16:creationId xmlns:a16="http://schemas.microsoft.com/office/drawing/2014/main" id="{EE0937A5-62ED-4557-A72C-214FE9C3B65B}"/>
               </a:ext>
             </a:extLst>
           </p:cNvPr>
@@ -10649,7 +10729,7 @@
           <p:cNvPr id="7" name="">
             <a:extLst xmlns:a="http://schemas.openxmlformats.org/drawingml/2006/main">
               <a:ext uri="{FF2B5EF4-FFF2-40B4-BE49-F238E27FC236}">
-                <a16:creationId xmlns:a16="http://schemas.microsoft.com/office/drawing/2014/main" id="{23C006FB-7D28-41F0-A784-BF8ED642B27D}"/>
+                <a16:creationId xmlns:a16="http://schemas.microsoft.com/office/drawing/2014/main" id="{87B25233-FEF7-45E7-A610-188075126543}"/>
               </a:ext>
             </a:extLst>
           </p:cNvPr>
@@ -10727,7 +10807,7 @@
     </p:spTree>
     <p:extLst>
       <p:ext uri="{BB962C8B-B14F-4D97-AF65-F5344CB8AC3E}">
-        <p14:creationId xmlns:p14="http://schemas.microsoft.com/office/powerpoint/2010/main" val="1736297023"/>
+        <p14:creationId xmlns:p14="http://schemas.microsoft.com/office/powerpoint/2010/main" val="1129043366"/>
       </p:ext>
     </p:extLst>
   </p:cSld>
@@ -10758,7 +10838,7 @@
           <p:cNvPr id="9" name="">
             <a:extLst xmlns:a="http://schemas.openxmlformats.org/drawingml/2006/main">
               <a:ext uri="{FF2B5EF4-FFF2-40B4-BE49-F238E27FC236}">
-                <a16:creationId xmlns:a16="http://schemas.microsoft.com/office/drawing/2014/main" id="{FB595447-26CE-4CB6-BCC0-06DB0F97B11D}"/>
+                <a16:creationId xmlns:a16="http://schemas.microsoft.com/office/drawing/2014/main" id="{B5399ED9-DA56-44BE-899B-9419AEFBFCBE}"/>
               </a:ext>
             </a:extLst>
           </p:cNvPr>
@@ -10815,7 +10895,7 @@
           <p:cNvPr id="2" name="">
             <a:extLst xmlns:a="http://schemas.openxmlformats.org/drawingml/2006/main">
               <a:ext uri="{FF2B5EF4-FFF2-40B4-BE49-F238E27FC236}">
-                <a16:creationId xmlns:a16="http://schemas.microsoft.com/office/drawing/2014/main" id="{87B92ACE-826A-47DA-B080-0D43957D67E9}"/>
+                <a16:creationId xmlns:a16="http://schemas.microsoft.com/office/drawing/2014/main" id="{91E08811-1EBE-4DCE-8F89-6175C2DDD29A}"/>
               </a:ext>
             </a:extLst>
           </p:cNvPr>
@@ -10872,7 +10952,7 @@
           <p:cNvPr id="3" name="">
             <a:extLst xmlns:a="http://schemas.openxmlformats.org/drawingml/2006/main">
               <a:ext uri="{FF2B5EF4-FFF2-40B4-BE49-F238E27FC236}">
-                <a16:creationId xmlns:a16="http://schemas.microsoft.com/office/drawing/2014/main" id="{37F9525F-221E-45C8-A329-4D753F01AE9E}"/>
+                <a16:creationId xmlns:a16="http://schemas.microsoft.com/office/drawing/2014/main" id="{6233EA8B-D7B6-4070-8643-80F4F85BFBC2}"/>
               </a:ext>
             </a:extLst>
           </p:cNvPr>
@@ -10929,7 +11009,7 @@
           <p:cNvPr id="4" name="">
             <a:extLst xmlns:a="http://schemas.openxmlformats.org/drawingml/2006/main">
               <a:ext uri="{FF2B5EF4-FFF2-40B4-BE49-F238E27FC236}">
-                <a16:creationId xmlns:a16="http://schemas.microsoft.com/office/drawing/2014/main" id="{EB73714C-5393-4499-80B9-A37258428D0B}"/>
+                <a16:creationId xmlns:a16="http://schemas.microsoft.com/office/drawing/2014/main" id="{29C959E2-4565-4089-9DD4-81185B629435}"/>
               </a:ext>
             </a:extLst>
           </p:cNvPr>
@@ -10986,7 +11066,7 @@
           <p:cNvPr id="5" name="">
             <a:extLst xmlns:a="http://schemas.openxmlformats.org/drawingml/2006/main">
               <a:ext uri="{FF2B5EF4-FFF2-40B4-BE49-F238E27FC236}">
-                <a16:creationId xmlns:a16="http://schemas.microsoft.com/office/drawing/2014/main" id="{60FB3A2A-DD3E-43AF-81E8-72AAD00F474E}"/>
+                <a16:creationId xmlns:a16="http://schemas.microsoft.com/office/drawing/2014/main" id="{10A0677A-165E-454B-BDB1-4341DA384B33}"/>
               </a:ext>
             </a:extLst>
           </p:cNvPr>
@@ -11066,7 +11146,7 @@
           <p:cNvPr id="6" name="">
             <a:extLst xmlns:a="http://schemas.openxmlformats.org/drawingml/2006/main">
               <a:ext uri="{FF2B5EF4-FFF2-40B4-BE49-F238E27FC236}">
-                <a16:creationId xmlns:a16="http://schemas.microsoft.com/office/drawing/2014/main" id="{C173F40F-4C22-400F-B6C9-42774D088C26}"/>
+                <a16:creationId xmlns:a16="http://schemas.microsoft.com/office/drawing/2014/main" id="{F5394D26-E0F6-406A-8EAB-D9458C006ADD}"/>
               </a:ext>
             </a:extLst>
           </p:cNvPr>
@@ -11123,7 +11203,7 @@
           <p:cNvPr id="7" name="">
             <a:extLst xmlns:a="http://schemas.openxmlformats.org/drawingml/2006/main">
               <a:ext uri="{FF2B5EF4-FFF2-40B4-BE49-F238E27FC236}">
-                <a16:creationId xmlns:a16="http://schemas.microsoft.com/office/drawing/2014/main" id="{38F77C3A-33BB-46E3-B7AD-B2D08CC64B8B}"/>
+                <a16:creationId xmlns:a16="http://schemas.microsoft.com/office/drawing/2014/main" id="{D1E5D5BE-5687-47C5-82F5-1AF834164D77}"/>
               </a:ext>
             </a:extLst>
           </p:cNvPr>
@@ -11203,7 +11283,7 @@
           <p:cNvPr id="8" name="">
             <a:extLst xmlns:a="http://schemas.openxmlformats.org/drawingml/2006/main">
               <a:ext uri="{FF2B5EF4-FFF2-40B4-BE49-F238E27FC236}">
-                <a16:creationId xmlns:a16="http://schemas.microsoft.com/office/drawing/2014/main" id="{7B88C94A-ACA7-4F07-82FB-2E34AB1DE13C}"/>
+                <a16:creationId xmlns:a16="http://schemas.microsoft.com/office/drawing/2014/main" id="{CCFA97C4-57BF-47B0-8A97-B9693D23AA03}"/>
               </a:ext>
             </a:extLst>
           </p:cNvPr>
@@ -11258,7 +11338,7 @@
     </p:spTree>
     <p:extLst>
       <p:ext uri="{BB962C8B-B14F-4D97-AF65-F5344CB8AC3E}">
-        <p14:creationId xmlns:p14="http://schemas.microsoft.com/office/powerpoint/2010/main" val="885609335"/>
+        <p14:creationId xmlns:p14="http://schemas.microsoft.com/office/powerpoint/2010/main" val="700473687"/>
       </p:ext>
     </p:extLst>
   </p:cSld>

--- a/rapor/final_2026/deliverables/CS395_Presentation_EfeHan_Keles_25September2026.pptx
+++ b/rapor/final_2026/deliverables/CS395_Presentation_EfeHan_Keles_25September2026.pptx
@@ -2,27 +2,27 @@
 <file path=ppt/presentation.xml><?xml version="1.0" encoding="utf-8"?>
 <p:presentation xmlns:p="http://schemas.openxmlformats.org/presentationml/2006/main">
   <p:sldMasterIdLst>
-    <p:sldMasterId xmlns:r="http://schemas.openxmlformats.org/officeDocument/2006/relationships" id="2147483648" r:id="R4b50027b5dc348fc"/>
+    <p:sldMasterId xmlns:r="http://schemas.openxmlformats.org/officeDocument/2006/relationships" id="2147483648" r:id="R70d3a0bc2af641bd"/>
   </p:sldMasterIdLst>
   <p:notesMasterIdLst>
-    <p:notesMasterId xmlns:r="http://schemas.openxmlformats.org/officeDocument/2006/relationships" r:id="R2410f0b7ca774366"/>
+    <p:notesMasterId xmlns:r="http://schemas.openxmlformats.org/officeDocument/2006/relationships" r:id="Re8f7e74a60be40ab"/>
   </p:notesMasterIdLst>
   <p:sldIdLst>
-    <p:sldId xmlns:r="http://schemas.openxmlformats.org/officeDocument/2006/relationships" id="256" r:id="Rf81ce69d99be41be"/>
-    <p:sldId xmlns:r="http://schemas.openxmlformats.org/officeDocument/2006/relationships" id="257" r:id="R3453ef72a7c94f1d"/>
-    <p:sldId xmlns:r="http://schemas.openxmlformats.org/officeDocument/2006/relationships" id="258" r:id="Rfd30003958694b1f"/>
-    <p:sldId xmlns:r="http://schemas.openxmlformats.org/officeDocument/2006/relationships" id="259" r:id="Ra5943ae70502450d"/>
-    <p:sldId xmlns:r="http://schemas.openxmlformats.org/officeDocument/2006/relationships" id="260" r:id="R239fef931c454172"/>
-    <p:sldId xmlns:r="http://schemas.openxmlformats.org/officeDocument/2006/relationships" id="261" r:id="R5327489161ca4798"/>
-    <p:sldId xmlns:r="http://schemas.openxmlformats.org/officeDocument/2006/relationships" id="262" r:id="R53533de9b5a7495e"/>
-    <p:sldId xmlns:r="http://schemas.openxmlformats.org/officeDocument/2006/relationships" id="263" r:id="R816ca1bd16774908"/>
-    <p:sldId xmlns:r="http://schemas.openxmlformats.org/officeDocument/2006/relationships" id="264" r:id="Rfd0f89a8caaa490f"/>
-    <p:sldId xmlns:r="http://schemas.openxmlformats.org/officeDocument/2006/relationships" id="265" r:id="R256df6816a274d4c"/>
-    <p:sldId xmlns:r="http://schemas.openxmlformats.org/officeDocument/2006/relationships" id="266" r:id="R9b7aa8dc2ea44f45"/>
-    <p:sldId xmlns:r="http://schemas.openxmlformats.org/officeDocument/2006/relationships" id="267" r:id="Rac954695553c4c45"/>
-    <p:sldId xmlns:r="http://schemas.openxmlformats.org/officeDocument/2006/relationships" id="268" r:id="R083e2515ed2b4d93"/>
-    <p:sldId xmlns:r="http://schemas.openxmlformats.org/officeDocument/2006/relationships" id="269" r:id="Rbd36a15f496f4556"/>
-    <p:sldId xmlns:r="http://schemas.openxmlformats.org/officeDocument/2006/relationships" id="270" r:id="R025e0527d66c40c6"/>
+    <p:sldId xmlns:r="http://schemas.openxmlformats.org/officeDocument/2006/relationships" id="256" r:id="Rcce430cbb6344af5"/>
+    <p:sldId xmlns:r="http://schemas.openxmlformats.org/officeDocument/2006/relationships" id="257" r:id="R6ca2d0d20af646aa"/>
+    <p:sldId xmlns:r="http://schemas.openxmlformats.org/officeDocument/2006/relationships" id="258" r:id="R0eb1af215ab74161"/>
+    <p:sldId xmlns:r="http://schemas.openxmlformats.org/officeDocument/2006/relationships" id="259" r:id="R4011b5b4af584930"/>
+    <p:sldId xmlns:r="http://schemas.openxmlformats.org/officeDocument/2006/relationships" id="260" r:id="Re1e90e45824d45ac"/>
+    <p:sldId xmlns:r="http://schemas.openxmlformats.org/officeDocument/2006/relationships" id="261" r:id="Rcfde829d31cb4eae"/>
+    <p:sldId xmlns:r="http://schemas.openxmlformats.org/officeDocument/2006/relationships" id="262" r:id="R1d742d7d068944e5"/>
+    <p:sldId xmlns:r="http://schemas.openxmlformats.org/officeDocument/2006/relationships" id="263" r:id="Rb2e6a7a7cdeb4eb7"/>
+    <p:sldId xmlns:r="http://schemas.openxmlformats.org/officeDocument/2006/relationships" id="264" r:id="R19a68e677f454d78"/>
+    <p:sldId xmlns:r="http://schemas.openxmlformats.org/officeDocument/2006/relationships" id="265" r:id="Rc575cd7606984eb5"/>
+    <p:sldId xmlns:r="http://schemas.openxmlformats.org/officeDocument/2006/relationships" id="266" r:id="Rf0682ca192e84f6b"/>
+    <p:sldId xmlns:r="http://schemas.openxmlformats.org/officeDocument/2006/relationships" id="267" r:id="Rc5a274cfe7c744c9"/>
+    <p:sldId xmlns:r="http://schemas.openxmlformats.org/officeDocument/2006/relationships" id="268" r:id="R2e52018e748a4f65"/>
+    <p:sldId xmlns:r="http://schemas.openxmlformats.org/officeDocument/2006/relationships" id="269" r:id="Rf527a2f31d604ec6"/>
+    <p:sldId xmlns:r="http://schemas.openxmlformats.org/officeDocument/2006/relationships" id="270" r:id="Re9e484e6a1944e24"/>
   </p:sldIdLst>
   <p:sldSz cx="12192000" cy="6858000"/>
   <p:notesSz cx="6858000" cy="9144000"/>
@@ -466,7 +466,7 @@
           </a:p>
           <a:p xmlns:a="http://schemas.openxmlformats.org/drawingml/2006/main">
             <a:r>
-              <a:t>My supervisor was Önder Çelebi, Director of the Planning and Development Directorate. The submission date remains to be completed. My internship project was PixelProof, a research prototype for detecting evidence of AI generation in images. I will explain the problem, how the project changed after failures, what the current demo model achieved, and what remains unresolved. The main result is a working local demonstration with substantial improvement on a defined development collection. It is not a universally reliable authenticity detector. The approved internship lasted forty working days. This presentation covers the technical record available before the end of the internship.</a:t>
+              <a:t>My supervisor was Önder Çelebi, Director of the Planning and Development Directorate. My internship project was PixelProof, a research prototype for detecting evidence of AI generation in images. I will explain the problem, how the project changed after failures, what the current demo model achieved, and what remains unresolved. The main result is a working local demonstration with substantial improvement on a defined development collection. It is not a universally reliable authenticity detector. The approved internship lasted forty working days. This presentation covers the technical record available before the end of the internship.</a:t>
             </a:r>
           </a:p>
         </p:txBody>
@@ -546,7 +546,7 @@
           </a:p>
           <a:p xmlns:a="http://schemas.openxmlformats.org/drawingml/2006/main">
             <a:r>
-              <a:t>Model2 illustrates another generalization failure. The earlier head ranked edited pixels reasonably on the original placement, with pixel AUC around zero point seven four. When edits moved, that fell to about zero point five seven. Training on two placements partly recovered performance at the new location, but harmed the original location and increased the area wrongly highlighted in authentic images. Only sixteen consumed parent images and one editor were involved. The many transformed maps are not independent samples. Moving an edit also changes its content and generated output, so this is not a pure causal location experiment. Model2 remains separate from the active demo. Sources: E132 through E135.</a:t>
+              <a:t>Model2 illustrates another generalization failure. The earlier head ranked edited pixels reasonably on the original placement, with pixel AUC around zero point seven four. When edits moved, that fell to about zero point five seven. Training on two placements partly recovered performance at the new location, but harmed the original location and increased the area wrongly highlighted in authentic images. Only sixteen previously used original images and one editor were involved. The many transformed maps are not independent samples. Moving an edit also changes its content and generated output, so this is not a pure causal location experiment. Model2 remains separate from the active demo. Sources: E132 through E135.</a:t>
             </a:r>
           </a:p>
         </p:txBody>
@@ -1496,7 +1496,7 @@
           <a:lstStyle xmlns:a="http://schemas.openxmlformats.org/drawingml/2006/main"/>
           <a:p xmlns:a="http://schemas.openxmlformats.org/drawingml/2006/main">
             <a:r>
-              <a:t>Suggested time: 65 seconds.</a:t>
+              <a:t>Suggested time: 85 seconds.</a:t>
             </a:r>
           </a:p>
           <a:p xmlns:a="http://schemas.openxmlformats.org/drawingml/2006/main">
@@ -1506,7 +1506,7 @@
           </a:p>
           <a:p xmlns:a="http://schemas.openxmlformats.org/drawingml/2006/main">
             <a:r>
-              <a:t>The displayed number caused understandable confusion. It is a raw model score multiplied by one hundred, not a probability that a photograph is AI. There is no reason to impose a fifty-percent boundary. The inherited upper cut is approximately seven point nine four; the lower cut is approximately one point one five. An original score above the upper cut keeps an AI alert visible. Two low E92 views produce no clear AI evidence. Other cases remain uncertain, and disagreement can require review. The older reference is advisory and no longer vetoes two low E92 scores. The upper cut came from earlier calibration; the lower cut used consumed calibration and development observations. They are not fresh E92 calibration or universally optimal values. Guo et al. explain why calibration is a separate question.</a:t>
+              <a:t>The displayed number caused understandable confusion. It is a raw model score multiplied by one hundred, not a probability that a photograph is AI. There is no reason to impose a fifty-percent boundary. The inherited upper cut is approximately seven point nine four; the lower cut is approximately one point one five. An original score above the upper cut keeps an AI alert visible. Two low E92 views produce no clear AI evidence. Other cases remain uncertain, and disagreement can require review. The older reference is advisory and no longer vetoes two low E92 scores. The upper cut came from earlier calibration; the lower cut used previously inspected calibration and development images. They are not fresh E92 calibration or universally optimal values. On the reused development set, the combined website rule left twenty-one real images uncertain and gave no real image an AI alert. It alerted on one hundred fifty-nine AI images and left one uncertain. These are one-result-per-upload counts, unlike the separate-view scores in Figure 1. Guo et al. explain why calibration is a separate question.</a:t>
             </a:r>
           </a:p>
         </p:txBody>
@@ -1586,7 +1586,7 @@
           </a:p>
           <a:p xmlns:a="http://schemas.openxmlformats.org/drawingml/2006/main">
             <a:r>
-              <a:t>The earlier comprehensive E49 test had one thousand real and one thousand AI parents. E43 falsely flagged three hundred ninety-one real originals and four hundred ninety processed views, passing only eleven of twenty checks. Those are E43 results on a different population, not E92 accuracy. E92 did not pass the gate needed to open its E49 regression. Its twenty-out-of-twenty development milestone therefore does not repair or replace that final test. On the owner gallery, E92 produced nine false alerts in two hundred six unique real originals and eighteen after processing. This consumed collection mostly represents one phone. Later E102 reduced development processed false alerts from fourteen to twelve, preserving E92 detections, but retained the same E43-relative miss. It was not promoted. Separate source-fold calibration and source-pixel candidates also failed their requirements. The protected reserves remain unscored, without a verified balanced-final admission. Sources: evidence/e49_final_result.json, E92, E95, E102, E139, E146 and E151.</a:t>
+              <a:t>The earlier comprehensive E49 test had one thousand real and one thousand AI parents. E43 falsely flagged three hundred ninety-one real originals and four hundred ninety processed views, passing only eleven of twenty checks. Those are E43 results on a different population, not E92 accuracy. E92 did not pass the gate needed to open its E49 regression. Its twenty-out-of-twenty development milestone therefore does not repair or replace that final test. On the owner gallery, E92 produced nine false alerts in two hundred six unique real originals and eighteen after processing. This previously used collection mostly represents one phone. Later E102 reduced development processed false alerts from fourteen to twelve, preserving E92 detections, but retained the same E43-relative miss. It was not promoted. Separate source-fold calibration and source-pixel candidates also failed their requirements. The protected reserves remain unscored, without a verified balanced-final admission. Sources: evidence/e49_final_result.json, E92, E95, E102, E139, E146 and E151.</a:t>
             </a:r>
           </a:p>
         </p:txBody>
@@ -1654,7 +1654,7 @@
   </p:cSld>
   <p:clrMap bg1="lt1" tx1="dk1" bg2="lt2" tx2="dk2" accent1="accent1" accent2="accent2" accent3="accent3" accent4="accent4" accent5="accent5" accent6="accent6" hlink="hlink" folHlink="folHlink"/>
   <p:sldLayoutIdLst>
-    <p:sldLayoutId xmlns:r="http://schemas.openxmlformats.org/officeDocument/2006/relationships" id="2147483649" r:id="R6dc5444661294537"/>
+    <p:sldLayoutId xmlns:r="http://schemas.openxmlformats.org/officeDocument/2006/relationships" id="2147483649" r:id="R4668d79192cb4df2"/>
   </p:sldLayoutIdLst>
   <p:txStyles>
     <p:titleStyle>
@@ -2471,7 +2471,7 @@
           <p:cNvPr id="9" name="">
             <a:extLst xmlns:a="http://schemas.openxmlformats.org/drawingml/2006/main">
               <a:ext uri="{FF2B5EF4-FFF2-40B4-BE49-F238E27FC236}">
-                <a16:creationId xmlns:a16="http://schemas.microsoft.com/office/drawing/2014/main" id="{26BC09F2-CB33-4BBD-BDBE-CCB22BCCD2B2}"/>
+                <a16:creationId xmlns:a16="http://schemas.microsoft.com/office/drawing/2014/main" id="{FB166A2B-530E-4AF3-9D3C-E71FFB87C69D}"/>
               </a:ext>
             </a:extLst>
           </p:cNvPr>
@@ -2528,7 +2528,7 @@
           <p:cNvPr id="2" name="">
             <a:extLst xmlns:a="http://schemas.openxmlformats.org/drawingml/2006/main">
               <a:ext uri="{FF2B5EF4-FFF2-40B4-BE49-F238E27FC236}">
-                <a16:creationId xmlns:a16="http://schemas.microsoft.com/office/drawing/2014/main" id="{56B9CC4B-FF13-4D33-84DB-D8FA2F621F02}"/>
+                <a16:creationId xmlns:a16="http://schemas.microsoft.com/office/drawing/2014/main" id="{6C55F2F5-5FF1-45A9-84BE-8E5A9F1FB3EE}"/>
               </a:ext>
             </a:extLst>
           </p:cNvPr>
@@ -2585,7 +2585,7 @@
           <p:cNvPr id="3" name="">
             <a:extLst xmlns:a="http://schemas.openxmlformats.org/drawingml/2006/main">
               <a:ext uri="{FF2B5EF4-FFF2-40B4-BE49-F238E27FC236}">
-                <a16:creationId xmlns:a16="http://schemas.microsoft.com/office/drawing/2014/main" id="{1B375DD1-CBDC-4302-9319-BA2DAF1C260D}"/>
+                <a16:creationId xmlns:a16="http://schemas.microsoft.com/office/drawing/2014/main" id="{7FEC65D4-91E5-42DF-99CE-B6B7128459CC}"/>
               </a:ext>
             </a:extLst>
           </p:cNvPr>
@@ -2642,7 +2642,7 @@
           <p:cNvPr id="4" name="">
             <a:extLst xmlns:a="http://schemas.openxmlformats.org/drawingml/2006/main">
               <a:ext uri="{FF2B5EF4-FFF2-40B4-BE49-F238E27FC236}">
-                <a16:creationId xmlns:a16="http://schemas.microsoft.com/office/drawing/2014/main" id="{ADDDA529-B9CE-4168-9756-DEBCD1E539C4}"/>
+                <a16:creationId xmlns:a16="http://schemas.microsoft.com/office/drawing/2014/main" id="{49B7D6C1-48A6-4EDC-815C-29F4353D898E}"/>
               </a:ext>
             </a:extLst>
           </p:cNvPr>
@@ -2722,7 +2722,7 @@
           <p:cNvPr id="5" name="">
             <a:extLst xmlns:a="http://schemas.openxmlformats.org/drawingml/2006/main">
               <a:ext uri="{FF2B5EF4-FFF2-40B4-BE49-F238E27FC236}">
-                <a16:creationId xmlns:a16="http://schemas.microsoft.com/office/drawing/2014/main" id="{86BABC0E-C671-4BAF-AE91-8C4D811601B4}"/>
+                <a16:creationId xmlns:a16="http://schemas.microsoft.com/office/drawing/2014/main" id="{A07CC0DF-146F-4303-89A9-26A7A0AD4668}"/>
               </a:ext>
             </a:extLst>
           </p:cNvPr>
@@ -2779,7 +2779,7 @@
           <p:cNvPr id="6" name="">
             <a:extLst xmlns:a="http://schemas.openxmlformats.org/drawingml/2006/main">
               <a:ext uri="{FF2B5EF4-FFF2-40B4-BE49-F238E27FC236}">
-                <a16:creationId xmlns:a16="http://schemas.microsoft.com/office/drawing/2014/main" id="{FC6C349E-8B69-44C5-B3D6-CB83962D854D}"/>
+                <a16:creationId xmlns:a16="http://schemas.microsoft.com/office/drawing/2014/main" id="{494345B8-FB61-4E2A-BD11-8382926B5614}"/>
               </a:ext>
             </a:extLst>
           </p:cNvPr>
@@ -2836,7 +2836,7 @@
           <p:cNvPr id="7" name="">
             <a:extLst xmlns:a="http://schemas.openxmlformats.org/drawingml/2006/main">
               <a:ext uri="{FF2B5EF4-FFF2-40B4-BE49-F238E27FC236}">
-                <a16:creationId xmlns:a16="http://schemas.microsoft.com/office/drawing/2014/main" id="{C5D6847C-F8FF-4E5F-838F-BF5128EC71B8}"/>
+                <a16:creationId xmlns:a16="http://schemas.microsoft.com/office/drawing/2014/main" id="{021981EE-15F3-4B5F-B814-13DFC67F018C}"/>
               </a:ext>
             </a:extLst>
           </p:cNvPr>
@@ -2939,7 +2939,7 @@
           <p:cNvPr id="8" name="">
             <a:extLst xmlns:a="http://schemas.openxmlformats.org/drawingml/2006/main">
               <a:ext uri="{FF2B5EF4-FFF2-40B4-BE49-F238E27FC236}">
-                <a16:creationId xmlns:a16="http://schemas.microsoft.com/office/drawing/2014/main" id="{1DBEBECA-DC76-4993-92B2-B97A346160E1}"/>
+                <a16:creationId xmlns:a16="http://schemas.microsoft.com/office/drawing/2014/main" id="{D5BD5F44-7442-4601-91AD-9FEDDE36625E}"/>
               </a:ext>
             </a:extLst>
           </p:cNvPr>
@@ -2994,7 +2994,7 @@
     </p:spTree>
     <p:extLst>
       <p:ext uri="{BB962C8B-B14F-4D97-AF65-F5344CB8AC3E}">
-        <p14:creationId xmlns:p14="http://schemas.microsoft.com/office/powerpoint/2010/main" val="556894269"/>
+        <p14:creationId xmlns:p14="http://schemas.microsoft.com/office/powerpoint/2010/main" val="1304307628"/>
       </p:ext>
     </p:extLst>
   </p:cSld>
@@ -3025,7 +3025,7 @@
           <p:cNvPr id="8" name="">
             <a:extLst xmlns:a="http://schemas.openxmlformats.org/drawingml/2006/main">
               <a:ext uri="{FF2B5EF4-FFF2-40B4-BE49-F238E27FC236}">
-                <a16:creationId xmlns:a16="http://schemas.microsoft.com/office/drawing/2014/main" id="{E2A98C2A-840B-473F-AD17-DFD5EA11247F}"/>
+                <a16:creationId xmlns:a16="http://schemas.microsoft.com/office/drawing/2014/main" id="{C5E046B4-9255-4E7B-B0F5-C649BA8E924A}"/>
               </a:ext>
             </a:extLst>
           </p:cNvPr>
@@ -3082,7 +3082,7 @@
           <p:cNvPr id="2" name="">
             <a:extLst xmlns:a="http://schemas.openxmlformats.org/drawingml/2006/main">
               <a:ext uri="{FF2B5EF4-FFF2-40B4-BE49-F238E27FC236}">
-                <a16:creationId xmlns:a16="http://schemas.microsoft.com/office/drawing/2014/main" id="{1AA8361A-D8A5-4B35-9EE7-666845BFDF6F}"/>
+                <a16:creationId xmlns:a16="http://schemas.microsoft.com/office/drawing/2014/main" id="{223B576D-E29F-43CC-B088-F01FCECBE9FD}"/>
               </a:ext>
             </a:extLst>
           </p:cNvPr>
@@ -3139,7 +3139,7 @@
           <p:cNvPr id="3" name="">
             <a:extLst xmlns:a="http://schemas.openxmlformats.org/drawingml/2006/main">
               <a:ext uri="{FF2B5EF4-FFF2-40B4-BE49-F238E27FC236}">
-                <a16:creationId xmlns:a16="http://schemas.microsoft.com/office/drawing/2014/main" id="{9DC56862-A017-4D51-BDEB-C767F30E4DFA}"/>
+                <a16:creationId xmlns:a16="http://schemas.microsoft.com/office/drawing/2014/main" id="{86ED0D93-CB31-48DD-BA23-20DF0C23CE16}"/>
               </a:ext>
             </a:extLst>
           </p:cNvPr>
@@ -3196,7 +3196,7 @@
           <p:cNvPr id="4" name="">
             <a:extLst xmlns:a="http://schemas.openxmlformats.org/drawingml/2006/main">
               <a:ext uri="{FF2B5EF4-FFF2-40B4-BE49-F238E27FC236}">
-                <a16:creationId xmlns:a16="http://schemas.microsoft.com/office/drawing/2014/main" id="{2451B2BC-7162-4ADA-A8DB-CC1E9B075143}"/>
+                <a16:creationId xmlns:a16="http://schemas.microsoft.com/office/drawing/2014/main" id="{056EF289-02DE-42BC-A342-E5DEF3664B0B}"/>
               </a:ext>
             </a:extLst>
           </p:cNvPr>
@@ -3243,7 +3243,7 @@
                 <a:ea typeface="Times New Roman"/>
                 <a:cs typeface="Times New Roman"/>
               </a:rPr>
-              <a:t>Table 4 compares edit placement on 16 consumed parents.</a:t>
+              <a:t>Table 4 compares edit placement on 16 previously used images.</a:t>
             </a:r>
           </a:p>
         </p:txBody>
@@ -3253,7 +3253,7 @@
           <p:cNvPr id="5" name="">
             <a:extLst xmlns:a="http://schemas.openxmlformats.org/drawingml/2006/main">
               <a:ext uri="{FF2B5EF4-FFF2-40B4-BE49-F238E27FC236}">
-                <a16:creationId xmlns:a16="http://schemas.microsoft.com/office/drawing/2014/main" id="{334F5685-1266-461F-9134-E974D71CE3FD}"/>
+                <a16:creationId xmlns:a16="http://schemas.microsoft.com/office/drawing/2014/main" id="{A1973177-7B7D-4468-8DB1-957479B4B662}"/>
               </a:ext>
             </a:extLst>
           </p:cNvPr>
@@ -3452,7 +3452,7 @@
                           <a:ea typeface="Times New Roman"/>
                           <a:cs typeface="Times New Roman"/>
                         </a:rPr>
-                        <a:t>0.742</a:t>
+                        <a:t>0.74</a:t>
                       </a:r>
                     </a:p>
                   </a:txBody>
@@ -3479,7 +3479,7 @@
                           <a:ea typeface="Times New Roman"/>
                           <a:cs typeface="Times New Roman"/>
                         </a:rPr>
-                        <a:t>0.699</a:t>
+                        <a:t>0.70</a:t>
                       </a:r>
                     </a:p>
                   </a:txBody>
@@ -3535,7 +3535,7 @@
                           <a:ea typeface="Times New Roman"/>
                           <a:cs typeface="Times New Roman"/>
                         </a:rPr>
-                        <a:t>0.566</a:t>
+                        <a:t>0.57</a:t>
                       </a:r>
                     </a:p>
                   </a:txBody>
@@ -3562,7 +3562,7 @@
                           <a:ea typeface="Times New Roman"/>
                           <a:cs typeface="Times New Roman"/>
                         </a:rPr>
-                        <a:t>0.638</a:t>
+                        <a:t>0.64</a:t>
                       </a:r>
                     </a:p>
                   </a:txBody>
@@ -3665,7 +3665,7 @@
           <p:cNvPr id="7" name="">
             <a:extLst xmlns:a="http://schemas.openxmlformats.org/drawingml/2006/main">
               <a:ext uri="{FF2B5EF4-FFF2-40B4-BE49-F238E27FC236}">
-                <a16:creationId xmlns:a16="http://schemas.microsoft.com/office/drawing/2014/main" id="{CB8F3345-F183-4BAF-A6D4-861BA608580E}"/>
+                <a16:creationId xmlns:a16="http://schemas.microsoft.com/office/drawing/2014/main" id="{F0EF8159-8022-4144-A21A-EF4CFADFFBD6}"/>
               </a:ext>
             </a:extLst>
           </p:cNvPr>
@@ -3720,7 +3720,7 @@
     </p:spTree>
     <p:extLst>
       <p:ext uri="{BB962C8B-B14F-4D97-AF65-F5344CB8AC3E}">
-        <p14:creationId xmlns:p14="http://schemas.microsoft.com/office/powerpoint/2010/main" val="996669859"/>
+        <p14:creationId xmlns:p14="http://schemas.microsoft.com/office/powerpoint/2010/main" val="1776009922"/>
       </p:ext>
     </p:extLst>
   </p:cSld>
@@ -3751,7 +3751,7 @@
           <p:cNvPr id="9" name="">
             <a:extLst xmlns:a="http://schemas.openxmlformats.org/drawingml/2006/main">
               <a:ext uri="{FF2B5EF4-FFF2-40B4-BE49-F238E27FC236}">
-                <a16:creationId xmlns:a16="http://schemas.microsoft.com/office/drawing/2014/main" id="{5033755C-E581-46DC-8182-46A61C090109}"/>
+                <a16:creationId xmlns:a16="http://schemas.microsoft.com/office/drawing/2014/main" id="{007576B1-3888-4DE0-9B52-CA9367E143A5}"/>
               </a:ext>
             </a:extLst>
           </p:cNvPr>
@@ -3808,7 +3808,7 @@
           <p:cNvPr id="2" name="">
             <a:extLst xmlns:a="http://schemas.openxmlformats.org/drawingml/2006/main">
               <a:ext uri="{FF2B5EF4-FFF2-40B4-BE49-F238E27FC236}">
-                <a16:creationId xmlns:a16="http://schemas.microsoft.com/office/drawing/2014/main" id="{B4FA5238-9700-447B-B9BE-603710D246A0}"/>
+                <a16:creationId xmlns:a16="http://schemas.microsoft.com/office/drawing/2014/main" id="{90765BA5-1F51-4C62-ADB5-A3F7113DDF6B}"/>
               </a:ext>
             </a:extLst>
           </p:cNvPr>
@@ -3865,7 +3865,7 @@
           <p:cNvPr id="3" name="">
             <a:extLst xmlns:a="http://schemas.openxmlformats.org/drawingml/2006/main">
               <a:ext uri="{FF2B5EF4-FFF2-40B4-BE49-F238E27FC236}">
-                <a16:creationId xmlns:a16="http://schemas.microsoft.com/office/drawing/2014/main" id="{75350301-8BFF-4F1D-AC6C-F4ABC0A80726}"/>
+                <a16:creationId xmlns:a16="http://schemas.microsoft.com/office/drawing/2014/main" id="{3F22C789-CD30-4F6B-9966-09D151E8D4A7}"/>
               </a:ext>
             </a:extLst>
           </p:cNvPr>
@@ -3922,7 +3922,7 @@
           <p:cNvPr id="4" name="">
             <a:extLst xmlns:a="http://schemas.openxmlformats.org/drawingml/2006/main">
               <a:ext uri="{FF2B5EF4-FFF2-40B4-BE49-F238E27FC236}">
-                <a16:creationId xmlns:a16="http://schemas.microsoft.com/office/drawing/2014/main" id="{94867E04-2497-46D9-96BE-9EB057DFCBF4}"/>
+                <a16:creationId xmlns:a16="http://schemas.microsoft.com/office/drawing/2014/main" id="{47AF2A2E-121C-4655-B584-9535BE2C51AA}"/>
               </a:ext>
             </a:extLst>
           </p:cNvPr>
@@ -3979,7 +3979,7 @@
           <p:cNvPr id="5" name="">
             <a:extLst xmlns:a="http://schemas.openxmlformats.org/drawingml/2006/main">
               <a:ext uri="{FF2B5EF4-FFF2-40B4-BE49-F238E27FC236}">
-                <a16:creationId xmlns:a16="http://schemas.microsoft.com/office/drawing/2014/main" id="{0D764829-D315-438F-A33B-AF1CBCA92063}"/>
+                <a16:creationId xmlns:a16="http://schemas.microsoft.com/office/drawing/2014/main" id="{2DED0615-830F-4031-90FC-6E4F1AB9DDD4}"/>
               </a:ext>
             </a:extLst>
           </p:cNvPr>
@@ -4036,7 +4036,7 @@
           <p:cNvPr id="6" name="">
             <a:extLst xmlns:a="http://schemas.openxmlformats.org/drawingml/2006/main">
               <a:ext uri="{FF2B5EF4-FFF2-40B4-BE49-F238E27FC236}">
-                <a16:creationId xmlns:a16="http://schemas.microsoft.com/office/drawing/2014/main" id="{F7600A14-1B70-498B-BA12-8D17FCC0865B}"/>
+                <a16:creationId xmlns:a16="http://schemas.microsoft.com/office/drawing/2014/main" id="{34CBE74B-951C-47E9-A575-90B8C577DA2E}"/>
               </a:ext>
             </a:extLst>
           </p:cNvPr>
@@ -4093,7 +4093,7 @@
           <p:cNvPr id="7" name="">
             <a:extLst xmlns:a="http://schemas.openxmlformats.org/drawingml/2006/main">
               <a:ext uri="{FF2B5EF4-FFF2-40B4-BE49-F238E27FC236}">
-                <a16:creationId xmlns:a16="http://schemas.microsoft.com/office/drawing/2014/main" id="{E1109A79-8A68-41CA-952E-59A13A705CA3}"/>
+                <a16:creationId xmlns:a16="http://schemas.microsoft.com/office/drawing/2014/main" id="{EFC7C14C-7FFD-4E03-BAF4-D77BA3C79668}"/>
               </a:ext>
             </a:extLst>
           </p:cNvPr>
@@ -4173,7 +4173,7 @@
           <p:cNvPr id="8" name="">
             <a:extLst xmlns:a="http://schemas.openxmlformats.org/drawingml/2006/main">
               <a:ext uri="{FF2B5EF4-FFF2-40B4-BE49-F238E27FC236}">
-                <a16:creationId xmlns:a16="http://schemas.microsoft.com/office/drawing/2014/main" id="{5FDE47A7-6877-44DA-BB4A-806F7224AEF1}"/>
+                <a16:creationId xmlns:a16="http://schemas.microsoft.com/office/drawing/2014/main" id="{667AE9D1-20E0-4D6B-9C6A-D4C9A252339F}"/>
               </a:ext>
             </a:extLst>
           </p:cNvPr>
@@ -4228,7 +4228,7 @@
     </p:spTree>
     <p:extLst>
       <p:ext uri="{BB962C8B-B14F-4D97-AF65-F5344CB8AC3E}">
-        <p14:creationId xmlns:p14="http://schemas.microsoft.com/office/powerpoint/2010/main" val="184521776"/>
+        <p14:creationId xmlns:p14="http://schemas.microsoft.com/office/powerpoint/2010/main" val="883476266"/>
       </p:ext>
     </p:extLst>
   </p:cSld>
@@ -4259,7 +4259,7 @@
           <p:cNvPr id="8" name="">
             <a:extLst xmlns:a="http://schemas.openxmlformats.org/drawingml/2006/main">
               <a:ext uri="{FF2B5EF4-FFF2-40B4-BE49-F238E27FC236}">
-                <a16:creationId xmlns:a16="http://schemas.microsoft.com/office/drawing/2014/main" id="{8EDE7FD6-DB55-46FA-9E0C-AAD01CD07FBD}"/>
+                <a16:creationId xmlns:a16="http://schemas.microsoft.com/office/drawing/2014/main" id="{B3C62919-9DF6-4E39-9B7C-AE19F9783D2B}"/>
               </a:ext>
             </a:extLst>
           </p:cNvPr>
@@ -4316,7 +4316,7 @@
           <p:cNvPr id="2" name="">
             <a:extLst xmlns:a="http://schemas.openxmlformats.org/drawingml/2006/main">
               <a:ext uri="{FF2B5EF4-FFF2-40B4-BE49-F238E27FC236}">
-                <a16:creationId xmlns:a16="http://schemas.microsoft.com/office/drawing/2014/main" id="{C1FD05E1-5C4B-4687-993D-1038E83EAA95}"/>
+                <a16:creationId xmlns:a16="http://schemas.microsoft.com/office/drawing/2014/main" id="{79FC138A-D3C6-4011-B2E9-F3FC0B27A605}"/>
               </a:ext>
             </a:extLst>
           </p:cNvPr>
@@ -4373,7 +4373,7 @@
           <p:cNvPr id="3" name="">
             <a:extLst xmlns:a="http://schemas.openxmlformats.org/drawingml/2006/main">
               <a:ext uri="{FF2B5EF4-FFF2-40B4-BE49-F238E27FC236}">
-                <a16:creationId xmlns:a16="http://schemas.microsoft.com/office/drawing/2014/main" id="{634BD51F-28D2-4C30-942E-38574404649D}"/>
+                <a16:creationId xmlns:a16="http://schemas.microsoft.com/office/drawing/2014/main" id="{6CD1FC8B-D05A-4D3A-962D-D2A5D3FF31F3}"/>
               </a:ext>
             </a:extLst>
           </p:cNvPr>
@@ -4430,7 +4430,7 @@
           <p:cNvPr id="4" name="">
             <a:extLst xmlns:a="http://schemas.openxmlformats.org/drawingml/2006/main">
               <a:ext uri="{FF2B5EF4-FFF2-40B4-BE49-F238E27FC236}">
-                <a16:creationId xmlns:a16="http://schemas.microsoft.com/office/drawing/2014/main" id="{0BE29BEB-B651-466D-A8F2-4687AF3AC349}"/>
+                <a16:creationId xmlns:a16="http://schemas.microsoft.com/office/drawing/2014/main" id="{C7445EBD-55AE-43B6-A578-E4913AD938B1}"/>
               </a:ext>
             </a:extLst>
           </p:cNvPr>
@@ -4487,7 +4487,7 @@
           <p:cNvPr id="5" name="">
             <a:extLst xmlns:a="http://schemas.openxmlformats.org/drawingml/2006/main">
               <a:ext uri="{FF2B5EF4-FFF2-40B4-BE49-F238E27FC236}">
-                <a16:creationId xmlns:a16="http://schemas.microsoft.com/office/drawing/2014/main" id="{1A106478-3164-47C3-B63C-A4AEF58A5822}"/>
+                <a16:creationId xmlns:a16="http://schemas.microsoft.com/office/drawing/2014/main" id="{82F70BEA-E5CA-4998-A8C7-2D8865081962}"/>
               </a:ext>
             </a:extLst>
           </p:cNvPr>
@@ -4846,7 +4846,7 @@
           <p:cNvPr id="7" name="">
             <a:extLst xmlns:a="http://schemas.openxmlformats.org/drawingml/2006/main">
               <a:ext uri="{FF2B5EF4-FFF2-40B4-BE49-F238E27FC236}">
-                <a16:creationId xmlns:a16="http://schemas.microsoft.com/office/drawing/2014/main" id="{B0E71C98-8F71-4567-A930-66EE339D37E7}"/>
+                <a16:creationId xmlns:a16="http://schemas.microsoft.com/office/drawing/2014/main" id="{E0C69E88-3245-4919-B4C1-9C5F404CAD7E}"/>
               </a:ext>
             </a:extLst>
           </p:cNvPr>
@@ -4901,7 +4901,7 @@
     </p:spTree>
     <p:extLst>
       <p:ext uri="{BB962C8B-B14F-4D97-AF65-F5344CB8AC3E}">
-        <p14:creationId xmlns:p14="http://schemas.microsoft.com/office/powerpoint/2010/main" val="596323619"/>
+        <p14:creationId xmlns:p14="http://schemas.microsoft.com/office/powerpoint/2010/main" val="1294065440"/>
       </p:ext>
     </p:extLst>
   </p:cSld>
@@ -4932,7 +4932,7 @@
           <p:cNvPr id="8" name="">
             <a:extLst xmlns:a="http://schemas.openxmlformats.org/drawingml/2006/main">
               <a:ext uri="{FF2B5EF4-FFF2-40B4-BE49-F238E27FC236}">
-                <a16:creationId xmlns:a16="http://schemas.microsoft.com/office/drawing/2014/main" id="{60F1C58E-08EA-4FC3-A889-F1C24C56BBD4}"/>
+                <a16:creationId xmlns:a16="http://schemas.microsoft.com/office/drawing/2014/main" id="{87A2C693-AA90-4576-9674-906D797477FB}"/>
               </a:ext>
             </a:extLst>
           </p:cNvPr>
@@ -4989,7 +4989,7 @@
           <p:cNvPr id="2" name="">
             <a:extLst xmlns:a="http://schemas.openxmlformats.org/drawingml/2006/main">
               <a:ext uri="{FF2B5EF4-FFF2-40B4-BE49-F238E27FC236}">
-                <a16:creationId xmlns:a16="http://schemas.microsoft.com/office/drawing/2014/main" id="{A2F16137-8AA3-497F-A88E-8E1543383B31}"/>
+                <a16:creationId xmlns:a16="http://schemas.microsoft.com/office/drawing/2014/main" id="{5CFB7A4A-E4EE-4E8D-B636-08B2A278BB48}"/>
               </a:ext>
             </a:extLst>
           </p:cNvPr>
@@ -5046,7 +5046,7 @@
           <p:cNvPr id="3" name="">
             <a:extLst xmlns:a="http://schemas.openxmlformats.org/drawingml/2006/main">
               <a:ext uri="{FF2B5EF4-FFF2-40B4-BE49-F238E27FC236}">
-                <a16:creationId xmlns:a16="http://schemas.microsoft.com/office/drawing/2014/main" id="{D8D64108-D85C-4C93-A573-90B5DBB03616}"/>
+                <a16:creationId xmlns:a16="http://schemas.microsoft.com/office/drawing/2014/main" id="{06F0DCE1-47FA-4D88-8013-C8D3FF007AE6}"/>
               </a:ext>
             </a:extLst>
           </p:cNvPr>
@@ -5103,7 +5103,7 @@
           <p:cNvPr id="4" name="">
             <a:extLst xmlns:a="http://schemas.openxmlformats.org/drawingml/2006/main">
               <a:ext uri="{FF2B5EF4-FFF2-40B4-BE49-F238E27FC236}">
-                <a16:creationId xmlns:a16="http://schemas.microsoft.com/office/drawing/2014/main" id="{C354D4CC-BF9C-4A27-8F4B-F0CCCED60B95}"/>
+                <a16:creationId xmlns:a16="http://schemas.microsoft.com/office/drawing/2014/main" id="{9A1B4EAC-D9FB-4E87-B4AD-340E8472225B}"/>
               </a:ext>
             </a:extLst>
           </p:cNvPr>
@@ -5160,7 +5160,7 @@
           <p:cNvPr id="5" name="">
             <a:extLst xmlns:a="http://schemas.openxmlformats.org/drawingml/2006/main">
               <a:ext uri="{FF2B5EF4-FFF2-40B4-BE49-F238E27FC236}">
-                <a16:creationId xmlns:a16="http://schemas.microsoft.com/office/drawing/2014/main" id="{229B7F14-A45A-416A-9E96-48B9A13FD664}"/>
+                <a16:creationId xmlns:a16="http://schemas.microsoft.com/office/drawing/2014/main" id="{69EE475F-5CA7-4669-B355-53AE0ACCE5F9}"/>
               </a:ext>
             </a:extLst>
           </p:cNvPr>
@@ -5217,7 +5217,7 @@
           <p:cNvPr id="6" name="">
             <a:extLst xmlns:a="http://schemas.openxmlformats.org/drawingml/2006/main">
               <a:ext uri="{FF2B5EF4-FFF2-40B4-BE49-F238E27FC236}">
-                <a16:creationId xmlns:a16="http://schemas.microsoft.com/office/drawing/2014/main" id="{EEC10EFB-9548-41D6-B400-1C8B95EBF5B0}"/>
+                <a16:creationId xmlns:a16="http://schemas.microsoft.com/office/drawing/2014/main" id="{576248D3-F3BC-4029-BC95-BDE8CBCAD2CE}"/>
               </a:ext>
             </a:extLst>
           </p:cNvPr>
@@ -5274,7 +5274,7 @@
           <p:cNvPr id="7" name="">
             <a:extLst xmlns:a="http://schemas.openxmlformats.org/drawingml/2006/main">
               <a:ext uri="{FF2B5EF4-FFF2-40B4-BE49-F238E27FC236}">
-                <a16:creationId xmlns:a16="http://schemas.microsoft.com/office/drawing/2014/main" id="{6BF8BBF2-B232-4CD5-A81F-5E7096525566}"/>
+                <a16:creationId xmlns:a16="http://schemas.microsoft.com/office/drawing/2014/main" id="{D13C22BB-8108-4995-9917-39C04E430C88}"/>
               </a:ext>
             </a:extLst>
           </p:cNvPr>
@@ -5329,7 +5329,7 @@
     </p:spTree>
     <p:extLst>
       <p:ext uri="{BB962C8B-B14F-4D97-AF65-F5344CB8AC3E}">
-        <p14:creationId xmlns:p14="http://schemas.microsoft.com/office/powerpoint/2010/main" val="478076009"/>
+        <p14:creationId xmlns:p14="http://schemas.microsoft.com/office/powerpoint/2010/main" val="1607062347"/>
       </p:ext>
     </p:extLst>
   </p:cSld>
@@ -5360,7 +5360,7 @@
           <p:cNvPr id="16" name="">
             <a:extLst xmlns:a="http://schemas.openxmlformats.org/drawingml/2006/main">
               <a:ext uri="{FF2B5EF4-FFF2-40B4-BE49-F238E27FC236}">
-                <a16:creationId xmlns:a16="http://schemas.microsoft.com/office/drawing/2014/main" id="{44BD6011-CD63-406D-8622-2B80C3C2B059}"/>
+                <a16:creationId xmlns:a16="http://schemas.microsoft.com/office/drawing/2014/main" id="{E4FD3F81-41C4-48EC-A716-C47BA22C72BD}"/>
               </a:ext>
             </a:extLst>
           </p:cNvPr>
@@ -5417,7 +5417,7 @@
           <p:cNvPr id="2" name="">
             <a:extLst xmlns:a="http://schemas.openxmlformats.org/drawingml/2006/main">
               <a:ext uri="{FF2B5EF4-FFF2-40B4-BE49-F238E27FC236}">
-                <a16:creationId xmlns:a16="http://schemas.microsoft.com/office/drawing/2014/main" id="{B9FDF67D-10A4-4191-936C-F6B7646D865F}"/>
+                <a16:creationId xmlns:a16="http://schemas.microsoft.com/office/drawing/2014/main" id="{5FD40CA6-6B13-4623-B38D-3A64E40830EF}"/>
               </a:ext>
             </a:extLst>
           </p:cNvPr>
@@ -5474,7 +5474,7 @@
           <p:cNvPr id="3" name="">
             <a:extLst xmlns:a="http://schemas.openxmlformats.org/drawingml/2006/main">
               <a:ext uri="{FF2B5EF4-FFF2-40B4-BE49-F238E27FC236}">
-                <a16:creationId xmlns:a16="http://schemas.microsoft.com/office/drawing/2014/main" id="{CCC3AB83-881F-481E-8774-735FBE24AEA8}"/>
+                <a16:creationId xmlns:a16="http://schemas.microsoft.com/office/drawing/2014/main" id="{B24430AB-281C-4822-9FC4-3EFB60594C3F}"/>
               </a:ext>
             </a:extLst>
           </p:cNvPr>
@@ -5531,7 +5531,7 @@
           <p:cNvPr id="4" name="">
             <a:extLst xmlns:a="http://schemas.openxmlformats.org/drawingml/2006/main">
               <a:ext uri="{FF2B5EF4-FFF2-40B4-BE49-F238E27FC236}">
-                <a16:creationId xmlns:a16="http://schemas.microsoft.com/office/drawing/2014/main" id="{9C2593A9-16EF-47CE-A409-7430A00D4D72}"/>
+                <a16:creationId xmlns:a16="http://schemas.microsoft.com/office/drawing/2014/main" id="{C6904938-DF35-4DB9-81C0-062D3A1192EB}"/>
               </a:ext>
             </a:extLst>
           </p:cNvPr>
@@ -5588,7 +5588,7 @@
           <p:cNvPr id="5" name="">
             <a:extLst xmlns:a="http://schemas.openxmlformats.org/drawingml/2006/main">
               <a:ext uri="{FF2B5EF4-FFF2-40B4-BE49-F238E27FC236}">
-                <a16:creationId xmlns:a16="http://schemas.microsoft.com/office/drawing/2014/main" id="{7AE98E3E-8E86-43A0-8A4D-4D17C324FAB2}"/>
+                <a16:creationId xmlns:a16="http://schemas.microsoft.com/office/drawing/2014/main" id="{964EEE18-A910-4C3F-A28B-46DAD6BF769F}"/>
               </a:ext>
             </a:extLst>
           </p:cNvPr>
@@ -5645,7 +5645,7 @@
           <p:cNvPr id="6" name="">
             <a:extLst xmlns:a="http://schemas.openxmlformats.org/drawingml/2006/main">
               <a:ext uri="{FF2B5EF4-FFF2-40B4-BE49-F238E27FC236}">
-                <a16:creationId xmlns:a16="http://schemas.microsoft.com/office/drawing/2014/main" id="{CC317283-A875-482B-B138-2C1072858DD3}"/>
+                <a16:creationId xmlns:a16="http://schemas.microsoft.com/office/drawing/2014/main" id="{18CF92AE-9345-4F03-8F92-8C898566FF2F}"/>
               </a:ext>
             </a:extLst>
           </p:cNvPr>
@@ -5702,7 +5702,7 @@
           <p:cNvPr id="7" name="">
             <a:extLst xmlns:a="http://schemas.openxmlformats.org/drawingml/2006/main">
               <a:ext uri="{FF2B5EF4-FFF2-40B4-BE49-F238E27FC236}">
-                <a16:creationId xmlns:a16="http://schemas.microsoft.com/office/drawing/2014/main" id="{A10CB75D-A988-4AD2-AA52-04B23C239E9E}"/>
+                <a16:creationId xmlns:a16="http://schemas.microsoft.com/office/drawing/2014/main" id="{6200EC4F-6BDE-4A19-8C60-8EEB7469F83E}"/>
               </a:ext>
             </a:extLst>
           </p:cNvPr>
@@ -5759,7 +5759,7 @@
           <p:cNvPr id="8" name="">
             <a:extLst xmlns:a="http://schemas.openxmlformats.org/drawingml/2006/main">
               <a:ext uri="{FF2B5EF4-FFF2-40B4-BE49-F238E27FC236}">
-                <a16:creationId xmlns:a16="http://schemas.microsoft.com/office/drawing/2014/main" id="{A6D844C3-FA8D-4F2F-ADAD-36A833ED063B}"/>
+                <a16:creationId xmlns:a16="http://schemas.microsoft.com/office/drawing/2014/main" id="{865FB08A-E882-423E-8D0D-865D52F9BC96}"/>
               </a:ext>
             </a:extLst>
           </p:cNvPr>
@@ -5816,7 +5816,7 @@
           <p:cNvPr id="9" name="">
             <a:extLst xmlns:a="http://schemas.openxmlformats.org/drawingml/2006/main">
               <a:ext uri="{FF2B5EF4-FFF2-40B4-BE49-F238E27FC236}">
-                <a16:creationId xmlns:a16="http://schemas.microsoft.com/office/drawing/2014/main" id="{AD582EB2-960B-4BD1-B60E-6ABB9C3DDDA0}"/>
+                <a16:creationId xmlns:a16="http://schemas.microsoft.com/office/drawing/2014/main" id="{942727BD-D559-454D-975F-70C8DF90F53C}"/>
               </a:ext>
             </a:extLst>
           </p:cNvPr>
@@ -5873,7 +5873,7 @@
           <p:cNvPr id="10" name="">
             <a:extLst xmlns:a="http://schemas.openxmlformats.org/drawingml/2006/main">
               <a:ext uri="{FF2B5EF4-FFF2-40B4-BE49-F238E27FC236}">
-                <a16:creationId xmlns:a16="http://schemas.microsoft.com/office/drawing/2014/main" id="{ED40EA19-B66E-4D3B-AA18-4E07B98CD9DE}"/>
+                <a16:creationId xmlns:a16="http://schemas.microsoft.com/office/drawing/2014/main" id="{95110BA2-ECB4-4619-98FF-04515A3EA9FE}"/>
               </a:ext>
             </a:extLst>
           </p:cNvPr>
@@ -5930,7 +5930,7 @@
           <p:cNvPr id="11" name="">
             <a:extLst xmlns:a="http://schemas.openxmlformats.org/drawingml/2006/main">
               <a:ext uri="{FF2B5EF4-FFF2-40B4-BE49-F238E27FC236}">
-                <a16:creationId xmlns:a16="http://schemas.microsoft.com/office/drawing/2014/main" id="{B3255190-A96E-454C-BB31-3768D1B42451}"/>
+                <a16:creationId xmlns:a16="http://schemas.microsoft.com/office/drawing/2014/main" id="{708C4404-74EA-4D1A-BD86-879CE59B6C5B}"/>
               </a:ext>
             </a:extLst>
           </p:cNvPr>
@@ -5987,7 +5987,7 @@
           <p:cNvPr id="12" name="">
             <a:extLst xmlns:a="http://schemas.openxmlformats.org/drawingml/2006/main">
               <a:ext uri="{FF2B5EF4-FFF2-40B4-BE49-F238E27FC236}">
-                <a16:creationId xmlns:a16="http://schemas.microsoft.com/office/drawing/2014/main" id="{95B01668-8C1D-4F54-849F-F5871CC76FE9}"/>
+                <a16:creationId xmlns:a16="http://schemas.microsoft.com/office/drawing/2014/main" id="{5565B5D6-4499-4BD8-82CC-42A2C21B4ADC}"/>
               </a:ext>
             </a:extLst>
           </p:cNvPr>
@@ -6044,7 +6044,7 @@
           <p:cNvPr id="13" name="">
             <a:extLst xmlns:a="http://schemas.openxmlformats.org/drawingml/2006/main">
               <a:ext uri="{FF2B5EF4-FFF2-40B4-BE49-F238E27FC236}">
-                <a16:creationId xmlns:a16="http://schemas.microsoft.com/office/drawing/2014/main" id="{9EFD0661-C577-4173-A765-AD3F45FE23DD}"/>
+                <a16:creationId xmlns:a16="http://schemas.microsoft.com/office/drawing/2014/main" id="{ACF33A76-F797-4319-9590-FE010743660C}"/>
               </a:ext>
             </a:extLst>
           </p:cNvPr>
@@ -6101,7 +6101,7 @@
           <p:cNvPr id="14" name="">
             <a:extLst xmlns:a="http://schemas.openxmlformats.org/drawingml/2006/main">
               <a:ext uri="{FF2B5EF4-FFF2-40B4-BE49-F238E27FC236}">
-                <a16:creationId xmlns:a16="http://schemas.microsoft.com/office/drawing/2014/main" id="{655176E4-7BCF-4E2A-A4C5-C5FF7E1F7172}"/>
+                <a16:creationId xmlns:a16="http://schemas.microsoft.com/office/drawing/2014/main" id="{D59B2585-A839-4B40-AD4B-5A464AEF354D}"/>
               </a:ext>
             </a:extLst>
           </p:cNvPr>
@@ -6158,7 +6158,7 @@
           <p:cNvPr id="15" name="">
             <a:extLst xmlns:a="http://schemas.openxmlformats.org/drawingml/2006/main">
               <a:ext uri="{FF2B5EF4-FFF2-40B4-BE49-F238E27FC236}">
-                <a16:creationId xmlns:a16="http://schemas.microsoft.com/office/drawing/2014/main" id="{E5FE20D1-263A-48AE-AFF8-B4B9D0B92F32}"/>
+                <a16:creationId xmlns:a16="http://schemas.microsoft.com/office/drawing/2014/main" id="{ECE26939-F239-4041-A429-7C1787CDD544}"/>
               </a:ext>
             </a:extLst>
           </p:cNvPr>
@@ -6213,7 +6213,7 @@
     </p:spTree>
     <p:extLst>
       <p:ext uri="{BB962C8B-B14F-4D97-AF65-F5344CB8AC3E}">
-        <p14:creationId xmlns:p14="http://schemas.microsoft.com/office/powerpoint/2010/main" val="17887357"/>
+        <p14:creationId xmlns:p14="http://schemas.microsoft.com/office/powerpoint/2010/main" val="757423999"/>
       </p:ext>
     </p:extLst>
   </p:cSld>
@@ -6244,7 +6244,7 @@
           <p:cNvPr id="16" name="">
             <a:extLst xmlns:a="http://schemas.openxmlformats.org/drawingml/2006/main">
               <a:ext uri="{FF2B5EF4-FFF2-40B4-BE49-F238E27FC236}">
-                <a16:creationId xmlns:a16="http://schemas.microsoft.com/office/drawing/2014/main" id="{B576CC0E-3337-411C-8DC7-897792474B1C}"/>
+                <a16:creationId xmlns:a16="http://schemas.microsoft.com/office/drawing/2014/main" id="{7F33CEB6-52F1-4AFB-B7BC-C12D7CDE1A1F}"/>
               </a:ext>
             </a:extLst>
           </p:cNvPr>
@@ -6301,7 +6301,7 @@
           <p:cNvPr id="2" name="">
             <a:extLst xmlns:a="http://schemas.openxmlformats.org/drawingml/2006/main">
               <a:ext uri="{FF2B5EF4-FFF2-40B4-BE49-F238E27FC236}">
-                <a16:creationId xmlns:a16="http://schemas.microsoft.com/office/drawing/2014/main" id="{7A07067C-5DB0-4E89-80E7-4FBBD91631C2}"/>
+                <a16:creationId xmlns:a16="http://schemas.microsoft.com/office/drawing/2014/main" id="{3378B711-B7B7-46E7-B561-D8AFAE300236}"/>
               </a:ext>
             </a:extLst>
           </p:cNvPr>
@@ -6358,7 +6358,7 @@
           <p:cNvPr id="3" name="">
             <a:extLst xmlns:a="http://schemas.openxmlformats.org/drawingml/2006/main">
               <a:ext uri="{FF2B5EF4-FFF2-40B4-BE49-F238E27FC236}">
-                <a16:creationId xmlns:a16="http://schemas.microsoft.com/office/drawing/2014/main" id="{0BB5ED55-6BD1-4759-92D9-EB162EC96E2C}"/>
+                <a16:creationId xmlns:a16="http://schemas.microsoft.com/office/drawing/2014/main" id="{4992CFE9-2ED5-48C5-9181-41AA0B411F22}"/>
               </a:ext>
             </a:extLst>
           </p:cNvPr>
@@ -6415,7 +6415,7 @@
           <p:cNvPr id="4" name="">
             <a:extLst xmlns:a="http://schemas.openxmlformats.org/drawingml/2006/main">
               <a:ext uri="{FF2B5EF4-FFF2-40B4-BE49-F238E27FC236}">
-                <a16:creationId xmlns:a16="http://schemas.microsoft.com/office/drawing/2014/main" id="{BAEBF8E9-688A-433A-9A19-FE6109A87D6F}"/>
+                <a16:creationId xmlns:a16="http://schemas.microsoft.com/office/drawing/2014/main" id="{6E341C46-ADF3-4406-A744-880677773DC9}"/>
               </a:ext>
             </a:extLst>
           </p:cNvPr>
@@ -6472,7 +6472,7 @@
           <p:cNvPr id="5" name="">
             <a:extLst xmlns:a="http://schemas.openxmlformats.org/drawingml/2006/main">
               <a:ext uri="{FF2B5EF4-FFF2-40B4-BE49-F238E27FC236}">
-                <a16:creationId xmlns:a16="http://schemas.microsoft.com/office/drawing/2014/main" id="{78B97A90-E5AA-4031-99C6-FA91EA4921FB}"/>
+                <a16:creationId xmlns:a16="http://schemas.microsoft.com/office/drawing/2014/main" id="{D988C31B-C9A6-4EB7-BCAA-B6FA0A9A2A82}"/>
               </a:ext>
             </a:extLst>
           </p:cNvPr>
@@ -6529,7 +6529,7 @@
           <p:cNvPr id="6" name="">
             <a:extLst xmlns:a="http://schemas.openxmlformats.org/drawingml/2006/main">
               <a:ext uri="{FF2B5EF4-FFF2-40B4-BE49-F238E27FC236}">
-                <a16:creationId xmlns:a16="http://schemas.microsoft.com/office/drawing/2014/main" id="{5537FB2B-3827-46B9-98CD-FACC8AF8A106}"/>
+                <a16:creationId xmlns:a16="http://schemas.microsoft.com/office/drawing/2014/main" id="{587F0D1B-541D-4F50-B209-9972280382CA}"/>
               </a:ext>
             </a:extLst>
           </p:cNvPr>
@@ -6586,7 +6586,7 @@
           <p:cNvPr id="7" name="">
             <a:extLst xmlns:a="http://schemas.openxmlformats.org/drawingml/2006/main">
               <a:ext uri="{FF2B5EF4-FFF2-40B4-BE49-F238E27FC236}">
-                <a16:creationId xmlns:a16="http://schemas.microsoft.com/office/drawing/2014/main" id="{5EEA2952-30AF-494B-9F28-557B59854874}"/>
+                <a16:creationId xmlns:a16="http://schemas.microsoft.com/office/drawing/2014/main" id="{326E8243-99C8-47A6-A844-2DDCB018576E}"/>
               </a:ext>
             </a:extLst>
           </p:cNvPr>
@@ -6643,7 +6643,7 @@
           <p:cNvPr id="8" name="">
             <a:extLst xmlns:a="http://schemas.openxmlformats.org/drawingml/2006/main">
               <a:ext uri="{FF2B5EF4-FFF2-40B4-BE49-F238E27FC236}">
-                <a16:creationId xmlns:a16="http://schemas.microsoft.com/office/drawing/2014/main" id="{37D0BF1E-C647-4F8C-81FF-3F4BAED8756E}"/>
+                <a16:creationId xmlns:a16="http://schemas.microsoft.com/office/drawing/2014/main" id="{7BB6DB07-86CF-4658-996E-0A61FA5B98C0}"/>
               </a:ext>
             </a:extLst>
           </p:cNvPr>
@@ -6700,7 +6700,7 @@
           <p:cNvPr id="9" name="">
             <a:extLst xmlns:a="http://schemas.openxmlformats.org/drawingml/2006/main">
               <a:ext uri="{FF2B5EF4-FFF2-40B4-BE49-F238E27FC236}">
-                <a16:creationId xmlns:a16="http://schemas.microsoft.com/office/drawing/2014/main" id="{4C17586D-AD50-4D19-A2FD-A77B56752E2F}"/>
+                <a16:creationId xmlns:a16="http://schemas.microsoft.com/office/drawing/2014/main" id="{85C4BAF8-6BB4-4AFC-A470-D74E93568BB4}"/>
               </a:ext>
             </a:extLst>
           </p:cNvPr>
@@ -6757,7 +6757,7 @@
           <p:cNvPr id="10" name="">
             <a:extLst xmlns:a="http://schemas.openxmlformats.org/drawingml/2006/main">
               <a:ext uri="{FF2B5EF4-FFF2-40B4-BE49-F238E27FC236}">
-                <a16:creationId xmlns:a16="http://schemas.microsoft.com/office/drawing/2014/main" id="{200021EE-0FA0-4751-9A83-2EF29C38FE3E}"/>
+                <a16:creationId xmlns:a16="http://schemas.microsoft.com/office/drawing/2014/main" id="{51DFD487-BD6F-476C-9863-48EE793FE930}"/>
               </a:ext>
             </a:extLst>
           </p:cNvPr>
@@ -6814,7 +6814,7 @@
           <p:cNvPr id="11" name="">
             <a:extLst xmlns:a="http://schemas.openxmlformats.org/drawingml/2006/main">
               <a:ext uri="{FF2B5EF4-FFF2-40B4-BE49-F238E27FC236}">
-                <a16:creationId xmlns:a16="http://schemas.microsoft.com/office/drawing/2014/main" id="{1F01B2FD-638D-4772-8DBF-0B08B47E3133}"/>
+                <a16:creationId xmlns:a16="http://schemas.microsoft.com/office/drawing/2014/main" id="{96CAB5C4-7308-452F-AF27-703D747236A1}"/>
               </a:ext>
             </a:extLst>
           </p:cNvPr>
@@ -6871,7 +6871,7 @@
           <p:cNvPr id="12" name="">
             <a:extLst xmlns:a="http://schemas.openxmlformats.org/drawingml/2006/main">
               <a:ext uri="{FF2B5EF4-FFF2-40B4-BE49-F238E27FC236}">
-                <a16:creationId xmlns:a16="http://schemas.microsoft.com/office/drawing/2014/main" id="{0E0F42EF-C327-4CC0-9538-BC220950C74E}"/>
+                <a16:creationId xmlns:a16="http://schemas.microsoft.com/office/drawing/2014/main" id="{15953DB5-E863-4B4A-BD93-E7211AB0DF0A}"/>
               </a:ext>
             </a:extLst>
           </p:cNvPr>
@@ -6928,7 +6928,7 @@
           <p:cNvPr id="13" name="">
             <a:extLst xmlns:a="http://schemas.openxmlformats.org/drawingml/2006/main">
               <a:ext uri="{FF2B5EF4-FFF2-40B4-BE49-F238E27FC236}">
-                <a16:creationId xmlns:a16="http://schemas.microsoft.com/office/drawing/2014/main" id="{742E5989-B373-42E4-ACF3-7E0A056F96D3}"/>
+                <a16:creationId xmlns:a16="http://schemas.microsoft.com/office/drawing/2014/main" id="{0D851590-92B4-4381-9BB9-561DCB8B4943}"/>
               </a:ext>
             </a:extLst>
           </p:cNvPr>
@@ -6985,7 +6985,7 @@
           <p:cNvPr id="14" name="">
             <a:extLst xmlns:a="http://schemas.openxmlformats.org/drawingml/2006/main">
               <a:ext uri="{FF2B5EF4-FFF2-40B4-BE49-F238E27FC236}">
-                <a16:creationId xmlns:a16="http://schemas.microsoft.com/office/drawing/2014/main" id="{9FE25105-E280-448F-9025-1B19E77EB1D5}"/>
+                <a16:creationId xmlns:a16="http://schemas.microsoft.com/office/drawing/2014/main" id="{F55DF402-82A1-4880-A947-00DF66810821}"/>
               </a:ext>
             </a:extLst>
           </p:cNvPr>
@@ -7042,7 +7042,7 @@
           <p:cNvPr id="15" name="">
             <a:extLst xmlns:a="http://schemas.openxmlformats.org/drawingml/2006/main">
               <a:ext uri="{FF2B5EF4-FFF2-40B4-BE49-F238E27FC236}">
-                <a16:creationId xmlns:a16="http://schemas.microsoft.com/office/drawing/2014/main" id="{02B3C55C-EB47-4F19-B433-8AD381975BA2}"/>
+                <a16:creationId xmlns:a16="http://schemas.microsoft.com/office/drawing/2014/main" id="{5559C3FB-CD75-4A41-B2DE-ECB828CEC124}"/>
               </a:ext>
             </a:extLst>
           </p:cNvPr>
@@ -7097,7 +7097,7 @@
     </p:spTree>
     <p:extLst>
       <p:ext uri="{BB962C8B-B14F-4D97-AF65-F5344CB8AC3E}">
-        <p14:creationId xmlns:p14="http://schemas.microsoft.com/office/powerpoint/2010/main" val="1519549327"/>
+        <p14:creationId xmlns:p14="http://schemas.microsoft.com/office/powerpoint/2010/main" val="326885571"/>
       </p:ext>
     </p:extLst>
   </p:cSld>
@@ -7128,7 +7128,7 @@
           <p:cNvPr id="8" name="">
             <a:extLst xmlns:a="http://schemas.openxmlformats.org/drawingml/2006/main">
               <a:ext uri="{FF2B5EF4-FFF2-40B4-BE49-F238E27FC236}">
-                <a16:creationId xmlns:a16="http://schemas.microsoft.com/office/drawing/2014/main" id="{16285753-C105-4166-8E1C-458C086855D3}"/>
+                <a16:creationId xmlns:a16="http://schemas.microsoft.com/office/drawing/2014/main" id="{CFF5BF1B-E537-408F-A902-8A790635DCDC}"/>
               </a:ext>
             </a:extLst>
           </p:cNvPr>
@@ -7185,7 +7185,7 @@
           <p:cNvPr id="2" name="">
             <a:extLst xmlns:a="http://schemas.openxmlformats.org/drawingml/2006/main">
               <a:ext uri="{FF2B5EF4-FFF2-40B4-BE49-F238E27FC236}">
-                <a16:creationId xmlns:a16="http://schemas.microsoft.com/office/drawing/2014/main" id="{370C4DE6-F7E5-4AA3-A816-1E85C79686E8}"/>
+                <a16:creationId xmlns:a16="http://schemas.microsoft.com/office/drawing/2014/main" id="{2D6584DC-812B-4EB8-9C2B-7611E78CE60B}"/>
               </a:ext>
             </a:extLst>
           </p:cNvPr>
@@ -7242,7 +7242,7 @@
           <p:cNvPr id="3" name="">
             <a:extLst xmlns:a="http://schemas.openxmlformats.org/drawingml/2006/main">
               <a:ext uri="{FF2B5EF4-FFF2-40B4-BE49-F238E27FC236}">
-                <a16:creationId xmlns:a16="http://schemas.microsoft.com/office/drawing/2014/main" id="{5C1D25EF-7D9A-4239-895A-178AC12D8B16}"/>
+                <a16:creationId xmlns:a16="http://schemas.microsoft.com/office/drawing/2014/main" id="{438ABA7B-E77A-409E-876E-B4813BDCF2A3}"/>
               </a:ext>
             </a:extLst>
           </p:cNvPr>
@@ -7299,7 +7299,7 @@
           <p:cNvPr id="4" name="">
             <a:extLst xmlns:a="http://schemas.openxmlformats.org/drawingml/2006/main">
               <a:ext uri="{FF2B5EF4-FFF2-40B4-BE49-F238E27FC236}">
-                <a16:creationId xmlns:a16="http://schemas.microsoft.com/office/drawing/2014/main" id="{EB738AB4-6BA0-4F9C-9532-2799A85E0E02}"/>
+                <a16:creationId xmlns:a16="http://schemas.microsoft.com/office/drawing/2014/main" id="{90491854-7B8F-4994-B528-ACC64B083260}"/>
               </a:ext>
             </a:extLst>
           </p:cNvPr>
@@ -7356,7 +7356,7 @@
           <p:cNvPr id="5" name="">
             <a:extLst xmlns:a="http://schemas.openxmlformats.org/drawingml/2006/main">
               <a:ext uri="{FF2B5EF4-FFF2-40B4-BE49-F238E27FC236}">
-                <a16:creationId xmlns:a16="http://schemas.microsoft.com/office/drawing/2014/main" id="{0B17EEA3-056B-4F32-851F-3B252BB3860D}"/>
+                <a16:creationId xmlns:a16="http://schemas.microsoft.com/office/drawing/2014/main" id="{57813CB6-3227-4914-9637-8F04ED741770}"/>
               </a:ext>
             </a:extLst>
           </p:cNvPr>
@@ -7436,7 +7436,7 @@
           <p:cNvPr id="6" name="">
             <a:extLst xmlns:a="http://schemas.openxmlformats.org/drawingml/2006/main">
               <a:ext uri="{FF2B5EF4-FFF2-40B4-BE49-F238E27FC236}">
-                <a16:creationId xmlns:a16="http://schemas.microsoft.com/office/drawing/2014/main" id="{914C4CA9-6D84-4924-A944-D0A94B302CD7}"/>
+                <a16:creationId xmlns:a16="http://schemas.microsoft.com/office/drawing/2014/main" id="{EA21690E-C645-460F-BEBC-05615852211B}"/>
               </a:ext>
             </a:extLst>
           </p:cNvPr>
@@ -7493,7 +7493,7 @@
           <p:cNvPr id="7" name="">
             <a:extLst xmlns:a="http://schemas.openxmlformats.org/drawingml/2006/main">
               <a:ext uri="{FF2B5EF4-FFF2-40B4-BE49-F238E27FC236}">
-                <a16:creationId xmlns:a16="http://schemas.microsoft.com/office/drawing/2014/main" id="{A12DF876-4BFB-41A9-A501-ECE935AFCE30}"/>
+                <a16:creationId xmlns:a16="http://schemas.microsoft.com/office/drawing/2014/main" id="{F565EFB6-CD34-4C17-9531-E3B58CBD7BBA}"/>
               </a:ext>
             </a:extLst>
           </p:cNvPr>
@@ -7548,7 +7548,7 @@
     </p:spTree>
     <p:extLst>
       <p:ext uri="{BB962C8B-B14F-4D97-AF65-F5344CB8AC3E}">
-        <p14:creationId xmlns:p14="http://schemas.microsoft.com/office/powerpoint/2010/main" val="1684253119"/>
+        <p14:creationId xmlns:p14="http://schemas.microsoft.com/office/powerpoint/2010/main" val="1772102396"/>
       </p:ext>
     </p:extLst>
   </p:cSld>
@@ -7579,7 +7579,7 @@
           <p:cNvPr id="8" name="">
             <a:extLst xmlns:a="http://schemas.openxmlformats.org/drawingml/2006/main">
               <a:ext uri="{FF2B5EF4-FFF2-40B4-BE49-F238E27FC236}">
-                <a16:creationId xmlns:a16="http://schemas.microsoft.com/office/drawing/2014/main" id="{CEDCBCB8-DF0C-4535-AA1B-431525AC99F1}"/>
+                <a16:creationId xmlns:a16="http://schemas.microsoft.com/office/drawing/2014/main" id="{7C9335FA-EBF5-48CB-A458-FBF81A5F6296}"/>
               </a:ext>
             </a:extLst>
           </p:cNvPr>
@@ -7636,7 +7636,7 @@
           <p:cNvPr id="2" name="">
             <a:extLst xmlns:a="http://schemas.openxmlformats.org/drawingml/2006/main">
               <a:ext uri="{FF2B5EF4-FFF2-40B4-BE49-F238E27FC236}">
-                <a16:creationId xmlns:a16="http://schemas.microsoft.com/office/drawing/2014/main" id="{32474150-D274-4206-936A-54B0308AF764}"/>
+                <a16:creationId xmlns:a16="http://schemas.microsoft.com/office/drawing/2014/main" id="{5B24FE3E-E8BF-4439-819D-AFF74784DD4F}"/>
               </a:ext>
             </a:extLst>
           </p:cNvPr>
@@ -7693,7 +7693,7 @@
           <p:cNvPr id="3" name="">
             <a:extLst xmlns:a="http://schemas.openxmlformats.org/drawingml/2006/main">
               <a:ext uri="{FF2B5EF4-FFF2-40B4-BE49-F238E27FC236}">
-                <a16:creationId xmlns:a16="http://schemas.microsoft.com/office/drawing/2014/main" id="{4701C6E2-D230-4F15-B9DB-EDD309235BC7}"/>
+                <a16:creationId xmlns:a16="http://schemas.microsoft.com/office/drawing/2014/main" id="{7F4937DF-4AB3-445D-90A1-F4220425F930}"/>
               </a:ext>
             </a:extLst>
           </p:cNvPr>
@@ -7750,7 +7750,7 @@
           <p:cNvPr id="4" name="">
             <a:extLst xmlns:a="http://schemas.openxmlformats.org/drawingml/2006/main">
               <a:ext uri="{FF2B5EF4-FFF2-40B4-BE49-F238E27FC236}">
-                <a16:creationId xmlns:a16="http://schemas.microsoft.com/office/drawing/2014/main" id="{9D0B164D-228E-4BB7-B8AF-33CCA4BF953E}"/>
+                <a16:creationId xmlns:a16="http://schemas.microsoft.com/office/drawing/2014/main" id="{F6FD96CD-3D09-42A7-AC89-891B17AF14C6}"/>
               </a:ext>
             </a:extLst>
           </p:cNvPr>
@@ -7807,7 +7807,7 @@
           <p:cNvPr id="5" name="">
             <a:extLst xmlns:a="http://schemas.openxmlformats.org/drawingml/2006/main">
               <a:ext uri="{FF2B5EF4-FFF2-40B4-BE49-F238E27FC236}">
-                <a16:creationId xmlns:a16="http://schemas.microsoft.com/office/drawing/2014/main" id="{F9495593-189D-41B9-B21C-4C746CB7E6CF}"/>
+                <a16:creationId xmlns:a16="http://schemas.microsoft.com/office/drawing/2014/main" id="{697D9E78-C594-417D-89EC-3A2391ABF0F2}"/>
               </a:ext>
             </a:extLst>
           </p:cNvPr>
@@ -8136,7 +8136,7 @@
           <p:cNvPr id="7" name="">
             <a:extLst xmlns:a="http://schemas.openxmlformats.org/drawingml/2006/main">
               <a:ext uri="{FF2B5EF4-FFF2-40B4-BE49-F238E27FC236}">
-                <a16:creationId xmlns:a16="http://schemas.microsoft.com/office/drawing/2014/main" id="{5290C5DC-6D1A-421E-AB4B-F61122F47977}"/>
+                <a16:creationId xmlns:a16="http://schemas.microsoft.com/office/drawing/2014/main" id="{94947671-CF57-4306-8766-9DD5374DC499}"/>
               </a:ext>
             </a:extLst>
           </p:cNvPr>
@@ -8214,7 +8214,7 @@
     </p:spTree>
     <p:extLst>
       <p:ext uri="{BB962C8B-B14F-4D97-AF65-F5344CB8AC3E}">
-        <p14:creationId xmlns:p14="http://schemas.microsoft.com/office/powerpoint/2010/main" val="391638179"/>
+        <p14:creationId xmlns:p14="http://schemas.microsoft.com/office/powerpoint/2010/main" val="9358665"/>
       </p:ext>
     </p:extLst>
   </p:cSld>
@@ -8245,7 +8245,7 @@
           <p:cNvPr id="8" name="">
             <a:extLst xmlns:a="http://schemas.openxmlformats.org/drawingml/2006/main">
               <a:ext uri="{FF2B5EF4-FFF2-40B4-BE49-F238E27FC236}">
-                <a16:creationId xmlns:a16="http://schemas.microsoft.com/office/drawing/2014/main" id="{5A652CA3-5057-4C68-B181-17BC68907AFA}"/>
+                <a16:creationId xmlns:a16="http://schemas.microsoft.com/office/drawing/2014/main" id="{31FA1B33-72E0-4444-8947-168217973B2C}"/>
               </a:ext>
             </a:extLst>
           </p:cNvPr>
@@ -8302,7 +8302,7 @@
           <p:cNvPr id="2" name="">
             <a:extLst xmlns:a="http://schemas.openxmlformats.org/drawingml/2006/main">
               <a:ext uri="{FF2B5EF4-FFF2-40B4-BE49-F238E27FC236}">
-                <a16:creationId xmlns:a16="http://schemas.microsoft.com/office/drawing/2014/main" id="{51A40D40-609E-46F0-8758-523EBAF1B8C5}"/>
+                <a16:creationId xmlns:a16="http://schemas.microsoft.com/office/drawing/2014/main" id="{3B1D052D-C3AA-45C8-8E5B-35F2D34BA52C}"/>
               </a:ext>
             </a:extLst>
           </p:cNvPr>
@@ -8359,7 +8359,7 @@
           <p:cNvPr id="3" name="">
             <a:extLst xmlns:a="http://schemas.openxmlformats.org/drawingml/2006/main">
               <a:ext uri="{FF2B5EF4-FFF2-40B4-BE49-F238E27FC236}">
-                <a16:creationId xmlns:a16="http://schemas.microsoft.com/office/drawing/2014/main" id="{2DD8ED0F-030E-41A3-BF66-C75E33A708AA}"/>
+                <a16:creationId xmlns:a16="http://schemas.microsoft.com/office/drawing/2014/main" id="{4A6742DB-AAFA-4D10-A16E-73FE10374A21}"/>
               </a:ext>
             </a:extLst>
           </p:cNvPr>
@@ -8416,7 +8416,7 @@
           <p:cNvPr id="4" name="">
             <a:extLst xmlns:a="http://schemas.openxmlformats.org/drawingml/2006/main">
               <a:ext uri="{FF2B5EF4-FFF2-40B4-BE49-F238E27FC236}">
-                <a16:creationId xmlns:a16="http://schemas.microsoft.com/office/drawing/2014/main" id="{CE54562A-1E67-4811-BC20-416445806451}"/>
+                <a16:creationId xmlns:a16="http://schemas.microsoft.com/office/drawing/2014/main" id="{008DF8F4-BA21-4953-90EE-72484D77AFFC}"/>
               </a:ext>
             </a:extLst>
           </p:cNvPr>
@@ -8496,7 +8496,7 @@
           <p:cNvPr id="5" name="">
             <a:extLst xmlns:a="http://schemas.openxmlformats.org/drawingml/2006/main">
               <a:ext uri="{FF2B5EF4-FFF2-40B4-BE49-F238E27FC236}">
-                <a16:creationId xmlns:a16="http://schemas.microsoft.com/office/drawing/2014/main" id="{70C53561-2300-4EFC-81EF-D55646327C0E}"/>
+                <a16:creationId xmlns:a16="http://schemas.microsoft.com/office/drawing/2014/main" id="{AB5BD666-B69E-4EBD-85EF-E0C1414E5FE8}"/>
               </a:ext>
             </a:extLst>
           </p:cNvPr>
@@ -8576,7 +8576,7 @@
           <p:cNvPr id="6" name="">
             <a:extLst xmlns:a="http://schemas.openxmlformats.org/drawingml/2006/main">
               <a:ext uri="{FF2B5EF4-FFF2-40B4-BE49-F238E27FC236}">
-                <a16:creationId xmlns:a16="http://schemas.microsoft.com/office/drawing/2014/main" id="{17FB0DE5-D3A3-4040-A3CE-C80D52A4687E}"/>
+                <a16:creationId xmlns:a16="http://schemas.microsoft.com/office/drawing/2014/main" id="{5A82FC9B-56B2-4FA8-9403-8CC3A45ADE6D}"/>
               </a:ext>
             </a:extLst>
           </p:cNvPr>
@@ -8656,7 +8656,7 @@
           <p:cNvPr id="7" name="">
             <a:extLst xmlns:a="http://schemas.openxmlformats.org/drawingml/2006/main">
               <a:ext uri="{FF2B5EF4-FFF2-40B4-BE49-F238E27FC236}">
-                <a16:creationId xmlns:a16="http://schemas.microsoft.com/office/drawing/2014/main" id="{7DBAE706-3A14-4C53-B17A-E1A561FE850D}"/>
+                <a16:creationId xmlns:a16="http://schemas.microsoft.com/office/drawing/2014/main" id="{BC8BDC0A-C041-450D-B525-C3454E9058F2}"/>
               </a:ext>
             </a:extLst>
           </p:cNvPr>
@@ -8711,7 +8711,7 @@
     </p:spTree>
     <p:extLst>
       <p:ext uri="{BB962C8B-B14F-4D97-AF65-F5344CB8AC3E}">
-        <p14:creationId xmlns:p14="http://schemas.microsoft.com/office/powerpoint/2010/main" val="610090670"/>
+        <p14:creationId xmlns:p14="http://schemas.microsoft.com/office/powerpoint/2010/main" val="365767161"/>
       </p:ext>
     </p:extLst>
   </p:cSld>
@@ -8742,7 +8742,7 @@
           <p:cNvPr id="9" name="">
             <a:extLst xmlns:a="http://schemas.openxmlformats.org/drawingml/2006/main">
               <a:ext uri="{FF2B5EF4-FFF2-40B4-BE49-F238E27FC236}">
-                <a16:creationId xmlns:a16="http://schemas.microsoft.com/office/drawing/2014/main" id="{B7F1B9F8-9BA6-4B51-AB9C-F6C65F0862AC}"/>
+                <a16:creationId xmlns:a16="http://schemas.microsoft.com/office/drawing/2014/main" id="{4EB67CC3-6F21-4366-9E53-CC0527E704DD}"/>
               </a:ext>
             </a:extLst>
           </p:cNvPr>
@@ -8799,7 +8799,7 @@
           <p:cNvPr id="2" name="">
             <a:extLst xmlns:a="http://schemas.openxmlformats.org/drawingml/2006/main">
               <a:ext uri="{FF2B5EF4-FFF2-40B4-BE49-F238E27FC236}">
-                <a16:creationId xmlns:a16="http://schemas.microsoft.com/office/drawing/2014/main" id="{9CA268EB-3A1C-4700-99B9-E9A7263AB5E3}"/>
+                <a16:creationId xmlns:a16="http://schemas.microsoft.com/office/drawing/2014/main" id="{1A25B4C4-4B44-460D-9BD3-E68C7682ED81}"/>
               </a:ext>
             </a:extLst>
           </p:cNvPr>
@@ -8856,7 +8856,7 @@
           <p:cNvPr id="3" name="">
             <a:extLst xmlns:a="http://schemas.openxmlformats.org/drawingml/2006/main">
               <a:ext uri="{FF2B5EF4-FFF2-40B4-BE49-F238E27FC236}">
-                <a16:creationId xmlns:a16="http://schemas.microsoft.com/office/drawing/2014/main" id="{CBC44FB3-FAFE-43C7-BAA1-6F6D8B70E078}"/>
+                <a16:creationId xmlns:a16="http://schemas.microsoft.com/office/drawing/2014/main" id="{E9DB0B39-A14C-4439-ADDB-8A08AAAB16F7}"/>
               </a:ext>
             </a:extLst>
           </p:cNvPr>
@@ -8913,7 +8913,7 @@
           <p:cNvPr id="4" name="">
             <a:extLst xmlns:a="http://schemas.openxmlformats.org/drawingml/2006/main">
               <a:ext uri="{FF2B5EF4-FFF2-40B4-BE49-F238E27FC236}">
-                <a16:creationId xmlns:a16="http://schemas.microsoft.com/office/drawing/2014/main" id="{C4B41740-AD7F-43E1-A942-EA784AE4D9F7}"/>
+                <a16:creationId xmlns:a16="http://schemas.microsoft.com/office/drawing/2014/main" id="{874A924B-6E37-4050-B920-9CBA608F9133}"/>
               </a:ext>
             </a:extLst>
           </p:cNvPr>
@@ -8970,7 +8970,7 @@
           <p:cNvPr id="5" name="">
             <a:extLst xmlns:a="http://schemas.openxmlformats.org/drawingml/2006/main">
               <a:ext uri="{FF2B5EF4-FFF2-40B4-BE49-F238E27FC236}">
-                <a16:creationId xmlns:a16="http://schemas.microsoft.com/office/drawing/2014/main" id="{584FCB02-CC3A-4EAC-9B27-71D748A54ABA}"/>
+                <a16:creationId xmlns:a16="http://schemas.microsoft.com/office/drawing/2014/main" id="{30FE3D32-C443-41BD-A314-EA4555DA7765}"/>
               </a:ext>
             </a:extLst>
           </p:cNvPr>
@@ -9027,7 +9027,7 @@
           <p:cNvPr id="6" name="">
             <a:extLst xmlns:a="http://schemas.openxmlformats.org/drawingml/2006/main">
               <a:ext uri="{FF2B5EF4-FFF2-40B4-BE49-F238E27FC236}">
-                <a16:creationId xmlns:a16="http://schemas.microsoft.com/office/drawing/2014/main" id="{20BA766E-2BB0-4ADC-A9A1-7F07C64334B4}"/>
+                <a16:creationId xmlns:a16="http://schemas.microsoft.com/office/drawing/2014/main" id="{A3FCC9FE-69B1-4C2D-B519-2A9D9AA356A4}"/>
               </a:ext>
             </a:extLst>
           </p:cNvPr>
@@ -9084,7 +9084,7 @@
           <p:cNvPr id="7" name="">
             <a:extLst xmlns:a="http://schemas.openxmlformats.org/drawingml/2006/main">
               <a:ext uri="{FF2B5EF4-FFF2-40B4-BE49-F238E27FC236}">
-                <a16:creationId xmlns:a16="http://schemas.microsoft.com/office/drawing/2014/main" id="{F3B48406-B911-4494-801E-BBEA6E5847A9}"/>
+                <a16:creationId xmlns:a16="http://schemas.microsoft.com/office/drawing/2014/main" id="{EC6383A8-4CF8-4EFC-BCA2-4B06439BA802}"/>
               </a:ext>
             </a:extLst>
           </p:cNvPr>
@@ -9141,7 +9141,7 @@
           <p:cNvPr id="8" name="">
             <a:extLst xmlns:a="http://schemas.openxmlformats.org/drawingml/2006/main">
               <a:ext uri="{FF2B5EF4-FFF2-40B4-BE49-F238E27FC236}">
-                <a16:creationId xmlns:a16="http://schemas.microsoft.com/office/drawing/2014/main" id="{EA7241F4-A0D2-4A72-9648-24CE7AC6E85D}"/>
+                <a16:creationId xmlns:a16="http://schemas.microsoft.com/office/drawing/2014/main" id="{BB35F9D9-0722-4EC1-A6D1-7D120A618696}"/>
               </a:ext>
             </a:extLst>
           </p:cNvPr>
@@ -9196,7 +9196,7 @@
     </p:spTree>
     <p:extLst>
       <p:ext uri="{BB962C8B-B14F-4D97-AF65-F5344CB8AC3E}">
-        <p14:creationId xmlns:p14="http://schemas.microsoft.com/office/powerpoint/2010/main" val="296796229"/>
+        <p14:creationId xmlns:p14="http://schemas.microsoft.com/office/powerpoint/2010/main" val="1743881956"/>
       </p:ext>
     </p:extLst>
   </p:cSld>
@@ -9227,7 +9227,7 @@
           <p:cNvPr id="8" name="">
             <a:extLst xmlns:a="http://schemas.openxmlformats.org/drawingml/2006/main">
               <a:ext uri="{FF2B5EF4-FFF2-40B4-BE49-F238E27FC236}">
-                <a16:creationId xmlns:a16="http://schemas.microsoft.com/office/drawing/2014/main" id="{36CBCBCA-4EE9-4DE0-9F03-007813C93A71}"/>
+                <a16:creationId xmlns:a16="http://schemas.microsoft.com/office/drawing/2014/main" id="{F8F7E501-5DA7-4A8F-AB1A-47AF430F589F}"/>
               </a:ext>
             </a:extLst>
           </p:cNvPr>
@@ -9284,7 +9284,7 @@
           <p:cNvPr id="2" name="">
             <a:extLst xmlns:a="http://schemas.openxmlformats.org/drawingml/2006/main">
               <a:ext uri="{FF2B5EF4-FFF2-40B4-BE49-F238E27FC236}">
-                <a16:creationId xmlns:a16="http://schemas.microsoft.com/office/drawing/2014/main" id="{877A3B0C-1515-42CB-9657-4560CA16B7BA}"/>
+                <a16:creationId xmlns:a16="http://schemas.microsoft.com/office/drawing/2014/main" id="{7D6068EE-781E-4F9E-9517-45778DC5190B}"/>
               </a:ext>
             </a:extLst>
           </p:cNvPr>
@@ -9341,7 +9341,7 @@
           <p:cNvPr id="3" name="">
             <a:extLst xmlns:a="http://schemas.openxmlformats.org/drawingml/2006/main">
               <a:ext uri="{FF2B5EF4-FFF2-40B4-BE49-F238E27FC236}">
-                <a16:creationId xmlns:a16="http://schemas.microsoft.com/office/drawing/2014/main" id="{8A0486C1-4A6D-4026-88A9-57271AADD6A4}"/>
+                <a16:creationId xmlns:a16="http://schemas.microsoft.com/office/drawing/2014/main" id="{9F5EB096-1049-42AE-8822-847BE44842FC}"/>
               </a:ext>
             </a:extLst>
           </p:cNvPr>
@@ -9398,7 +9398,7 @@
           <p:cNvPr id="4" name="">
             <a:extLst xmlns:a="http://schemas.openxmlformats.org/drawingml/2006/main">
               <a:ext uri="{FF2B5EF4-FFF2-40B4-BE49-F238E27FC236}">
-                <a16:creationId xmlns:a16="http://schemas.microsoft.com/office/drawing/2014/main" id="{B8ECB837-0A69-4880-B3A1-514A9DCABE1A}"/>
+                <a16:creationId xmlns:a16="http://schemas.microsoft.com/office/drawing/2014/main" id="{5C183C15-9712-4EC3-87FD-9C1BB9F3D56C}"/>
               </a:ext>
             </a:extLst>
           </p:cNvPr>
@@ -9462,7 +9462,7 @@
         </p:xfrm>
         <a:graphic xmlns:a="http://schemas.openxmlformats.org/drawingml/2006/main">
           <a:graphicData uri="http://schemas.openxmlformats.org/drawingml/2006/chart">
-            <c:chart xmlns:r="http://schemas.openxmlformats.org/officeDocument/2006/relationships" xmlns:c="http://schemas.openxmlformats.org/drawingml/2006/chart" r:id="R28cdce4bb4f04df3"/>
+            <c:chart xmlns:r="http://schemas.openxmlformats.org/officeDocument/2006/relationships" xmlns:c="http://schemas.openxmlformats.org/drawingml/2006/chart" r:id="R23a1669447044914"/>
           </a:graphicData>
         </a:graphic>
       </p:graphicFrame>
@@ -9471,7 +9471,7 @@
           <p:cNvPr id="6" name="">
             <a:extLst xmlns:a="http://schemas.openxmlformats.org/drawingml/2006/main">
               <a:ext uri="{FF2B5EF4-FFF2-40B4-BE49-F238E27FC236}">
-                <a16:creationId xmlns:a16="http://schemas.microsoft.com/office/drawing/2014/main" id="{E43F499C-5CE5-4CA3-932D-CECD338BA0D3}"/>
+                <a16:creationId xmlns:a16="http://schemas.microsoft.com/office/drawing/2014/main" id="{82E6FF73-5939-49E6-8C20-CD90AA6233BC}"/>
               </a:ext>
             </a:extLst>
           </p:cNvPr>
@@ -9528,7 +9528,7 @@
           <p:cNvPr id="7" name="">
             <a:extLst xmlns:a="http://schemas.openxmlformats.org/drawingml/2006/main">
               <a:ext uri="{FF2B5EF4-FFF2-40B4-BE49-F238E27FC236}">
-                <a16:creationId xmlns:a16="http://schemas.microsoft.com/office/drawing/2014/main" id="{89EF0869-8CDC-4DEA-A629-51E9F66C0986}"/>
+                <a16:creationId xmlns:a16="http://schemas.microsoft.com/office/drawing/2014/main" id="{C5075518-7F5E-4A87-AD62-74B435117C08}"/>
               </a:ext>
             </a:extLst>
           </p:cNvPr>
@@ -9583,7 +9583,7 @@
     </p:spTree>
     <p:extLst>
       <p:ext uri="{BB962C8B-B14F-4D97-AF65-F5344CB8AC3E}">
-        <p14:creationId xmlns:p14="http://schemas.microsoft.com/office/powerpoint/2010/main" val="1363432392"/>
+        <p14:creationId xmlns:p14="http://schemas.microsoft.com/office/powerpoint/2010/main" val="1716967976"/>
       </p:ext>
     </p:extLst>
   </p:cSld>
@@ -9614,7 +9614,7 @@
           <p:cNvPr id="8" name="">
             <a:extLst xmlns:a="http://schemas.openxmlformats.org/drawingml/2006/main">
               <a:ext uri="{FF2B5EF4-FFF2-40B4-BE49-F238E27FC236}">
-                <a16:creationId xmlns:a16="http://schemas.microsoft.com/office/drawing/2014/main" id="{12200763-3EFD-4507-9D1B-515FAB6D7EDB}"/>
+                <a16:creationId xmlns:a16="http://schemas.microsoft.com/office/drawing/2014/main" id="{C945557F-0E53-4E5F-830E-55C7C4D02325}"/>
               </a:ext>
             </a:extLst>
           </p:cNvPr>
@@ -9671,7 +9671,7 @@
           <p:cNvPr id="2" name="">
             <a:extLst xmlns:a="http://schemas.openxmlformats.org/drawingml/2006/main">
               <a:ext uri="{FF2B5EF4-FFF2-40B4-BE49-F238E27FC236}">
-                <a16:creationId xmlns:a16="http://schemas.microsoft.com/office/drawing/2014/main" id="{B1715D59-8D71-460F-BD65-15DBAA30EE5A}"/>
+                <a16:creationId xmlns:a16="http://schemas.microsoft.com/office/drawing/2014/main" id="{6B57E6FE-742B-4484-B7BC-08603AB35A7A}"/>
               </a:ext>
             </a:extLst>
           </p:cNvPr>
@@ -9728,7 +9728,7 @@
           <p:cNvPr id="3" name="">
             <a:extLst xmlns:a="http://schemas.openxmlformats.org/drawingml/2006/main">
               <a:ext uri="{FF2B5EF4-FFF2-40B4-BE49-F238E27FC236}">
-                <a16:creationId xmlns:a16="http://schemas.microsoft.com/office/drawing/2014/main" id="{1820C382-05A0-4EAD-AD69-44A61C057C1A}"/>
+                <a16:creationId xmlns:a16="http://schemas.microsoft.com/office/drawing/2014/main" id="{14DF25A5-C1B3-4C64-B862-EF08945A0A81}"/>
               </a:ext>
             </a:extLst>
           </p:cNvPr>
@@ -9785,7 +9785,7 @@
           <p:cNvPr id="4" name="">
             <a:extLst xmlns:a="http://schemas.openxmlformats.org/drawingml/2006/main">
               <a:ext uri="{FF2B5EF4-FFF2-40B4-BE49-F238E27FC236}">
-                <a16:creationId xmlns:a16="http://schemas.microsoft.com/office/drawing/2014/main" id="{50F0C19A-9AD9-4A29-B23B-2035375893EE}"/>
+                <a16:creationId xmlns:a16="http://schemas.microsoft.com/office/drawing/2014/main" id="{3F184AF6-DFC1-4D17-A5D9-6F195D8FB093}"/>
               </a:ext>
             </a:extLst>
           </p:cNvPr>
@@ -9842,7 +9842,7 @@
           <p:cNvPr id="5" name="">
             <a:extLst xmlns:a="http://schemas.openxmlformats.org/drawingml/2006/main">
               <a:ext uri="{FF2B5EF4-FFF2-40B4-BE49-F238E27FC236}">
-                <a16:creationId xmlns:a16="http://schemas.microsoft.com/office/drawing/2014/main" id="{A5EA1360-57E1-4C13-9014-B73CDB0DD977}"/>
+                <a16:creationId xmlns:a16="http://schemas.microsoft.com/office/drawing/2014/main" id="{5574CFBA-35C2-48AE-88C8-CCE68FB568A3}"/>
               </a:ext>
             </a:extLst>
           </p:cNvPr>
@@ -10089,7 +10089,7 @@
           <p:cNvPr id="7" name="">
             <a:extLst xmlns:a="http://schemas.openxmlformats.org/drawingml/2006/main">
               <a:ext uri="{FF2B5EF4-FFF2-40B4-BE49-F238E27FC236}">
-                <a16:creationId xmlns:a16="http://schemas.microsoft.com/office/drawing/2014/main" id="{50EAD5F3-8C59-452F-85F8-9FFF28EF6940}"/>
+                <a16:creationId xmlns:a16="http://schemas.microsoft.com/office/drawing/2014/main" id="{949E868C-6556-4E7B-9DD7-2D5673287EDF}"/>
               </a:ext>
             </a:extLst>
           </p:cNvPr>
@@ -10167,7 +10167,7 @@
     </p:spTree>
     <p:extLst>
       <p:ext uri="{BB962C8B-B14F-4D97-AF65-F5344CB8AC3E}">
-        <p14:creationId xmlns:p14="http://schemas.microsoft.com/office/powerpoint/2010/main" val="1096809730"/>
+        <p14:creationId xmlns:p14="http://schemas.microsoft.com/office/powerpoint/2010/main" val="821256802"/>
       </p:ext>
     </p:extLst>
   </p:cSld>
@@ -10198,7 +10198,7 @@
           <p:cNvPr id="8" name="">
             <a:extLst xmlns:a="http://schemas.openxmlformats.org/drawingml/2006/main">
               <a:ext uri="{FF2B5EF4-FFF2-40B4-BE49-F238E27FC236}">
-                <a16:creationId xmlns:a16="http://schemas.microsoft.com/office/drawing/2014/main" id="{F563E9DA-014E-4683-AB61-FC816B97733E}"/>
+                <a16:creationId xmlns:a16="http://schemas.microsoft.com/office/drawing/2014/main" id="{40114375-DF02-4395-8A0E-313843AE0154}"/>
               </a:ext>
             </a:extLst>
           </p:cNvPr>
@@ -10255,7 +10255,7 @@
           <p:cNvPr id="2" name="">
             <a:extLst xmlns:a="http://schemas.openxmlformats.org/drawingml/2006/main">
               <a:ext uri="{FF2B5EF4-FFF2-40B4-BE49-F238E27FC236}">
-                <a16:creationId xmlns:a16="http://schemas.microsoft.com/office/drawing/2014/main" id="{BC1E87E8-9CA9-4734-AC39-634C55726B6A}"/>
+                <a16:creationId xmlns:a16="http://schemas.microsoft.com/office/drawing/2014/main" id="{551D05F6-20C2-4C56-9B05-4A9F0C88F551}"/>
               </a:ext>
             </a:extLst>
           </p:cNvPr>
@@ -10312,7 +10312,7 @@
           <p:cNvPr id="3" name="">
             <a:extLst xmlns:a="http://schemas.openxmlformats.org/drawingml/2006/main">
               <a:ext uri="{FF2B5EF4-FFF2-40B4-BE49-F238E27FC236}">
-                <a16:creationId xmlns:a16="http://schemas.microsoft.com/office/drawing/2014/main" id="{EBB4F683-38C6-4D33-9520-FEC096560540}"/>
+                <a16:creationId xmlns:a16="http://schemas.microsoft.com/office/drawing/2014/main" id="{E12E8CF3-9FCF-430F-AC68-B9BC4F71F2B5}"/>
               </a:ext>
             </a:extLst>
           </p:cNvPr>
@@ -10369,7 +10369,7 @@
           <p:cNvPr id="4" name="">
             <a:extLst xmlns:a="http://schemas.openxmlformats.org/drawingml/2006/main">
               <a:ext uri="{FF2B5EF4-FFF2-40B4-BE49-F238E27FC236}">
-                <a16:creationId xmlns:a16="http://schemas.microsoft.com/office/drawing/2014/main" id="{4D5984B0-5059-4702-ADE8-7704FD3A580F}"/>
+                <a16:creationId xmlns:a16="http://schemas.microsoft.com/office/drawing/2014/main" id="{5E1CEC48-9D6A-4FD9-A725-BA537FBEF410}"/>
               </a:ext>
             </a:extLst>
           </p:cNvPr>
@@ -10426,7 +10426,7 @@
           <p:cNvPr id="5" name="">
             <a:extLst xmlns:a="http://schemas.openxmlformats.org/drawingml/2006/main">
               <a:ext uri="{FF2B5EF4-FFF2-40B4-BE49-F238E27FC236}">
-                <a16:creationId xmlns:a16="http://schemas.microsoft.com/office/drawing/2014/main" id="{EE0937A5-62ED-4557-A72C-214FE9C3B65B}"/>
+                <a16:creationId xmlns:a16="http://schemas.microsoft.com/office/drawing/2014/main" id="{D3A024FE-3013-4212-ACBB-013FF9F452C7}"/>
               </a:ext>
             </a:extLst>
           </p:cNvPr>
@@ -10729,7 +10729,7 @@
           <p:cNvPr id="7" name="">
             <a:extLst xmlns:a="http://schemas.openxmlformats.org/drawingml/2006/main">
               <a:ext uri="{FF2B5EF4-FFF2-40B4-BE49-F238E27FC236}">
-                <a16:creationId xmlns:a16="http://schemas.microsoft.com/office/drawing/2014/main" id="{87B25233-FEF7-45E7-A610-188075126543}"/>
+                <a16:creationId xmlns:a16="http://schemas.microsoft.com/office/drawing/2014/main" id="{9CEE6F61-2961-4701-88E5-D31B3ABB09D8}"/>
               </a:ext>
             </a:extLst>
           </p:cNvPr>
@@ -10807,7 +10807,7 @@
     </p:spTree>
     <p:extLst>
       <p:ext uri="{BB962C8B-B14F-4D97-AF65-F5344CB8AC3E}">
-        <p14:creationId xmlns:p14="http://schemas.microsoft.com/office/powerpoint/2010/main" val="1129043366"/>
+        <p14:creationId xmlns:p14="http://schemas.microsoft.com/office/powerpoint/2010/main" val="1082959915"/>
       </p:ext>
     </p:extLst>
   </p:cSld>
@@ -10838,7 +10838,7 @@
           <p:cNvPr id="9" name="">
             <a:extLst xmlns:a="http://schemas.openxmlformats.org/drawingml/2006/main">
               <a:ext uri="{FF2B5EF4-FFF2-40B4-BE49-F238E27FC236}">
-                <a16:creationId xmlns:a16="http://schemas.microsoft.com/office/drawing/2014/main" id="{B5399ED9-DA56-44BE-899B-9419AEFBFCBE}"/>
+                <a16:creationId xmlns:a16="http://schemas.microsoft.com/office/drawing/2014/main" id="{298F17CB-7984-48F2-B2A3-5383FDBD80DF}"/>
               </a:ext>
             </a:extLst>
           </p:cNvPr>
@@ -10895,7 +10895,7 @@
           <p:cNvPr id="2" name="">
             <a:extLst xmlns:a="http://schemas.openxmlformats.org/drawingml/2006/main">
               <a:ext uri="{FF2B5EF4-FFF2-40B4-BE49-F238E27FC236}">
-                <a16:creationId xmlns:a16="http://schemas.microsoft.com/office/drawing/2014/main" id="{91E08811-1EBE-4DCE-8F89-6175C2DDD29A}"/>
+                <a16:creationId xmlns:a16="http://schemas.microsoft.com/office/drawing/2014/main" id="{3B17C897-FB97-42C7-8AAF-E3FE2F9C919A}"/>
               </a:ext>
             </a:extLst>
           </p:cNvPr>
@@ -10952,7 +10952,7 @@
           <p:cNvPr id="3" name="">
             <a:extLst xmlns:a="http://schemas.openxmlformats.org/drawingml/2006/main">
               <a:ext uri="{FF2B5EF4-FFF2-40B4-BE49-F238E27FC236}">
-                <a16:creationId xmlns:a16="http://schemas.microsoft.com/office/drawing/2014/main" id="{6233EA8B-D7B6-4070-8643-80F4F85BFBC2}"/>
+                <a16:creationId xmlns:a16="http://schemas.microsoft.com/office/drawing/2014/main" id="{734A69E6-9F4B-4049-A26C-E475CD91113E}"/>
               </a:ext>
             </a:extLst>
           </p:cNvPr>
@@ -11009,7 +11009,7 @@
           <p:cNvPr id="4" name="">
             <a:extLst xmlns:a="http://schemas.openxmlformats.org/drawingml/2006/main">
               <a:ext uri="{FF2B5EF4-FFF2-40B4-BE49-F238E27FC236}">
-                <a16:creationId xmlns:a16="http://schemas.microsoft.com/office/drawing/2014/main" id="{29C959E2-4565-4089-9DD4-81185B629435}"/>
+                <a16:creationId xmlns:a16="http://schemas.microsoft.com/office/drawing/2014/main" id="{18F6DE23-8AA2-4733-8C9E-002CB9B6592E}"/>
               </a:ext>
             </a:extLst>
           </p:cNvPr>
@@ -11066,7 +11066,7 @@
           <p:cNvPr id="5" name="">
             <a:extLst xmlns:a="http://schemas.openxmlformats.org/drawingml/2006/main">
               <a:ext uri="{FF2B5EF4-FFF2-40B4-BE49-F238E27FC236}">
-                <a16:creationId xmlns:a16="http://schemas.microsoft.com/office/drawing/2014/main" id="{10A0677A-165E-454B-BDB1-4341DA384B33}"/>
+                <a16:creationId xmlns:a16="http://schemas.microsoft.com/office/drawing/2014/main" id="{2C73E296-30A4-4A64-B0FA-7D9D612B7135}"/>
               </a:ext>
             </a:extLst>
           </p:cNvPr>
@@ -11146,7 +11146,7 @@
           <p:cNvPr id="6" name="">
             <a:extLst xmlns:a="http://schemas.openxmlformats.org/drawingml/2006/main">
               <a:ext uri="{FF2B5EF4-FFF2-40B4-BE49-F238E27FC236}">
-                <a16:creationId xmlns:a16="http://schemas.microsoft.com/office/drawing/2014/main" id="{F5394D26-E0F6-406A-8EAB-D9458C006ADD}"/>
+                <a16:creationId xmlns:a16="http://schemas.microsoft.com/office/drawing/2014/main" id="{9E1E340D-ADAB-4718-A09B-69E6C787286E}"/>
               </a:ext>
             </a:extLst>
           </p:cNvPr>
@@ -11203,7 +11203,7 @@
           <p:cNvPr id="7" name="">
             <a:extLst xmlns:a="http://schemas.openxmlformats.org/drawingml/2006/main">
               <a:ext uri="{FF2B5EF4-FFF2-40B4-BE49-F238E27FC236}">
-                <a16:creationId xmlns:a16="http://schemas.microsoft.com/office/drawing/2014/main" id="{D1E5D5BE-5687-47C5-82F5-1AF834164D77}"/>
+                <a16:creationId xmlns:a16="http://schemas.microsoft.com/office/drawing/2014/main" id="{D7C28CBE-0758-4B94-8816-D4769700AEDF}"/>
               </a:ext>
             </a:extLst>
           </p:cNvPr>
@@ -11273,7 +11273,7 @@
                 <a:ea typeface="Times New Roman"/>
                 <a:cs typeface="Times New Roman"/>
               </a:rPr>
-              <a:t>Consumed data, mostly one phone and correlated scenes</a:t>
+              <a:t>Previously used data, mostly one phone and related scenes</a:t>
             </a:r>
           </a:p>
         </p:txBody>
@@ -11283,7 +11283,7 @@
           <p:cNvPr id="8" name="">
             <a:extLst xmlns:a="http://schemas.openxmlformats.org/drawingml/2006/main">
               <a:ext uri="{FF2B5EF4-FFF2-40B4-BE49-F238E27FC236}">
-                <a16:creationId xmlns:a16="http://schemas.microsoft.com/office/drawing/2014/main" id="{CCFA97C4-57BF-47B0-8A97-B9693D23AA03}"/>
+                <a16:creationId xmlns:a16="http://schemas.microsoft.com/office/drawing/2014/main" id="{48833AE5-B4A8-4130-950C-C0CF1116760A}"/>
               </a:ext>
             </a:extLst>
           </p:cNvPr>
@@ -11338,7 +11338,7 @@
     </p:spTree>
     <p:extLst>
       <p:ext uri="{BB962C8B-B14F-4D97-AF65-F5344CB8AC3E}">
-        <p14:creationId xmlns:p14="http://schemas.microsoft.com/office/powerpoint/2010/main" val="700473687"/>
+        <p14:creationId xmlns:p14="http://schemas.microsoft.com/office/powerpoint/2010/main" val="1221917296"/>
       </p:ext>
     </p:extLst>
   </p:cSld>

--- a/rapor/final_2026/deliverables/CS395_Presentation_EfeHan_Keles_25September2026.pptx
+++ b/rapor/final_2026/deliverables/CS395_Presentation_EfeHan_Keles_25September2026.pptx
@@ -2,27 +2,27 @@
 <file path=ppt/presentation.xml><?xml version="1.0" encoding="utf-8"?>
 <p:presentation xmlns:p="http://schemas.openxmlformats.org/presentationml/2006/main">
   <p:sldMasterIdLst>
-    <p:sldMasterId xmlns:r="http://schemas.openxmlformats.org/officeDocument/2006/relationships" id="2147483648" r:id="R70d3a0bc2af641bd"/>
+    <p:sldMasterId xmlns:r="http://schemas.openxmlformats.org/officeDocument/2006/relationships" id="2147483648" r:id="Re101ce2f55d04dc2"/>
   </p:sldMasterIdLst>
   <p:notesMasterIdLst>
-    <p:notesMasterId xmlns:r="http://schemas.openxmlformats.org/officeDocument/2006/relationships" r:id="Re8f7e74a60be40ab"/>
+    <p:notesMasterId xmlns:r="http://schemas.openxmlformats.org/officeDocument/2006/relationships" r:id="Rb33dea48c95746f7"/>
   </p:notesMasterIdLst>
   <p:sldIdLst>
-    <p:sldId xmlns:r="http://schemas.openxmlformats.org/officeDocument/2006/relationships" id="256" r:id="Rcce430cbb6344af5"/>
-    <p:sldId xmlns:r="http://schemas.openxmlformats.org/officeDocument/2006/relationships" id="257" r:id="R6ca2d0d20af646aa"/>
-    <p:sldId xmlns:r="http://schemas.openxmlformats.org/officeDocument/2006/relationships" id="258" r:id="R0eb1af215ab74161"/>
-    <p:sldId xmlns:r="http://schemas.openxmlformats.org/officeDocument/2006/relationships" id="259" r:id="R4011b5b4af584930"/>
-    <p:sldId xmlns:r="http://schemas.openxmlformats.org/officeDocument/2006/relationships" id="260" r:id="Re1e90e45824d45ac"/>
-    <p:sldId xmlns:r="http://schemas.openxmlformats.org/officeDocument/2006/relationships" id="261" r:id="Rcfde829d31cb4eae"/>
-    <p:sldId xmlns:r="http://schemas.openxmlformats.org/officeDocument/2006/relationships" id="262" r:id="R1d742d7d068944e5"/>
-    <p:sldId xmlns:r="http://schemas.openxmlformats.org/officeDocument/2006/relationships" id="263" r:id="Rb2e6a7a7cdeb4eb7"/>
-    <p:sldId xmlns:r="http://schemas.openxmlformats.org/officeDocument/2006/relationships" id="264" r:id="R19a68e677f454d78"/>
-    <p:sldId xmlns:r="http://schemas.openxmlformats.org/officeDocument/2006/relationships" id="265" r:id="Rc575cd7606984eb5"/>
-    <p:sldId xmlns:r="http://schemas.openxmlformats.org/officeDocument/2006/relationships" id="266" r:id="Rf0682ca192e84f6b"/>
-    <p:sldId xmlns:r="http://schemas.openxmlformats.org/officeDocument/2006/relationships" id="267" r:id="Rc5a274cfe7c744c9"/>
-    <p:sldId xmlns:r="http://schemas.openxmlformats.org/officeDocument/2006/relationships" id="268" r:id="R2e52018e748a4f65"/>
-    <p:sldId xmlns:r="http://schemas.openxmlformats.org/officeDocument/2006/relationships" id="269" r:id="Rf527a2f31d604ec6"/>
-    <p:sldId xmlns:r="http://schemas.openxmlformats.org/officeDocument/2006/relationships" id="270" r:id="Re9e484e6a1944e24"/>
+    <p:sldId xmlns:r="http://schemas.openxmlformats.org/officeDocument/2006/relationships" id="256" r:id="Re413ddbf6a524b94"/>
+    <p:sldId xmlns:r="http://schemas.openxmlformats.org/officeDocument/2006/relationships" id="257" r:id="R55c3252fb6684920"/>
+    <p:sldId xmlns:r="http://schemas.openxmlformats.org/officeDocument/2006/relationships" id="258" r:id="R1bfb2fbca21b4cbb"/>
+    <p:sldId xmlns:r="http://schemas.openxmlformats.org/officeDocument/2006/relationships" id="259" r:id="R79c11d76d06e4187"/>
+    <p:sldId xmlns:r="http://schemas.openxmlformats.org/officeDocument/2006/relationships" id="260" r:id="Rdbe0ada491ad4416"/>
+    <p:sldId xmlns:r="http://schemas.openxmlformats.org/officeDocument/2006/relationships" id="261" r:id="Rbfb8861f885c4836"/>
+    <p:sldId xmlns:r="http://schemas.openxmlformats.org/officeDocument/2006/relationships" id="262" r:id="R30d9f4ebd17444e6"/>
+    <p:sldId xmlns:r="http://schemas.openxmlformats.org/officeDocument/2006/relationships" id="263" r:id="Ra88484a5b81342dc"/>
+    <p:sldId xmlns:r="http://schemas.openxmlformats.org/officeDocument/2006/relationships" id="264" r:id="R9d48060591ec4dc9"/>
+    <p:sldId xmlns:r="http://schemas.openxmlformats.org/officeDocument/2006/relationships" id="265" r:id="R3290a6fd85f54fe3"/>
+    <p:sldId xmlns:r="http://schemas.openxmlformats.org/officeDocument/2006/relationships" id="266" r:id="R565469912a0c4e21"/>
+    <p:sldId xmlns:r="http://schemas.openxmlformats.org/officeDocument/2006/relationships" id="267" r:id="Rd81c1293ed93444c"/>
+    <p:sldId xmlns:r="http://schemas.openxmlformats.org/officeDocument/2006/relationships" id="268" r:id="Rae8974be9cdf4333"/>
+    <p:sldId xmlns:r="http://schemas.openxmlformats.org/officeDocument/2006/relationships" id="269" r:id="Raa6c2a7550994aa2"/>
+    <p:sldId xmlns:r="http://schemas.openxmlformats.org/officeDocument/2006/relationships" id="270" r:id="R5dbdef20de2b4b64"/>
   </p:sldIdLst>
   <p:sldSz cx="12192000" cy="6858000"/>
   <p:notesSz cx="6858000" cy="9144000"/>
@@ -1256,7 +1256,7 @@
           <a:lstStyle xmlns:a="http://schemas.openxmlformats.org/drawingml/2006/main"/>
           <a:p xmlns:a="http://schemas.openxmlformats.org/drawingml/2006/main">
             <a:r>
-              <a:t>Suggested time: 65 seconds.</a:t>
+              <a:t>Suggested time: 85 seconds.</a:t>
             </a:r>
           </a:p>
           <a:p xmlns:a="http://schemas.openxmlformats.org/drawingml/2006/main">
@@ -1266,7 +1266,7 @@
           </a:p>
           <a:p xmlns:a="http://schemas.openxmlformats.org/drawingml/2006/main">
             <a:r>
-              <a:t>The project did not train a foundation model from scratch. Frozen encoders turn an image into numerical descriptions. PixelProof fits additional components and a constrained correction around these features. E92 used twelve thousand two hundred sixty-nine training parent images, with four processing views per parent. More views test processing robustness, but do not create independent photographs. The demo checks the upload, computes original and processed scores, and applies a documented display rule. My responsibilities included directing experiments, organizing sources and reviewing evidence, with AI coding assistance used for implementation and documentation. Research references: Radford et al. 2021, Oquab et al. 2024, Kim et al. 2026 and Ojha et al. 2023.</a:t>
+              <a:t>The project did not train a foundation model from scratch. Frozen encoders turn an image into numerical descriptions. PixelProof fits additional components and a constrained correction around these features. E92 used twelve thousand two hundred sixty-nine training parent images, with four processing views per parent. More views test processing robustness, but do not create independent photographs. These training counts are separate from the three hundred twenty development images discussed next. The plan recorded a question and acceptance rules. The experiment log retained measurements, the history explained the resulting decision and the dataset register recorded which data could be used. Corrected conclusions stayed visible, so a failed experiment could guide the next one. The demo applies the resulting model through a documented display rule. My responsibilities included directing experiments, organizing sources and reviewing evidence, with AI coding assistance used for implementation and documentation. Research references: Radford et al. 2021, Oquab et al. 2024, Kim et al. 2026 and Ojha et al. 2023.</a:t>
             </a:r>
           </a:p>
         </p:txBody>
@@ -1654,7 +1654,7 @@
   </p:cSld>
   <p:clrMap bg1="lt1" tx1="dk1" bg2="lt2" tx2="dk2" accent1="accent1" accent2="accent2" accent3="accent3" accent4="accent4" accent5="accent5" accent6="accent6" hlink="hlink" folHlink="folHlink"/>
   <p:sldLayoutIdLst>
-    <p:sldLayoutId xmlns:r="http://schemas.openxmlformats.org/officeDocument/2006/relationships" id="2147483649" r:id="R4668d79192cb4df2"/>
+    <p:sldLayoutId xmlns:r="http://schemas.openxmlformats.org/officeDocument/2006/relationships" id="2147483649" r:id="Raf3d9297c9ef4c9b"/>
   </p:sldLayoutIdLst>
   <p:txStyles>
     <p:titleStyle>
@@ -2471,7 +2471,7 @@
           <p:cNvPr id="9" name="">
             <a:extLst xmlns:a="http://schemas.openxmlformats.org/drawingml/2006/main">
               <a:ext uri="{FF2B5EF4-FFF2-40B4-BE49-F238E27FC236}">
-                <a16:creationId xmlns:a16="http://schemas.microsoft.com/office/drawing/2014/main" id="{FB166A2B-530E-4AF3-9D3C-E71FFB87C69D}"/>
+                <a16:creationId xmlns:a16="http://schemas.microsoft.com/office/drawing/2014/main" id="{20FC8F06-494C-4432-AF15-BE880C6DCDC8}"/>
               </a:ext>
             </a:extLst>
           </p:cNvPr>
@@ -2528,7 +2528,7 @@
           <p:cNvPr id="2" name="">
             <a:extLst xmlns:a="http://schemas.openxmlformats.org/drawingml/2006/main">
               <a:ext uri="{FF2B5EF4-FFF2-40B4-BE49-F238E27FC236}">
-                <a16:creationId xmlns:a16="http://schemas.microsoft.com/office/drawing/2014/main" id="{6C55F2F5-5FF1-45A9-84BE-8E5A9F1FB3EE}"/>
+                <a16:creationId xmlns:a16="http://schemas.microsoft.com/office/drawing/2014/main" id="{FEA84154-D200-44E6-B2F0-E2D01AA00677}"/>
               </a:ext>
             </a:extLst>
           </p:cNvPr>
@@ -2585,7 +2585,7 @@
           <p:cNvPr id="3" name="">
             <a:extLst xmlns:a="http://schemas.openxmlformats.org/drawingml/2006/main">
               <a:ext uri="{FF2B5EF4-FFF2-40B4-BE49-F238E27FC236}">
-                <a16:creationId xmlns:a16="http://schemas.microsoft.com/office/drawing/2014/main" id="{7FEC65D4-91E5-42DF-99CE-B6B7128459CC}"/>
+                <a16:creationId xmlns:a16="http://schemas.microsoft.com/office/drawing/2014/main" id="{DE871820-AAF5-42DD-8A12-F0DA50DF9976}"/>
               </a:ext>
             </a:extLst>
           </p:cNvPr>
@@ -2642,7 +2642,7 @@
           <p:cNvPr id="4" name="">
             <a:extLst xmlns:a="http://schemas.openxmlformats.org/drawingml/2006/main">
               <a:ext uri="{FF2B5EF4-FFF2-40B4-BE49-F238E27FC236}">
-                <a16:creationId xmlns:a16="http://schemas.microsoft.com/office/drawing/2014/main" id="{49B7D6C1-48A6-4EDC-815C-29F4353D898E}"/>
+                <a16:creationId xmlns:a16="http://schemas.microsoft.com/office/drawing/2014/main" id="{340A7EBF-678D-4289-8712-53C69BDC874F}"/>
               </a:ext>
             </a:extLst>
           </p:cNvPr>
@@ -2722,7 +2722,7 @@
           <p:cNvPr id="5" name="">
             <a:extLst xmlns:a="http://schemas.openxmlformats.org/drawingml/2006/main">
               <a:ext uri="{FF2B5EF4-FFF2-40B4-BE49-F238E27FC236}">
-                <a16:creationId xmlns:a16="http://schemas.microsoft.com/office/drawing/2014/main" id="{A07CC0DF-146F-4303-89A9-26A7A0AD4668}"/>
+                <a16:creationId xmlns:a16="http://schemas.microsoft.com/office/drawing/2014/main" id="{E32F4C9F-D223-4F12-B9F3-F09D19638788}"/>
               </a:ext>
             </a:extLst>
           </p:cNvPr>
@@ -2779,7 +2779,7 @@
           <p:cNvPr id="6" name="">
             <a:extLst xmlns:a="http://schemas.openxmlformats.org/drawingml/2006/main">
               <a:ext uri="{FF2B5EF4-FFF2-40B4-BE49-F238E27FC236}">
-                <a16:creationId xmlns:a16="http://schemas.microsoft.com/office/drawing/2014/main" id="{494345B8-FB61-4E2A-BD11-8382926B5614}"/>
+                <a16:creationId xmlns:a16="http://schemas.microsoft.com/office/drawing/2014/main" id="{CAE792F9-AA3F-40D8-B6B8-CCDA32BE8392}"/>
               </a:ext>
             </a:extLst>
           </p:cNvPr>
@@ -2836,7 +2836,7 @@
           <p:cNvPr id="7" name="">
             <a:extLst xmlns:a="http://schemas.openxmlformats.org/drawingml/2006/main">
               <a:ext uri="{FF2B5EF4-FFF2-40B4-BE49-F238E27FC236}">
-                <a16:creationId xmlns:a16="http://schemas.microsoft.com/office/drawing/2014/main" id="{021981EE-15F3-4B5F-B814-13DFC67F018C}"/>
+                <a16:creationId xmlns:a16="http://schemas.microsoft.com/office/drawing/2014/main" id="{4B17E73C-F663-46DD-9364-B67177707BC3}"/>
               </a:ext>
             </a:extLst>
           </p:cNvPr>
@@ -2939,7 +2939,7 @@
           <p:cNvPr id="8" name="">
             <a:extLst xmlns:a="http://schemas.openxmlformats.org/drawingml/2006/main">
               <a:ext uri="{FF2B5EF4-FFF2-40B4-BE49-F238E27FC236}">
-                <a16:creationId xmlns:a16="http://schemas.microsoft.com/office/drawing/2014/main" id="{D5BD5F44-7442-4601-91AD-9FEDDE36625E}"/>
+                <a16:creationId xmlns:a16="http://schemas.microsoft.com/office/drawing/2014/main" id="{D757C104-2083-40EC-907D-10165EB22B04}"/>
               </a:ext>
             </a:extLst>
           </p:cNvPr>
@@ -2994,7 +2994,7 @@
     </p:spTree>
     <p:extLst>
       <p:ext uri="{BB962C8B-B14F-4D97-AF65-F5344CB8AC3E}">
-        <p14:creationId xmlns:p14="http://schemas.microsoft.com/office/powerpoint/2010/main" val="1304307628"/>
+        <p14:creationId xmlns:p14="http://schemas.microsoft.com/office/powerpoint/2010/main" val="1502694758"/>
       </p:ext>
     </p:extLst>
   </p:cSld>
@@ -3025,7 +3025,7 @@
           <p:cNvPr id="8" name="">
             <a:extLst xmlns:a="http://schemas.openxmlformats.org/drawingml/2006/main">
               <a:ext uri="{FF2B5EF4-FFF2-40B4-BE49-F238E27FC236}">
-                <a16:creationId xmlns:a16="http://schemas.microsoft.com/office/drawing/2014/main" id="{C5E046B4-9255-4E7B-B0F5-C649BA8E924A}"/>
+                <a16:creationId xmlns:a16="http://schemas.microsoft.com/office/drawing/2014/main" id="{21292DAC-78EE-409D-87E0-6D770B2A2927}"/>
               </a:ext>
             </a:extLst>
           </p:cNvPr>
@@ -3082,7 +3082,7 @@
           <p:cNvPr id="2" name="">
             <a:extLst xmlns:a="http://schemas.openxmlformats.org/drawingml/2006/main">
               <a:ext uri="{FF2B5EF4-FFF2-40B4-BE49-F238E27FC236}">
-                <a16:creationId xmlns:a16="http://schemas.microsoft.com/office/drawing/2014/main" id="{223B576D-E29F-43CC-B088-F01FCECBE9FD}"/>
+                <a16:creationId xmlns:a16="http://schemas.microsoft.com/office/drawing/2014/main" id="{0F386473-5EF0-4271-A773-C6F69CA43257}"/>
               </a:ext>
             </a:extLst>
           </p:cNvPr>
@@ -3139,7 +3139,7 @@
           <p:cNvPr id="3" name="">
             <a:extLst xmlns:a="http://schemas.openxmlformats.org/drawingml/2006/main">
               <a:ext uri="{FF2B5EF4-FFF2-40B4-BE49-F238E27FC236}">
-                <a16:creationId xmlns:a16="http://schemas.microsoft.com/office/drawing/2014/main" id="{86ED0D93-CB31-48DD-BA23-20DF0C23CE16}"/>
+                <a16:creationId xmlns:a16="http://schemas.microsoft.com/office/drawing/2014/main" id="{9C7A19D2-3119-4EF7-AD32-820940F696A3}"/>
               </a:ext>
             </a:extLst>
           </p:cNvPr>
@@ -3196,7 +3196,7 @@
           <p:cNvPr id="4" name="">
             <a:extLst xmlns:a="http://schemas.openxmlformats.org/drawingml/2006/main">
               <a:ext uri="{FF2B5EF4-FFF2-40B4-BE49-F238E27FC236}">
-                <a16:creationId xmlns:a16="http://schemas.microsoft.com/office/drawing/2014/main" id="{056EF289-02DE-42BC-A342-E5DEF3664B0B}"/>
+                <a16:creationId xmlns:a16="http://schemas.microsoft.com/office/drawing/2014/main" id="{E313C87C-244F-4AA6-A495-FC111F01572D}"/>
               </a:ext>
             </a:extLst>
           </p:cNvPr>
@@ -3253,7 +3253,7 @@
           <p:cNvPr id="5" name="">
             <a:extLst xmlns:a="http://schemas.openxmlformats.org/drawingml/2006/main">
               <a:ext uri="{FF2B5EF4-FFF2-40B4-BE49-F238E27FC236}">
-                <a16:creationId xmlns:a16="http://schemas.microsoft.com/office/drawing/2014/main" id="{A1973177-7B7D-4468-8DB1-957479B4B662}"/>
+                <a16:creationId xmlns:a16="http://schemas.microsoft.com/office/drawing/2014/main" id="{53D6F808-7080-494B-8B68-BD0E31DFF58D}"/>
               </a:ext>
             </a:extLst>
           </p:cNvPr>
@@ -3665,7 +3665,7 @@
           <p:cNvPr id="7" name="">
             <a:extLst xmlns:a="http://schemas.openxmlformats.org/drawingml/2006/main">
               <a:ext uri="{FF2B5EF4-FFF2-40B4-BE49-F238E27FC236}">
-                <a16:creationId xmlns:a16="http://schemas.microsoft.com/office/drawing/2014/main" id="{F0EF8159-8022-4144-A21A-EF4CFADFFBD6}"/>
+                <a16:creationId xmlns:a16="http://schemas.microsoft.com/office/drawing/2014/main" id="{C6D5606D-F018-42C7-873C-D85886362BBE}"/>
               </a:ext>
             </a:extLst>
           </p:cNvPr>
@@ -3720,7 +3720,7 @@
     </p:spTree>
     <p:extLst>
       <p:ext uri="{BB962C8B-B14F-4D97-AF65-F5344CB8AC3E}">
-        <p14:creationId xmlns:p14="http://schemas.microsoft.com/office/powerpoint/2010/main" val="1776009922"/>
+        <p14:creationId xmlns:p14="http://schemas.microsoft.com/office/powerpoint/2010/main" val="1449621368"/>
       </p:ext>
     </p:extLst>
   </p:cSld>
@@ -3751,7 +3751,7 @@
           <p:cNvPr id="9" name="">
             <a:extLst xmlns:a="http://schemas.openxmlformats.org/drawingml/2006/main">
               <a:ext uri="{FF2B5EF4-FFF2-40B4-BE49-F238E27FC236}">
-                <a16:creationId xmlns:a16="http://schemas.microsoft.com/office/drawing/2014/main" id="{007576B1-3888-4DE0-9B52-CA9367E143A5}"/>
+                <a16:creationId xmlns:a16="http://schemas.microsoft.com/office/drawing/2014/main" id="{3FA7FB60-8E9D-47B7-8C41-1278E6C7E9F1}"/>
               </a:ext>
             </a:extLst>
           </p:cNvPr>
@@ -3808,7 +3808,7 @@
           <p:cNvPr id="2" name="">
             <a:extLst xmlns:a="http://schemas.openxmlformats.org/drawingml/2006/main">
               <a:ext uri="{FF2B5EF4-FFF2-40B4-BE49-F238E27FC236}">
-                <a16:creationId xmlns:a16="http://schemas.microsoft.com/office/drawing/2014/main" id="{90765BA5-1F51-4C62-ADB5-A3F7113DDF6B}"/>
+                <a16:creationId xmlns:a16="http://schemas.microsoft.com/office/drawing/2014/main" id="{5195868A-17D3-4AA8-B05B-0027333AB0C2}"/>
               </a:ext>
             </a:extLst>
           </p:cNvPr>
@@ -3865,7 +3865,7 @@
           <p:cNvPr id="3" name="">
             <a:extLst xmlns:a="http://schemas.openxmlformats.org/drawingml/2006/main">
               <a:ext uri="{FF2B5EF4-FFF2-40B4-BE49-F238E27FC236}">
-                <a16:creationId xmlns:a16="http://schemas.microsoft.com/office/drawing/2014/main" id="{3F22C789-CD30-4F6B-9966-09D151E8D4A7}"/>
+                <a16:creationId xmlns:a16="http://schemas.microsoft.com/office/drawing/2014/main" id="{7062D140-B73A-425C-BD98-6D26F8315B87}"/>
               </a:ext>
             </a:extLst>
           </p:cNvPr>
@@ -3922,7 +3922,7 @@
           <p:cNvPr id="4" name="">
             <a:extLst xmlns:a="http://schemas.openxmlformats.org/drawingml/2006/main">
               <a:ext uri="{FF2B5EF4-FFF2-40B4-BE49-F238E27FC236}">
-                <a16:creationId xmlns:a16="http://schemas.microsoft.com/office/drawing/2014/main" id="{47AF2A2E-121C-4655-B584-9535BE2C51AA}"/>
+                <a16:creationId xmlns:a16="http://schemas.microsoft.com/office/drawing/2014/main" id="{B81D3D93-9B55-4DF7-BFC3-5793D9D6334B}"/>
               </a:ext>
             </a:extLst>
           </p:cNvPr>
@@ -3979,7 +3979,7 @@
           <p:cNvPr id="5" name="">
             <a:extLst xmlns:a="http://schemas.openxmlformats.org/drawingml/2006/main">
               <a:ext uri="{FF2B5EF4-FFF2-40B4-BE49-F238E27FC236}">
-                <a16:creationId xmlns:a16="http://schemas.microsoft.com/office/drawing/2014/main" id="{2DED0615-830F-4031-90FC-6E4F1AB9DDD4}"/>
+                <a16:creationId xmlns:a16="http://schemas.microsoft.com/office/drawing/2014/main" id="{C73EA38D-139F-42BF-8558-77659F683668}"/>
               </a:ext>
             </a:extLst>
           </p:cNvPr>
@@ -4036,7 +4036,7 @@
           <p:cNvPr id="6" name="">
             <a:extLst xmlns:a="http://schemas.openxmlformats.org/drawingml/2006/main">
               <a:ext uri="{FF2B5EF4-FFF2-40B4-BE49-F238E27FC236}">
-                <a16:creationId xmlns:a16="http://schemas.microsoft.com/office/drawing/2014/main" id="{34CBE74B-951C-47E9-A575-90B8C577DA2E}"/>
+                <a16:creationId xmlns:a16="http://schemas.microsoft.com/office/drawing/2014/main" id="{6465B481-7F4B-407E-A774-5B8CBEE7E59C}"/>
               </a:ext>
             </a:extLst>
           </p:cNvPr>
@@ -4093,7 +4093,7 @@
           <p:cNvPr id="7" name="">
             <a:extLst xmlns:a="http://schemas.openxmlformats.org/drawingml/2006/main">
               <a:ext uri="{FF2B5EF4-FFF2-40B4-BE49-F238E27FC236}">
-                <a16:creationId xmlns:a16="http://schemas.microsoft.com/office/drawing/2014/main" id="{EFC7C14C-7FFD-4E03-BAF4-D77BA3C79668}"/>
+                <a16:creationId xmlns:a16="http://schemas.microsoft.com/office/drawing/2014/main" id="{0C7AB342-DF8F-462D-A1BE-04259DFD0012}"/>
               </a:ext>
             </a:extLst>
           </p:cNvPr>
@@ -4173,7 +4173,7 @@
           <p:cNvPr id="8" name="">
             <a:extLst xmlns:a="http://schemas.openxmlformats.org/drawingml/2006/main">
               <a:ext uri="{FF2B5EF4-FFF2-40B4-BE49-F238E27FC236}">
-                <a16:creationId xmlns:a16="http://schemas.microsoft.com/office/drawing/2014/main" id="{667AE9D1-20E0-4D6B-9C6A-D4C9A252339F}"/>
+                <a16:creationId xmlns:a16="http://schemas.microsoft.com/office/drawing/2014/main" id="{A834E9FE-F2C4-47AD-BEFB-CBE58BB09908}"/>
               </a:ext>
             </a:extLst>
           </p:cNvPr>
@@ -4228,7 +4228,7 @@
     </p:spTree>
     <p:extLst>
       <p:ext uri="{BB962C8B-B14F-4D97-AF65-F5344CB8AC3E}">
-        <p14:creationId xmlns:p14="http://schemas.microsoft.com/office/powerpoint/2010/main" val="883476266"/>
+        <p14:creationId xmlns:p14="http://schemas.microsoft.com/office/powerpoint/2010/main" val="1710674381"/>
       </p:ext>
     </p:extLst>
   </p:cSld>
@@ -4259,7 +4259,7 @@
           <p:cNvPr id="8" name="">
             <a:extLst xmlns:a="http://schemas.openxmlformats.org/drawingml/2006/main">
               <a:ext uri="{FF2B5EF4-FFF2-40B4-BE49-F238E27FC236}">
-                <a16:creationId xmlns:a16="http://schemas.microsoft.com/office/drawing/2014/main" id="{B3C62919-9DF6-4E39-9B7C-AE19F9783D2B}"/>
+                <a16:creationId xmlns:a16="http://schemas.microsoft.com/office/drawing/2014/main" id="{03F0BE86-682B-4F09-90A8-4579BE577588}"/>
               </a:ext>
             </a:extLst>
           </p:cNvPr>
@@ -4316,7 +4316,7 @@
           <p:cNvPr id="2" name="">
             <a:extLst xmlns:a="http://schemas.openxmlformats.org/drawingml/2006/main">
               <a:ext uri="{FF2B5EF4-FFF2-40B4-BE49-F238E27FC236}">
-                <a16:creationId xmlns:a16="http://schemas.microsoft.com/office/drawing/2014/main" id="{79FC138A-D3C6-4011-B2E9-F3FC0B27A605}"/>
+                <a16:creationId xmlns:a16="http://schemas.microsoft.com/office/drawing/2014/main" id="{D7981A7F-9EBB-4684-A093-1CF6DBC0A81C}"/>
               </a:ext>
             </a:extLst>
           </p:cNvPr>
@@ -4373,7 +4373,7 @@
           <p:cNvPr id="3" name="">
             <a:extLst xmlns:a="http://schemas.openxmlformats.org/drawingml/2006/main">
               <a:ext uri="{FF2B5EF4-FFF2-40B4-BE49-F238E27FC236}">
-                <a16:creationId xmlns:a16="http://schemas.microsoft.com/office/drawing/2014/main" id="{6CD1FC8B-D05A-4D3A-962D-D2A5D3FF31F3}"/>
+                <a16:creationId xmlns:a16="http://schemas.microsoft.com/office/drawing/2014/main" id="{2D4497FD-B6FE-4BE0-B632-BEEC39AFDDA1}"/>
               </a:ext>
             </a:extLst>
           </p:cNvPr>
@@ -4430,7 +4430,7 @@
           <p:cNvPr id="4" name="">
             <a:extLst xmlns:a="http://schemas.openxmlformats.org/drawingml/2006/main">
               <a:ext uri="{FF2B5EF4-FFF2-40B4-BE49-F238E27FC236}">
-                <a16:creationId xmlns:a16="http://schemas.microsoft.com/office/drawing/2014/main" id="{C7445EBD-55AE-43B6-A578-E4913AD938B1}"/>
+                <a16:creationId xmlns:a16="http://schemas.microsoft.com/office/drawing/2014/main" id="{6B64A2FE-7A8E-49EB-8E06-7F4E76BBF2F7}"/>
               </a:ext>
             </a:extLst>
           </p:cNvPr>
@@ -4487,7 +4487,7 @@
           <p:cNvPr id="5" name="">
             <a:extLst xmlns:a="http://schemas.openxmlformats.org/drawingml/2006/main">
               <a:ext uri="{FF2B5EF4-FFF2-40B4-BE49-F238E27FC236}">
-                <a16:creationId xmlns:a16="http://schemas.microsoft.com/office/drawing/2014/main" id="{82F70BEA-E5CA-4998-A8C7-2D8865081962}"/>
+                <a16:creationId xmlns:a16="http://schemas.microsoft.com/office/drawing/2014/main" id="{A3614480-7148-472A-9ACE-308548410164}"/>
               </a:ext>
             </a:extLst>
           </p:cNvPr>
@@ -4846,7 +4846,7 @@
           <p:cNvPr id="7" name="">
             <a:extLst xmlns:a="http://schemas.openxmlformats.org/drawingml/2006/main">
               <a:ext uri="{FF2B5EF4-FFF2-40B4-BE49-F238E27FC236}">
-                <a16:creationId xmlns:a16="http://schemas.microsoft.com/office/drawing/2014/main" id="{E0C69E88-3245-4919-B4C1-9C5F404CAD7E}"/>
+                <a16:creationId xmlns:a16="http://schemas.microsoft.com/office/drawing/2014/main" id="{6DF287E2-5CAE-40FD-991C-534FDAB0E4CE}"/>
               </a:ext>
             </a:extLst>
           </p:cNvPr>
@@ -4901,7 +4901,7 @@
     </p:spTree>
     <p:extLst>
       <p:ext uri="{BB962C8B-B14F-4D97-AF65-F5344CB8AC3E}">
-        <p14:creationId xmlns:p14="http://schemas.microsoft.com/office/powerpoint/2010/main" val="1294065440"/>
+        <p14:creationId xmlns:p14="http://schemas.microsoft.com/office/powerpoint/2010/main" val="1562194396"/>
       </p:ext>
     </p:extLst>
   </p:cSld>
@@ -4932,7 +4932,7 @@
           <p:cNvPr id="8" name="">
             <a:extLst xmlns:a="http://schemas.openxmlformats.org/drawingml/2006/main">
               <a:ext uri="{FF2B5EF4-FFF2-40B4-BE49-F238E27FC236}">
-                <a16:creationId xmlns:a16="http://schemas.microsoft.com/office/drawing/2014/main" id="{87A2C693-AA90-4576-9674-906D797477FB}"/>
+                <a16:creationId xmlns:a16="http://schemas.microsoft.com/office/drawing/2014/main" id="{8FEB952C-10BD-47EA-94DF-193BC3D6A7CA}"/>
               </a:ext>
             </a:extLst>
           </p:cNvPr>
@@ -4989,7 +4989,7 @@
           <p:cNvPr id="2" name="">
             <a:extLst xmlns:a="http://schemas.openxmlformats.org/drawingml/2006/main">
               <a:ext uri="{FF2B5EF4-FFF2-40B4-BE49-F238E27FC236}">
-                <a16:creationId xmlns:a16="http://schemas.microsoft.com/office/drawing/2014/main" id="{5CFB7A4A-E4EE-4E8D-B636-08B2A278BB48}"/>
+                <a16:creationId xmlns:a16="http://schemas.microsoft.com/office/drawing/2014/main" id="{1A6D892C-33B5-45B3-A4DC-647AE36A40B2}"/>
               </a:ext>
             </a:extLst>
           </p:cNvPr>
@@ -5046,7 +5046,7 @@
           <p:cNvPr id="3" name="">
             <a:extLst xmlns:a="http://schemas.openxmlformats.org/drawingml/2006/main">
               <a:ext uri="{FF2B5EF4-FFF2-40B4-BE49-F238E27FC236}">
-                <a16:creationId xmlns:a16="http://schemas.microsoft.com/office/drawing/2014/main" id="{06F0DCE1-47FA-4D88-8013-C8D3FF007AE6}"/>
+                <a16:creationId xmlns:a16="http://schemas.microsoft.com/office/drawing/2014/main" id="{C1251F27-5B77-4085-A9F5-B86F45108B92}"/>
               </a:ext>
             </a:extLst>
           </p:cNvPr>
@@ -5103,7 +5103,7 @@
           <p:cNvPr id="4" name="">
             <a:extLst xmlns:a="http://schemas.openxmlformats.org/drawingml/2006/main">
               <a:ext uri="{FF2B5EF4-FFF2-40B4-BE49-F238E27FC236}">
-                <a16:creationId xmlns:a16="http://schemas.microsoft.com/office/drawing/2014/main" id="{9A1B4EAC-D9FB-4E87-B4AD-340E8472225B}"/>
+                <a16:creationId xmlns:a16="http://schemas.microsoft.com/office/drawing/2014/main" id="{7A127DE7-CCA5-4D46-91F4-619FE6B4B990}"/>
               </a:ext>
             </a:extLst>
           </p:cNvPr>
@@ -5160,7 +5160,7 @@
           <p:cNvPr id="5" name="">
             <a:extLst xmlns:a="http://schemas.openxmlformats.org/drawingml/2006/main">
               <a:ext uri="{FF2B5EF4-FFF2-40B4-BE49-F238E27FC236}">
-                <a16:creationId xmlns:a16="http://schemas.microsoft.com/office/drawing/2014/main" id="{69EE475F-5CA7-4669-B355-53AE0ACCE5F9}"/>
+                <a16:creationId xmlns:a16="http://schemas.microsoft.com/office/drawing/2014/main" id="{E3BE2791-F6E6-4F8B-B035-EE773F0DC0FC}"/>
               </a:ext>
             </a:extLst>
           </p:cNvPr>
@@ -5217,7 +5217,7 @@
           <p:cNvPr id="6" name="">
             <a:extLst xmlns:a="http://schemas.openxmlformats.org/drawingml/2006/main">
               <a:ext uri="{FF2B5EF4-FFF2-40B4-BE49-F238E27FC236}">
-                <a16:creationId xmlns:a16="http://schemas.microsoft.com/office/drawing/2014/main" id="{576248D3-F3BC-4029-BC95-BDE8CBCAD2CE}"/>
+                <a16:creationId xmlns:a16="http://schemas.microsoft.com/office/drawing/2014/main" id="{FA1D3887-3436-4C95-99BC-8BE16D4C0CE3}"/>
               </a:ext>
             </a:extLst>
           </p:cNvPr>
@@ -5274,7 +5274,7 @@
           <p:cNvPr id="7" name="">
             <a:extLst xmlns:a="http://schemas.openxmlformats.org/drawingml/2006/main">
               <a:ext uri="{FF2B5EF4-FFF2-40B4-BE49-F238E27FC236}">
-                <a16:creationId xmlns:a16="http://schemas.microsoft.com/office/drawing/2014/main" id="{D13C22BB-8108-4995-9917-39C04E430C88}"/>
+                <a16:creationId xmlns:a16="http://schemas.microsoft.com/office/drawing/2014/main" id="{CE206C9A-6616-43D3-88ED-80CE73AF583F}"/>
               </a:ext>
             </a:extLst>
           </p:cNvPr>
@@ -5329,7 +5329,7 @@
     </p:spTree>
     <p:extLst>
       <p:ext uri="{BB962C8B-B14F-4D97-AF65-F5344CB8AC3E}">
-        <p14:creationId xmlns:p14="http://schemas.microsoft.com/office/powerpoint/2010/main" val="1607062347"/>
+        <p14:creationId xmlns:p14="http://schemas.microsoft.com/office/powerpoint/2010/main" val="1918170772"/>
       </p:ext>
     </p:extLst>
   </p:cSld>
@@ -5360,7 +5360,7 @@
           <p:cNvPr id="16" name="">
             <a:extLst xmlns:a="http://schemas.openxmlformats.org/drawingml/2006/main">
               <a:ext uri="{FF2B5EF4-FFF2-40B4-BE49-F238E27FC236}">
-                <a16:creationId xmlns:a16="http://schemas.microsoft.com/office/drawing/2014/main" id="{E4FD3F81-41C4-48EC-A716-C47BA22C72BD}"/>
+                <a16:creationId xmlns:a16="http://schemas.microsoft.com/office/drawing/2014/main" id="{98ED2A93-EBFF-4961-BF52-9959F8C43FE2}"/>
               </a:ext>
             </a:extLst>
           </p:cNvPr>
@@ -5417,7 +5417,7 @@
           <p:cNvPr id="2" name="">
             <a:extLst xmlns:a="http://schemas.openxmlformats.org/drawingml/2006/main">
               <a:ext uri="{FF2B5EF4-FFF2-40B4-BE49-F238E27FC236}">
-                <a16:creationId xmlns:a16="http://schemas.microsoft.com/office/drawing/2014/main" id="{5FD40CA6-6B13-4623-B38D-3A64E40830EF}"/>
+                <a16:creationId xmlns:a16="http://schemas.microsoft.com/office/drawing/2014/main" id="{6B74E3A1-2703-418E-BDF8-873900300B76}"/>
               </a:ext>
             </a:extLst>
           </p:cNvPr>
@@ -5474,7 +5474,7 @@
           <p:cNvPr id="3" name="">
             <a:extLst xmlns:a="http://schemas.openxmlformats.org/drawingml/2006/main">
               <a:ext uri="{FF2B5EF4-FFF2-40B4-BE49-F238E27FC236}">
-                <a16:creationId xmlns:a16="http://schemas.microsoft.com/office/drawing/2014/main" id="{B24430AB-281C-4822-9FC4-3EFB60594C3F}"/>
+                <a16:creationId xmlns:a16="http://schemas.microsoft.com/office/drawing/2014/main" id="{68D708D4-E083-4916-88A4-E94EDCD43083}"/>
               </a:ext>
             </a:extLst>
           </p:cNvPr>
@@ -5531,7 +5531,7 @@
           <p:cNvPr id="4" name="">
             <a:extLst xmlns:a="http://schemas.openxmlformats.org/drawingml/2006/main">
               <a:ext uri="{FF2B5EF4-FFF2-40B4-BE49-F238E27FC236}">
-                <a16:creationId xmlns:a16="http://schemas.microsoft.com/office/drawing/2014/main" id="{C6904938-DF35-4DB9-81C0-062D3A1192EB}"/>
+                <a16:creationId xmlns:a16="http://schemas.microsoft.com/office/drawing/2014/main" id="{3192A4E4-8B6B-4734-A81D-38966B7D482D}"/>
               </a:ext>
             </a:extLst>
           </p:cNvPr>
@@ -5588,7 +5588,7 @@
           <p:cNvPr id="5" name="">
             <a:extLst xmlns:a="http://schemas.openxmlformats.org/drawingml/2006/main">
               <a:ext uri="{FF2B5EF4-FFF2-40B4-BE49-F238E27FC236}">
-                <a16:creationId xmlns:a16="http://schemas.microsoft.com/office/drawing/2014/main" id="{964EEE18-A910-4C3F-A28B-46DAD6BF769F}"/>
+                <a16:creationId xmlns:a16="http://schemas.microsoft.com/office/drawing/2014/main" id="{0FCA19D4-7350-4CEB-BCA7-62DCAA62A8BA}"/>
               </a:ext>
             </a:extLst>
           </p:cNvPr>
@@ -5645,7 +5645,7 @@
           <p:cNvPr id="6" name="">
             <a:extLst xmlns:a="http://schemas.openxmlformats.org/drawingml/2006/main">
               <a:ext uri="{FF2B5EF4-FFF2-40B4-BE49-F238E27FC236}">
-                <a16:creationId xmlns:a16="http://schemas.microsoft.com/office/drawing/2014/main" id="{18CF92AE-9345-4F03-8F92-8C898566FF2F}"/>
+                <a16:creationId xmlns:a16="http://schemas.microsoft.com/office/drawing/2014/main" id="{48540F83-403E-40C6-B005-BA59C4361886}"/>
               </a:ext>
             </a:extLst>
           </p:cNvPr>
@@ -5702,7 +5702,7 @@
           <p:cNvPr id="7" name="">
             <a:extLst xmlns:a="http://schemas.openxmlformats.org/drawingml/2006/main">
               <a:ext uri="{FF2B5EF4-FFF2-40B4-BE49-F238E27FC236}">
-                <a16:creationId xmlns:a16="http://schemas.microsoft.com/office/drawing/2014/main" id="{6200EC4F-6BDE-4A19-8C60-8EEB7469F83E}"/>
+                <a16:creationId xmlns:a16="http://schemas.microsoft.com/office/drawing/2014/main" id="{A7646AAF-D119-4A08-A96E-7B63E3D446BC}"/>
               </a:ext>
             </a:extLst>
           </p:cNvPr>
@@ -5759,7 +5759,7 @@
           <p:cNvPr id="8" name="">
             <a:extLst xmlns:a="http://schemas.openxmlformats.org/drawingml/2006/main">
               <a:ext uri="{FF2B5EF4-FFF2-40B4-BE49-F238E27FC236}">
-                <a16:creationId xmlns:a16="http://schemas.microsoft.com/office/drawing/2014/main" id="{865FB08A-E882-423E-8D0D-865D52F9BC96}"/>
+                <a16:creationId xmlns:a16="http://schemas.microsoft.com/office/drawing/2014/main" id="{E0241FF4-986C-4B3B-AC46-CF961124AB86}"/>
               </a:ext>
             </a:extLst>
           </p:cNvPr>
@@ -5816,7 +5816,7 @@
           <p:cNvPr id="9" name="">
             <a:extLst xmlns:a="http://schemas.openxmlformats.org/drawingml/2006/main">
               <a:ext uri="{FF2B5EF4-FFF2-40B4-BE49-F238E27FC236}">
-                <a16:creationId xmlns:a16="http://schemas.microsoft.com/office/drawing/2014/main" id="{942727BD-D559-454D-975F-70C8DF90F53C}"/>
+                <a16:creationId xmlns:a16="http://schemas.microsoft.com/office/drawing/2014/main" id="{64850E62-515C-4F37-AA16-E3C689BB9A7E}"/>
               </a:ext>
             </a:extLst>
           </p:cNvPr>
@@ -5873,7 +5873,7 @@
           <p:cNvPr id="10" name="">
             <a:extLst xmlns:a="http://schemas.openxmlformats.org/drawingml/2006/main">
               <a:ext uri="{FF2B5EF4-FFF2-40B4-BE49-F238E27FC236}">
-                <a16:creationId xmlns:a16="http://schemas.microsoft.com/office/drawing/2014/main" id="{95110BA2-ECB4-4619-98FF-04515A3EA9FE}"/>
+                <a16:creationId xmlns:a16="http://schemas.microsoft.com/office/drawing/2014/main" id="{D9C2D4CA-0BEF-4114-9396-1EBEB05727BB}"/>
               </a:ext>
             </a:extLst>
           </p:cNvPr>
@@ -5930,7 +5930,7 @@
           <p:cNvPr id="11" name="">
             <a:extLst xmlns:a="http://schemas.openxmlformats.org/drawingml/2006/main">
               <a:ext uri="{FF2B5EF4-FFF2-40B4-BE49-F238E27FC236}">
-                <a16:creationId xmlns:a16="http://schemas.microsoft.com/office/drawing/2014/main" id="{708C4404-74EA-4D1A-BD86-879CE59B6C5B}"/>
+                <a16:creationId xmlns:a16="http://schemas.microsoft.com/office/drawing/2014/main" id="{EC899DAF-833B-4882-ACE7-947FDB6E698D}"/>
               </a:ext>
             </a:extLst>
           </p:cNvPr>
@@ -5987,7 +5987,7 @@
           <p:cNvPr id="12" name="">
             <a:extLst xmlns:a="http://schemas.openxmlformats.org/drawingml/2006/main">
               <a:ext uri="{FF2B5EF4-FFF2-40B4-BE49-F238E27FC236}">
-                <a16:creationId xmlns:a16="http://schemas.microsoft.com/office/drawing/2014/main" id="{5565B5D6-4499-4BD8-82CC-42A2C21B4ADC}"/>
+                <a16:creationId xmlns:a16="http://schemas.microsoft.com/office/drawing/2014/main" id="{8667B082-4669-48CD-9920-C89605618C08}"/>
               </a:ext>
             </a:extLst>
           </p:cNvPr>
@@ -6044,7 +6044,7 @@
           <p:cNvPr id="13" name="">
             <a:extLst xmlns:a="http://schemas.openxmlformats.org/drawingml/2006/main">
               <a:ext uri="{FF2B5EF4-FFF2-40B4-BE49-F238E27FC236}">
-                <a16:creationId xmlns:a16="http://schemas.microsoft.com/office/drawing/2014/main" id="{ACF33A76-F797-4319-9590-FE010743660C}"/>
+                <a16:creationId xmlns:a16="http://schemas.microsoft.com/office/drawing/2014/main" id="{54EE372C-7B70-4BCB-A182-DC4B80263921}"/>
               </a:ext>
             </a:extLst>
           </p:cNvPr>
@@ -6101,7 +6101,7 @@
           <p:cNvPr id="14" name="">
             <a:extLst xmlns:a="http://schemas.openxmlformats.org/drawingml/2006/main">
               <a:ext uri="{FF2B5EF4-FFF2-40B4-BE49-F238E27FC236}">
-                <a16:creationId xmlns:a16="http://schemas.microsoft.com/office/drawing/2014/main" id="{D59B2585-A839-4B40-AD4B-5A464AEF354D}"/>
+                <a16:creationId xmlns:a16="http://schemas.microsoft.com/office/drawing/2014/main" id="{2B0F8C2C-98B5-4AD4-BEA2-21028ABA613F}"/>
               </a:ext>
             </a:extLst>
           </p:cNvPr>
@@ -6158,7 +6158,7 @@
           <p:cNvPr id="15" name="">
             <a:extLst xmlns:a="http://schemas.openxmlformats.org/drawingml/2006/main">
               <a:ext uri="{FF2B5EF4-FFF2-40B4-BE49-F238E27FC236}">
-                <a16:creationId xmlns:a16="http://schemas.microsoft.com/office/drawing/2014/main" id="{ECE26939-F239-4041-A429-7C1787CDD544}"/>
+                <a16:creationId xmlns:a16="http://schemas.microsoft.com/office/drawing/2014/main" id="{DEEF5F34-2F83-480A-821B-D48C2C5B9DA1}"/>
               </a:ext>
             </a:extLst>
           </p:cNvPr>
@@ -6213,7 +6213,7 @@
     </p:spTree>
     <p:extLst>
       <p:ext uri="{BB962C8B-B14F-4D97-AF65-F5344CB8AC3E}">
-        <p14:creationId xmlns:p14="http://schemas.microsoft.com/office/powerpoint/2010/main" val="757423999"/>
+        <p14:creationId xmlns:p14="http://schemas.microsoft.com/office/powerpoint/2010/main" val="304010874"/>
       </p:ext>
     </p:extLst>
   </p:cSld>
@@ -6244,7 +6244,7 @@
           <p:cNvPr id="16" name="">
             <a:extLst xmlns:a="http://schemas.openxmlformats.org/drawingml/2006/main">
               <a:ext uri="{FF2B5EF4-FFF2-40B4-BE49-F238E27FC236}">
-                <a16:creationId xmlns:a16="http://schemas.microsoft.com/office/drawing/2014/main" id="{7F33CEB6-52F1-4AFB-B7BC-C12D7CDE1A1F}"/>
+                <a16:creationId xmlns:a16="http://schemas.microsoft.com/office/drawing/2014/main" id="{FAA228FA-5D69-4EAB-9E0D-4FC79F1A596F}"/>
               </a:ext>
             </a:extLst>
           </p:cNvPr>
@@ -6301,7 +6301,7 @@
           <p:cNvPr id="2" name="">
             <a:extLst xmlns:a="http://schemas.openxmlformats.org/drawingml/2006/main">
               <a:ext uri="{FF2B5EF4-FFF2-40B4-BE49-F238E27FC236}">
-                <a16:creationId xmlns:a16="http://schemas.microsoft.com/office/drawing/2014/main" id="{3378B711-B7B7-46E7-B561-D8AFAE300236}"/>
+                <a16:creationId xmlns:a16="http://schemas.microsoft.com/office/drawing/2014/main" id="{9FE16F86-0ACF-4F18-A9C7-8C79EBB5BC21}"/>
               </a:ext>
             </a:extLst>
           </p:cNvPr>
@@ -6358,7 +6358,7 @@
           <p:cNvPr id="3" name="">
             <a:extLst xmlns:a="http://schemas.openxmlformats.org/drawingml/2006/main">
               <a:ext uri="{FF2B5EF4-FFF2-40B4-BE49-F238E27FC236}">
-                <a16:creationId xmlns:a16="http://schemas.microsoft.com/office/drawing/2014/main" id="{4992CFE9-2ED5-48C5-9181-41AA0B411F22}"/>
+                <a16:creationId xmlns:a16="http://schemas.microsoft.com/office/drawing/2014/main" id="{731631BE-1133-4B41-A409-F76F409B7DE2}"/>
               </a:ext>
             </a:extLst>
           </p:cNvPr>
@@ -6415,7 +6415,7 @@
           <p:cNvPr id="4" name="">
             <a:extLst xmlns:a="http://schemas.openxmlformats.org/drawingml/2006/main">
               <a:ext uri="{FF2B5EF4-FFF2-40B4-BE49-F238E27FC236}">
-                <a16:creationId xmlns:a16="http://schemas.microsoft.com/office/drawing/2014/main" id="{6E341C46-ADF3-4406-A744-880677773DC9}"/>
+                <a16:creationId xmlns:a16="http://schemas.microsoft.com/office/drawing/2014/main" id="{4B45D523-AF59-4B83-9B66-9BA920AF6A13}"/>
               </a:ext>
             </a:extLst>
           </p:cNvPr>
@@ -6472,7 +6472,7 @@
           <p:cNvPr id="5" name="">
             <a:extLst xmlns:a="http://schemas.openxmlformats.org/drawingml/2006/main">
               <a:ext uri="{FF2B5EF4-FFF2-40B4-BE49-F238E27FC236}">
-                <a16:creationId xmlns:a16="http://schemas.microsoft.com/office/drawing/2014/main" id="{D988C31B-C9A6-4EB7-BCAA-B6FA0A9A2A82}"/>
+                <a16:creationId xmlns:a16="http://schemas.microsoft.com/office/drawing/2014/main" id="{C574BA37-1EF1-41E4-8AB7-700CBB3DBD0F}"/>
               </a:ext>
             </a:extLst>
           </p:cNvPr>
@@ -6529,7 +6529,7 @@
           <p:cNvPr id="6" name="">
             <a:extLst xmlns:a="http://schemas.openxmlformats.org/drawingml/2006/main">
               <a:ext uri="{FF2B5EF4-FFF2-40B4-BE49-F238E27FC236}">
-                <a16:creationId xmlns:a16="http://schemas.microsoft.com/office/drawing/2014/main" id="{587F0D1B-541D-4F50-B209-9972280382CA}"/>
+                <a16:creationId xmlns:a16="http://schemas.microsoft.com/office/drawing/2014/main" id="{2D304883-AC80-4F98-B0F6-3A16C63FC2B2}"/>
               </a:ext>
             </a:extLst>
           </p:cNvPr>
@@ -6586,7 +6586,7 @@
           <p:cNvPr id="7" name="">
             <a:extLst xmlns:a="http://schemas.openxmlformats.org/drawingml/2006/main">
               <a:ext uri="{FF2B5EF4-FFF2-40B4-BE49-F238E27FC236}">
-                <a16:creationId xmlns:a16="http://schemas.microsoft.com/office/drawing/2014/main" id="{326E8243-99C8-47A6-A844-2DDCB018576E}"/>
+                <a16:creationId xmlns:a16="http://schemas.microsoft.com/office/drawing/2014/main" id="{66BAD779-A414-4B91-99B4-A211F0467CDF}"/>
               </a:ext>
             </a:extLst>
           </p:cNvPr>
@@ -6643,7 +6643,7 @@
           <p:cNvPr id="8" name="">
             <a:extLst xmlns:a="http://schemas.openxmlformats.org/drawingml/2006/main">
               <a:ext uri="{FF2B5EF4-FFF2-40B4-BE49-F238E27FC236}">
-                <a16:creationId xmlns:a16="http://schemas.microsoft.com/office/drawing/2014/main" id="{7BB6DB07-86CF-4658-996E-0A61FA5B98C0}"/>
+                <a16:creationId xmlns:a16="http://schemas.microsoft.com/office/drawing/2014/main" id="{A29AD4DA-22B6-4E15-A05C-E3BCEFD1B427}"/>
               </a:ext>
             </a:extLst>
           </p:cNvPr>
@@ -6700,7 +6700,7 @@
           <p:cNvPr id="9" name="">
             <a:extLst xmlns:a="http://schemas.openxmlformats.org/drawingml/2006/main">
               <a:ext uri="{FF2B5EF4-FFF2-40B4-BE49-F238E27FC236}">
-                <a16:creationId xmlns:a16="http://schemas.microsoft.com/office/drawing/2014/main" id="{85C4BAF8-6BB4-4AFC-A470-D74E93568BB4}"/>
+                <a16:creationId xmlns:a16="http://schemas.microsoft.com/office/drawing/2014/main" id="{8E17AE72-C78D-49E7-9B40-D9730237B3AB}"/>
               </a:ext>
             </a:extLst>
           </p:cNvPr>
@@ -6757,7 +6757,7 @@
           <p:cNvPr id="10" name="">
             <a:extLst xmlns:a="http://schemas.openxmlformats.org/drawingml/2006/main">
               <a:ext uri="{FF2B5EF4-FFF2-40B4-BE49-F238E27FC236}">
-                <a16:creationId xmlns:a16="http://schemas.microsoft.com/office/drawing/2014/main" id="{51DFD487-BD6F-476C-9863-48EE793FE930}"/>
+                <a16:creationId xmlns:a16="http://schemas.microsoft.com/office/drawing/2014/main" id="{01E398D9-FDC7-4AE0-827F-E5DBA7167A07}"/>
               </a:ext>
             </a:extLst>
           </p:cNvPr>
@@ -6814,7 +6814,7 @@
           <p:cNvPr id="11" name="">
             <a:extLst xmlns:a="http://schemas.openxmlformats.org/drawingml/2006/main">
               <a:ext uri="{FF2B5EF4-FFF2-40B4-BE49-F238E27FC236}">
-                <a16:creationId xmlns:a16="http://schemas.microsoft.com/office/drawing/2014/main" id="{96CAB5C4-7308-452F-AF27-703D747236A1}"/>
+                <a16:creationId xmlns:a16="http://schemas.microsoft.com/office/drawing/2014/main" id="{7CD79383-233E-4258-9F0A-1C08AA1F1E39}"/>
               </a:ext>
             </a:extLst>
           </p:cNvPr>
@@ -6871,7 +6871,7 @@
           <p:cNvPr id="12" name="">
             <a:extLst xmlns:a="http://schemas.openxmlformats.org/drawingml/2006/main">
               <a:ext uri="{FF2B5EF4-FFF2-40B4-BE49-F238E27FC236}">
-                <a16:creationId xmlns:a16="http://schemas.microsoft.com/office/drawing/2014/main" id="{15953DB5-E863-4B4A-BD93-E7211AB0DF0A}"/>
+                <a16:creationId xmlns:a16="http://schemas.microsoft.com/office/drawing/2014/main" id="{447C520D-69B2-4B7B-81D7-8CFE4E4995F3}"/>
               </a:ext>
             </a:extLst>
           </p:cNvPr>
@@ -6928,7 +6928,7 @@
           <p:cNvPr id="13" name="">
             <a:extLst xmlns:a="http://schemas.openxmlformats.org/drawingml/2006/main">
               <a:ext uri="{FF2B5EF4-FFF2-40B4-BE49-F238E27FC236}">
-                <a16:creationId xmlns:a16="http://schemas.microsoft.com/office/drawing/2014/main" id="{0D851590-92B4-4381-9BB9-561DCB8B4943}"/>
+                <a16:creationId xmlns:a16="http://schemas.microsoft.com/office/drawing/2014/main" id="{36517C10-57F0-41AE-8E53-48916BD90D32}"/>
               </a:ext>
             </a:extLst>
           </p:cNvPr>
@@ -6985,7 +6985,7 @@
           <p:cNvPr id="14" name="">
             <a:extLst xmlns:a="http://schemas.openxmlformats.org/drawingml/2006/main">
               <a:ext uri="{FF2B5EF4-FFF2-40B4-BE49-F238E27FC236}">
-                <a16:creationId xmlns:a16="http://schemas.microsoft.com/office/drawing/2014/main" id="{F55DF402-82A1-4880-A947-00DF66810821}"/>
+                <a16:creationId xmlns:a16="http://schemas.microsoft.com/office/drawing/2014/main" id="{B1A4D3D6-EDBF-42B7-8466-1BFE81646324}"/>
               </a:ext>
             </a:extLst>
           </p:cNvPr>
@@ -7042,7 +7042,7 @@
           <p:cNvPr id="15" name="">
             <a:extLst xmlns:a="http://schemas.openxmlformats.org/drawingml/2006/main">
               <a:ext uri="{FF2B5EF4-FFF2-40B4-BE49-F238E27FC236}">
-                <a16:creationId xmlns:a16="http://schemas.microsoft.com/office/drawing/2014/main" id="{5559C3FB-CD75-4A41-B2DE-ECB828CEC124}"/>
+                <a16:creationId xmlns:a16="http://schemas.microsoft.com/office/drawing/2014/main" id="{ABC75B55-B8D5-4FB9-8647-6265676F4D14}"/>
               </a:ext>
             </a:extLst>
           </p:cNvPr>
@@ -7097,7 +7097,7 @@
     </p:spTree>
     <p:extLst>
       <p:ext uri="{BB962C8B-B14F-4D97-AF65-F5344CB8AC3E}">
-        <p14:creationId xmlns:p14="http://schemas.microsoft.com/office/powerpoint/2010/main" val="326885571"/>
+        <p14:creationId xmlns:p14="http://schemas.microsoft.com/office/powerpoint/2010/main" val="473642488"/>
       </p:ext>
     </p:extLst>
   </p:cSld>
@@ -7128,7 +7128,7 @@
           <p:cNvPr id="8" name="">
             <a:extLst xmlns:a="http://schemas.openxmlformats.org/drawingml/2006/main">
               <a:ext uri="{FF2B5EF4-FFF2-40B4-BE49-F238E27FC236}">
-                <a16:creationId xmlns:a16="http://schemas.microsoft.com/office/drawing/2014/main" id="{CFF5BF1B-E537-408F-A902-8A790635DCDC}"/>
+                <a16:creationId xmlns:a16="http://schemas.microsoft.com/office/drawing/2014/main" id="{EFB1FD73-E9FC-4F6E-A583-F90962508AE3}"/>
               </a:ext>
             </a:extLst>
           </p:cNvPr>
@@ -7185,7 +7185,7 @@
           <p:cNvPr id="2" name="">
             <a:extLst xmlns:a="http://schemas.openxmlformats.org/drawingml/2006/main">
               <a:ext uri="{FF2B5EF4-FFF2-40B4-BE49-F238E27FC236}">
-                <a16:creationId xmlns:a16="http://schemas.microsoft.com/office/drawing/2014/main" id="{2D6584DC-812B-4EB8-9C2B-7611E78CE60B}"/>
+                <a16:creationId xmlns:a16="http://schemas.microsoft.com/office/drawing/2014/main" id="{9666C466-2806-4802-BEAB-9BE1B0346622}"/>
               </a:ext>
             </a:extLst>
           </p:cNvPr>
@@ -7242,7 +7242,7 @@
           <p:cNvPr id="3" name="">
             <a:extLst xmlns:a="http://schemas.openxmlformats.org/drawingml/2006/main">
               <a:ext uri="{FF2B5EF4-FFF2-40B4-BE49-F238E27FC236}">
-                <a16:creationId xmlns:a16="http://schemas.microsoft.com/office/drawing/2014/main" id="{438ABA7B-E77A-409E-876E-B4813BDCF2A3}"/>
+                <a16:creationId xmlns:a16="http://schemas.microsoft.com/office/drawing/2014/main" id="{F17CB899-C66A-4940-AF8D-35E303148F13}"/>
               </a:ext>
             </a:extLst>
           </p:cNvPr>
@@ -7299,7 +7299,7 @@
           <p:cNvPr id="4" name="">
             <a:extLst xmlns:a="http://schemas.openxmlformats.org/drawingml/2006/main">
               <a:ext uri="{FF2B5EF4-FFF2-40B4-BE49-F238E27FC236}">
-                <a16:creationId xmlns:a16="http://schemas.microsoft.com/office/drawing/2014/main" id="{90491854-7B8F-4994-B528-ACC64B083260}"/>
+                <a16:creationId xmlns:a16="http://schemas.microsoft.com/office/drawing/2014/main" id="{5A2FDC19-DA9E-43EB-9FB7-D2B0002749A0}"/>
               </a:ext>
             </a:extLst>
           </p:cNvPr>
@@ -7356,7 +7356,7 @@
           <p:cNvPr id="5" name="">
             <a:extLst xmlns:a="http://schemas.openxmlformats.org/drawingml/2006/main">
               <a:ext uri="{FF2B5EF4-FFF2-40B4-BE49-F238E27FC236}">
-                <a16:creationId xmlns:a16="http://schemas.microsoft.com/office/drawing/2014/main" id="{57813CB6-3227-4914-9637-8F04ED741770}"/>
+                <a16:creationId xmlns:a16="http://schemas.microsoft.com/office/drawing/2014/main" id="{69F3EDDE-E80E-4A8D-8F45-CE7532F789A6}"/>
               </a:ext>
             </a:extLst>
           </p:cNvPr>
@@ -7436,7 +7436,7 @@
           <p:cNvPr id="6" name="">
             <a:extLst xmlns:a="http://schemas.openxmlformats.org/drawingml/2006/main">
               <a:ext uri="{FF2B5EF4-FFF2-40B4-BE49-F238E27FC236}">
-                <a16:creationId xmlns:a16="http://schemas.microsoft.com/office/drawing/2014/main" id="{EA21690E-C645-460F-BEBC-05615852211B}"/>
+                <a16:creationId xmlns:a16="http://schemas.microsoft.com/office/drawing/2014/main" id="{51DF8A9F-BBE0-4174-B3DF-2EA8EDA03424}"/>
               </a:ext>
             </a:extLst>
           </p:cNvPr>
@@ -7493,7 +7493,7 @@
           <p:cNvPr id="7" name="">
             <a:extLst xmlns:a="http://schemas.openxmlformats.org/drawingml/2006/main">
               <a:ext uri="{FF2B5EF4-FFF2-40B4-BE49-F238E27FC236}">
-                <a16:creationId xmlns:a16="http://schemas.microsoft.com/office/drawing/2014/main" id="{F565EFB6-CD34-4C17-9531-E3B58CBD7BBA}"/>
+                <a16:creationId xmlns:a16="http://schemas.microsoft.com/office/drawing/2014/main" id="{7CC63F3D-A3A5-498D-B171-F499E6A92525}"/>
               </a:ext>
             </a:extLst>
           </p:cNvPr>
@@ -7548,7 +7548,7 @@
     </p:spTree>
     <p:extLst>
       <p:ext uri="{BB962C8B-B14F-4D97-AF65-F5344CB8AC3E}">
-        <p14:creationId xmlns:p14="http://schemas.microsoft.com/office/powerpoint/2010/main" val="1772102396"/>
+        <p14:creationId xmlns:p14="http://schemas.microsoft.com/office/powerpoint/2010/main" val="1525189330"/>
       </p:ext>
     </p:extLst>
   </p:cSld>
@@ -7579,7 +7579,7 @@
           <p:cNvPr id="8" name="">
             <a:extLst xmlns:a="http://schemas.openxmlformats.org/drawingml/2006/main">
               <a:ext uri="{FF2B5EF4-FFF2-40B4-BE49-F238E27FC236}">
-                <a16:creationId xmlns:a16="http://schemas.microsoft.com/office/drawing/2014/main" id="{7C9335FA-EBF5-48CB-A458-FBF81A5F6296}"/>
+                <a16:creationId xmlns:a16="http://schemas.microsoft.com/office/drawing/2014/main" id="{BADC72B5-93E4-448E-B264-3ADC979C34CE}"/>
               </a:ext>
             </a:extLst>
           </p:cNvPr>
@@ -7636,7 +7636,7 @@
           <p:cNvPr id="2" name="">
             <a:extLst xmlns:a="http://schemas.openxmlformats.org/drawingml/2006/main">
               <a:ext uri="{FF2B5EF4-FFF2-40B4-BE49-F238E27FC236}">
-                <a16:creationId xmlns:a16="http://schemas.microsoft.com/office/drawing/2014/main" id="{5B24FE3E-E8BF-4439-819D-AFF74784DD4F}"/>
+                <a16:creationId xmlns:a16="http://schemas.microsoft.com/office/drawing/2014/main" id="{2B765D34-B457-4553-AE39-90DE26DF7F49}"/>
               </a:ext>
             </a:extLst>
           </p:cNvPr>
@@ -7693,7 +7693,7 @@
           <p:cNvPr id="3" name="">
             <a:extLst xmlns:a="http://schemas.openxmlformats.org/drawingml/2006/main">
               <a:ext uri="{FF2B5EF4-FFF2-40B4-BE49-F238E27FC236}">
-                <a16:creationId xmlns:a16="http://schemas.microsoft.com/office/drawing/2014/main" id="{7F4937DF-4AB3-445D-90A1-F4220425F930}"/>
+                <a16:creationId xmlns:a16="http://schemas.microsoft.com/office/drawing/2014/main" id="{C6010A5A-6CC3-4CBE-9935-45C771E2F1A9}"/>
               </a:ext>
             </a:extLst>
           </p:cNvPr>
@@ -7750,7 +7750,7 @@
           <p:cNvPr id="4" name="">
             <a:extLst xmlns:a="http://schemas.openxmlformats.org/drawingml/2006/main">
               <a:ext uri="{FF2B5EF4-FFF2-40B4-BE49-F238E27FC236}">
-                <a16:creationId xmlns:a16="http://schemas.microsoft.com/office/drawing/2014/main" id="{F6FD96CD-3D09-42A7-AC89-891B17AF14C6}"/>
+                <a16:creationId xmlns:a16="http://schemas.microsoft.com/office/drawing/2014/main" id="{84F1559D-9E03-45F3-ACD4-794E0BE434B8}"/>
               </a:ext>
             </a:extLst>
           </p:cNvPr>
@@ -7807,7 +7807,7 @@
           <p:cNvPr id="5" name="">
             <a:extLst xmlns:a="http://schemas.openxmlformats.org/drawingml/2006/main">
               <a:ext uri="{FF2B5EF4-FFF2-40B4-BE49-F238E27FC236}">
-                <a16:creationId xmlns:a16="http://schemas.microsoft.com/office/drawing/2014/main" id="{697D9E78-C594-417D-89EC-3A2391ABF0F2}"/>
+                <a16:creationId xmlns:a16="http://schemas.microsoft.com/office/drawing/2014/main" id="{55C5AF69-512A-469E-A38A-C10F61F04CA1}"/>
               </a:ext>
             </a:extLst>
           </p:cNvPr>
@@ -8136,7 +8136,7 @@
           <p:cNvPr id="7" name="">
             <a:extLst xmlns:a="http://schemas.openxmlformats.org/drawingml/2006/main">
               <a:ext uri="{FF2B5EF4-FFF2-40B4-BE49-F238E27FC236}">
-                <a16:creationId xmlns:a16="http://schemas.microsoft.com/office/drawing/2014/main" id="{94947671-CF57-4306-8766-9DD5374DC499}"/>
+                <a16:creationId xmlns:a16="http://schemas.microsoft.com/office/drawing/2014/main" id="{EFA077CE-F5DD-4934-85DF-DB2481CD4D62}"/>
               </a:ext>
             </a:extLst>
           </p:cNvPr>
@@ -8214,7 +8214,7 @@
     </p:spTree>
     <p:extLst>
       <p:ext uri="{BB962C8B-B14F-4D97-AF65-F5344CB8AC3E}">
-        <p14:creationId xmlns:p14="http://schemas.microsoft.com/office/powerpoint/2010/main" val="9358665"/>
+        <p14:creationId xmlns:p14="http://schemas.microsoft.com/office/powerpoint/2010/main" val="1687253711"/>
       </p:ext>
     </p:extLst>
   </p:cSld>
@@ -8245,7 +8245,7 @@
           <p:cNvPr id="8" name="">
             <a:extLst xmlns:a="http://schemas.openxmlformats.org/drawingml/2006/main">
               <a:ext uri="{FF2B5EF4-FFF2-40B4-BE49-F238E27FC236}">
-                <a16:creationId xmlns:a16="http://schemas.microsoft.com/office/drawing/2014/main" id="{31FA1B33-72E0-4444-8947-168217973B2C}"/>
+                <a16:creationId xmlns:a16="http://schemas.microsoft.com/office/drawing/2014/main" id="{AFF5EA53-E40B-4F93-A514-7485E71FBCF4}"/>
               </a:ext>
             </a:extLst>
           </p:cNvPr>
@@ -8302,7 +8302,7 @@
           <p:cNvPr id="2" name="">
             <a:extLst xmlns:a="http://schemas.openxmlformats.org/drawingml/2006/main">
               <a:ext uri="{FF2B5EF4-FFF2-40B4-BE49-F238E27FC236}">
-                <a16:creationId xmlns:a16="http://schemas.microsoft.com/office/drawing/2014/main" id="{3B1D052D-C3AA-45C8-8E5B-35F2D34BA52C}"/>
+                <a16:creationId xmlns:a16="http://schemas.microsoft.com/office/drawing/2014/main" id="{24DA1195-055D-4BD2-BB92-3FE57141994D}"/>
               </a:ext>
             </a:extLst>
           </p:cNvPr>
@@ -8359,7 +8359,7 @@
           <p:cNvPr id="3" name="">
             <a:extLst xmlns:a="http://schemas.openxmlformats.org/drawingml/2006/main">
               <a:ext uri="{FF2B5EF4-FFF2-40B4-BE49-F238E27FC236}">
-                <a16:creationId xmlns:a16="http://schemas.microsoft.com/office/drawing/2014/main" id="{4A6742DB-AAFA-4D10-A16E-73FE10374A21}"/>
+                <a16:creationId xmlns:a16="http://schemas.microsoft.com/office/drawing/2014/main" id="{31D6CE10-2AB2-41C7-A655-D36620D1B87D}"/>
               </a:ext>
             </a:extLst>
           </p:cNvPr>
@@ -8416,7 +8416,7 @@
           <p:cNvPr id="4" name="">
             <a:extLst xmlns:a="http://schemas.openxmlformats.org/drawingml/2006/main">
               <a:ext uri="{FF2B5EF4-FFF2-40B4-BE49-F238E27FC236}">
-                <a16:creationId xmlns:a16="http://schemas.microsoft.com/office/drawing/2014/main" id="{008DF8F4-BA21-4953-90EE-72484D77AFFC}"/>
+                <a16:creationId xmlns:a16="http://schemas.microsoft.com/office/drawing/2014/main" id="{BFA427D0-ADC1-40B6-B35F-CCA95CAFF4D8}"/>
               </a:ext>
             </a:extLst>
           </p:cNvPr>
@@ -8496,7 +8496,7 @@
           <p:cNvPr id="5" name="">
             <a:extLst xmlns:a="http://schemas.openxmlformats.org/drawingml/2006/main">
               <a:ext uri="{FF2B5EF4-FFF2-40B4-BE49-F238E27FC236}">
-                <a16:creationId xmlns:a16="http://schemas.microsoft.com/office/drawing/2014/main" id="{AB5BD666-B69E-4EBD-85EF-E0C1414E5FE8}"/>
+                <a16:creationId xmlns:a16="http://schemas.microsoft.com/office/drawing/2014/main" id="{03DD8741-0B21-4C8D-BC56-1A9E17679F24}"/>
               </a:ext>
             </a:extLst>
           </p:cNvPr>
@@ -8576,7 +8576,7 @@
           <p:cNvPr id="6" name="">
             <a:extLst xmlns:a="http://schemas.openxmlformats.org/drawingml/2006/main">
               <a:ext uri="{FF2B5EF4-FFF2-40B4-BE49-F238E27FC236}">
-                <a16:creationId xmlns:a16="http://schemas.microsoft.com/office/drawing/2014/main" id="{5A82FC9B-56B2-4FA8-9403-8CC3A45ADE6D}"/>
+                <a16:creationId xmlns:a16="http://schemas.microsoft.com/office/drawing/2014/main" id="{A6898764-39E2-47FE-9830-BB2B4C0FC4DD}"/>
               </a:ext>
             </a:extLst>
           </p:cNvPr>
@@ -8656,7 +8656,7 @@
           <p:cNvPr id="7" name="">
             <a:extLst xmlns:a="http://schemas.openxmlformats.org/drawingml/2006/main">
               <a:ext uri="{FF2B5EF4-FFF2-40B4-BE49-F238E27FC236}">
-                <a16:creationId xmlns:a16="http://schemas.microsoft.com/office/drawing/2014/main" id="{BC8BDC0A-C041-450D-B525-C3454E9058F2}"/>
+                <a16:creationId xmlns:a16="http://schemas.microsoft.com/office/drawing/2014/main" id="{81865CCB-5A66-4FC4-8D2A-0BDA2D71BED6}"/>
               </a:ext>
             </a:extLst>
           </p:cNvPr>
@@ -8711,7 +8711,7 @@
     </p:spTree>
     <p:extLst>
       <p:ext uri="{BB962C8B-B14F-4D97-AF65-F5344CB8AC3E}">
-        <p14:creationId xmlns:p14="http://schemas.microsoft.com/office/powerpoint/2010/main" val="365767161"/>
+        <p14:creationId xmlns:p14="http://schemas.microsoft.com/office/powerpoint/2010/main" val="1092887806"/>
       </p:ext>
     </p:extLst>
   </p:cSld>
@@ -8742,7 +8742,7 @@
           <p:cNvPr id="9" name="">
             <a:extLst xmlns:a="http://schemas.openxmlformats.org/drawingml/2006/main">
               <a:ext uri="{FF2B5EF4-FFF2-40B4-BE49-F238E27FC236}">
-                <a16:creationId xmlns:a16="http://schemas.microsoft.com/office/drawing/2014/main" id="{4EB67CC3-6F21-4366-9E53-CC0527E704DD}"/>
+                <a16:creationId xmlns:a16="http://schemas.microsoft.com/office/drawing/2014/main" id="{5F5F6BF6-2E15-4A71-8FD0-A97493C1B503}"/>
               </a:ext>
             </a:extLst>
           </p:cNvPr>
@@ -8799,7 +8799,7 @@
           <p:cNvPr id="2" name="">
             <a:extLst xmlns:a="http://schemas.openxmlformats.org/drawingml/2006/main">
               <a:ext uri="{FF2B5EF4-FFF2-40B4-BE49-F238E27FC236}">
-                <a16:creationId xmlns:a16="http://schemas.microsoft.com/office/drawing/2014/main" id="{1A25B4C4-4B44-460D-9BD3-E68C7682ED81}"/>
+                <a16:creationId xmlns:a16="http://schemas.microsoft.com/office/drawing/2014/main" id="{9C8502EB-A7C5-40F0-99BA-ED0CFD111461}"/>
               </a:ext>
             </a:extLst>
           </p:cNvPr>
@@ -8856,7 +8856,7 @@
           <p:cNvPr id="3" name="">
             <a:extLst xmlns:a="http://schemas.openxmlformats.org/drawingml/2006/main">
               <a:ext uri="{FF2B5EF4-FFF2-40B4-BE49-F238E27FC236}">
-                <a16:creationId xmlns:a16="http://schemas.microsoft.com/office/drawing/2014/main" id="{E9DB0B39-A14C-4439-ADDB-8A08AAAB16F7}"/>
+                <a16:creationId xmlns:a16="http://schemas.microsoft.com/office/drawing/2014/main" id="{B0B1D7B0-ACBA-4B93-B907-FF76AB65AAF4}"/>
               </a:ext>
             </a:extLst>
           </p:cNvPr>
@@ -8913,7 +8913,7 @@
           <p:cNvPr id="4" name="">
             <a:extLst xmlns:a="http://schemas.openxmlformats.org/drawingml/2006/main">
               <a:ext uri="{FF2B5EF4-FFF2-40B4-BE49-F238E27FC236}">
-                <a16:creationId xmlns:a16="http://schemas.microsoft.com/office/drawing/2014/main" id="{874A924B-6E37-4050-B920-9CBA608F9133}"/>
+                <a16:creationId xmlns:a16="http://schemas.microsoft.com/office/drawing/2014/main" id="{27FADB82-9842-4841-BC46-E25629BA530E}"/>
               </a:ext>
             </a:extLst>
           </p:cNvPr>
@@ -8970,7 +8970,7 @@
           <p:cNvPr id="5" name="">
             <a:extLst xmlns:a="http://schemas.openxmlformats.org/drawingml/2006/main">
               <a:ext uri="{FF2B5EF4-FFF2-40B4-BE49-F238E27FC236}">
-                <a16:creationId xmlns:a16="http://schemas.microsoft.com/office/drawing/2014/main" id="{30FE3D32-C443-41BD-A314-EA4555DA7765}"/>
+                <a16:creationId xmlns:a16="http://schemas.microsoft.com/office/drawing/2014/main" id="{7A2511BF-49D5-467D-83C8-687AF80BDD6C}"/>
               </a:ext>
             </a:extLst>
           </p:cNvPr>
@@ -9027,7 +9027,7 @@
           <p:cNvPr id="6" name="">
             <a:extLst xmlns:a="http://schemas.openxmlformats.org/drawingml/2006/main">
               <a:ext uri="{FF2B5EF4-FFF2-40B4-BE49-F238E27FC236}">
-                <a16:creationId xmlns:a16="http://schemas.microsoft.com/office/drawing/2014/main" id="{A3FCC9FE-69B1-4C2D-B519-2A9D9AA356A4}"/>
+                <a16:creationId xmlns:a16="http://schemas.microsoft.com/office/drawing/2014/main" id="{785E230F-52F2-4C09-A352-91749C1A238D}"/>
               </a:ext>
             </a:extLst>
           </p:cNvPr>
@@ -9074,7 +9074,7 @@
                 <a:ea typeface="Times New Roman"/>
                 <a:cs typeface="Times New Roman"/>
               </a:rPr>
-              <a:t>Project adaptation</a:t>
+              <a:t>Project training: 12,269 images</a:t>
             </a:r>
           </a:p>
         </p:txBody>
@@ -9084,7 +9084,7 @@
           <p:cNvPr id="7" name="">
             <a:extLst xmlns:a="http://schemas.openxmlformats.org/drawingml/2006/main">
               <a:ext uri="{FF2B5EF4-FFF2-40B4-BE49-F238E27FC236}">
-                <a16:creationId xmlns:a16="http://schemas.microsoft.com/office/drawing/2014/main" id="{EC6383A8-4CF8-4EFC-BCA2-4B06439BA802}"/>
+                <a16:creationId xmlns:a16="http://schemas.microsoft.com/office/drawing/2014/main" id="{A27524A2-2819-415F-89FF-62F1AA8AD135}"/>
               </a:ext>
             </a:extLst>
           </p:cNvPr>
@@ -9131,7 +9131,7 @@
                 <a:ea typeface="Times New Roman"/>
                 <a:cs typeface="Times New Roman"/>
               </a:rPr>
-              <a:t>Audited data · fitted components · constrained correction</a:t>
+              <a:t>Four processing conditions: 49,076 training views</a:t>
             </a:r>
           </a:p>
         </p:txBody>
@@ -9141,7 +9141,7 @@
           <p:cNvPr id="8" name="">
             <a:extLst xmlns:a="http://schemas.openxmlformats.org/drawingml/2006/main">
               <a:ext uri="{FF2B5EF4-FFF2-40B4-BE49-F238E27FC236}">
-                <a16:creationId xmlns:a16="http://schemas.microsoft.com/office/drawing/2014/main" id="{BB35F9D9-0722-4EC1-A6D1-7D120A618696}"/>
+                <a16:creationId xmlns:a16="http://schemas.microsoft.com/office/drawing/2014/main" id="{22DEB9E3-CCD4-4DE9-A24F-F97CFC2694F0}"/>
               </a:ext>
             </a:extLst>
           </p:cNvPr>
@@ -9153,7 +9153,7 @@
         <p:spPr>
           <a:xfrm xmlns:a="http://schemas.openxmlformats.org/drawingml/2006/main">
             <a:off x="685800" y="5191125"/>
-            <a:ext cx="10820400" cy="619125"/>
+            <a:ext cx="10820400" cy="762000"/>
           </a:xfrm>
           <a:prstGeom xmlns:a="http://schemas.openxmlformats.org/drawingml/2006/main" prst="rect">
             <a:avLst/>
@@ -9188,7 +9188,7 @@
                 <a:ea typeface="Times New Roman"/>
                 <a:cs typeface="Times New Roman"/>
               </a:rPr>
-              <a:t>Validated upload → E92 scores → evidence and uncertainty</a:t>
+              <a:t>Record the question, measure errors and decide the next step.</a:t>
             </a:r>
           </a:p>
         </p:txBody>
@@ -9196,7 +9196,7 @@
     </p:spTree>
     <p:extLst>
       <p:ext uri="{BB962C8B-B14F-4D97-AF65-F5344CB8AC3E}">
-        <p14:creationId xmlns:p14="http://schemas.microsoft.com/office/powerpoint/2010/main" val="1743881956"/>
+        <p14:creationId xmlns:p14="http://schemas.microsoft.com/office/powerpoint/2010/main" val="1817454994"/>
       </p:ext>
     </p:extLst>
   </p:cSld>
@@ -9227,7 +9227,7 @@
           <p:cNvPr id="8" name="">
             <a:extLst xmlns:a="http://schemas.openxmlformats.org/drawingml/2006/main">
               <a:ext uri="{FF2B5EF4-FFF2-40B4-BE49-F238E27FC236}">
-                <a16:creationId xmlns:a16="http://schemas.microsoft.com/office/drawing/2014/main" id="{F8F7E501-5DA7-4A8F-AB1A-47AF430F589F}"/>
+                <a16:creationId xmlns:a16="http://schemas.microsoft.com/office/drawing/2014/main" id="{7155C643-0CC8-4AEA-B341-3F1A4B9C7244}"/>
               </a:ext>
             </a:extLst>
           </p:cNvPr>
@@ -9284,7 +9284,7 @@
           <p:cNvPr id="2" name="">
             <a:extLst xmlns:a="http://schemas.openxmlformats.org/drawingml/2006/main">
               <a:ext uri="{FF2B5EF4-FFF2-40B4-BE49-F238E27FC236}">
-                <a16:creationId xmlns:a16="http://schemas.microsoft.com/office/drawing/2014/main" id="{7D6068EE-781E-4F9E-9517-45778DC5190B}"/>
+                <a16:creationId xmlns:a16="http://schemas.microsoft.com/office/drawing/2014/main" id="{38BDFC3C-CD73-4C77-BE59-C761A551EF18}"/>
               </a:ext>
             </a:extLst>
           </p:cNvPr>
@@ -9341,7 +9341,7 @@
           <p:cNvPr id="3" name="">
             <a:extLst xmlns:a="http://schemas.openxmlformats.org/drawingml/2006/main">
               <a:ext uri="{FF2B5EF4-FFF2-40B4-BE49-F238E27FC236}">
-                <a16:creationId xmlns:a16="http://schemas.microsoft.com/office/drawing/2014/main" id="{9F5EB096-1049-42AE-8822-847BE44842FC}"/>
+                <a16:creationId xmlns:a16="http://schemas.microsoft.com/office/drawing/2014/main" id="{C590CA48-BC5A-43E4-B61E-137104A5DF9C}"/>
               </a:ext>
             </a:extLst>
           </p:cNvPr>
@@ -9398,7 +9398,7 @@
           <p:cNvPr id="4" name="">
             <a:extLst xmlns:a="http://schemas.openxmlformats.org/drawingml/2006/main">
               <a:ext uri="{FF2B5EF4-FFF2-40B4-BE49-F238E27FC236}">
-                <a16:creationId xmlns:a16="http://schemas.microsoft.com/office/drawing/2014/main" id="{5C183C15-9712-4EC3-87FD-9C1BB9F3D56C}"/>
+                <a16:creationId xmlns:a16="http://schemas.microsoft.com/office/drawing/2014/main" id="{5F840519-2677-426F-902D-F6AFE0C6CB1A}"/>
               </a:ext>
             </a:extLst>
           </p:cNvPr>
@@ -9462,7 +9462,7 @@
         </p:xfrm>
         <a:graphic xmlns:a="http://schemas.openxmlformats.org/drawingml/2006/main">
           <a:graphicData uri="http://schemas.openxmlformats.org/drawingml/2006/chart">
-            <c:chart xmlns:r="http://schemas.openxmlformats.org/officeDocument/2006/relationships" xmlns:c="http://schemas.openxmlformats.org/drawingml/2006/chart" r:id="R23a1669447044914"/>
+            <c:chart xmlns:r="http://schemas.openxmlformats.org/officeDocument/2006/relationships" xmlns:c="http://schemas.openxmlformats.org/drawingml/2006/chart" r:id="R1039e8fab6c54c5c"/>
           </a:graphicData>
         </a:graphic>
       </p:graphicFrame>
@@ -9471,7 +9471,7 @@
           <p:cNvPr id="6" name="">
             <a:extLst xmlns:a="http://schemas.openxmlformats.org/drawingml/2006/main">
               <a:ext uri="{FF2B5EF4-FFF2-40B4-BE49-F238E27FC236}">
-                <a16:creationId xmlns:a16="http://schemas.microsoft.com/office/drawing/2014/main" id="{82E6FF73-5939-49E6-8C20-CD90AA6233BC}"/>
+                <a16:creationId xmlns:a16="http://schemas.microsoft.com/office/drawing/2014/main" id="{B7EDE6D1-3542-4701-9182-6694B5EDC5A6}"/>
               </a:ext>
             </a:extLst>
           </p:cNvPr>
@@ -9528,7 +9528,7 @@
           <p:cNvPr id="7" name="">
             <a:extLst xmlns:a="http://schemas.openxmlformats.org/drawingml/2006/main">
               <a:ext uri="{FF2B5EF4-FFF2-40B4-BE49-F238E27FC236}">
-                <a16:creationId xmlns:a16="http://schemas.microsoft.com/office/drawing/2014/main" id="{C5075518-7F5E-4A87-AD62-74B435117C08}"/>
+                <a16:creationId xmlns:a16="http://schemas.microsoft.com/office/drawing/2014/main" id="{F8512ED6-BBFB-4486-802A-7A304EE71487}"/>
               </a:ext>
             </a:extLst>
           </p:cNvPr>
@@ -9583,7 +9583,7 @@
     </p:spTree>
     <p:extLst>
       <p:ext uri="{BB962C8B-B14F-4D97-AF65-F5344CB8AC3E}">
-        <p14:creationId xmlns:p14="http://schemas.microsoft.com/office/powerpoint/2010/main" val="1716967976"/>
+        <p14:creationId xmlns:p14="http://schemas.microsoft.com/office/powerpoint/2010/main" val="1220264907"/>
       </p:ext>
     </p:extLst>
   </p:cSld>
@@ -9614,7 +9614,7 @@
           <p:cNvPr id="8" name="">
             <a:extLst xmlns:a="http://schemas.openxmlformats.org/drawingml/2006/main">
               <a:ext uri="{FF2B5EF4-FFF2-40B4-BE49-F238E27FC236}">
-                <a16:creationId xmlns:a16="http://schemas.microsoft.com/office/drawing/2014/main" id="{C945557F-0E53-4E5F-830E-55C7C4D02325}"/>
+                <a16:creationId xmlns:a16="http://schemas.microsoft.com/office/drawing/2014/main" id="{874FF211-F8DE-4752-9918-93A04ECCE501}"/>
               </a:ext>
             </a:extLst>
           </p:cNvPr>
@@ -9671,7 +9671,7 @@
           <p:cNvPr id="2" name="">
             <a:extLst xmlns:a="http://schemas.openxmlformats.org/drawingml/2006/main">
               <a:ext uri="{FF2B5EF4-FFF2-40B4-BE49-F238E27FC236}">
-                <a16:creationId xmlns:a16="http://schemas.microsoft.com/office/drawing/2014/main" id="{6B57E6FE-742B-4484-B7BC-08603AB35A7A}"/>
+                <a16:creationId xmlns:a16="http://schemas.microsoft.com/office/drawing/2014/main" id="{C949A1BA-473F-4F4A-BA24-DF7136AD524E}"/>
               </a:ext>
             </a:extLst>
           </p:cNvPr>
@@ -9728,7 +9728,7 @@
           <p:cNvPr id="3" name="">
             <a:extLst xmlns:a="http://schemas.openxmlformats.org/drawingml/2006/main">
               <a:ext uri="{FF2B5EF4-FFF2-40B4-BE49-F238E27FC236}">
-                <a16:creationId xmlns:a16="http://schemas.microsoft.com/office/drawing/2014/main" id="{14DF25A5-C1B3-4C64-B862-EF08945A0A81}"/>
+                <a16:creationId xmlns:a16="http://schemas.microsoft.com/office/drawing/2014/main" id="{013FC00E-B61B-454C-BA60-7A5830F29FEE}"/>
               </a:ext>
             </a:extLst>
           </p:cNvPr>
@@ -9785,7 +9785,7 @@
           <p:cNvPr id="4" name="">
             <a:extLst xmlns:a="http://schemas.openxmlformats.org/drawingml/2006/main">
               <a:ext uri="{FF2B5EF4-FFF2-40B4-BE49-F238E27FC236}">
-                <a16:creationId xmlns:a16="http://schemas.microsoft.com/office/drawing/2014/main" id="{3F184AF6-DFC1-4D17-A5D9-6F195D8FB093}"/>
+                <a16:creationId xmlns:a16="http://schemas.microsoft.com/office/drawing/2014/main" id="{268589A3-9BB3-4A0B-B14E-FA071E6BF3DE}"/>
               </a:ext>
             </a:extLst>
           </p:cNvPr>
@@ -9842,7 +9842,7 @@
           <p:cNvPr id="5" name="">
             <a:extLst xmlns:a="http://schemas.openxmlformats.org/drawingml/2006/main">
               <a:ext uri="{FF2B5EF4-FFF2-40B4-BE49-F238E27FC236}">
-                <a16:creationId xmlns:a16="http://schemas.microsoft.com/office/drawing/2014/main" id="{5574CFBA-35C2-48AE-88C8-CCE68FB568A3}"/>
+                <a16:creationId xmlns:a16="http://schemas.microsoft.com/office/drawing/2014/main" id="{A517B1BD-A1D7-4553-BA9E-3265A7CF41C1}"/>
               </a:ext>
             </a:extLst>
           </p:cNvPr>
@@ -10089,7 +10089,7 @@
           <p:cNvPr id="7" name="">
             <a:extLst xmlns:a="http://schemas.openxmlformats.org/drawingml/2006/main">
               <a:ext uri="{FF2B5EF4-FFF2-40B4-BE49-F238E27FC236}">
-                <a16:creationId xmlns:a16="http://schemas.microsoft.com/office/drawing/2014/main" id="{949E868C-6556-4E7B-9DD7-2D5673287EDF}"/>
+                <a16:creationId xmlns:a16="http://schemas.microsoft.com/office/drawing/2014/main" id="{234C855C-E24B-4DBE-9AC1-DB229D0AEFE1}"/>
               </a:ext>
             </a:extLst>
           </p:cNvPr>
@@ -10167,7 +10167,7 @@
     </p:spTree>
     <p:extLst>
       <p:ext uri="{BB962C8B-B14F-4D97-AF65-F5344CB8AC3E}">
-        <p14:creationId xmlns:p14="http://schemas.microsoft.com/office/powerpoint/2010/main" val="821256802"/>
+        <p14:creationId xmlns:p14="http://schemas.microsoft.com/office/powerpoint/2010/main" val="12548680"/>
       </p:ext>
     </p:extLst>
   </p:cSld>
@@ -10198,7 +10198,7 @@
           <p:cNvPr id="8" name="">
             <a:extLst xmlns:a="http://schemas.openxmlformats.org/drawingml/2006/main">
               <a:ext uri="{FF2B5EF4-FFF2-40B4-BE49-F238E27FC236}">
-                <a16:creationId xmlns:a16="http://schemas.microsoft.com/office/drawing/2014/main" id="{40114375-DF02-4395-8A0E-313843AE0154}"/>
+                <a16:creationId xmlns:a16="http://schemas.microsoft.com/office/drawing/2014/main" id="{605DBEF6-B886-437E-AF91-F00698A65F57}"/>
               </a:ext>
             </a:extLst>
           </p:cNvPr>
@@ -10255,7 +10255,7 @@
           <p:cNvPr id="2" name="">
             <a:extLst xmlns:a="http://schemas.openxmlformats.org/drawingml/2006/main">
               <a:ext uri="{FF2B5EF4-FFF2-40B4-BE49-F238E27FC236}">
-                <a16:creationId xmlns:a16="http://schemas.microsoft.com/office/drawing/2014/main" id="{551D05F6-20C2-4C56-9B05-4A9F0C88F551}"/>
+                <a16:creationId xmlns:a16="http://schemas.microsoft.com/office/drawing/2014/main" id="{AC4F174D-188B-42AC-8043-DAD7DFFFB2FA}"/>
               </a:ext>
             </a:extLst>
           </p:cNvPr>
@@ -10312,7 +10312,7 @@
           <p:cNvPr id="3" name="">
             <a:extLst xmlns:a="http://schemas.openxmlformats.org/drawingml/2006/main">
               <a:ext uri="{FF2B5EF4-FFF2-40B4-BE49-F238E27FC236}">
-                <a16:creationId xmlns:a16="http://schemas.microsoft.com/office/drawing/2014/main" id="{E12E8CF3-9FCF-430F-AC68-B9BC4F71F2B5}"/>
+                <a16:creationId xmlns:a16="http://schemas.microsoft.com/office/drawing/2014/main" id="{B5E89009-9FF9-4060-ABB9-0672FDC90A69}"/>
               </a:ext>
             </a:extLst>
           </p:cNvPr>
@@ -10369,7 +10369,7 @@
           <p:cNvPr id="4" name="">
             <a:extLst xmlns:a="http://schemas.openxmlformats.org/drawingml/2006/main">
               <a:ext uri="{FF2B5EF4-FFF2-40B4-BE49-F238E27FC236}">
-                <a16:creationId xmlns:a16="http://schemas.microsoft.com/office/drawing/2014/main" id="{5E1CEC48-9D6A-4FD9-A725-BA537FBEF410}"/>
+                <a16:creationId xmlns:a16="http://schemas.microsoft.com/office/drawing/2014/main" id="{F8A28C06-F5F9-4F4B-9D73-92AB6E6C6F9B}"/>
               </a:ext>
             </a:extLst>
           </p:cNvPr>
@@ -10426,7 +10426,7 @@
           <p:cNvPr id="5" name="">
             <a:extLst xmlns:a="http://schemas.openxmlformats.org/drawingml/2006/main">
               <a:ext uri="{FF2B5EF4-FFF2-40B4-BE49-F238E27FC236}">
-                <a16:creationId xmlns:a16="http://schemas.microsoft.com/office/drawing/2014/main" id="{D3A024FE-3013-4212-ACBB-013FF9F452C7}"/>
+                <a16:creationId xmlns:a16="http://schemas.microsoft.com/office/drawing/2014/main" id="{283E469A-2047-4122-B85E-2FF39F280B47}"/>
               </a:ext>
             </a:extLst>
           </p:cNvPr>
@@ -10729,7 +10729,7 @@
           <p:cNvPr id="7" name="">
             <a:extLst xmlns:a="http://schemas.openxmlformats.org/drawingml/2006/main">
               <a:ext uri="{FF2B5EF4-FFF2-40B4-BE49-F238E27FC236}">
-                <a16:creationId xmlns:a16="http://schemas.microsoft.com/office/drawing/2014/main" id="{9CEE6F61-2961-4701-88E5-D31B3ABB09D8}"/>
+                <a16:creationId xmlns:a16="http://schemas.microsoft.com/office/drawing/2014/main" id="{F9D9A5AF-E100-41AB-9190-496DE124FC22}"/>
               </a:ext>
             </a:extLst>
           </p:cNvPr>
@@ -10807,7 +10807,7 @@
     </p:spTree>
     <p:extLst>
       <p:ext uri="{BB962C8B-B14F-4D97-AF65-F5344CB8AC3E}">
-        <p14:creationId xmlns:p14="http://schemas.microsoft.com/office/powerpoint/2010/main" val="1082959915"/>
+        <p14:creationId xmlns:p14="http://schemas.microsoft.com/office/powerpoint/2010/main" val="1052264684"/>
       </p:ext>
     </p:extLst>
   </p:cSld>
@@ -10838,7 +10838,7 @@
           <p:cNvPr id="9" name="">
             <a:extLst xmlns:a="http://schemas.openxmlformats.org/drawingml/2006/main">
               <a:ext uri="{FF2B5EF4-FFF2-40B4-BE49-F238E27FC236}">
-                <a16:creationId xmlns:a16="http://schemas.microsoft.com/office/drawing/2014/main" id="{298F17CB-7984-48F2-B2A3-5383FDBD80DF}"/>
+                <a16:creationId xmlns:a16="http://schemas.microsoft.com/office/drawing/2014/main" id="{A6C8A39A-0DAC-4543-9AE8-9C0512887863}"/>
               </a:ext>
             </a:extLst>
           </p:cNvPr>
@@ -10895,7 +10895,7 @@
           <p:cNvPr id="2" name="">
             <a:extLst xmlns:a="http://schemas.openxmlformats.org/drawingml/2006/main">
               <a:ext uri="{FF2B5EF4-FFF2-40B4-BE49-F238E27FC236}">
-                <a16:creationId xmlns:a16="http://schemas.microsoft.com/office/drawing/2014/main" id="{3B17C897-FB97-42C7-8AAF-E3FE2F9C919A}"/>
+                <a16:creationId xmlns:a16="http://schemas.microsoft.com/office/drawing/2014/main" id="{F1A0A3E9-906C-4D53-8D40-3DDCBA566B9E}"/>
               </a:ext>
             </a:extLst>
           </p:cNvPr>
@@ -10952,7 +10952,7 @@
           <p:cNvPr id="3" name="">
             <a:extLst xmlns:a="http://schemas.openxmlformats.org/drawingml/2006/main">
               <a:ext uri="{FF2B5EF4-FFF2-40B4-BE49-F238E27FC236}">
-                <a16:creationId xmlns:a16="http://schemas.microsoft.com/office/drawing/2014/main" id="{734A69E6-9F4B-4049-A26C-E475CD91113E}"/>
+                <a16:creationId xmlns:a16="http://schemas.microsoft.com/office/drawing/2014/main" id="{1EDA45D7-A9D2-4CDD-B5E6-DA56B582E982}"/>
               </a:ext>
             </a:extLst>
           </p:cNvPr>
@@ -11009,7 +11009,7 @@
           <p:cNvPr id="4" name="">
             <a:extLst xmlns:a="http://schemas.openxmlformats.org/drawingml/2006/main">
               <a:ext uri="{FF2B5EF4-FFF2-40B4-BE49-F238E27FC236}">
-                <a16:creationId xmlns:a16="http://schemas.microsoft.com/office/drawing/2014/main" id="{18F6DE23-8AA2-4733-8C9E-002CB9B6592E}"/>
+                <a16:creationId xmlns:a16="http://schemas.microsoft.com/office/drawing/2014/main" id="{8BFCE7D7-7764-499C-9B13-03BCA240BD60}"/>
               </a:ext>
             </a:extLst>
           </p:cNvPr>
@@ -11066,7 +11066,7 @@
           <p:cNvPr id="5" name="">
             <a:extLst xmlns:a="http://schemas.openxmlformats.org/drawingml/2006/main">
               <a:ext uri="{FF2B5EF4-FFF2-40B4-BE49-F238E27FC236}">
-                <a16:creationId xmlns:a16="http://schemas.microsoft.com/office/drawing/2014/main" id="{2C73E296-30A4-4A64-B0FA-7D9D612B7135}"/>
+                <a16:creationId xmlns:a16="http://schemas.microsoft.com/office/drawing/2014/main" id="{45523CFF-E0DC-42D5-AB51-3E4CD5F08A41}"/>
               </a:ext>
             </a:extLst>
           </p:cNvPr>
@@ -11146,7 +11146,7 @@
           <p:cNvPr id="6" name="">
             <a:extLst xmlns:a="http://schemas.openxmlformats.org/drawingml/2006/main">
               <a:ext uri="{FF2B5EF4-FFF2-40B4-BE49-F238E27FC236}">
-                <a16:creationId xmlns:a16="http://schemas.microsoft.com/office/drawing/2014/main" id="{9E1E340D-ADAB-4718-A09B-69E6C787286E}"/>
+                <a16:creationId xmlns:a16="http://schemas.microsoft.com/office/drawing/2014/main" id="{96FB2226-C2C6-44F7-BE9F-C91322D8F969}"/>
               </a:ext>
             </a:extLst>
           </p:cNvPr>
@@ -11203,7 +11203,7 @@
           <p:cNvPr id="7" name="">
             <a:extLst xmlns:a="http://schemas.openxmlformats.org/drawingml/2006/main">
               <a:ext uri="{FF2B5EF4-FFF2-40B4-BE49-F238E27FC236}">
-                <a16:creationId xmlns:a16="http://schemas.microsoft.com/office/drawing/2014/main" id="{D7C28CBE-0758-4B94-8816-D4769700AEDF}"/>
+                <a16:creationId xmlns:a16="http://schemas.microsoft.com/office/drawing/2014/main" id="{7A99689E-F863-4D9D-A253-8C1BE596F06B}"/>
               </a:ext>
             </a:extLst>
           </p:cNvPr>
@@ -11283,7 +11283,7 @@
           <p:cNvPr id="8" name="">
             <a:extLst xmlns:a="http://schemas.openxmlformats.org/drawingml/2006/main">
               <a:ext uri="{FF2B5EF4-FFF2-40B4-BE49-F238E27FC236}">
-                <a16:creationId xmlns:a16="http://schemas.microsoft.com/office/drawing/2014/main" id="{48833AE5-B4A8-4130-950C-C0CF1116760A}"/>
+                <a16:creationId xmlns:a16="http://schemas.microsoft.com/office/drawing/2014/main" id="{3ED36F1F-42E6-4C75-A364-39A978F46EFE}"/>
               </a:ext>
             </a:extLst>
           </p:cNvPr>
@@ -11338,7 +11338,7 @@
     </p:spTree>
     <p:extLst>
       <p:ext uri="{BB962C8B-B14F-4D97-AF65-F5344CB8AC3E}">
-        <p14:creationId xmlns:p14="http://schemas.microsoft.com/office/powerpoint/2010/main" val="1221917296"/>
+        <p14:creationId xmlns:p14="http://schemas.microsoft.com/office/powerpoint/2010/main" val="1420417492"/>
       </p:ext>
     </p:extLst>
   </p:cSld>
